--- a/output/apple_deck/Apple_EFX_Study.pptx
+++ b/output/apple_deck/Apple_EFX_Study.pptx
@@ -3311,7 +3311,7 @@
                 </a:solidFill>
                 <a:latin typeface="Arial"/>
               </a:rPr>
-              <a:t>Risk  ·  14 Oct 2026  ·  scope: Apple own stores (Apple Propio)</a:t>
+              <a:t>Risk  ·  14 Oct 2026  ·  scope: Apple Propio (own channel, no APRS)</a:t>
             </a:r>
           </a:p>
         </p:txBody>
@@ -4314,7 +4314,7 @@
                 </a:solidFill>
                 <a:latin typeface="Arial"/>
               </a:rPr>
-              <a:t>Bins 1-6 carry almost no production, and that is where the selection uplift weighs most (2.4x). They are the ones that open the loosest scenario.</a:t>
+              <a:t>Bins 1-5 carry under 0.5% of production each, and that is where the selection uplift weighs most (2.4x). They are the ones that open the loosest scenario.</a:t>
             </a:r>
           </a:p>
           <a:p>
@@ -8469,6 +8469,38 @@
                 <a:latin typeface="Arial"/>
               </a:rPr>
               <a:t>Shifting the current grid keeps its shape —looser where the group is good— and gives slightly more acceptance at the same risk.</a:t>
+            </a:r>
+          </a:p>
+          <a:p>
+            <a:pPr algn="l">
+              <a:lnSpc>
+                <a:spcPct val="125000"/>
+              </a:lnSpc>
+            </a:pPr>
+            <a:r>
+              <a:rPr sz="1050" b="0">
+                <a:solidFill>
+                  <a:srgbClr val="5D6D7E"/>
+                </a:solidFill>
+                <a:latin typeface="Arial"/>
+              </a:rPr>
+              <a:t/>
+            </a:r>
+          </a:p>
+          <a:p>
+            <a:pPr algn="l">
+              <a:lnSpc>
+                <a:spcPct val="125000"/>
+              </a:lnSpc>
+            </a:pPr>
+            <a:r>
+              <a:rPr sz="1050" b="0">
+                <a:solidFill>
+                  <a:srgbClr val="5D6D7E"/>
+                </a:solidFill>
+                <a:latin typeface="Arial"/>
+              </a:rPr>
+              <a:t>Scenario risks carry the reject-inference uplift, a conservative margin that also falls on Online's own book (+0.08 pp vs realized); the two 'today' rows are realized. Like for like, the current grid moves risk by -0.21 pp.</a:t>
             </a:r>
           </a:p>
         </p:txBody>
@@ -11901,7 +11933,7 @@
                 </a:solidFill>
                 <a:latin typeface="Arial"/>
               </a:rPr>
-              <a:t>The EFX score went live in stores in Aug 2026. Comparing 2 loose months against a twelve-month average requires knowing what each month is worth.</a:t>
+              <a:t>The EFX score went live in stores in Aug 2026. Comparing 2 months on their own against a twelve-month average requires knowing what each month is worth.</a:t>
             </a:r>
           </a:p>
         </p:txBody>

--- a/output/apple_deck/Apple_EFX_Study.pptx
+++ b/output/apple_deck/Apple_EFX_Study.pptx
@@ -18,6 +18,7 @@
     <p:sldId id="266" r:id="rId17"/>
     <p:sldId id="267" r:id="rId18"/>
     <p:sldId id="268" r:id="rId19"/>
+    <p:sldId id="269" r:id="rId20"/>
   </p:sldIdLst>
   <p:sldSz cx="12191695" cy="6858000" type="screen4x3"/>
   <p:notesSz cx="6858000" cy="9144000"/>
@@ -3368,7 +3369,7 @@
                 </a:solidFill>
                 <a:latin typeface="Arial"/>
               </a:rPr>
-              <a:t>APPENDIX · THE ENGINE OF THE STUDY</a:t>
+              <a:t>METHODOLOGY · SEASONALITY</a:t>
             </a:r>
           </a:p>
         </p:txBody>
@@ -3407,7 +3408,7 @@
                 </a:solidFill>
                 <a:latin typeface="Arial"/>
               </a:rPr>
-              <a:t>Originations Mar 2025 – Feb 2026</a:t>
+              <a:t>Full years 2024 and 2025</a:t>
             </a:r>
           </a:p>
         </p:txBody>
@@ -3446,7 +3447,7 @@
                 </a:solidFill>
                 <a:latin typeface="Arial"/>
               </a:rPr>
-              <a:t>The EFX score ranks risk in e-commerce</a:t>
+              <a:t>How months are annualised</a:t>
             </a:r>
           </a:p>
         </p:txBody>
@@ -3495,30 +3496,50 @@
           </a:p>
         </p:txBody>
       </p:sp>
-      <p:pic>
-        <p:nvPicPr>
-          <p:cNvPr id="6" name="Picture 5" descr="curve.png"/>
-          <p:cNvPicPr>
-            <a:picLocks noChangeAspect="1"/>
-          </p:cNvPicPr>
-          <p:nvPr/>
-        </p:nvPicPr>
-        <p:blipFill>
-          <a:blip r:embed="rId2"/>
-          <a:stretch>
-            <a:fillRect/>
-          </a:stretch>
-        </p:blipFill>
-        <p:spPr>
-          <a:xfrm>
-            <a:off x="1798613" y="1563624"/>
-            <a:ext cx="8594469" cy="4425696"/>
-          </a:xfrm>
-          <a:prstGeom prst="rect">
-            <a:avLst/>
-          </a:prstGeom>
-        </p:spPr>
-      </p:pic>
+      <p:sp>
+        <p:nvSpPr>
+          <p:cNvPr id="6" name="Rectangle 5"/>
+          <p:cNvSpPr/>
+          <p:nvPr/>
+        </p:nvSpPr>
+        <p:spPr>
+          <a:xfrm>
+            <a:off x="566928" y="1563624"/>
+            <a:ext cx="420624" cy="420624"/>
+          </a:xfrm>
+          <a:prstGeom prst="rect">
+            <a:avLst/>
+          </a:prstGeom>
+          <a:solidFill>
+            <a:srgbClr val="2C3E50"/>
+          </a:solidFill>
+          <a:ln>
+            <a:noFill/>
+          </a:ln>
+          <a:effectLst/>
+        </p:spPr>
+        <p:style>
+          <a:lnRef idx="1">
+            <a:schemeClr val="accent1"/>
+          </a:lnRef>
+          <a:fillRef idx="3">
+            <a:schemeClr val="accent1"/>
+          </a:fillRef>
+          <a:effectRef idx="2">
+            <a:schemeClr val="accent1"/>
+          </a:effectRef>
+          <a:fontRef idx="minor">
+            <a:schemeClr val="lt1"/>
+          </a:fontRef>
+        </p:style>
+        <p:txBody>
+          <a:bodyPr rtlCol="0" anchor="ctr"/>
+          <a:lstStyle/>
+          <a:p>
+            <a:pPr algn="ctr"/>
+          </a:p>
+        </p:txBody>
+      </p:sp>
       <p:sp>
         <p:nvSpPr>
           <p:cNvPr id="7" name="TextBox 6"/>
@@ -3527,8 +3548,764 @@
         </p:nvSpPr>
         <p:spPr>
           <a:xfrm>
-            <a:off x="566928" y="6071616"/>
-            <a:ext cx="11057839" cy="548640"/>
+            <a:off x="566928" y="1618488"/>
+            <a:ext cx="420624" cy="310896"/>
+          </a:xfrm>
+          <a:prstGeom prst="rect">
+            <a:avLst/>
+          </a:prstGeom>
+          <a:noFill/>
+        </p:spPr>
+        <p:txBody>
+          <a:bodyPr wrap="square">
+            <a:spAutoFit/>
+          </a:bodyPr>
+          <a:lstStyle/>
+          <a:p>
+            <a:pPr algn="ctr">
+              <a:lnSpc>
+                <a:spcPct val="100000"/>
+              </a:lnSpc>
+            </a:pPr>
+            <a:r>
+              <a:rPr sz="1400" b="1">
+                <a:solidFill>
+                  <a:srgbClr val="FFFFFF"/>
+                </a:solidFill>
+                <a:latin typeface="Arial"/>
+              </a:rPr>
+              <a:t>1</a:t>
+            </a:r>
+          </a:p>
+        </p:txBody>
+      </p:sp>
+      <p:sp>
+        <p:nvSpPr>
+          <p:cNvPr id="8" name="TextBox 7"/>
+          <p:cNvSpPr txBox="1"/>
+          <p:nvPr/>
+        </p:nvSpPr>
+        <p:spPr>
+          <a:xfrm>
+            <a:off x="1188720" y="1563624"/>
+            <a:ext cx="8863279" cy="274320"/>
+          </a:xfrm>
+          <a:prstGeom prst="rect">
+            <a:avLst/>
+          </a:prstGeom>
+          <a:noFill/>
+        </p:spPr>
+        <p:txBody>
+          <a:bodyPr wrap="square">
+            <a:spAutoFit/>
+          </a:bodyPr>
+          <a:lstStyle/>
+          <a:p>
+            <a:pPr algn="l">
+              <a:lnSpc>
+                <a:spcPct val="100000"/>
+              </a:lnSpc>
+            </a:pPr>
+            <a:r>
+              <a:rPr sz="1300" b="1">
+                <a:solidFill>
+                  <a:srgbClr val="2C3E50"/>
+                </a:solidFill>
+                <a:latin typeface="Arial"/>
+              </a:rPr>
+              <a:t>The problem: stores only have the score for Aug–Sep 2026</a:t>
+            </a:r>
+          </a:p>
+        </p:txBody>
+      </p:sp>
+      <p:sp>
+        <p:nvSpPr>
+          <p:cNvPr id="9" name="TextBox 8"/>
+          <p:cNvSpPr txBox="1"/>
+          <p:nvPr/>
+        </p:nvSpPr>
+        <p:spPr>
+          <a:xfrm>
+            <a:off x="1188720" y="1837944"/>
+            <a:ext cx="8863279" cy="603504"/>
+          </a:xfrm>
+          <a:prstGeom prst="rect">
+            <a:avLst/>
+          </a:prstGeom>
+          <a:noFill/>
+        </p:spPr>
+        <p:txBody>
+          <a:bodyPr wrap="square">
+            <a:spAutoFit/>
+          </a:bodyPr>
+          <a:lstStyle/>
+          <a:p>
+            <a:pPr algn="l">
+              <a:lnSpc>
+                <a:spcPct val="118000"/>
+              </a:lnSpc>
+            </a:pPr>
+            <a:r>
+              <a:rPr sz="1100" b="0">
+                <a:solidFill>
+                  <a:srgbClr val="5D6D7E"/>
+                </a:solidFill>
+                <a:latin typeface="Arial"/>
+              </a:rPr>
+              <a:t>The EFX score went live in stores in Aug 2026. Comparing 2 months on their own against a twelve-month average requires knowing what each month is worth.</a:t>
+            </a:r>
+          </a:p>
+        </p:txBody>
+      </p:sp>
+      <p:sp>
+        <p:nvSpPr>
+          <p:cNvPr id="10" name="TextBox 9"/>
+          <p:cNvSpPr txBox="1"/>
+          <p:nvPr/>
+        </p:nvSpPr>
+        <p:spPr>
+          <a:xfrm>
+            <a:off x="10161727" y="1581912"/>
+            <a:ext cx="1463040" cy="274320"/>
+          </a:xfrm>
+          <a:prstGeom prst="rect">
+            <a:avLst/>
+          </a:prstGeom>
+          <a:noFill/>
+        </p:spPr>
+        <p:txBody>
+          <a:bodyPr wrap="square">
+            <a:spAutoFit/>
+          </a:bodyPr>
+          <a:lstStyle/>
+          <a:p>
+            <a:pPr algn="r">
+              <a:lnSpc>
+                <a:spcPct val="100000"/>
+              </a:lnSpc>
+            </a:pPr>
+            <a:r>
+              <a:rPr sz="1000" b="1">
+                <a:solidFill>
+                  <a:srgbClr val="3498DB"/>
+                </a:solidFill>
+                <a:latin typeface="Arial"/>
+              </a:rPr>
+              <a:t>MEASURED</a:t>
+            </a:r>
+          </a:p>
+        </p:txBody>
+      </p:sp>
+      <p:sp>
+        <p:nvSpPr>
+          <p:cNvPr id="11" name="Rectangle 10"/>
+          <p:cNvSpPr/>
+          <p:nvPr/>
+        </p:nvSpPr>
+        <p:spPr>
+          <a:xfrm>
+            <a:off x="566928" y="2496312"/>
+            <a:ext cx="420624" cy="420624"/>
+          </a:xfrm>
+          <a:prstGeom prst="rect">
+            <a:avLst/>
+          </a:prstGeom>
+          <a:solidFill>
+            <a:srgbClr val="2C3E50"/>
+          </a:solidFill>
+          <a:ln>
+            <a:noFill/>
+          </a:ln>
+          <a:effectLst/>
+        </p:spPr>
+        <p:style>
+          <a:lnRef idx="1">
+            <a:schemeClr val="accent1"/>
+          </a:lnRef>
+          <a:fillRef idx="3">
+            <a:schemeClr val="accent1"/>
+          </a:fillRef>
+          <a:effectRef idx="2">
+            <a:schemeClr val="accent1"/>
+          </a:effectRef>
+          <a:fontRef idx="minor">
+            <a:schemeClr val="lt1"/>
+          </a:fontRef>
+        </p:style>
+        <p:txBody>
+          <a:bodyPr rtlCol="0" anchor="ctr"/>
+          <a:lstStyle/>
+          <a:p>
+            <a:pPr algn="ctr"/>
+          </a:p>
+        </p:txBody>
+      </p:sp>
+      <p:sp>
+        <p:nvSpPr>
+          <p:cNvPr id="12" name="TextBox 11"/>
+          <p:cNvSpPr txBox="1"/>
+          <p:nvPr/>
+        </p:nvSpPr>
+        <p:spPr>
+          <a:xfrm>
+            <a:off x="566928" y="2551176"/>
+            <a:ext cx="420624" cy="310896"/>
+          </a:xfrm>
+          <a:prstGeom prst="rect">
+            <a:avLst/>
+          </a:prstGeom>
+          <a:noFill/>
+        </p:spPr>
+        <p:txBody>
+          <a:bodyPr wrap="square">
+            <a:spAutoFit/>
+          </a:bodyPr>
+          <a:lstStyle/>
+          <a:p>
+            <a:pPr algn="ctr">
+              <a:lnSpc>
+                <a:spcPct val="100000"/>
+              </a:lnSpc>
+            </a:pPr>
+            <a:r>
+              <a:rPr sz="1400" b="1">
+                <a:solidFill>
+                  <a:srgbClr val="FFFFFF"/>
+                </a:solidFill>
+                <a:latin typeface="Arial"/>
+              </a:rPr>
+              <a:t>2</a:t>
+            </a:r>
+          </a:p>
+        </p:txBody>
+      </p:sp>
+      <p:sp>
+        <p:nvSpPr>
+          <p:cNvPr id="13" name="TextBox 12"/>
+          <p:cNvSpPr txBox="1"/>
+          <p:nvPr/>
+        </p:nvSpPr>
+        <p:spPr>
+          <a:xfrm>
+            <a:off x="1188720" y="2496312"/>
+            <a:ext cx="8863279" cy="274320"/>
+          </a:xfrm>
+          <a:prstGeom prst="rect">
+            <a:avLst/>
+          </a:prstGeom>
+          <a:noFill/>
+        </p:spPr>
+        <p:txBody>
+          <a:bodyPr wrap="square">
+            <a:spAutoFit/>
+          </a:bodyPr>
+          <a:lstStyle/>
+          <a:p>
+            <a:pPr algn="l">
+              <a:lnSpc>
+                <a:spcPct val="100000"/>
+              </a:lnSpc>
+            </a:pPr>
+            <a:r>
+              <a:rPr sz="1300" b="1">
+                <a:solidFill>
+                  <a:srgbClr val="2C3E50"/>
+                </a:solidFill>
+                <a:latin typeface="Arial"/>
+              </a:rPr>
+              <a:t>August and September: no average month, and each channel has its own</a:t>
+            </a:r>
+          </a:p>
+        </p:txBody>
+      </p:sp>
+      <p:sp>
+        <p:nvSpPr>
+          <p:cNvPr id="14" name="TextBox 13"/>
+          <p:cNvSpPr txBox="1"/>
+          <p:nvPr/>
+        </p:nvSpPr>
+        <p:spPr>
+          <a:xfrm>
+            <a:off x="1188720" y="2770632"/>
+            <a:ext cx="8863279" cy="603504"/>
+          </a:xfrm>
+          <a:prstGeom prst="rect">
+            <a:avLst/>
+          </a:prstGeom>
+          <a:noFill/>
+        </p:spPr>
+        <p:txBody>
+          <a:bodyPr wrap="square">
+            <a:spAutoFit/>
+          </a:bodyPr>
+          <a:lstStyle/>
+          <a:p>
+            <a:pPr algn="l">
+              <a:lnSpc>
+                <a:spcPct val="118000"/>
+              </a:lnSpc>
+            </a:pPr>
+            <a:r>
+              <a:rPr sz="1100" b="0">
+                <a:solidFill>
+                  <a:srgbClr val="5D6D7E"/>
+                </a:solidFill>
+                <a:latin typeface="Arial"/>
+              </a:rPr>
+              <a:t>Index for Aug and Sep: 0.49 / 2.03 in Online and 0.76 / 0.69 in stores. Online concentrates demand around the iPhone launch (Sep 2.03) and stores around Christmas (Dec 1.70). The correlation between the two profiles is 0.39: not the same pattern.</a:t>
+            </a:r>
+          </a:p>
+        </p:txBody>
+      </p:sp>
+      <p:sp>
+        <p:nvSpPr>
+          <p:cNvPr id="15" name="TextBox 14"/>
+          <p:cNvSpPr txBox="1"/>
+          <p:nvPr/>
+        </p:nvSpPr>
+        <p:spPr>
+          <a:xfrm>
+            <a:off x="10161727" y="2514600"/>
+            <a:ext cx="1463040" cy="274320"/>
+          </a:xfrm>
+          <a:prstGeom prst="rect">
+            <a:avLst/>
+          </a:prstGeom>
+          <a:noFill/>
+        </p:spPr>
+        <p:txBody>
+          <a:bodyPr wrap="square">
+            <a:spAutoFit/>
+          </a:bodyPr>
+          <a:lstStyle/>
+          <a:p>
+            <a:pPr algn="r">
+              <a:lnSpc>
+                <a:spcPct val="100000"/>
+              </a:lnSpc>
+            </a:pPr>
+            <a:r>
+              <a:rPr sz="1000" b="1">
+                <a:solidFill>
+                  <a:srgbClr val="3498DB"/>
+                </a:solidFill>
+                <a:latin typeface="Arial"/>
+              </a:rPr>
+              <a:t>MEASURED</a:t>
+            </a:r>
+          </a:p>
+        </p:txBody>
+      </p:sp>
+      <p:sp>
+        <p:nvSpPr>
+          <p:cNvPr id="16" name="Rectangle 15"/>
+          <p:cNvSpPr/>
+          <p:nvPr/>
+        </p:nvSpPr>
+        <p:spPr>
+          <a:xfrm>
+            <a:off x="566928" y="3429000"/>
+            <a:ext cx="420624" cy="420624"/>
+          </a:xfrm>
+          <a:prstGeom prst="rect">
+            <a:avLst/>
+          </a:prstGeom>
+          <a:solidFill>
+            <a:srgbClr val="2C3E50"/>
+          </a:solidFill>
+          <a:ln>
+            <a:noFill/>
+          </a:ln>
+          <a:effectLst/>
+        </p:spPr>
+        <p:style>
+          <a:lnRef idx="1">
+            <a:schemeClr val="accent1"/>
+          </a:lnRef>
+          <a:fillRef idx="3">
+            <a:schemeClr val="accent1"/>
+          </a:fillRef>
+          <a:effectRef idx="2">
+            <a:schemeClr val="accent1"/>
+          </a:effectRef>
+          <a:fontRef idx="minor">
+            <a:schemeClr val="lt1"/>
+          </a:fontRef>
+        </p:style>
+        <p:txBody>
+          <a:bodyPr rtlCol="0" anchor="ctr"/>
+          <a:lstStyle/>
+          <a:p>
+            <a:pPr algn="ctr"/>
+          </a:p>
+        </p:txBody>
+      </p:sp>
+      <p:sp>
+        <p:nvSpPr>
+          <p:cNvPr id="17" name="TextBox 16"/>
+          <p:cNvSpPr txBox="1"/>
+          <p:nvPr/>
+        </p:nvSpPr>
+        <p:spPr>
+          <a:xfrm>
+            <a:off x="566928" y="3483864"/>
+            <a:ext cx="420624" cy="310896"/>
+          </a:xfrm>
+          <a:prstGeom prst="rect">
+            <a:avLst/>
+          </a:prstGeom>
+          <a:noFill/>
+        </p:spPr>
+        <p:txBody>
+          <a:bodyPr wrap="square">
+            <a:spAutoFit/>
+          </a:bodyPr>
+          <a:lstStyle/>
+          <a:p>
+            <a:pPr algn="ctr">
+              <a:lnSpc>
+                <a:spcPct val="100000"/>
+              </a:lnSpc>
+            </a:pPr>
+            <a:r>
+              <a:rPr sz="1400" b="1">
+                <a:solidFill>
+                  <a:srgbClr val="FFFFFF"/>
+                </a:solidFill>
+                <a:latin typeface="Arial"/>
+              </a:rPr>
+              <a:t>3</a:t>
+            </a:r>
+          </a:p>
+        </p:txBody>
+      </p:sp>
+      <p:sp>
+        <p:nvSpPr>
+          <p:cNvPr id="18" name="TextBox 17"/>
+          <p:cNvSpPr txBox="1"/>
+          <p:nvPr/>
+        </p:nvSpPr>
+        <p:spPr>
+          <a:xfrm>
+            <a:off x="1188720" y="3429000"/>
+            <a:ext cx="8863279" cy="274320"/>
+          </a:xfrm>
+          <a:prstGeom prst="rect">
+            <a:avLst/>
+          </a:prstGeom>
+          <a:noFill/>
+        </p:spPr>
+        <p:txBody>
+          <a:bodyPr wrap="square">
+            <a:spAutoFit/>
+          </a:bodyPr>
+          <a:lstStyle/>
+          <a:p>
+            <a:pPr algn="l">
+              <a:lnSpc>
+                <a:spcPct val="100000"/>
+              </a:lnSpc>
+            </a:pPr>
+            <a:r>
+              <a:rPr sz="1300" b="1">
+                <a:solidFill>
+                  <a:srgbClr val="2C3E50"/>
+                </a:solidFill>
+                <a:latin typeface="Arial"/>
+              </a:rPr>
+              <a:t>Effective months instead of calendar months</a:t>
+            </a:r>
+          </a:p>
+        </p:txBody>
+      </p:sp>
+      <p:sp>
+        <p:nvSpPr>
+          <p:cNvPr id="19" name="TextBox 18"/>
+          <p:cNvSpPr txBox="1"/>
+          <p:nvPr/>
+        </p:nvSpPr>
+        <p:spPr>
+          <a:xfrm>
+            <a:off x="1188720" y="3703320"/>
+            <a:ext cx="8863279" cy="603504"/>
+          </a:xfrm>
+          <a:prstGeom prst="rect">
+            <a:avLst/>
+          </a:prstGeom>
+          <a:noFill/>
+        </p:spPr>
+        <p:txBody>
+          <a:bodyPr wrap="square">
+            <a:spAutoFit/>
+          </a:bodyPr>
+          <a:lstStyle/>
+          <a:p>
+            <a:pPr algn="l">
+              <a:lnSpc>
+                <a:spcPct val="118000"/>
+              </a:lnSpc>
+            </a:pPr>
+            <a:r>
+              <a:rPr sz="1100" b="0">
+                <a:solidFill>
+                  <a:srgbClr val="5D6D7E"/>
+                </a:solidFill>
+                <a:latin typeface="Arial"/>
+              </a:rPr>
+              <a:t>The run-rate is divided not by the number of months but by the sum of the seasonal index over the months covered. A full calendar year sums to 12.00 and changes nothing; the stores window (Aug–Sep 2026) sums to 1.45 and corrects for falling in weak store months.</a:t>
+            </a:r>
+          </a:p>
+        </p:txBody>
+      </p:sp>
+      <p:sp>
+        <p:nvSpPr>
+          <p:cNvPr id="20" name="TextBox 19"/>
+          <p:cNvSpPr txBox="1"/>
+          <p:nvPr/>
+        </p:nvSpPr>
+        <p:spPr>
+          <a:xfrm>
+            <a:off x="10161727" y="3447288"/>
+            <a:ext cx="1463040" cy="274320"/>
+          </a:xfrm>
+          <a:prstGeom prst="rect">
+            <a:avLst/>
+          </a:prstGeom>
+          <a:noFill/>
+        </p:spPr>
+        <p:txBody>
+          <a:bodyPr wrap="square">
+            <a:spAutoFit/>
+          </a:bodyPr>
+          <a:lstStyle/>
+          <a:p>
+            <a:pPr algn="r">
+              <a:lnSpc>
+                <a:spcPct val="100000"/>
+              </a:lnSpc>
+            </a:pPr>
+            <a:r>
+              <a:rPr sz="1000" b="1">
+                <a:solidFill>
+                  <a:srgbClr val="5D6D7E"/>
+                </a:solidFill>
+                <a:latin typeface="Arial"/>
+              </a:rPr>
+              <a:t>CORRECTED</a:t>
+            </a:r>
+          </a:p>
+        </p:txBody>
+      </p:sp>
+      <p:sp>
+        <p:nvSpPr>
+          <p:cNvPr id="21" name="Rectangle 20"/>
+          <p:cNvSpPr/>
+          <p:nvPr/>
+        </p:nvSpPr>
+        <p:spPr>
+          <a:xfrm>
+            <a:off x="566928" y="4361688"/>
+            <a:ext cx="420624" cy="420624"/>
+          </a:xfrm>
+          <a:prstGeom prst="rect">
+            <a:avLst/>
+          </a:prstGeom>
+          <a:solidFill>
+            <a:srgbClr val="2C3E50"/>
+          </a:solidFill>
+          <a:ln>
+            <a:noFill/>
+          </a:ln>
+          <a:effectLst/>
+        </p:spPr>
+        <p:style>
+          <a:lnRef idx="1">
+            <a:schemeClr val="accent1"/>
+          </a:lnRef>
+          <a:fillRef idx="3">
+            <a:schemeClr val="accent1"/>
+          </a:fillRef>
+          <a:effectRef idx="2">
+            <a:schemeClr val="accent1"/>
+          </a:effectRef>
+          <a:fontRef idx="minor">
+            <a:schemeClr val="lt1"/>
+          </a:fontRef>
+        </p:style>
+        <p:txBody>
+          <a:bodyPr rtlCol="0" anchor="ctr"/>
+          <a:lstStyle/>
+          <a:p>
+            <a:pPr algn="ctr"/>
+          </a:p>
+        </p:txBody>
+      </p:sp>
+      <p:sp>
+        <p:nvSpPr>
+          <p:cNvPr id="22" name="TextBox 21"/>
+          <p:cNvSpPr txBox="1"/>
+          <p:nvPr/>
+        </p:nvSpPr>
+        <p:spPr>
+          <a:xfrm>
+            <a:off x="566928" y="4416552"/>
+            <a:ext cx="420624" cy="310896"/>
+          </a:xfrm>
+          <a:prstGeom prst="rect">
+            <a:avLst/>
+          </a:prstGeom>
+          <a:noFill/>
+        </p:spPr>
+        <p:txBody>
+          <a:bodyPr wrap="square">
+            <a:spAutoFit/>
+          </a:bodyPr>
+          <a:lstStyle/>
+          <a:p>
+            <a:pPr algn="ctr">
+              <a:lnSpc>
+                <a:spcPct val="100000"/>
+              </a:lnSpc>
+            </a:pPr>
+            <a:r>
+              <a:rPr sz="1400" b="1">
+                <a:solidFill>
+                  <a:srgbClr val="FFFFFF"/>
+                </a:solidFill>
+                <a:latin typeface="Arial"/>
+              </a:rPr>
+              <a:t>4</a:t>
+            </a:r>
+          </a:p>
+        </p:txBody>
+      </p:sp>
+      <p:sp>
+        <p:nvSpPr>
+          <p:cNvPr id="23" name="TextBox 22"/>
+          <p:cNvSpPr txBox="1"/>
+          <p:nvPr/>
+        </p:nvSpPr>
+        <p:spPr>
+          <a:xfrm>
+            <a:off x="1188720" y="4361688"/>
+            <a:ext cx="8863279" cy="274320"/>
+          </a:xfrm>
+          <a:prstGeom prst="rect">
+            <a:avLst/>
+          </a:prstGeom>
+          <a:noFill/>
+        </p:spPr>
+        <p:txBody>
+          <a:bodyPr wrap="square">
+            <a:spAutoFit/>
+          </a:bodyPr>
+          <a:lstStyle/>
+          <a:p>
+            <a:pPr algn="l">
+              <a:lnSpc>
+                <a:spcPct val="100000"/>
+              </a:lnSpc>
+            </a:pPr>
+            <a:r>
+              <a:rPr sz="1300" b="1">
+                <a:solidFill>
+                  <a:srgbClr val="2C3E50"/>
+                </a:solidFill>
+                <a:latin typeface="Arial"/>
+              </a:rPr>
+              <a:t>Effect on stores' weight in Apple Total</a:t>
+            </a:r>
+          </a:p>
+        </p:txBody>
+      </p:sp>
+      <p:sp>
+        <p:nvSpPr>
+          <p:cNvPr id="24" name="TextBox 23"/>
+          <p:cNvSpPr txBox="1"/>
+          <p:nvPr/>
+        </p:nvSpPr>
+        <p:spPr>
+          <a:xfrm>
+            <a:off x="1188720" y="4636008"/>
+            <a:ext cx="8863279" cy="603504"/>
+          </a:xfrm>
+          <a:prstGeom prst="rect">
+            <a:avLst/>
+          </a:prstGeom>
+          <a:noFill/>
+        </p:spPr>
+        <p:txBody>
+          <a:bodyPr wrap="square">
+            <a:spAutoFit/>
+          </a:bodyPr>
+          <a:lstStyle/>
+          <a:p>
+            <a:pPr algn="l">
+              <a:lnSpc>
+                <a:spcPct val="118000"/>
+              </a:lnSpc>
+            </a:pPr>
+            <a:r>
+              <a:rPr sz="1100" b="0">
+                <a:solidFill>
+                  <a:srgbClr val="5D6D7E"/>
+                </a:solidFill>
+                <a:latin typeface="Arial"/>
+              </a:rPr>
+              <a:t>Uncorrected, stores appeared to be 23% of demand. With their own seasonality they are 29%. Had Online's profile been applied —the only option before stores' history was available— we would have said 19%, and every scenario would show less production than there really is.</a:t>
+            </a:r>
+          </a:p>
+        </p:txBody>
+      </p:sp>
+      <p:sp>
+        <p:nvSpPr>
+          <p:cNvPr id="25" name="TextBox 24"/>
+          <p:cNvSpPr txBox="1"/>
+          <p:nvPr/>
+        </p:nvSpPr>
+        <p:spPr>
+          <a:xfrm>
+            <a:off x="10161727" y="4379976"/>
+            <a:ext cx="1463040" cy="274320"/>
+          </a:xfrm>
+          <a:prstGeom prst="rect">
+            <a:avLst/>
+          </a:prstGeom>
+          <a:noFill/>
+        </p:spPr>
+        <p:txBody>
+          <a:bodyPr wrap="square">
+            <a:spAutoFit/>
+          </a:bodyPr>
+          <a:lstStyle/>
+          <a:p>
+            <a:pPr algn="r">
+              <a:lnSpc>
+                <a:spcPct val="100000"/>
+              </a:lnSpc>
+            </a:pPr>
+            <a:r>
+              <a:rPr sz="1000" b="1">
+                <a:solidFill>
+                  <a:srgbClr val="3498DB"/>
+                </a:solidFill>
+                <a:latin typeface="Arial"/>
+              </a:rPr>
+              <a:t>MEASURED</a:t>
+            </a:r>
+          </a:p>
+        </p:txBody>
+      </p:sp>
+      <p:sp>
+        <p:nvSpPr>
+          <p:cNvPr id="26" name="TextBox 25"/>
+          <p:cNvSpPr txBox="1"/>
+          <p:nvPr/>
+        </p:nvSpPr>
+        <p:spPr>
+          <a:xfrm>
+            <a:off x="566928" y="5806440"/>
+            <a:ext cx="11057839" cy="822960"/>
           </a:xfrm>
           <a:prstGeom prst="rect">
             <a:avLst/>
@@ -3553,7 +4330,7 @@
                 </a:solidFill>
                 <a:latin typeface="Arial"/>
               </a:rPr>
-              <a:t>The risk curve by bin is the only measured piece of the study. Everything else —store risk, the scenarios— derives from it.</a:t>
+              <a:t>The index averages complete calendar years, so year-on-year volume growth is not mistaken for seasonality. What remains open is whether the Aug–Sep 2026 mix in stores is representative of the year.</a:t>
             </a:r>
           </a:p>
         </p:txBody>
@@ -3610,7 +4387,7 @@
                 </a:solidFill>
                 <a:latin typeface="Arial"/>
               </a:rPr>
-              <a:t>APPENDIX · BREAKDOWN BY SEGMENT</a:t>
+              <a:t>APPENDIX · THE ENGINE OF THE STUDY</a:t>
             </a:r>
           </a:p>
         </p:txBody>
@@ -3649,7 +4426,7 @@
                 </a:solidFill>
                 <a:latin typeface="Arial"/>
               </a:rPr>
-              <a:t>Stores Aug–Sep 2026</a:t>
+              <a:t>Originations Mar 2025 – Feb 2026</a:t>
             </a:r>
           </a:p>
         </p:txBody>
@@ -3688,7 +4465,7 @@
                 </a:solidFill>
                 <a:latin typeface="Arial"/>
               </a:rPr>
-              <a:t>Where the stores improvement comes from</a:t>
+              <a:t>The EFX score ranks risk in e-commerce</a:t>
             </a:r>
           </a:p>
         </p:txBody>
@@ -3739,7 +4516,7 @@
       </p:sp>
       <p:pic>
         <p:nvPicPr>
-          <p:cNvPr id="6" name="Picture 5" descr="stores_segments.png"/>
+          <p:cNvPr id="6" name="Picture 5" descr="curve.png"/>
           <p:cNvPicPr>
             <a:picLocks noChangeAspect="1"/>
           </p:cNvPicPr>
@@ -3753,8 +4530,8 @@
         </p:blipFill>
         <p:spPr>
           <a:xfrm>
-            <a:off x="648653" y="1563624"/>
-            <a:ext cx="10894388" cy="4425696"/>
+            <a:off x="1798613" y="1563624"/>
+            <a:ext cx="8594469" cy="4425696"/>
           </a:xfrm>
           <a:prstGeom prst="rect">
             <a:avLst/>
@@ -3795,7 +4572,7 @@
                 </a:solidFill>
                 <a:latin typeface="Arial"/>
               </a:rPr>
-              <a:t>'New' is 81% of store demand and where risk falls. Take-up is measured by segment and by engine decision (approved / referred). '&gt;=G' is absent: it is always rejected, so it has neither acceptance nor risk.</a:t>
+              <a:t>The risk curve by bin is the only measured piece of the study. Everything else —store risk, the scenarios— derives from it.</a:t>
             </a:r>
           </a:p>
         </p:txBody>
@@ -3852,7 +4629,7 @@
                 </a:solidFill>
                 <a:latin typeface="Arial"/>
               </a:rPr>
-              <a:t>APPENDIX · ANNUALISATION</a:t>
+              <a:t>APPENDIX · BREAKDOWN BY SEGMENT</a:t>
             </a:r>
           </a:p>
         </p:txBody>
@@ -3891,7 +4668,7 @@
                 </a:solidFill>
                 <a:latin typeface="Arial"/>
               </a:rPr>
-              <a:t>Full years 2024 and 2025</a:t>
+              <a:t>Stores Aug–Sep 2026</a:t>
             </a:r>
           </a:p>
         </p:txBody>
@@ -3930,7 +4707,7 @@
                 </a:solidFill>
                 <a:latin typeface="Arial"/>
               </a:rPr>
-              <a:t>The two channels do not share a seasonality</a:t>
+              <a:t>Where the stores improvement comes from</a:t>
             </a:r>
           </a:p>
         </p:txBody>
@@ -3981,7 +4758,7 @@
       </p:sp>
       <p:pic>
         <p:nvPicPr>
-          <p:cNvPr id="6" name="Picture 5" descr="seasonality.png"/>
+          <p:cNvPr id="6" name="Picture 5" descr="stores_segments.png"/>
           <p:cNvPicPr>
             <a:picLocks noChangeAspect="1"/>
           </p:cNvPicPr>
@@ -3995,8 +4772,8 @@
         </p:blipFill>
         <p:spPr>
           <a:xfrm>
-            <a:off x="1296112" y="1563624"/>
-            <a:ext cx="9599470" cy="4425696"/>
+            <a:off x="648653" y="1563624"/>
+            <a:ext cx="10894388" cy="4425696"/>
           </a:xfrm>
           <a:prstGeom prst="rect">
             <a:avLst/>
@@ -4037,7 +4814,7 @@
                 </a:solidFill>
                 <a:latin typeface="Arial"/>
               </a:rPr>
-              <a:t>Stores only have the score for Aug–Sep 2026, so their weight in Apple depends on how it is annualised. Stores peak in December and September is their weakest month, the opposite of Online: using Online's curve would have cut their weight to 19% when with their own seasonality it is 29%.</a:t>
+              <a:t>'New' is 81% of store demand and where risk falls. Take-up is measured by segment and by engine decision (approved / referred). '&gt;=G' is absent: it is always rejected, so it has neither acceptance nor risk.</a:t>
             </a:r>
           </a:p>
         </p:txBody>
@@ -4051,6 +4828,248 @@
 </file>
 
 <file path=ppt/slides/slide13.xml><?xml version="1.0" encoding="utf-8"?>
+<p:sld xmlns:a="http://schemas.openxmlformats.org/drawingml/2006/main" xmlns:p="http://schemas.openxmlformats.org/presentationml/2006/main" xmlns:r="http://schemas.openxmlformats.org/officeDocument/2006/relationships">
+  <p:cSld>
+    <p:spTree>
+      <p:nvGrpSpPr>
+        <p:cNvPr id="1" name=""/>
+        <p:cNvGrpSpPr/>
+        <p:nvPr/>
+      </p:nvGrpSpPr>
+      <p:grpSpPr/>
+      <p:sp>
+        <p:nvSpPr>
+          <p:cNvPr id="2" name="TextBox 1"/>
+          <p:cNvSpPr txBox="1"/>
+          <p:nvPr/>
+        </p:nvSpPr>
+        <p:spPr>
+          <a:xfrm>
+            <a:off x="566928" y="384048"/>
+            <a:ext cx="6400800" cy="274320"/>
+          </a:xfrm>
+          <a:prstGeom prst="rect">
+            <a:avLst/>
+          </a:prstGeom>
+          <a:noFill/>
+        </p:spPr>
+        <p:txBody>
+          <a:bodyPr wrap="square">
+            <a:spAutoFit/>
+          </a:bodyPr>
+          <a:lstStyle/>
+          <a:p>
+            <a:pPr algn="l">
+              <a:lnSpc>
+                <a:spcPct val="100000"/>
+              </a:lnSpc>
+            </a:pPr>
+            <a:r>
+              <a:rPr sz="1100" b="1">
+                <a:solidFill>
+                  <a:srgbClr val="3498DB"/>
+                </a:solidFill>
+                <a:latin typeface="Arial"/>
+              </a:rPr>
+              <a:t>APPENDIX · ANNUALISATION</a:t>
+            </a:r>
+          </a:p>
+        </p:txBody>
+      </p:sp>
+      <p:sp>
+        <p:nvSpPr>
+          <p:cNvPr id="3" name="TextBox 2"/>
+          <p:cNvSpPr txBox="1"/>
+          <p:nvPr/>
+        </p:nvSpPr>
+        <p:spPr>
+          <a:xfrm>
+            <a:off x="6869887" y="384048"/>
+            <a:ext cx="4754880" cy="274320"/>
+          </a:xfrm>
+          <a:prstGeom prst="rect">
+            <a:avLst/>
+          </a:prstGeom>
+          <a:noFill/>
+        </p:spPr>
+        <p:txBody>
+          <a:bodyPr wrap="square">
+            <a:spAutoFit/>
+          </a:bodyPr>
+          <a:lstStyle/>
+          <a:p>
+            <a:pPr algn="r">
+              <a:lnSpc>
+                <a:spcPct val="100000"/>
+              </a:lnSpc>
+            </a:pPr>
+            <a:r>
+              <a:rPr sz="1100" b="0">
+                <a:solidFill>
+                  <a:srgbClr val="5D6D7E"/>
+                </a:solidFill>
+                <a:latin typeface="Arial"/>
+              </a:rPr>
+              <a:t>Full years 2024 and 2025</a:t>
+            </a:r>
+          </a:p>
+        </p:txBody>
+      </p:sp>
+      <p:sp>
+        <p:nvSpPr>
+          <p:cNvPr id="4" name="TextBox 3"/>
+          <p:cNvSpPr txBox="1"/>
+          <p:nvPr/>
+        </p:nvSpPr>
+        <p:spPr>
+          <a:xfrm>
+            <a:off x="566928" y="694944"/>
+            <a:ext cx="11057839" cy="548640"/>
+          </a:xfrm>
+          <a:prstGeom prst="rect">
+            <a:avLst/>
+          </a:prstGeom>
+          <a:noFill/>
+        </p:spPr>
+        <p:txBody>
+          <a:bodyPr wrap="square">
+            <a:spAutoFit/>
+          </a:bodyPr>
+          <a:lstStyle/>
+          <a:p>
+            <a:pPr algn="l">
+              <a:lnSpc>
+                <a:spcPct val="100000"/>
+              </a:lnSpc>
+            </a:pPr>
+            <a:r>
+              <a:rPr sz="2600" b="1">
+                <a:solidFill>
+                  <a:srgbClr val="2C3E50"/>
+                </a:solidFill>
+                <a:latin typeface="Arial"/>
+              </a:rPr>
+              <a:t>The two channels do not share a seasonality</a:t>
+            </a:r>
+          </a:p>
+        </p:txBody>
+      </p:sp>
+      <p:sp>
+        <p:nvSpPr>
+          <p:cNvPr id="5" name="Rectangle 4"/>
+          <p:cNvSpPr/>
+          <p:nvPr/>
+        </p:nvSpPr>
+        <p:spPr>
+          <a:xfrm>
+            <a:off x="566928" y="1353312"/>
+            <a:ext cx="11057839" cy="9525"/>
+          </a:xfrm>
+          <a:prstGeom prst="rect">
+            <a:avLst/>
+          </a:prstGeom>
+          <a:solidFill>
+            <a:srgbClr val="E5E7EB"/>
+          </a:solidFill>
+          <a:ln>
+            <a:noFill/>
+          </a:ln>
+          <a:effectLst/>
+        </p:spPr>
+        <p:style>
+          <a:lnRef idx="1">
+            <a:schemeClr val="accent1"/>
+          </a:lnRef>
+          <a:fillRef idx="3">
+            <a:schemeClr val="accent1"/>
+          </a:fillRef>
+          <a:effectRef idx="2">
+            <a:schemeClr val="accent1"/>
+          </a:effectRef>
+          <a:fontRef idx="minor">
+            <a:schemeClr val="lt1"/>
+          </a:fontRef>
+        </p:style>
+        <p:txBody>
+          <a:bodyPr rtlCol="0" anchor="ctr"/>
+          <a:lstStyle/>
+          <a:p>
+            <a:pPr algn="ctr"/>
+          </a:p>
+        </p:txBody>
+      </p:sp>
+      <p:pic>
+        <p:nvPicPr>
+          <p:cNvPr id="6" name="Picture 5" descr="seasonality.png"/>
+          <p:cNvPicPr>
+            <a:picLocks noChangeAspect="1"/>
+          </p:cNvPicPr>
+          <p:nvPr/>
+        </p:nvPicPr>
+        <p:blipFill>
+          <a:blip r:embed="rId2"/>
+          <a:stretch>
+            <a:fillRect/>
+          </a:stretch>
+        </p:blipFill>
+        <p:spPr>
+          <a:xfrm>
+            <a:off x="1296112" y="1563624"/>
+            <a:ext cx="9599470" cy="4425696"/>
+          </a:xfrm>
+          <a:prstGeom prst="rect">
+            <a:avLst/>
+          </a:prstGeom>
+        </p:spPr>
+      </p:pic>
+      <p:sp>
+        <p:nvSpPr>
+          <p:cNvPr id="7" name="TextBox 6"/>
+          <p:cNvSpPr txBox="1"/>
+          <p:nvPr/>
+        </p:nvSpPr>
+        <p:spPr>
+          <a:xfrm>
+            <a:off x="566928" y="6071616"/>
+            <a:ext cx="11057839" cy="548640"/>
+          </a:xfrm>
+          <a:prstGeom prst="rect">
+            <a:avLst/>
+          </a:prstGeom>
+          <a:noFill/>
+        </p:spPr>
+        <p:txBody>
+          <a:bodyPr wrap="square">
+            <a:spAutoFit/>
+          </a:bodyPr>
+          <a:lstStyle/>
+          <a:p>
+            <a:pPr algn="l">
+              <a:lnSpc>
+                <a:spcPct val="120000"/>
+              </a:lnSpc>
+            </a:pPr>
+            <a:r>
+              <a:rPr sz="1150" b="0">
+                <a:solidFill>
+                  <a:srgbClr val="5D6D7E"/>
+                </a:solidFill>
+                <a:latin typeface="Arial"/>
+              </a:rPr>
+              <a:t>Stores only have the score for Aug–Sep 2026, so their weight in Apple depends on how it is annualised. Stores peak in December and September is their weakest month, the opposite of Online: using Online's curve would have cut their weight to 19% when with their own seasonality it is 29%.</a:t>
+            </a:r>
+          </a:p>
+        </p:txBody>
+      </p:sp>
+    </p:spTree>
+  </p:cSld>
+  <p:clrMapOvr>
+    <a:masterClrMapping/>
+  </p:clrMapOvr>
+</p:sld>
+</file>
+
+<file path=ppt/slides/slide14.xml><?xml version="1.0" encoding="utf-8"?>
 <p:sld xmlns:a="http://schemas.openxmlformats.org/drawingml/2006/main" xmlns:p="http://schemas.openxmlformats.org/presentationml/2006/main" xmlns:r="http://schemas.openxmlformats.org/officeDocument/2006/relationships">
   <p:cSld>
     <p:spTree>
@@ -6275,7 +7294,7 @@
                 </a:solidFill>
                 <a:latin typeface="Arial"/>
               </a:rPr>
-              <a:t>POINT 1 · MEASURED</a:t>
+              <a:t>DEFINITIONS</a:t>
             </a:r>
           </a:p>
         </p:txBody>
@@ -6314,7 +7333,7 @@
                 </a:solidFill>
                 <a:latin typeface="Arial"/>
               </a:rPr>
-              <a:t>Originations Mar 2025 – Feb 2026</a:t>
+              <a:t>Online Mar 2025 – Feb 2026  ·  stores Aug–Sep 2026</a:t>
             </a:r>
           </a:p>
         </p:txBody>
@@ -6353,7 +7372,7 @@
                 </a:solidFill>
                 <a:latin typeface="Arial"/>
               </a:rPr>
-              <a:t>Apple Online today</a:t>
+              <a:t>How acceptance is measured</a:t>
             </a:r>
           </a:p>
         </p:txBody>
@@ -6402,30 +7421,916 @@
           </a:p>
         </p:txBody>
       </p:sp>
-      <p:pic>
-        <p:nvPicPr>
-          <p:cNvPr id="6" name="Picture 5" descr="online.png"/>
-          <p:cNvPicPr>
-            <a:picLocks noChangeAspect="1"/>
-          </p:cNvPicPr>
-          <p:nvPr/>
-        </p:nvPicPr>
-        <p:blipFill>
-          <a:blip r:embed="rId2"/>
-          <a:stretch>
-            <a:fillRect/>
-          </a:stretch>
-        </p:blipFill>
-        <p:spPr>
-          <a:xfrm>
-            <a:off x="1746542" y="1563624"/>
-            <a:ext cx="8698611" cy="4425696"/>
-          </a:xfrm>
-          <a:prstGeom prst="rect">
-            <a:avLst/>
-          </a:prstGeom>
-        </p:spPr>
-      </p:pic>
+      <p:graphicFrame>
+        <p:nvGraphicFramePr>
+          <p:cNvPr id="6" name="Table 5"/>
+          <p:cNvGraphicFramePr>
+            <a:graphicFrameLocks noGrp="1"/>
+          </p:cNvGraphicFramePr>
+          <p:nvPr/>
+        </p:nvGraphicFramePr>
+        <p:xfrm>
+          <a:off x="566928" y="1563624"/>
+          <a:ext cx="6858000" cy="2798064"/>
+        </p:xfrm>
+        <a:graphic>
+          <a:graphicData uri="http://schemas.openxmlformats.org/drawingml/2006/table">
+            <a:tbl>
+              <a:tblPr firstRow="1" bandRow="1">
+                <a:tableStyleId>{5C22544A-7EE6-4342-B048-85BDC9FD1C3A}</a:tableStyleId>
+              </a:tblPr>
+              <a:tblGrid>
+                <a:gridCol w="3154680"/>
+                <a:gridCol w="1234440"/>
+                <a:gridCol w="1234440"/>
+                <a:gridCol w="1234440"/>
+              </a:tblGrid>
+              <a:tr h="310896">
+                <a:tc>
+                  <a:txBody>
+                    <a:bodyPr/>
+                    <a:lstStyle/>
+                    <a:p>
+                      <a:pPr algn="l"/>
+                      <a:r>
+                        <a:rPr sz="1150" b="1">
+                          <a:solidFill>
+                            <a:srgbClr val="2C3E50"/>
+                          </a:solidFill>
+                          <a:latin typeface="Arial"/>
+                        </a:rPr>
+                        <a:t>Where each € of demand ends up</a:t>
+                      </a:r>
+                    </a:p>
+                  </a:txBody>
+                  <a:tcPr>
+                    <a:solidFill>
+                      <a:srgbClr val="F6F7F9"/>
+                    </a:solidFill>
+                  </a:tcPr>
+                </a:tc>
+                <a:tc>
+                  <a:txBody>
+                    <a:bodyPr/>
+                    <a:lstStyle/>
+                    <a:p>
+                      <a:pPr algn="r"/>
+                      <a:r>
+                        <a:rPr sz="1150" b="1">
+                          <a:solidFill>
+                            <a:srgbClr val="2C3E50"/>
+                          </a:solidFill>
+                          <a:latin typeface="Arial"/>
+                        </a:rPr>
+                        <a:t>Online</a:t>
+                      </a:r>
+                    </a:p>
+                    <a:p>
+                      <a:pPr algn="r"/>
+                      <a:r>
+                        <a:rPr sz="1150" b="1">
+                          <a:solidFill>
+                            <a:srgbClr val="2C3E50"/>
+                          </a:solidFill>
+                          <a:latin typeface="Arial"/>
+                        </a:rPr>
+                        <a:t>Mar 25 – Feb 26</a:t>
+                      </a:r>
+                    </a:p>
+                  </a:txBody>
+                  <a:tcPr>
+                    <a:solidFill>
+                      <a:srgbClr val="F6F7F9"/>
+                    </a:solidFill>
+                  </a:tcPr>
+                </a:tc>
+                <a:tc>
+                  <a:txBody>
+                    <a:bodyPr/>
+                    <a:lstStyle/>
+                    <a:p>
+                      <a:pPr algn="r"/>
+                      <a:r>
+                        <a:rPr sz="1150" b="1">
+                          <a:solidFill>
+                            <a:srgbClr val="2C3E50"/>
+                          </a:solidFill>
+                          <a:latin typeface="Arial"/>
+                        </a:rPr>
+                        <a:t>Stores</a:t>
+                      </a:r>
+                    </a:p>
+                    <a:p>
+                      <a:pPr algn="r"/>
+                      <a:r>
+                        <a:rPr sz="1150" b="1">
+                          <a:solidFill>
+                            <a:srgbClr val="2C3E50"/>
+                          </a:solidFill>
+                          <a:latin typeface="Arial"/>
+                        </a:rPr>
+                        <a:t>Mar 25 – Feb 26</a:t>
+                      </a:r>
+                    </a:p>
+                  </a:txBody>
+                  <a:tcPr>
+                    <a:solidFill>
+                      <a:srgbClr val="F6F7F9"/>
+                    </a:solidFill>
+                  </a:tcPr>
+                </a:tc>
+                <a:tc>
+                  <a:txBody>
+                    <a:bodyPr/>
+                    <a:lstStyle/>
+                    <a:p>
+                      <a:pPr algn="r"/>
+                      <a:r>
+                        <a:rPr sz="1150" b="1">
+                          <a:solidFill>
+                            <a:srgbClr val="2C3E50"/>
+                          </a:solidFill>
+                          <a:latin typeface="Arial"/>
+                        </a:rPr>
+                        <a:t>Stores</a:t>
+                      </a:r>
+                    </a:p>
+                    <a:p>
+                      <a:pPr algn="r"/>
+                      <a:r>
+                        <a:rPr sz="1150" b="1">
+                          <a:solidFill>
+                            <a:srgbClr val="2C3E50"/>
+                          </a:solidFill>
+                          <a:latin typeface="Arial"/>
+                        </a:rPr>
+                        <a:t>Aug–Sep 26</a:t>
+                      </a:r>
+                    </a:p>
+                  </a:txBody>
+                  <a:tcPr>
+                    <a:solidFill>
+                      <a:srgbClr val="F6F7F9"/>
+                    </a:solidFill>
+                  </a:tcPr>
+                </a:tc>
+              </a:tr>
+              <a:tr h="310896">
+                <a:tc>
+                  <a:txBody>
+                    <a:bodyPr/>
+                    <a:lstStyle/>
+                    <a:p>
+                      <a:pPr algn="l"/>
+                      <a:r>
+                        <a:rPr sz="1150" b="0">
+                          <a:solidFill>
+                            <a:srgbClr val="5D6D7E"/>
+                          </a:solidFill>
+                          <a:latin typeface="Arial"/>
+                        </a:rPr>
+                        <a:t>booked  (= acceptance rate)</a:t>
+                      </a:r>
+                    </a:p>
+                  </a:txBody>
+                  <a:tcPr>
+                    <a:solidFill>
+                      <a:srgbClr val="FFFFFF"/>
+                    </a:solidFill>
+                  </a:tcPr>
+                </a:tc>
+                <a:tc>
+                  <a:txBody>
+                    <a:bodyPr/>
+                    <a:lstStyle/>
+                    <a:p>
+                      <a:pPr algn="r"/>
+                      <a:r>
+                        <a:rPr sz="1150" b="0">
+                          <a:solidFill>
+                            <a:srgbClr val="5D6D7E"/>
+                          </a:solidFill>
+                          <a:latin typeface="Arial"/>
+                        </a:rPr>
+                        <a:t>20.9%</a:t>
+                      </a:r>
+                    </a:p>
+                  </a:txBody>
+                  <a:tcPr>
+                    <a:solidFill>
+                      <a:srgbClr val="FFFFFF"/>
+                    </a:solidFill>
+                  </a:tcPr>
+                </a:tc>
+                <a:tc>
+                  <a:txBody>
+                    <a:bodyPr/>
+                    <a:lstStyle/>
+                    <a:p>
+                      <a:pPr algn="r"/>
+                      <a:r>
+                        <a:rPr sz="1150" b="0">
+                          <a:solidFill>
+                            <a:srgbClr val="5D6D7E"/>
+                          </a:solidFill>
+                          <a:latin typeface="Arial"/>
+                        </a:rPr>
+                        <a:t>58.7%</a:t>
+                      </a:r>
+                    </a:p>
+                  </a:txBody>
+                  <a:tcPr>
+                    <a:solidFill>
+                      <a:srgbClr val="FFFFFF"/>
+                    </a:solidFill>
+                  </a:tcPr>
+                </a:tc>
+                <a:tc>
+                  <a:txBody>
+                    <a:bodyPr/>
+                    <a:lstStyle/>
+                    <a:p>
+                      <a:pPr algn="r"/>
+                      <a:r>
+                        <a:rPr sz="1150" b="0">
+                          <a:solidFill>
+                            <a:srgbClr val="5D6D7E"/>
+                          </a:solidFill>
+                          <a:latin typeface="Arial"/>
+                        </a:rPr>
+                        <a:t>47.2%</a:t>
+                      </a:r>
+                    </a:p>
+                  </a:txBody>
+                  <a:tcPr>
+                    <a:solidFill>
+                      <a:srgbClr val="FFFFFF"/>
+                    </a:solidFill>
+                  </a:tcPr>
+                </a:tc>
+              </a:tr>
+              <a:tr h="310896">
+                <a:tc>
+                  <a:txBody>
+                    <a:bodyPr/>
+                    <a:lstStyle/>
+                    <a:p>
+                      <a:pPr algn="l"/>
+                      <a:r>
+                        <a:rPr sz="1150" b="0">
+                          <a:solidFill>
+                            <a:srgbClr val="5D6D7E"/>
+                          </a:solidFill>
+                          <a:latin typeface="Arial"/>
+                        </a:rPr>
+                        <a:t>approved, then cancelled (unfinished demand)</a:t>
+                      </a:r>
+                    </a:p>
+                  </a:txBody>
+                  <a:tcPr>
+                    <a:solidFill>
+                      <a:srgbClr val="FFFFFF"/>
+                    </a:solidFill>
+                  </a:tcPr>
+                </a:tc>
+                <a:tc>
+                  <a:txBody>
+                    <a:bodyPr/>
+                    <a:lstStyle/>
+                    <a:p>
+                      <a:pPr algn="r"/>
+                      <a:r>
+                        <a:rPr sz="1150" b="0">
+                          <a:solidFill>
+                            <a:srgbClr val="5D6D7E"/>
+                          </a:solidFill>
+                          <a:latin typeface="Arial"/>
+                        </a:rPr>
+                        <a:t>27.9%</a:t>
+                      </a:r>
+                    </a:p>
+                  </a:txBody>
+                  <a:tcPr>
+                    <a:solidFill>
+                      <a:srgbClr val="FFFFFF"/>
+                    </a:solidFill>
+                  </a:tcPr>
+                </a:tc>
+                <a:tc>
+                  <a:txBody>
+                    <a:bodyPr/>
+                    <a:lstStyle/>
+                    <a:p>
+                      <a:pPr algn="r"/>
+                      <a:r>
+                        <a:rPr sz="1150" b="0">
+                          <a:solidFill>
+                            <a:srgbClr val="5D6D7E"/>
+                          </a:solidFill>
+                          <a:latin typeface="Arial"/>
+                        </a:rPr>
+                        <a:t>7.0%</a:t>
+                      </a:r>
+                    </a:p>
+                  </a:txBody>
+                  <a:tcPr>
+                    <a:solidFill>
+                      <a:srgbClr val="FFFFFF"/>
+                    </a:solidFill>
+                  </a:tcPr>
+                </a:tc>
+                <a:tc>
+                  <a:txBody>
+                    <a:bodyPr/>
+                    <a:lstStyle/>
+                    <a:p>
+                      <a:pPr algn="r"/>
+                      <a:r>
+                        <a:rPr sz="1150" b="0">
+                          <a:solidFill>
+                            <a:srgbClr val="5D6D7E"/>
+                          </a:solidFill>
+                          <a:latin typeface="Arial"/>
+                        </a:rPr>
+                        <a:t>9.6%</a:t>
+                      </a:r>
+                    </a:p>
+                  </a:txBody>
+                  <a:tcPr>
+                    <a:solidFill>
+                      <a:srgbClr val="FFFFFF"/>
+                    </a:solidFill>
+                  </a:tcPr>
+                </a:tc>
+              </a:tr>
+              <a:tr h="310896">
+                <a:tc>
+                  <a:txBody>
+                    <a:bodyPr/>
+                    <a:lstStyle/>
+                    <a:p>
+                      <a:pPr algn="l"/>
+                      <a:r>
+                        <a:rPr sz="1150" b="0">
+                          <a:solidFill>
+                            <a:srgbClr val="5D6D7E"/>
+                          </a:solidFill>
+                          <a:latin typeface="Arial"/>
+                        </a:rPr>
+                        <a:t>approved, rejected downstream</a:t>
+                      </a:r>
+                    </a:p>
+                  </a:txBody>
+                  <a:tcPr>
+                    <a:solidFill>
+                      <a:srgbClr val="FFFFFF"/>
+                    </a:solidFill>
+                  </a:tcPr>
+                </a:tc>
+                <a:tc>
+                  <a:txBody>
+                    <a:bodyPr/>
+                    <a:lstStyle/>
+                    <a:p>
+                      <a:pPr algn="r"/>
+                      <a:r>
+                        <a:rPr sz="1150" b="0">
+                          <a:solidFill>
+                            <a:srgbClr val="5D6D7E"/>
+                          </a:solidFill>
+                          <a:latin typeface="Arial"/>
+                        </a:rPr>
+                        <a:t>3.1%</a:t>
+                      </a:r>
+                    </a:p>
+                  </a:txBody>
+                  <a:tcPr>
+                    <a:solidFill>
+                      <a:srgbClr val="FFFFFF"/>
+                    </a:solidFill>
+                  </a:tcPr>
+                </a:tc>
+                <a:tc>
+                  <a:txBody>
+                    <a:bodyPr/>
+                    <a:lstStyle/>
+                    <a:p>
+                      <a:pPr algn="r"/>
+                      <a:r>
+                        <a:rPr sz="1150" b="0">
+                          <a:solidFill>
+                            <a:srgbClr val="5D6D7E"/>
+                          </a:solidFill>
+                          <a:latin typeface="Arial"/>
+                        </a:rPr>
+                        <a:t>2.6%</a:t>
+                      </a:r>
+                    </a:p>
+                  </a:txBody>
+                  <a:tcPr>
+                    <a:solidFill>
+                      <a:srgbClr val="FFFFFF"/>
+                    </a:solidFill>
+                  </a:tcPr>
+                </a:tc>
+                <a:tc>
+                  <a:txBody>
+                    <a:bodyPr/>
+                    <a:lstStyle/>
+                    <a:p>
+                      <a:pPr algn="r"/>
+                      <a:r>
+                        <a:rPr sz="1150" b="0">
+                          <a:solidFill>
+                            <a:srgbClr val="5D6D7E"/>
+                          </a:solidFill>
+                          <a:latin typeface="Arial"/>
+                        </a:rPr>
+                        <a:t>2.0%</a:t>
+                      </a:r>
+                    </a:p>
+                  </a:txBody>
+                  <a:tcPr>
+                    <a:solidFill>
+                      <a:srgbClr val="FFFFFF"/>
+                    </a:solidFill>
+                  </a:tcPr>
+                </a:tc>
+              </a:tr>
+              <a:tr h="310896">
+                <a:tc>
+                  <a:txBody>
+                    <a:bodyPr/>
+                    <a:lstStyle/>
+                    <a:p>
+                      <a:pPr algn="l"/>
+                      <a:r>
+                        <a:rPr sz="1150" b="0">
+                          <a:solidFill>
+                            <a:srgbClr val="5D6D7E"/>
+                          </a:solidFill>
+                          <a:latin typeface="Arial"/>
+                        </a:rPr>
+                        <a:t>rejected by the engine: score</a:t>
+                      </a:r>
+                    </a:p>
+                  </a:txBody>
+                  <a:tcPr>
+                    <a:solidFill>
+                      <a:srgbClr val="FFFFFF"/>
+                    </a:solidFill>
+                  </a:tcPr>
+                </a:tc>
+                <a:tc>
+                  <a:txBody>
+                    <a:bodyPr/>
+                    <a:lstStyle/>
+                    <a:p>
+                      <a:pPr algn="r"/>
+                      <a:r>
+                        <a:rPr sz="1150" b="0">
+                          <a:solidFill>
+                            <a:srgbClr val="5D6D7E"/>
+                          </a:solidFill>
+                          <a:latin typeface="Arial"/>
+                        </a:rPr>
+                        <a:t>6.9%</a:t>
+                      </a:r>
+                    </a:p>
+                  </a:txBody>
+                  <a:tcPr>
+                    <a:solidFill>
+                      <a:srgbClr val="FFFFFF"/>
+                    </a:solidFill>
+                  </a:tcPr>
+                </a:tc>
+                <a:tc>
+                  <a:txBody>
+                    <a:bodyPr/>
+                    <a:lstStyle/>
+                    <a:p>
+                      <a:pPr algn="r"/>
+                      <a:r>
+                        <a:rPr sz="1150" b="0">
+                          <a:solidFill>
+                            <a:srgbClr val="5D6D7E"/>
+                          </a:solidFill>
+                          <a:latin typeface="Arial"/>
+                        </a:rPr>
+                        <a:t>11.3%</a:t>
+                      </a:r>
+                    </a:p>
+                  </a:txBody>
+                  <a:tcPr>
+                    <a:solidFill>
+                      <a:srgbClr val="FFFFFF"/>
+                    </a:solidFill>
+                  </a:tcPr>
+                </a:tc>
+                <a:tc>
+                  <a:txBody>
+                    <a:bodyPr/>
+                    <a:lstStyle/>
+                    <a:p>
+                      <a:pPr algn="r"/>
+                      <a:r>
+                        <a:rPr sz="1150" b="0">
+                          <a:solidFill>
+                            <a:srgbClr val="5D6D7E"/>
+                          </a:solidFill>
+                          <a:latin typeface="Arial"/>
+                        </a:rPr>
+                        <a:t>21.1%</a:t>
+                      </a:r>
+                    </a:p>
+                  </a:txBody>
+                  <a:tcPr>
+                    <a:solidFill>
+                      <a:srgbClr val="FFFFFF"/>
+                    </a:solidFill>
+                  </a:tcPr>
+                </a:tc>
+              </a:tr>
+              <a:tr h="310896">
+                <a:tc>
+                  <a:txBody>
+                    <a:bodyPr/>
+                    <a:lstStyle/>
+                    <a:p>
+                      <a:pPr algn="l"/>
+                      <a:r>
+                        <a:rPr sz="1150" b="0">
+                          <a:solidFill>
+                            <a:srgbClr val="5D6D7E"/>
+                          </a:solidFill>
+                          <a:latin typeface="Arial"/>
+                        </a:rPr>
+                        <a:t>rejected by the engine: other rules</a:t>
+                      </a:r>
+                    </a:p>
+                  </a:txBody>
+                  <a:tcPr>
+                    <a:solidFill>
+                      <a:srgbClr val="FFFFFF"/>
+                    </a:solidFill>
+                  </a:tcPr>
+                </a:tc>
+                <a:tc>
+                  <a:txBody>
+                    <a:bodyPr/>
+                    <a:lstStyle/>
+                    <a:p>
+                      <a:pPr algn="r"/>
+                      <a:r>
+                        <a:rPr sz="1150" b="0">
+                          <a:solidFill>
+                            <a:srgbClr val="5D6D7E"/>
+                          </a:solidFill>
+                          <a:latin typeface="Arial"/>
+                        </a:rPr>
+                        <a:t>41.2%</a:t>
+                      </a:r>
+                    </a:p>
+                  </a:txBody>
+                  <a:tcPr>
+                    <a:solidFill>
+                      <a:srgbClr val="FFFFFF"/>
+                    </a:solidFill>
+                  </a:tcPr>
+                </a:tc>
+                <a:tc>
+                  <a:txBody>
+                    <a:bodyPr/>
+                    <a:lstStyle/>
+                    <a:p>
+                      <a:pPr algn="r"/>
+                      <a:r>
+                        <a:rPr sz="1150" b="0">
+                          <a:solidFill>
+                            <a:srgbClr val="5D6D7E"/>
+                          </a:solidFill>
+                          <a:latin typeface="Arial"/>
+                        </a:rPr>
+                        <a:t>20.3%</a:t>
+                      </a:r>
+                    </a:p>
+                  </a:txBody>
+                  <a:tcPr>
+                    <a:solidFill>
+                      <a:srgbClr val="FFFFFF"/>
+                    </a:solidFill>
+                  </a:tcPr>
+                </a:tc>
+                <a:tc>
+                  <a:txBody>
+                    <a:bodyPr/>
+                    <a:lstStyle/>
+                    <a:p>
+                      <a:pPr algn="r"/>
+                      <a:r>
+                        <a:rPr sz="1150" b="0">
+                          <a:solidFill>
+                            <a:srgbClr val="5D6D7E"/>
+                          </a:solidFill>
+                          <a:latin typeface="Arial"/>
+                        </a:rPr>
+                        <a:t>20.1%</a:t>
+                      </a:r>
+                    </a:p>
+                  </a:txBody>
+                  <a:tcPr>
+                    <a:solidFill>
+                      <a:srgbClr val="FFFFFF"/>
+                    </a:solidFill>
+                  </a:tcPr>
+                </a:tc>
+              </a:tr>
+              <a:tr h="310896">
+                <a:tc>
+                  <a:txBody>
+                    <a:bodyPr/>
+                    <a:lstStyle/>
+                    <a:p>
+                      <a:pPr algn="l"/>
+                      <a:r>
+                        <a:rPr sz="1150" b="0">
+                          <a:solidFill>
+                            <a:srgbClr val="5D6D7E"/>
+                          </a:solidFill>
+                          <a:latin typeface="Arial"/>
+                        </a:rPr>
+                        <a:t>Total demand</a:t>
+                      </a:r>
+                    </a:p>
+                  </a:txBody>
+                  <a:tcPr>
+                    <a:solidFill>
+                      <a:srgbClr val="FFFFFF"/>
+                    </a:solidFill>
+                  </a:tcPr>
+                </a:tc>
+                <a:tc>
+                  <a:txBody>
+                    <a:bodyPr/>
+                    <a:lstStyle/>
+                    <a:p>
+                      <a:pPr algn="r"/>
+                      <a:r>
+                        <a:rPr sz="1150" b="0">
+                          <a:solidFill>
+                            <a:srgbClr val="5D6D7E"/>
+                          </a:solidFill>
+                          <a:latin typeface="Arial"/>
+                        </a:rPr>
+                        <a:t>100.0%</a:t>
+                      </a:r>
+                    </a:p>
+                  </a:txBody>
+                  <a:tcPr>
+                    <a:solidFill>
+                      <a:srgbClr val="FFFFFF"/>
+                    </a:solidFill>
+                  </a:tcPr>
+                </a:tc>
+                <a:tc>
+                  <a:txBody>
+                    <a:bodyPr/>
+                    <a:lstStyle/>
+                    <a:p>
+                      <a:pPr algn="r"/>
+                      <a:r>
+                        <a:rPr sz="1150" b="0">
+                          <a:solidFill>
+                            <a:srgbClr val="5D6D7E"/>
+                          </a:solidFill>
+                          <a:latin typeface="Arial"/>
+                        </a:rPr>
+                        <a:t>100.0%</a:t>
+                      </a:r>
+                    </a:p>
+                  </a:txBody>
+                  <a:tcPr>
+                    <a:solidFill>
+                      <a:srgbClr val="FFFFFF"/>
+                    </a:solidFill>
+                  </a:tcPr>
+                </a:tc>
+                <a:tc>
+                  <a:txBody>
+                    <a:bodyPr/>
+                    <a:lstStyle/>
+                    <a:p>
+                      <a:pPr algn="r"/>
+                      <a:r>
+                        <a:rPr sz="1150" b="0">
+                          <a:solidFill>
+                            <a:srgbClr val="5D6D7E"/>
+                          </a:solidFill>
+                          <a:latin typeface="Arial"/>
+                        </a:rPr>
+                        <a:t>100.0%</a:t>
+                      </a:r>
+                    </a:p>
+                  </a:txBody>
+                  <a:tcPr>
+                    <a:solidFill>
+                      <a:srgbClr val="FFFFFF"/>
+                    </a:solidFill>
+                  </a:tcPr>
+                </a:tc>
+              </a:tr>
+              <a:tr h="310896">
+                <a:tc>
+                  <a:txBody>
+                    <a:bodyPr/>
+                    <a:lstStyle/>
+                    <a:p>
+                      <a:pPr algn="l"/>
+                      <a:r>
+                        <a:rPr sz="1150" b="0">
+                          <a:solidFill>
+                            <a:srgbClr val="5D6D7E"/>
+                          </a:solidFill>
+                          <a:latin typeface="Arial"/>
+                        </a:rPr>
+                        <a:t>Engine approval (first three rows)</a:t>
+                      </a:r>
+                    </a:p>
+                  </a:txBody>
+                  <a:tcPr>
+                    <a:solidFill>
+                      <a:srgbClr val="FFFFFF"/>
+                    </a:solidFill>
+                  </a:tcPr>
+                </a:tc>
+                <a:tc>
+                  <a:txBody>
+                    <a:bodyPr/>
+                    <a:lstStyle/>
+                    <a:p>
+                      <a:pPr algn="r"/>
+                      <a:r>
+                        <a:rPr sz="1150" b="0">
+                          <a:solidFill>
+                            <a:srgbClr val="5D6D7E"/>
+                          </a:solidFill>
+                          <a:latin typeface="Arial"/>
+                        </a:rPr>
+                        <a:t>51.9%</a:t>
+                      </a:r>
+                    </a:p>
+                  </a:txBody>
+                  <a:tcPr>
+                    <a:solidFill>
+                      <a:srgbClr val="FFFFFF"/>
+                    </a:solidFill>
+                  </a:tcPr>
+                </a:tc>
+                <a:tc>
+                  <a:txBody>
+                    <a:bodyPr/>
+                    <a:lstStyle/>
+                    <a:p>
+                      <a:pPr algn="r"/>
+                      <a:r>
+                        <a:rPr sz="1150" b="0">
+                          <a:solidFill>
+                            <a:srgbClr val="5D6D7E"/>
+                          </a:solidFill>
+                          <a:latin typeface="Arial"/>
+                        </a:rPr>
+                        <a:t>68.3%</a:t>
+                      </a:r>
+                    </a:p>
+                  </a:txBody>
+                  <a:tcPr>
+                    <a:solidFill>
+                      <a:srgbClr val="FFFFFF"/>
+                    </a:solidFill>
+                  </a:tcPr>
+                </a:tc>
+                <a:tc>
+                  <a:txBody>
+                    <a:bodyPr/>
+                    <a:lstStyle/>
+                    <a:p>
+                      <a:pPr algn="r"/>
+                      <a:r>
+                        <a:rPr sz="1150" b="0">
+                          <a:solidFill>
+                            <a:srgbClr val="5D6D7E"/>
+                          </a:solidFill>
+                          <a:latin typeface="Arial"/>
+                        </a:rPr>
+                        <a:t>58.8%</a:t>
+                      </a:r>
+                    </a:p>
+                  </a:txBody>
+                  <a:tcPr>
+                    <a:solidFill>
+                      <a:srgbClr val="FFFFFF"/>
+                    </a:solidFill>
+                  </a:tcPr>
+                </a:tc>
+              </a:tr>
+              <a:tr h="310896">
+                <a:tc>
+                  <a:txBody>
+                    <a:bodyPr/>
+                    <a:lstStyle/>
+                    <a:p>
+                      <a:pPr algn="l"/>
+                      <a:r>
+                        <a:rPr sz="1150" b="0">
+                          <a:solidFill>
+                            <a:srgbClr val="5D6D7E"/>
+                          </a:solidFill>
+                          <a:latin typeface="Arial"/>
+                        </a:rPr>
+                        <a:t>Take-up: booked / approved</a:t>
+                      </a:r>
+                    </a:p>
+                  </a:txBody>
+                  <a:tcPr>
+                    <a:solidFill>
+                      <a:srgbClr val="FFFFFF"/>
+                    </a:solidFill>
+                  </a:tcPr>
+                </a:tc>
+                <a:tc>
+                  <a:txBody>
+                    <a:bodyPr/>
+                    <a:lstStyle/>
+                    <a:p>
+                      <a:pPr algn="r"/>
+                      <a:r>
+                        <a:rPr sz="1150" b="0">
+                          <a:solidFill>
+                            <a:srgbClr val="5D6D7E"/>
+                          </a:solidFill>
+                          <a:latin typeface="Arial"/>
+                        </a:rPr>
+                        <a:t>40%</a:t>
+                      </a:r>
+                    </a:p>
+                  </a:txBody>
+                  <a:tcPr>
+                    <a:solidFill>
+                      <a:srgbClr val="FFFFFF"/>
+                    </a:solidFill>
+                  </a:tcPr>
+                </a:tc>
+                <a:tc>
+                  <a:txBody>
+                    <a:bodyPr/>
+                    <a:lstStyle/>
+                    <a:p>
+                      <a:pPr algn="r"/>
+                      <a:r>
+                        <a:rPr sz="1150" b="0">
+                          <a:solidFill>
+                            <a:srgbClr val="5D6D7E"/>
+                          </a:solidFill>
+                          <a:latin typeface="Arial"/>
+                        </a:rPr>
+                        <a:t>86%</a:t>
+                      </a:r>
+                    </a:p>
+                  </a:txBody>
+                  <a:tcPr>
+                    <a:solidFill>
+                      <a:srgbClr val="FFFFFF"/>
+                    </a:solidFill>
+                  </a:tcPr>
+                </a:tc>
+                <a:tc>
+                  <a:txBody>
+                    <a:bodyPr/>
+                    <a:lstStyle/>
+                    <a:p>
+                      <a:pPr algn="r"/>
+                      <a:r>
+                        <a:rPr sz="1150" b="0">
+                          <a:solidFill>
+                            <a:srgbClr val="5D6D7E"/>
+                          </a:solidFill>
+                          <a:latin typeface="Arial"/>
+                        </a:rPr>
+                        <a:t>80%</a:t>
+                      </a:r>
+                    </a:p>
+                  </a:txBody>
+                  <a:tcPr>
+                    <a:solidFill>
+                      <a:srgbClr val="FFFFFF"/>
+                    </a:solidFill>
+                  </a:tcPr>
+                </a:tc>
+              </a:tr>
+            </a:tbl>
+          </a:graphicData>
+        </a:graphic>
+      </p:graphicFrame>
       <p:sp>
         <p:nvSpPr>
           <p:cNvPr id="7" name="TextBox 6"/>
@@ -6434,8 +8339,8 @@
         </p:nvSpPr>
         <p:spPr>
           <a:xfrm>
-            <a:off x="566928" y="6071616"/>
-            <a:ext cx="11057839" cy="548640"/>
+            <a:off x="7699248" y="1563624"/>
+            <a:ext cx="3886200" cy="4928616"/>
           </a:xfrm>
           <a:prstGeom prst="rect">
             <a:avLst/>
@@ -6448,19 +8353,128 @@
           </a:bodyPr>
           <a:lstStyle/>
           <a:p>
-            <a:pPr algn="l">
-              <a:lnSpc>
-                <a:spcPct val="120000"/>
-              </a:lnSpc>
+            <a:pPr>
+              <a:spcAft>
+                <a:spcPts val="900"/>
+              </a:spcAft>
             </a:pPr>
             <a:r>
-              <a:rPr sz="1150" b="0">
+              <a:rPr sz="1050" b="1">
+                <a:solidFill>
+                  <a:srgbClr val="2C3E50"/>
+                </a:solidFill>
+                <a:latin typeface="Arial"/>
+              </a:rPr>
+              <a:t>Acceptance rate (effective).  </a:t>
+            </a:r>
+            <a:r>
+              <a:rPr sz="1050">
                 <a:solidFill>
                   <a:srgbClr val="5D6D7E"/>
                 </a:solidFill>
                 <a:latin typeface="Arial"/>
               </a:rPr>
-              <a:t>Realized risk on originations with 6 months on book. No assumptions.</a:t>
+              <a:t>€ booked / € applied for, over every application that comes through the door — rejected, cancelled and booked alike. The first row of the table. Point 1 and every scenario use it.</a:t>
+            </a:r>
+          </a:p>
+          <a:p>
+            <a:pPr>
+              <a:spcAft>
+                <a:spcPts val="900"/>
+              </a:spcAft>
+            </a:pPr>
+            <a:r>
+              <a:rPr sz="1050" b="1">
+                <a:solidFill>
+                  <a:srgbClr val="2C3E50"/>
+                </a:solidFill>
+                <a:latin typeface="Arial"/>
+              </a:rPr>
+              <a:t>Score acceptance.  </a:t>
+            </a:r>
+            <a:r>
+              <a:rPr sz="1050">
+                <a:solidFill>
+                  <a:srgbClr val="5D6D7E"/>
+                </a:solidFill>
+                <a:latin typeface="Arial"/>
+              </a:rPr>
+              <a:t>€ above the score cutoff and not rejected by another rule, over € demand. Comparable with the engine's approval rate, not with the effective one; shown only in the scenario table.</a:t>
+            </a:r>
+          </a:p>
+          <a:p>
+            <a:pPr>
+              <a:spcAft>
+                <a:spcPts val="900"/>
+              </a:spcAft>
+            </a:pPr>
+            <a:r>
+              <a:rPr sz="1050" b="1">
+                <a:solidFill>
+                  <a:srgbClr val="2C3E50"/>
+                </a:solidFill>
+                <a:latin typeface="Arial"/>
+              </a:rPr>
+              <a:t>Unfinished demand.  </a:t>
+            </a:r>
+            <a:r>
+              <a:rPr sz="1050">
+                <a:solidFill>
+                  <a:srgbClr val="5D6D7E"/>
+                </a:solidFill>
+                <a:latin typeface="Arial"/>
+              </a:rPr>
+              <a:t>Approved by the engine, then cancelled by the customer. It counts in the denominator and not in the numerator, like a rejection. In the scenarios every accepted application converts at the actual take-up of its decision, so cancellations are assumed to behave as today: a looser grid does not recover them.</a:t>
+            </a:r>
+          </a:p>
+          <a:p>
+            <a:pPr>
+              <a:spcAft>
+                <a:spcPts val="900"/>
+              </a:spcAft>
+            </a:pPr>
+            <a:r>
+              <a:rPr sz="1050" b="1">
+                <a:solidFill>
+                  <a:srgbClr val="2C3E50"/>
+                </a:solidFill>
+                <a:latin typeface="Arial"/>
+              </a:rPr>
+              <a:t>Approved, rejected downstream.  </a:t>
+            </a:r>
+            <a:r>
+              <a:rPr sz="1050">
+                <a:solidFill>
+                  <a:srgbClr val="5D6D7E"/>
+                </a:solidFill>
+                <a:latin typeface="Arial"/>
+              </a:rPr>
+              <a:t>Approved by the engine, rejected at a later step (no reason in the extract). Treated like unfinished demand.</a:t>
+            </a:r>
+          </a:p>
+          <a:p>
+            <a:pPr>
+              <a:spcAft>
+                <a:spcPts val="900"/>
+              </a:spcAft>
+            </a:pPr>
+            <a:r>
+              <a:rPr sz="1050" b="1">
+                <a:solidFill>
+                  <a:srgbClr val="2C3E50"/>
+                </a:solidFill>
+                <a:latin typeface="Arial"/>
+              </a:rPr>
+              <a:t>Reject inference.  </a:t>
+            </a:r>
+            <a:r>
+              <a:rPr sz="1050">
+                <a:solidFill>
+                  <a:srgbClr val="5D6D7E"/>
+                </a:solidFill>
+                <a:latin typeface="Arial"/>
+              </a:rPr>
+              <a:t>Neither state enters the per-bin acceptance rate — booked / (booked + score-rejected) — so they do not inflate the uplift.</a:t>
             </a:r>
           </a:p>
         </p:txBody>
@@ -6595,7 +8609,7 @@
                 </a:solidFill>
                 <a:latin typeface="Arial"/>
               </a:rPr>
-              <a:t>Apple Stores today</a:t>
+              <a:t>Apple Online today</a:t>
             </a:r>
           </a:p>
         </p:txBody>
@@ -6646,7 +8660,7 @@
       </p:sp>
       <p:pic>
         <p:nvPicPr>
-          <p:cNvPr id="6" name="Picture 5" descr="stores_today.png"/>
+          <p:cNvPr id="6" name="Picture 5" descr="online.png"/>
           <p:cNvPicPr>
             <a:picLocks noChangeAspect="1"/>
           </p:cNvPicPr>
@@ -6702,7 +8716,7 @@
                 </a:solidFill>
                 <a:latin typeface="Arial"/>
               </a:rPr>
-              <a:t>Measured on stores' own history, same window as Online: describing where they stand today needs no imputation. They accept almost three times as much as Online and carry less risk. Warning: their acceptance rate is falling (58.7% over Mar 2025 – Feb 2026, 47.2% in Aug–Sep 2026), so the baseline is moving.</a:t>
+              <a:t>Realized risk on originations with 6 months on book. No assumptions.</a:t>
             </a:r>
           </a:p>
         </p:txBody>
@@ -6759,7 +8773,7 @@
                 </a:solidFill>
                 <a:latin typeface="Arial"/>
               </a:rPr>
-              <a:t>POINT 2 · ESTIMATED RISK</a:t>
+              <a:t>POINT 1 · MEASURED</a:t>
             </a:r>
           </a:p>
         </p:txBody>
@@ -6798,7 +8812,7 @@
                 </a:solidFill>
                 <a:latin typeface="Arial"/>
               </a:rPr>
-              <a:t>Stores Aug–Sep 2026</a:t>
+              <a:t>Originations Mar 2025 – Feb 2026</a:t>
             </a:r>
           </a:p>
         </p:txBody>
@@ -6837,7 +8851,7 @@
                 </a:solidFill>
                 <a:latin typeface="Arial"/>
               </a:rPr>
-              <a:t>Stores with the e-commerce grid</a:t>
+              <a:t>Apple Stores today</a:t>
             </a:r>
           </a:p>
         </p:txBody>
@@ -6888,7 +8902,7 @@
       </p:sp>
       <p:pic>
         <p:nvPicPr>
-          <p:cNvPr id="6" name="Picture 5" descr="stores.png"/>
+          <p:cNvPr id="6" name="Picture 5" descr="stores_today.png"/>
           <p:cNvPicPr>
             <a:picLocks noChangeAspect="1"/>
           </p:cNvPicPr>
@@ -6902,8 +8916,8 @@
         </p:blipFill>
         <p:spPr>
           <a:xfrm>
-            <a:off x="1006052" y="1563624"/>
-            <a:ext cx="10179590" cy="4425696"/>
+            <a:off x="1746542" y="1563624"/>
+            <a:ext cx="8698611" cy="4425696"/>
           </a:xfrm>
           <a:prstGeom prst="rect">
             <a:avLst/>
@@ -6944,7 +8958,7 @@
                 </a:solidFill>
                 <a:latin typeface="Arial"/>
               </a:rPr>
-              <a:t>Both columns measure the same population —Aug–Sep 2026, the only period with an EFX score in stores— which is why 'today' here is 47.2% and on the previous slide 58.7%. Only the score rule is swapped; stores' other rules stay. Risk is imputed from the Online curve, with the level anchored to stores' realized figure.</a:t>
+              <a:t>Measured on stores' own history, same window as Online: describing where they stand today needs no imputation. They accept almost three times as much as Online and carry less risk. Warning: their acceptance rate is falling (58.7% over Mar 2025 – Feb 2026, 47.2% in Aug–Sep 2026), so the baseline is moving.</a:t>
             </a:r>
           </a:p>
         </p:txBody>
@@ -7001,6 +9015,248 @@
                 </a:solidFill>
                 <a:latin typeface="Arial"/>
               </a:rPr>
+              <a:t>POINT 2 · ESTIMATED RISK</a:t>
+            </a:r>
+          </a:p>
+        </p:txBody>
+      </p:sp>
+      <p:sp>
+        <p:nvSpPr>
+          <p:cNvPr id="3" name="TextBox 2"/>
+          <p:cNvSpPr txBox="1"/>
+          <p:nvPr/>
+        </p:nvSpPr>
+        <p:spPr>
+          <a:xfrm>
+            <a:off x="6869887" y="384048"/>
+            <a:ext cx="4754880" cy="274320"/>
+          </a:xfrm>
+          <a:prstGeom prst="rect">
+            <a:avLst/>
+          </a:prstGeom>
+          <a:noFill/>
+        </p:spPr>
+        <p:txBody>
+          <a:bodyPr wrap="square">
+            <a:spAutoFit/>
+          </a:bodyPr>
+          <a:lstStyle/>
+          <a:p>
+            <a:pPr algn="r">
+              <a:lnSpc>
+                <a:spcPct val="100000"/>
+              </a:lnSpc>
+            </a:pPr>
+            <a:r>
+              <a:rPr sz="1100" b="0">
+                <a:solidFill>
+                  <a:srgbClr val="5D6D7E"/>
+                </a:solidFill>
+                <a:latin typeface="Arial"/>
+              </a:rPr>
+              <a:t>Stores Aug–Sep 2026</a:t>
+            </a:r>
+          </a:p>
+        </p:txBody>
+      </p:sp>
+      <p:sp>
+        <p:nvSpPr>
+          <p:cNvPr id="4" name="TextBox 3"/>
+          <p:cNvSpPr txBox="1"/>
+          <p:nvPr/>
+        </p:nvSpPr>
+        <p:spPr>
+          <a:xfrm>
+            <a:off x="566928" y="694944"/>
+            <a:ext cx="11057839" cy="548640"/>
+          </a:xfrm>
+          <a:prstGeom prst="rect">
+            <a:avLst/>
+          </a:prstGeom>
+          <a:noFill/>
+        </p:spPr>
+        <p:txBody>
+          <a:bodyPr wrap="square">
+            <a:spAutoFit/>
+          </a:bodyPr>
+          <a:lstStyle/>
+          <a:p>
+            <a:pPr algn="l">
+              <a:lnSpc>
+                <a:spcPct val="100000"/>
+              </a:lnSpc>
+            </a:pPr>
+            <a:r>
+              <a:rPr sz="2600" b="1">
+                <a:solidFill>
+                  <a:srgbClr val="2C3E50"/>
+                </a:solidFill>
+                <a:latin typeface="Arial"/>
+              </a:rPr>
+              <a:t>Stores with the e-commerce grid</a:t>
+            </a:r>
+          </a:p>
+        </p:txBody>
+      </p:sp>
+      <p:sp>
+        <p:nvSpPr>
+          <p:cNvPr id="5" name="Rectangle 4"/>
+          <p:cNvSpPr/>
+          <p:nvPr/>
+        </p:nvSpPr>
+        <p:spPr>
+          <a:xfrm>
+            <a:off x="566928" y="1353312"/>
+            <a:ext cx="11057839" cy="9525"/>
+          </a:xfrm>
+          <a:prstGeom prst="rect">
+            <a:avLst/>
+          </a:prstGeom>
+          <a:solidFill>
+            <a:srgbClr val="E5E7EB"/>
+          </a:solidFill>
+          <a:ln>
+            <a:noFill/>
+          </a:ln>
+          <a:effectLst/>
+        </p:spPr>
+        <p:style>
+          <a:lnRef idx="1">
+            <a:schemeClr val="accent1"/>
+          </a:lnRef>
+          <a:fillRef idx="3">
+            <a:schemeClr val="accent1"/>
+          </a:fillRef>
+          <a:effectRef idx="2">
+            <a:schemeClr val="accent1"/>
+          </a:effectRef>
+          <a:fontRef idx="minor">
+            <a:schemeClr val="lt1"/>
+          </a:fontRef>
+        </p:style>
+        <p:txBody>
+          <a:bodyPr rtlCol="0" anchor="ctr"/>
+          <a:lstStyle/>
+          <a:p>
+            <a:pPr algn="ctr"/>
+          </a:p>
+        </p:txBody>
+      </p:sp>
+      <p:pic>
+        <p:nvPicPr>
+          <p:cNvPr id="6" name="Picture 5" descr="stores.png"/>
+          <p:cNvPicPr>
+            <a:picLocks noChangeAspect="1"/>
+          </p:cNvPicPr>
+          <p:nvPr/>
+        </p:nvPicPr>
+        <p:blipFill>
+          <a:blip r:embed="rId2"/>
+          <a:stretch>
+            <a:fillRect/>
+          </a:stretch>
+        </p:blipFill>
+        <p:spPr>
+          <a:xfrm>
+            <a:off x="1006052" y="1563624"/>
+            <a:ext cx="10179590" cy="4425696"/>
+          </a:xfrm>
+          <a:prstGeom prst="rect">
+            <a:avLst/>
+          </a:prstGeom>
+        </p:spPr>
+      </p:pic>
+      <p:sp>
+        <p:nvSpPr>
+          <p:cNvPr id="7" name="TextBox 6"/>
+          <p:cNvSpPr txBox="1"/>
+          <p:nvPr/>
+        </p:nvSpPr>
+        <p:spPr>
+          <a:xfrm>
+            <a:off x="566928" y="6071616"/>
+            <a:ext cx="11057839" cy="548640"/>
+          </a:xfrm>
+          <a:prstGeom prst="rect">
+            <a:avLst/>
+          </a:prstGeom>
+          <a:noFill/>
+        </p:spPr>
+        <p:txBody>
+          <a:bodyPr wrap="square">
+            <a:spAutoFit/>
+          </a:bodyPr>
+          <a:lstStyle/>
+          <a:p>
+            <a:pPr algn="l">
+              <a:lnSpc>
+                <a:spcPct val="120000"/>
+              </a:lnSpc>
+            </a:pPr>
+            <a:r>
+              <a:rPr sz="1150" b="0">
+                <a:solidFill>
+                  <a:srgbClr val="5D6D7E"/>
+                </a:solidFill>
+                <a:latin typeface="Arial"/>
+              </a:rPr>
+              <a:t>Both columns measure the same population —Aug–Sep 2026, the only period with an EFX score in stores— which is why 'today' here is 47.2% and on the previous slide 58.7%. Only the score rule is swapped; stores' other rules stay. Risk is imputed from the Online curve, with the level anchored to stores' realized figure.</a:t>
+            </a:r>
+          </a:p>
+        </p:txBody>
+      </p:sp>
+    </p:spTree>
+  </p:cSld>
+  <p:clrMapOvr>
+    <a:masterClrMapping/>
+  </p:clrMapOvr>
+</p:sld>
+</file>
+
+<file path=ppt/slides/slide7.xml><?xml version="1.0" encoding="utf-8"?>
+<p:sld xmlns:a="http://schemas.openxmlformats.org/drawingml/2006/main" xmlns:p="http://schemas.openxmlformats.org/presentationml/2006/main" xmlns:r="http://schemas.openxmlformats.org/officeDocument/2006/relationships">
+  <p:cSld>
+    <p:spTree>
+      <p:nvGrpSpPr>
+        <p:cNvPr id="1" name=""/>
+        <p:cNvGrpSpPr/>
+        <p:nvPr/>
+      </p:nvGrpSpPr>
+      <p:grpSpPr/>
+      <p:sp>
+        <p:nvSpPr>
+          <p:cNvPr id="2" name="TextBox 1"/>
+          <p:cNvSpPr txBox="1"/>
+          <p:nvPr/>
+        </p:nvSpPr>
+        <p:spPr>
+          <a:xfrm>
+            <a:off x="566928" y="384048"/>
+            <a:ext cx="6400800" cy="274320"/>
+          </a:xfrm>
+          <a:prstGeom prst="rect">
+            <a:avLst/>
+          </a:prstGeom>
+          <a:noFill/>
+        </p:spPr>
+        <p:txBody>
+          <a:bodyPr wrap="square">
+            <a:spAutoFit/>
+          </a:bodyPr>
+          <a:lstStyle/>
+          <a:p>
+            <a:pPr algn="l">
+              <a:lnSpc>
+                <a:spcPct val="100000"/>
+              </a:lnSpc>
+            </a:pPr>
+            <a:r>
+              <a:rPr sz="1100" b="1">
+                <a:solidFill>
+                  <a:srgbClr val="3498DB"/>
+                </a:solidFill>
+                <a:latin typeface="Arial"/>
+              </a:rPr>
               <a:t>POINT 3 · SCENARIOS</a:t>
             </a:r>
           </a:p>
@@ -8513,7 +10769,7 @@
 </p:sld>
 </file>
 
-<file path=ppt/slides/slide7.xml><?xml version="1.0" encoding="utf-8"?>
+<file path=ppt/slides/slide8.xml><?xml version="1.0" encoding="utf-8"?>
 <p:sld xmlns:a="http://schemas.openxmlformats.org/drawingml/2006/main" xmlns:p="http://schemas.openxmlformats.org/presentationml/2006/main" xmlns:r="http://schemas.openxmlformats.org/officeDocument/2006/relationships">
   <p:cSld>
     <p:spTree>
@@ -10588,7 +12844,7 @@
 </p:sld>
 </file>
 
-<file path=ppt/slides/slide8.xml><?xml version="1.0" encoding="utf-8"?>
+<file path=ppt/slides/slide9.xml><?xml version="1.0" encoding="utf-8"?>
 <p:sld xmlns:a="http://schemas.openxmlformats.org/drawingml/2006/main" xmlns:p="http://schemas.openxmlformats.org/presentationml/2006/main" xmlns:r="http://schemas.openxmlformats.org/officeDocument/2006/relationships">
   <p:cSld>
     <p:spTree>
@@ -11594,1024 +13850,6 @@
                 <a:latin typeface="Arial"/>
               </a:rPr>
               <a:t>What this means in practice: if EFX ranks store applicants worse than it ranks Online ones, the scenario cutoffs fall short. What can no longer be wrong is the height of the curve, because it is calibrated against the delinquency stores have actually had.</a:t>
-            </a:r>
-          </a:p>
-        </p:txBody>
-      </p:sp>
-    </p:spTree>
-  </p:cSld>
-  <p:clrMapOvr>
-    <a:masterClrMapping/>
-  </p:clrMapOvr>
-</p:sld>
-</file>
-
-<file path=ppt/slides/slide9.xml><?xml version="1.0" encoding="utf-8"?>
-<p:sld xmlns:a="http://schemas.openxmlformats.org/drawingml/2006/main" xmlns:p="http://schemas.openxmlformats.org/presentationml/2006/main" xmlns:r="http://schemas.openxmlformats.org/officeDocument/2006/relationships">
-  <p:cSld>
-    <p:spTree>
-      <p:nvGrpSpPr>
-        <p:cNvPr id="1" name=""/>
-        <p:cNvGrpSpPr/>
-        <p:nvPr/>
-      </p:nvGrpSpPr>
-      <p:grpSpPr/>
-      <p:sp>
-        <p:nvSpPr>
-          <p:cNvPr id="2" name="TextBox 1"/>
-          <p:cNvSpPr txBox="1"/>
-          <p:nvPr/>
-        </p:nvSpPr>
-        <p:spPr>
-          <a:xfrm>
-            <a:off x="566928" y="384048"/>
-            <a:ext cx="6400800" cy="274320"/>
-          </a:xfrm>
-          <a:prstGeom prst="rect">
-            <a:avLst/>
-          </a:prstGeom>
-          <a:noFill/>
-        </p:spPr>
-        <p:txBody>
-          <a:bodyPr wrap="square">
-            <a:spAutoFit/>
-          </a:bodyPr>
-          <a:lstStyle/>
-          <a:p>
-            <a:pPr algn="l">
-              <a:lnSpc>
-                <a:spcPct val="100000"/>
-              </a:lnSpc>
-            </a:pPr>
-            <a:r>
-              <a:rPr sz="1100" b="1">
-                <a:solidFill>
-                  <a:srgbClr val="3498DB"/>
-                </a:solidFill>
-                <a:latin typeface="Arial"/>
-              </a:rPr>
-              <a:t>METHODOLOGY · SEASONALITY</a:t>
-            </a:r>
-          </a:p>
-        </p:txBody>
-      </p:sp>
-      <p:sp>
-        <p:nvSpPr>
-          <p:cNvPr id="3" name="TextBox 2"/>
-          <p:cNvSpPr txBox="1"/>
-          <p:nvPr/>
-        </p:nvSpPr>
-        <p:spPr>
-          <a:xfrm>
-            <a:off x="6869887" y="384048"/>
-            <a:ext cx="4754880" cy="274320"/>
-          </a:xfrm>
-          <a:prstGeom prst="rect">
-            <a:avLst/>
-          </a:prstGeom>
-          <a:noFill/>
-        </p:spPr>
-        <p:txBody>
-          <a:bodyPr wrap="square">
-            <a:spAutoFit/>
-          </a:bodyPr>
-          <a:lstStyle/>
-          <a:p>
-            <a:pPr algn="r">
-              <a:lnSpc>
-                <a:spcPct val="100000"/>
-              </a:lnSpc>
-            </a:pPr>
-            <a:r>
-              <a:rPr sz="1100" b="0">
-                <a:solidFill>
-                  <a:srgbClr val="5D6D7E"/>
-                </a:solidFill>
-                <a:latin typeface="Arial"/>
-              </a:rPr>
-              <a:t>Full years 2024 and 2025</a:t>
-            </a:r>
-          </a:p>
-        </p:txBody>
-      </p:sp>
-      <p:sp>
-        <p:nvSpPr>
-          <p:cNvPr id="4" name="TextBox 3"/>
-          <p:cNvSpPr txBox="1"/>
-          <p:nvPr/>
-        </p:nvSpPr>
-        <p:spPr>
-          <a:xfrm>
-            <a:off x="566928" y="694944"/>
-            <a:ext cx="11057839" cy="548640"/>
-          </a:xfrm>
-          <a:prstGeom prst="rect">
-            <a:avLst/>
-          </a:prstGeom>
-          <a:noFill/>
-        </p:spPr>
-        <p:txBody>
-          <a:bodyPr wrap="square">
-            <a:spAutoFit/>
-          </a:bodyPr>
-          <a:lstStyle/>
-          <a:p>
-            <a:pPr algn="l">
-              <a:lnSpc>
-                <a:spcPct val="100000"/>
-              </a:lnSpc>
-            </a:pPr>
-            <a:r>
-              <a:rPr sz="2600" b="1">
-                <a:solidFill>
-                  <a:srgbClr val="2C3E50"/>
-                </a:solidFill>
-                <a:latin typeface="Arial"/>
-              </a:rPr>
-              <a:t>How months are annualised</a:t>
-            </a:r>
-          </a:p>
-        </p:txBody>
-      </p:sp>
-      <p:sp>
-        <p:nvSpPr>
-          <p:cNvPr id="5" name="Rectangle 4"/>
-          <p:cNvSpPr/>
-          <p:nvPr/>
-        </p:nvSpPr>
-        <p:spPr>
-          <a:xfrm>
-            <a:off x="566928" y="1353312"/>
-            <a:ext cx="11057839" cy="9525"/>
-          </a:xfrm>
-          <a:prstGeom prst="rect">
-            <a:avLst/>
-          </a:prstGeom>
-          <a:solidFill>
-            <a:srgbClr val="E5E7EB"/>
-          </a:solidFill>
-          <a:ln>
-            <a:noFill/>
-          </a:ln>
-          <a:effectLst/>
-        </p:spPr>
-        <p:style>
-          <a:lnRef idx="1">
-            <a:schemeClr val="accent1"/>
-          </a:lnRef>
-          <a:fillRef idx="3">
-            <a:schemeClr val="accent1"/>
-          </a:fillRef>
-          <a:effectRef idx="2">
-            <a:schemeClr val="accent1"/>
-          </a:effectRef>
-          <a:fontRef idx="minor">
-            <a:schemeClr val="lt1"/>
-          </a:fontRef>
-        </p:style>
-        <p:txBody>
-          <a:bodyPr rtlCol="0" anchor="ctr"/>
-          <a:lstStyle/>
-          <a:p>
-            <a:pPr algn="ctr"/>
-          </a:p>
-        </p:txBody>
-      </p:sp>
-      <p:sp>
-        <p:nvSpPr>
-          <p:cNvPr id="6" name="Rectangle 5"/>
-          <p:cNvSpPr/>
-          <p:nvPr/>
-        </p:nvSpPr>
-        <p:spPr>
-          <a:xfrm>
-            <a:off x="566928" y="1563624"/>
-            <a:ext cx="420624" cy="420624"/>
-          </a:xfrm>
-          <a:prstGeom prst="rect">
-            <a:avLst/>
-          </a:prstGeom>
-          <a:solidFill>
-            <a:srgbClr val="2C3E50"/>
-          </a:solidFill>
-          <a:ln>
-            <a:noFill/>
-          </a:ln>
-          <a:effectLst/>
-        </p:spPr>
-        <p:style>
-          <a:lnRef idx="1">
-            <a:schemeClr val="accent1"/>
-          </a:lnRef>
-          <a:fillRef idx="3">
-            <a:schemeClr val="accent1"/>
-          </a:fillRef>
-          <a:effectRef idx="2">
-            <a:schemeClr val="accent1"/>
-          </a:effectRef>
-          <a:fontRef idx="minor">
-            <a:schemeClr val="lt1"/>
-          </a:fontRef>
-        </p:style>
-        <p:txBody>
-          <a:bodyPr rtlCol="0" anchor="ctr"/>
-          <a:lstStyle/>
-          <a:p>
-            <a:pPr algn="ctr"/>
-          </a:p>
-        </p:txBody>
-      </p:sp>
-      <p:sp>
-        <p:nvSpPr>
-          <p:cNvPr id="7" name="TextBox 6"/>
-          <p:cNvSpPr txBox="1"/>
-          <p:nvPr/>
-        </p:nvSpPr>
-        <p:spPr>
-          <a:xfrm>
-            <a:off x="566928" y="1618488"/>
-            <a:ext cx="420624" cy="310896"/>
-          </a:xfrm>
-          <a:prstGeom prst="rect">
-            <a:avLst/>
-          </a:prstGeom>
-          <a:noFill/>
-        </p:spPr>
-        <p:txBody>
-          <a:bodyPr wrap="square">
-            <a:spAutoFit/>
-          </a:bodyPr>
-          <a:lstStyle/>
-          <a:p>
-            <a:pPr algn="ctr">
-              <a:lnSpc>
-                <a:spcPct val="100000"/>
-              </a:lnSpc>
-            </a:pPr>
-            <a:r>
-              <a:rPr sz="1400" b="1">
-                <a:solidFill>
-                  <a:srgbClr val="FFFFFF"/>
-                </a:solidFill>
-                <a:latin typeface="Arial"/>
-              </a:rPr>
-              <a:t>1</a:t>
-            </a:r>
-          </a:p>
-        </p:txBody>
-      </p:sp>
-      <p:sp>
-        <p:nvSpPr>
-          <p:cNvPr id="8" name="TextBox 7"/>
-          <p:cNvSpPr txBox="1"/>
-          <p:nvPr/>
-        </p:nvSpPr>
-        <p:spPr>
-          <a:xfrm>
-            <a:off x="1188720" y="1563624"/>
-            <a:ext cx="8863279" cy="274320"/>
-          </a:xfrm>
-          <a:prstGeom prst="rect">
-            <a:avLst/>
-          </a:prstGeom>
-          <a:noFill/>
-        </p:spPr>
-        <p:txBody>
-          <a:bodyPr wrap="square">
-            <a:spAutoFit/>
-          </a:bodyPr>
-          <a:lstStyle/>
-          <a:p>
-            <a:pPr algn="l">
-              <a:lnSpc>
-                <a:spcPct val="100000"/>
-              </a:lnSpc>
-            </a:pPr>
-            <a:r>
-              <a:rPr sz="1300" b="1">
-                <a:solidFill>
-                  <a:srgbClr val="2C3E50"/>
-                </a:solidFill>
-                <a:latin typeface="Arial"/>
-              </a:rPr>
-              <a:t>The problem: stores only have the score for Aug–Sep 2026</a:t>
-            </a:r>
-          </a:p>
-        </p:txBody>
-      </p:sp>
-      <p:sp>
-        <p:nvSpPr>
-          <p:cNvPr id="9" name="TextBox 8"/>
-          <p:cNvSpPr txBox="1"/>
-          <p:nvPr/>
-        </p:nvSpPr>
-        <p:spPr>
-          <a:xfrm>
-            <a:off x="1188720" y="1837944"/>
-            <a:ext cx="8863279" cy="603504"/>
-          </a:xfrm>
-          <a:prstGeom prst="rect">
-            <a:avLst/>
-          </a:prstGeom>
-          <a:noFill/>
-        </p:spPr>
-        <p:txBody>
-          <a:bodyPr wrap="square">
-            <a:spAutoFit/>
-          </a:bodyPr>
-          <a:lstStyle/>
-          <a:p>
-            <a:pPr algn="l">
-              <a:lnSpc>
-                <a:spcPct val="118000"/>
-              </a:lnSpc>
-            </a:pPr>
-            <a:r>
-              <a:rPr sz="1100" b="0">
-                <a:solidFill>
-                  <a:srgbClr val="5D6D7E"/>
-                </a:solidFill>
-                <a:latin typeface="Arial"/>
-              </a:rPr>
-              <a:t>The EFX score went live in stores in Aug 2026. Comparing 2 months on their own against a twelve-month average requires knowing what each month is worth.</a:t>
-            </a:r>
-          </a:p>
-        </p:txBody>
-      </p:sp>
-      <p:sp>
-        <p:nvSpPr>
-          <p:cNvPr id="10" name="TextBox 9"/>
-          <p:cNvSpPr txBox="1"/>
-          <p:nvPr/>
-        </p:nvSpPr>
-        <p:spPr>
-          <a:xfrm>
-            <a:off x="10161727" y="1581912"/>
-            <a:ext cx="1463040" cy="274320"/>
-          </a:xfrm>
-          <a:prstGeom prst="rect">
-            <a:avLst/>
-          </a:prstGeom>
-          <a:noFill/>
-        </p:spPr>
-        <p:txBody>
-          <a:bodyPr wrap="square">
-            <a:spAutoFit/>
-          </a:bodyPr>
-          <a:lstStyle/>
-          <a:p>
-            <a:pPr algn="r">
-              <a:lnSpc>
-                <a:spcPct val="100000"/>
-              </a:lnSpc>
-            </a:pPr>
-            <a:r>
-              <a:rPr sz="1000" b="1">
-                <a:solidFill>
-                  <a:srgbClr val="3498DB"/>
-                </a:solidFill>
-                <a:latin typeface="Arial"/>
-              </a:rPr>
-              <a:t>MEASURED</a:t>
-            </a:r>
-          </a:p>
-        </p:txBody>
-      </p:sp>
-      <p:sp>
-        <p:nvSpPr>
-          <p:cNvPr id="11" name="Rectangle 10"/>
-          <p:cNvSpPr/>
-          <p:nvPr/>
-        </p:nvSpPr>
-        <p:spPr>
-          <a:xfrm>
-            <a:off x="566928" y="2496312"/>
-            <a:ext cx="420624" cy="420624"/>
-          </a:xfrm>
-          <a:prstGeom prst="rect">
-            <a:avLst/>
-          </a:prstGeom>
-          <a:solidFill>
-            <a:srgbClr val="2C3E50"/>
-          </a:solidFill>
-          <a:ln>
-            <a:noFill/>
-          </a:ln>
-          <a:effectLst/>
-        </p:spPr>
-        <p:style>
-          <a:lnRef idx="1">
-            <a:schemeClr val="accent1"/>
-          </a:lnRef>
-          <a:fillRef idx="3">
-            <a:schemeClr val="accent1"/>
-          </a:fillRef>
-          <a:effectRef idx="2">
-            <a:schemeClr val="accent1"/>
-          </a:effectRef>
-          <a:fontRef idx="minor">
-            <a:schemeClr val="lt1"/>
-          </a:fontRef>
-        </p:style>
-        <p:txBody>
-          <a:bodyPr rtlCol="0" anchor="ctr"/>
-          <a:lstStyle/>
-          <a:p>
-            <a:pPr algn="ctr"/>
-          </a:p>
-        </p:txBody>
-      </p:sp>
-      <p:sp>
-        <p:nvSpPr>
-          <p:cNvPr id="12" name="TextBox 11"/>
-          <p:cNvSpPr txBox="1"/>
-          <p:nvPr/>
-        </p:nvSpPr>
-        <p:spPr>
-          <a:xfrm>
-            <a:off x="566928" y="2551176"/>
-            <a:ext cx="420624" cy="310896"/>
-          </a:xfrm>
-          <a:prstGeom prst="rect">
-            <a:avLst/>
-          </a:prstGeom>
-          <a:noFill/>
-        </p:spPr>
-        <p:txBody>
-          <a:bodyPr wrap="square">
-            <a:spAutoFit/>
-          </a:bodyPr>
-          <a:lstStyle/>
-          <a:p>
-            <a:pPr algn="ctr">
-              <a:lnSpc>
-                <a:spcPct val="100000"/>
-              </a:lnSpc>
-            </a:pPr>
-            <a:r>
-              <a:rPr sz="1400" b="1">
-                <a:solidFill>
-                  <a:srgbClr val="FFFFFF"/>
-                </a:solidFill>
-                <a:latin typeface="Arial"/>
-              </a:rPr>
-              <a:t>2</a:t>
-            </a:r>
-          </a:p>
-        </p:txBody>
-      </p:sp>
-      <p:sp>
-        <p:nvSpPr>
-          <p:cNvPr id="13" name="TextBox 12"/>
-          <p:cNvSpPr txBox="1"/>
-          <p:nvPr/>
-        </p:nvSpPr>
-        <p:spPr>
-          <a:xfrm>
-            <a:off x="1188720" y="2496312"/>
-            <a:ext cx="8863279" cy="274320"/>
-          </a:xfrm>
-          <a:prstGeom prst="rect">
-            <a:avLst/>
-          </a:prstGeom>
-          <a:noFill/>
-        </p:spPr>
-        <p:txBody>
-          <a:bodyPr wrap="square">
-            <a:spAutoFit/>
-          </a:bodyPr>
-          <a:lstStyle/>
-          <a:p>
-            <a:pPr algn="l">
-              <a:lnSpc>
-                <a:spcPct val="100000"/>
-              </a:lnSpc>
-            </a:pPr>
-            <a:r>
-              <a:rPr sz="1300" b="1">
-                <a:solidFill>
-                  <a:srgbClr val="2C3E50"/>
-                </a:solidFill>
-                <a:latin typeface="Arial"/>
-              </a:rPr>
-              <a:t>August and September: no average month, and each channel has its own</a:t>
-            </a:r>
-          </a:p>
-        </p:txBody>
-      </p:sp>
-      <p:sp>
-        <p:nvSpPr>
-          <p:cNvPr id="14" name="TextBox 13"/>
-          <p:cNvSpPr txBox="1"/>
-          <p:nvPr/>
-        </p:nvSpPr>
-        <p:spPr>
-          <a:xfrm>
-            <a:off x="1188720" y="2770632"/>
-            <a:ext cx="8863279" cy="603504"/>
-          </a:xfrm>
-          <a:prstGeom prst="rect">
-            <a:avLst/>
-          </a:prstGeom>
-          <a:noFill/>
-        </p:spPr>
-        <p:txBody>
-          <a:bodyPr wrap="square">
-            <a:spAutoFit/>
-          </a:bodyPr>
-          <a:lstStyle/>
-          <a:p>
-            <a:pPr algn="l">
-              <a:lnSpc>
-                <a:spcPct val="118000"/>
-              </a:lnSpc>
-            </a:pPr>
-            <a:r>
-              <a:rPr sz="1100" b="0">
-                <a:solidFill>
-                  <a:srgbClr val="5D6D7E"/>
-                </a:solidFill>
-                <a:latin typeface="Arial"/>
-              </a:rPr>
-              <a:t>Index for Aug and Sep: 0.49 / 2.03 in Online and 0.76 / 0.69 in stores. Online concentrates demand around the iPhone launch (Sep 2.03) and stores around Christmas (Dec 1.70). The correlation between the two profiles is 0.39: not the same pattern.</a:t>
-            </a:r>
-          </a:p>
-        </p:txBody>
-      </p:sp>
-      <p:sp>
-        <p:nvSpPr>
-          <p:cNvPr id="15" name="TextBox 14"/>
-          <p:cNvSpPr txBox="1"/>
-          <p:nvPr/>
-        </p:nvSpPr>
-        <p:spPr>
-          <a:xfrm>
-            <a:off x="10161727" y="2514600"/>
-            <a:ext cx="1463040" cy="274320"/>
-          </a:xfrm>
-          <a:prstGeom prst="rect">
-            <a:avLst/>
-          </a:prstGeom>
-          <a:noFill/>
-        </p:spPr>
-        <p:txBody>
-          <a:bodyPr wrap="square">
-            <a:spAutoFit/>
-          </a:bodyPr>
-          <a:lstStyle/>
-          <a:p>
-            <a:pPr algn="r">
-              <a:lnSpc>
-                <a:spcPct val="100000"/>
-              </a:lnSpc>
-            </a:pPr>
-            <a:r>
-              <a:rPr sz="1000" b="1">
-                <a:solidFill>
-                  <a:srgbClr val="3498DB"/>
-                </a:solidFill>
-                <a:latin typeface="Arial"/>
-              </a:rPr>
-              <a:t>MEASURED</a:t>
-            </a:r>
-          </a:p>
-        </p:txBody>
-      </p:sp>
-      <p:sp>
-        <p:nvSpPr>
-          <p:cNvPr id="16" name="Rectangle 15"/>
-          <p:cNvSpPr/>
-          <p:nvPr/>
-        </p:nvSpPr>
-        <p:spPr>
-          <a:xfrm>
-            <a:off x="566928" y="3429000"/>
-            <a:ext cx="420624" cy="420624"/>
-          </a:xfrm>
-          <a:prstGeom prst="rect">
-            <a:avLst/>
-          </a:prstGeom>
-          <a:solidFill>
-            <a:srgbClr val="2C3E50"/>
-          </a:solidFill>
-          <a:ln>
-            <a:noFill/>
-          </a:ln>
-          <a:effectLst/>
-        </p:spPr>
-        <p:style>
-          <a:lnRef idx="1">
-            <a:schemeClr val="accent1"/>
-          </a:lnRef>
-          <a:fillRef idx="3">
-            <a:schemeClr val="accent1"/>
-          </a:fillRef>
-          <a:effectRef idx="2">
-            <a:schemeClr val="accent1"/>
-          </a:effectRef>
-          <a:fontRef idx="minor">
-            <a:schemeClr val="lt1"/>
-          </a:fontRef>
-        </p:style>
-        <p:txBody>
-          <a:bodyPr rtlCol="0" anchor="ctr"/>
-          <a:lstStyle/>
-          <a:p>
-            <a:pPr algn="ctr"/>
-          </a:p>
-        </p:txBody>
-      </p:sp>
-      <p:sp>
-        <p:nvSpPr>
-          <p:cNvPr id="17" name="TextBox 16"/>
-          <p:cNvSpPr txBox="1"/>
-          <p:nvPr/>
-        </p:nvSpPr>
-        <p:spPr>
-          <a:xfrm>
-            <a:off x="566928" y="3483864"/>
-            <a:ext cx="420624" cy="310896"/>
-          </a:xfrm>
-          <a:prstGeom prst="rect">
-            <a:avLst/>
-          </a:prstGeom>
-          <a:noFill/>
-        </p:spPr>
-        <p:txBody>
-          <a:bodyPr wrap="square">
-            <a:spAutoFit/>
-          </a:bodyPr>
-          <a:lstStyle/>
-          <a:p>
-            <a:pPr algn="ctr">
-              <a:lnSpc>
-                <a:spcPct val="100000"/>
-              </a:lnSpc>
-            </a:pPr>
-            <a:r>
-              <a:rPr sz="1400" b="1">
-                <a:solidFill>
-                  <a:srgbClr val="FFFFFF"/>
-                </a:solidFill>
-                <a:latin typeface="Arial"/>
-              </a:rPr>
-              <a:t>3</a:t>
-            </a:r>
-          </a:p>
-        </p:txBody>
-      </p:sp>
-      <p:sp>
-        <p:nvSpPr>
-          <p:cNvPr id="18" name="TextBox 17"/>
-          <p:cNvSpPr txBox="1"/>
-          <p:nvPr/>
-        </p:nvSpPr>
-        <p:spPr>
-          <a:xfrm>
-            <a:off x="1188720" y="3429000"/>
-            <a:ext cx="8863279" cy="274320"/>
-          </a:xfrm>
-          <a:prstGeom prst="rect">
-            <a:avLst/>
-          </a:prstGeom>
-          <a:noFill/>
-        </p:spPr>
-        <p:txBody>
-          <a:bodyPr wrap="square">
-            <a:spAutoFit/>
-          </a:bodyPr>
-          <a:lstStyle/>
-          <a:p>
-            <a:pPr algn="l">
-              <a:lnSpc>
-                <a:spcPct val="100000"/>
-              </a:lnSpc>
-            </a:pPr>
-            <a:r>
-              <a:rPr sz="1300" b="1">
-                <a:solidFill>
-                  <a:srgbClr val="2C3E50"/>
-                </a:solidFill>
-                <a:latin typeface="Arial"/>
-              </a:rPr>
-              <a:t>Effective months instead of calendar months</a:t>
-            </a:r>
-          </a:p>
-        </p:txBody>
-      </p:sp>
-      <p:sp>
-        <p:nvSpPr>
-          <p:cNvPr id="19" name="TextBox 18"/>
-          <p:cNvSpPr txBox="1"/>
-          <p:nvPr/>
-        </p:nvSpPr>
-        <p:spPr>
-          <a:xfrm>
-            <a:off x="1188720" y="3703320"/>
-            <a:ext cx="8863279" cy="603504"/>
-          </a:xfrm>
-          <a:prstGeom prst="rect">
-            <a:avLst/>
-          </a:prstGeom>
-          <a:noFill/>
-        </p:spPr>
-        <p:txBody>
-          <a:bodyPr wrap="square">
-            <a:spAutoFit/>
-          </a:bodyPr>
-          <a:lstStyle/>
-          <a:p>
-            <a:pPr algn="l">
-              <a:lnSpc>
-                <a:spcPct val="118000"/>
-              </a:lnSpc>
-            </a:pPr>
-            <a:r>
-              <a:rPr sz="1100" b="0">
-                <a:solidFill>
-                  <a:srgbClr val="5D6D7E"/>
-                </a:solidFill>
-                <a:latin typeface="Arial"/>
-              </a:rPr>
-              <a:t>The run-rate is divided not by the number of months but by the sum of the seasonal index over the months covered. A full calendar year sums to 12.00 and changes nothing; the stores window (Aug–Sep 2026) sums to 1.45 and corrects for falling in weak store months.</a:t>
-            </a:r>
-          </a:p>
-        </p:txBody>
-      </p:sp>
-      <p:sp>
-        <p:nvSpPr>
-          <p:cNvPr id="20" name="TextBox 19"/>
-          <p:cNvSpPr txBox="1"/>
-          <p:nvPr/>
-        </p:nvSpPr>
-        <p:spPr>
-          <a:xfrm>
-            <a:off x="10161727" y="3447288"/>
-            <a:ext cx="1463040" cy="274320"/>
-          </a:xfrm>
-          <a:prstGeom prst="rect">
-            <a:avLst/>
-          </a:prstGeom>
-          <a:noFill/>
-        </p:spPr>
-        <p:txBody>
-          <a:bodyPr wrap="square">
-            <a:spAutoFit/>
-          </a:bodyPr>
-          <a:lstStyle/>
-          <a:p>
-            <a:pPr algn="r">
-              <a:lnSpc>
-                <a:spcPct val="100000"/>
-              </a:lnSpc>
-            </a:pPr>
-            <a:r>
-              <a:rPr sz="1000" b="1">
-                <a:solidFill>
-                  <a:srgbClr val="5D6D7E"/>
-                </a:solidFill>
-                <a:latin typeface="Arial"/>
-              </a:rPr>
-              <a:t>CORRECTED</a:t>
-            </a:r>
-          </a:p>
-        </p:txBody>
-      </p:sp>
-      <p:sp>
-        <p:nvSpPr>
-          <p:cNvPr id="21" name="Rectangle 20"/>
-          <p:cNvSpPr/>
-          <p:nvPr/>
-        </p:nvSpPr>
-        <p:spPr>
-          <a:xfrm>
-            <a:off x="566928" y="4361688"/>
-            <a:ext cx="420624" cy="420624"/>
-          </a:xfrm>
-          <a:prstGeom prst="rect">
-            <a:avLst/>
-          </a:prstGeom>
-          <a:solidFill>
-            <a:srgbClr val="2C3E50"/>
-          </a:solidFill>
-          <a:ln>
-            <a:noFill/>
-          </a:ln>
-          <a:effectLst/>
-        </p:spPr>
-        <p:style>
-          <a:lnRef idx="1">
-            <a:schemeClr val="accent1"/>
-          </a:lnRef>
-          <a:fillRef idx="3">
-            <a:schemeClr val="accent1"/>
-          </a:fillRef>
-          <a:effectRef idx="2">
-            <a:schemeClr val="accent1"/>
-          </a:effectRef>
-          <a:fontRef idx="minor">
-            <a:schemeClr val="lt1"/>
-          </a:fontRef>
-        </p:style>
-        <p:txBody>
-          <a:bodyPr rtlCol="0" anchor="ctr"/>
-          <a:lstStyle/>
-          <a:p>
-            <a:pPr algn="ctr"/>
-          </a:p>
-        </p:txBody>
-      </p:sp>
-      <p:sp>
-        <p:nvSpPr>
-          <p:cNvPr id="22" name="TextBox 21"/>
-          <p:cNvSpPr txBox="1"/>
-          <p:nvPr/>
-        </p:nvSpPr>
-        <p:spPr>
-          <a:xfrm>
-            <a:off x="566928" y="4416552"/>
-            <a:ext cx="420624" cy="310896"/>
-          </a:xfrm>
-          <a:prstGeom prst="rect">
-            <a:avLst/>
-          </a:prstGeom>
-          <a:noFill/>
-        </p:spPr>
-        <p:txBody>
-          <a:bodyPr wrap="square">
-            <a:spAutoFit/>
-          </a:bodyPr>
-          <a:lstStyle/>
-          <a:p>
-            <a:pPr algn="ctr">
-              <a:lnSpc>
-                <a:spcPct val="100000"/>
-              </a:lnSpc>
-            </a:pPr>
-            <a:r>
-              <a:rPr sz="1400" b="1">
-                <a:solidFill>
-                  <a:srgbClr val="FFFFFF"/>
-                </a:solidFill>
-                <a:latin typeface="Arial"/>
-              </a:rPr>
-              <a:t>4</a:t>
-            </a:r>
-          </a:p>
-        </p:txBody>
-      </p:sp>
-      <p:sp>
-        <p:nvSpPr>
-          <p:cNvPr id="23" name="TextBox 22"/>
-          <p:cNvSpPr txBox="1"/>
-          <p:nvPr/>
-        </p:nvSpPr>
-        <p:spPr>
-          <a:xfrm>
-            <a:off x="1188720" y="4361688"/>
-            <a:ext cx="8863279" cy="274320"/>
-          </a:xfrm>
-          <a:prstGeom prst="rect">
-            <a:avLst/>
-          </a:prstGeom>
-          <a:noFill/>
-        </p:spPr>
-        <p:txBody>
-          <a:bodyPr wrap="square">
-            <a:spAutoFit/>
-          </a:bodyPr>
-          <a:lstStyle/>
-          <a:p>
-            <a:pPr algn="l">
-              <a:lnSpc>
-                <a:spcPct val="100000"/>
-              </a:lnSpc>
-            </a:pPr>
-            <a:r>
-              <a:rPr sz="1300" b="1">
-                <a:solidFill>
-                  <a:srgbClr val="2C3E50"/>
-                </a:solidFill>
-                <a:latin typeface="Arial"/>
-              </a:rPr>
-              <a:t>Effect on stores' weight in Apple Total</a:t>
-            </a:r>
-          </a:p>
-        </p:txBody>
-      </p:sp>
-      <p:sp>
-        <p:nvSpPr>
-          <p:cNvPr id="24" name="TextBox 23"/>
-          <p:cNvSpPr txBox="1"/>
-          <p:nvPr/>
-        </p:nvSpPr>
-        <p:spPr>
-          <a:xfrm>
-            <a:off x="1188720" y="4636008"/>
-            <a:ext cx="8863279" cy="603504"/>
-          </a:xfrm>
-          <a:prstGeom prst="rect">
-            <a:avLst/>
-          </a:prstGeom>
-          <a:noFill/>
-        </p:spPr>
-        <p:txBody>
-          <a:bodyPr wrap="square">
-            <a:spAutoFit/>
-          </a:bodyPr>
-          <a:lstStyle/>
-          <a:p>
-            <a:pPr algn="l">
-              <a:lnSpc>
-                <a:spcPct val="118000"/>
-              </a:lnSpc>
-            </a:pPr>
-            <a:r>
-              <a:rPr sz="1100" b="0">
-                <a:solidFill>
-                  <a:srgbClr val="5D6D7E"/>
-                </a:solidFill>
-                <a:latin typeface="Arial"/>
-              </a:rPr>
-              <a:t>Uncorrected, stores appeared to be 23% of demand. With their own seasonality they are 29%. Had Online's profile been applied —the only option before stores' history was available— we would have said 19%, and every scenario would show less production than there really is.</a:t>
-            </a:r>
-          </a:p>
-        </p:txBody>
-      </p:sp>
-      <p:sp>
-        <p:nvSpPr>
-          <p:cNvPr id="25" name="TextBox 24"/>
-          <p:cNvSpPr txBox="1"/>
-          <p:nvPr/>
-        </p:nvSpPr>
-        <p:spPr>
-          <a:xfrm>
-            <a:off x="10161727" y="4379976"/>
-            <a:ext cx="1463040" cy="274320"/>
-          </a:xfrm>
-          <a:prstGeom prst="rect">
-            <a:avLst/>
-          </a:prstGeom>
-          <a:noFill/>
-        </p:spPr>
-        <p:txBody>
-          <a:bodyPr wrap="square">
-            <a:spAutoFit/>
-          </a:bodyPr>
-          <a:lstStyle/>
-          <a:p>
-            <a:pPr algn="r">
-              <a:lnSpc>
-                <a:spcPct val="100000"/>
-              </a:lnSpc>
-            </a:pPr>
-            <a:r>
-              <a:rPr sz="1000" b="1">
-                <a:solidFill>
-                  <a:srgbClr val="3498DB"/>
-                </a:solidFill>
-                <a:latin typeface="Arial"/>
-              </a:rPr>
-              <a:t>MEASURED</a:t>
-            </a:r>
-          </a:p>
-        </p:txBody>
-      </p:sp>
-      <p:sp>
-        <p:nvSpPr>
-          <p:cNvPr id="26" name="TextBox 25"/>
-          <p:cNvSpPr txBox="1"/>
-          <p:nvPr/>
-        </p:nvSpPr>
-        <p:spPr>
-          <a:xfrm>
-            <a:off x="566928" y="5806440"/>
-            <a:ext cx="11057839" cy="822960"/>
-          </a:xfrm>
-          <a:prstGeom prst="rect">
-            <a:avLst/>
-          </a:prstGeom>
-          <a:noFill/>
-        </p:spPr>
-        <p:txBody>
-          <a:bodyPr wrap="square">
-            <a:spAutoFit/>
-          </a:bodyPr>
-          <a:lstStyle/>
-          <a:p>
-            <a:pPr algn="l">
-              <a:lnSpc>
-                <a:spcPct val="120000"/>
-              </a:lnSpc>
-            </a:pPr>
-            <a:r>
-              <a:rPr sz="1150" b="0">
-                <a:solidFill>
-                  <a:srgbClr val="5D6D7E"/>
-                </a:solidFill>
-                <a:latin typeface="Arial"/>
-              </a:rPr>
-              <a:t>The index averages complete calendar years, so year-on-year volume growth is not mistaken for seasonality. What remains open is whether the Aug–Sep 2026 mix in stores is representative of the year.</a:t>
             </a:r>
           </a:p>
         </p:txBody>

--- a/output/apple_deck/Apple_EFX_Study.pptx
+++ b/output/apple_deck/Apple_EFX_Study.pptx
@@ -19,6 +19,7 @@
     <p:sldId id="267" r:id="rId18"/>
     <p:sldId id="268" r:id="rId19"/>
     <p:sldId id="269" r:id="rId20"/>
+    <p:sldId id="270" r:id="rId21"/>
   </p:sldIdLst>
   <p:sldSz cx="12191695" cy="6858000" type="screen4x3"/>
   <p:notesSz cx="6858000" cy="9144000"/>
@@ -3369,7 +3370,7 @@
                 </a:solidFill>
                 <a:latin typeface="Arial"/>
               </a:rPr>
-              <a:t>METHODOLOGY · SEASONALITY</a:t>
+              <a:t>METHODOLOGY · STORE DEMAND</a:t>
             </a:r>
           </a:p>
         </p:txBody>
@@ -3408,7 +3409,7 @@
                 </a:solidFill>
                 <a:latin typeface="Arial"/>
               </a:rPr>
-              <a:t>Full years 2024 and 2025</a:t>
+              <a:t>Online Mar 2025 – Feb 2026  ·  stores Aug–Sep 2026</a:t>
             </a:r>
           </a:p>
         </p:txBody>
@@ -3447,7 +3448,7 @@
                 </a:solidFill>
                 <a:latin typeface="Arial"/>
               </a:rPr>
-              <a:t>How months are annualised</a:t>
+              <a:t>Store demand Aug–Sep 2026: from applications to risk</a:t>
             </a:r>
           </a:p>
         </p:txBody>
@@ -3496,89 +3497,1378 @@
           </a:p>
         </p:txBody>
       </p:sp>
-      <p:sp>
-        <p:nvSpPr>
-          <p:cNvPr id="6" name="Rectangle 5"/>
-          <p:cNvSpPr/>
+      <p:graphicFrame>
+        <p:nvGraphicFramePr>
+          <p:cNvPr id="6" name="Table 5"/>
+          <p:cNvGraphicFramePr>
+            <a:graphicFrameLocks noGrp="1"/>
+          </p:cNvGraphicFramePr>
           <p:nvPr/>
-        </p:nvSpPr>
-        <p:spPr>
-          <a:xfrm>
-            <a:off x="566928" y="1563624"/>
-            <a:ext cx="420624" cy="420624"/>
-          </a:xfrm>
-          <a:prstGeom prst="rect">
-            <a:avLst/>
-          </a:prstGeom>
-          <a:solidFill>
-            <a:srgbClr val="2C3E50"/>
-          </a:solidFill>
-          <a:ln>
-            <a:noFill/>
-          </a:ln>
-          <a:effectLst/>
-        </p:spPr>
-        <p:style>
-          <a:lnRef idx="1">
-            <a:schemeClr val="accent1"/>
-          </a:lnRef>
-          <a:fillRef idx="3">
-            <a:schemeClr val="accent1"/>
-          </a:fillRef>
-          <a:effectRef idx="2">
-            <a:schemeClr val="accent1"/>
-          </a:effectRef>
-          <a:fontRef idx="minor">
-            <a:schemeClr val="lt1"/>
-          </a:fontRef>
-        </p:style>
-        <p:txBody>
-          <a:bodyPr rtlCol="0" anchor="ctr"/>
-          <a:lstStyle/>
-          <a:p>
-            <a:pPr algn="ctr"/>
-          </a:p>
-        </p:txBody>
-      </p:sp>
-      <p:sp>
-        <p:nvSpPr>
-          <p:cNvPr id="7" name="TextBox 6"/>
-          <p:cNvSpPr txBox="1"/>
+        </p:nvGraphicFramePr>
+        <p:xfrm>
+          <a:off x="566928" y="1563624"/>
+          <a:ext cx="6858000" cy="2487168"/>
+        </p:xfrm>
+        <a:graphic>
+          <a:graphicData uri="http://schemas.openxmlformats.org/drawingml/2006/table">
+            <a:tbl>
+              <a:tblPr firstRow="1" bandRow="1">
+                <a:tableStyleId>{5C22544A-7EE6-4342-B048-85BDC9FD1C3A}</a:tableStyleId>
+              </a:tblPr>
+              <a:tblGrid>
+                <a:gridCol w="3108960"/>
+                <a:gridCol w="1097280"/>
+                <a:gridCol w="1371600"/>
+                <a:gridCol w="1280160"/>
+              </a:tblGrid>
+              <a:tr h="310896">
+                <a:tc>
+                  <a:txBody>
+                    <a:bodyPr/>
+                    <a:lstStyle/>
+                    <a:p>
+                      <a:pPr algn="l"/>
+                      <a:r>
+                        <a:rPr sz="1150" b="1">
+                          <a:solidFill>
+                            <a:srgbClr val="2C3E50"/>
+                          </a:solidFill>
+                          <a:latin typeface="Arial"/>
+                        </a:rPr>
+                        <a:t>Each € of store demand</a:t>
+                      </a:r>
+                    </a:p>
+                  </a:txBody>
+                  <a:tcPr>
+                    <a:solidFill>
+                      <a:srgbClr val="F6F7F9"/>
+                    </a:solidFill>
+                  </a:tcPr>
+                </a:tc>
+                <a:tc>
+                  <a:txBody>
+                    <a:bodyPr/>
+                    <a:lstStyle/>
+                    <a:p>
+                      <a:pPr algn="r"/>
+                      <a:r>
+                        <a:rPr sz="1150" b="1">
+                          <a:solidFill>
+                            <a:srgbClr val="2C3E50"/>
+                          </a:solidFill>
+                          <a:latin typeface="Arial"/>
+                        </a:rPr>
+                        <a:t>Share</a:t>
+                      </a:r>
+                    </a:p>
+                  </a:txBody>
+                  <a:tcPr>
+                    <a:solidFill>
+                      <a:srgbClr val="F6F7F9"/>
+                    </a:solidFill>
+                  </a:tcPr>
+                </a:tc>
+                <a:tc>
+                  <a:txBody>
+                    <a:bodyPr/>
+                    <a:lstStyle/>
+                    <a:p>
+                      <a:pPr algn="r"/>
+                      <a:r>
+                        <a:rPr sz="1150" b="1">
+                          <a:solidFill>
+                            <a:srgbClr val="2C3E50"/>
+                          </a:solidFill>
+                          <a:latin typeface="Arial"/>
+                        </a:rPr>
+                        <a:t>Exp. production</a:t>
+                      </a:r>
+                    </a:p>
+                  </a:txBody>
+                  <a:tcPr>
+                    <a:solidFill>
+                      <a:srgbClr val="F6F7F9"/>
+                    </a:solidFill>
+                  </a:tcPr>
+                </a:tc>
+                <a:tc>
+                  <a:txBody>
+                    <a:bodyPr/>
+                    <a:lstStyle/>
+                    <a:p>
+                      <a:pPr algn="r"/>
+                      <a:r>
+                        <a:rPr sz="1150" b="1">
+                          <a:solidFill>
+                            <a:srgbClr val="2C3E50"/>
+                          </a:solidFill>
+                          <a:latin typeface="Arial"/>
+                        </a:rPr>
+                        <a:t>Imputed risk</a:t>
+                      </a:r>
+                    </a:p>
+                  </a:txBody>
+                  <a:tcPr>
+                    <a:solidFill>
+                      <a:srgbClr val="F6F7F9"/>
+                    </a:solidFill>
+                  </a:tcPr>
+                </a:tc>
+              </a:tr>
+              <a:tr h="310896">
+                <a:tc>
+                  <a:txBody>
+                    <a:bodyPr/>
+                    <a:lstStyle/>
+                    <a:p>
+                      <a:pPr algn="l"/>
+                      <a:r>
+                        <a:rPr sz="1150" b="0">
+                          <a:solidFill>
+                            <a:srgbClr val="5D6D7E"/>
+                          </a:solidFill>
+                          <a:latin typeface="Arial"/>
+                        </a:rPr>
+                        <a:t>kept: approved today, above the cutoff</a:t>
+                      </a:r>
+                    </a:p>
+                  </a:txBody>
+                  <a:tcPr>
+                    <a:solidFill>
+                      <a:srgbClr val="FFFFFF"/>
+                    </a:solidFill>
+                  </a:tcPr>
+                </a:tc>
+                <a:tc>
+                  <a:txBody>
+                    <a:bodyPr/>
+                    <a:lstStyle/>
+                    <a:p>
+                      <a:pPr algn="r"/>
+                      <a:r>
+                        <a:rPr sz="1150" b="0">
+                          <a:solidFill>
+                            <a:srgbClr val="5D6D7E"/>
+                          </a:solidFill>
+                          <a:latin typeface="Arial"/>
+                        </a:rPr>
+                        <a:t>56.8%</a:t>
+                      </a:r>
+                    </a:p>
+                  </a:txBody>
+                  <a:tcPr>
+                    <a:solidFill>
+                      <a:srgbClr val="FFFFFF"/>
+                    </a:solidFill>
+                  </a:tcPr>
+                </a:tc>
+                <a:tc>
+                  <a:txBody>
+                    <a:bodyPr/>
+                    <a:lstStyle/>
+                    <a:p>
+                      <a:pPr algn="r"/>
+                      <a:r>
+                        <a:rPr sz="1150" b="0">
+                          <a:solidFill>
+                            <a:srgbClr val="5D6D7E"/>
+                          </a:solidFill>
+                          <a:latin typeface="Arial"/>
+                        </a:rPr>
+                        <a:t>€10.9M</a:t>
+                      </a:r>
+                    </a:p>
+                  </a:txBody>
+                  <a:tcPr>
+                    <a:solidFill>
+                      <a:srgbClr val="FFFFFF"/>
+                    </a:solidFill>
+                  </a:tcPr>
+                </a:tc>
+                <a:tc>
+                  <a:txBody>
+                    <a:bodyPr/>
+                    <a:lstStyle/>
+                    <a:p>
+                      <a:pPr algn="r"/>
+                      <a:r>
+                        <a:rPr sz="1150" b="0">
+                          <a:solidFill>
+                            <a:srgbClr val="5D6D7E"/>
+                          </a:solidFill>
+                          <a:latin typeface="Arial"/>
+                        </a:rPr>
+                        <a:t>3.3%</a:t>
+                      </a:r>
+                    </a:p>
+                  </a:txBody>
+                  <a:tcPr>
+                    <a:solidFill>
+                      <a:srgbClr val="FFFFFF"/>
+                    </a:solidFill>
+                  </a:tcPr>
+                </a:tc>
+              </a:tr>
+              <a:tr h="310896">
+                <a:tc>
+                  <a:txBody>
+                    <a:bodyPr/>
+                    <a:lstStyle/>
+                    <a:p>
+                      <a:pPr algn="l"/>
+                      <a:r>
+                        <a:rPr sz="1150" b="0">
+                          <a:solidFill>
+                            <a:srgbClr val="5D6D7E"/>
+                          </a:solidFill>
+                          <a:latin typeface="Arial"/>
+                        </a:rPr>
+                        <a:t>swap-in: rejected by score, above cutoff</a:t>
+                      </a:r>
+                    </a:p>
+                  </a:txBody>
+                  <a:tcPr>
+                    <a:solidFill>
+                      <a:srgbClr val="FFFFFF"/>
+                    </a:solidFill>
+                  </a:tcPr>
+                </a:tc>
+                <a:tc>
+                  <a:txBody>
+                    <a:bodyPr/>
+                    <a:lstStyle/>
+                    <a:p>
+                      <a:pPr algn="r"/>
+                      <a:r>
+                        <a:rPr sz="1150" b="0">
+                          <a:solidFill>
+                            <a:srgbClr val="5D6D7E"/>
+                          </a:solidFill>
+                          <a:latin typeface="Arial"/>
+                        </a:rPr>
+                        <a:t>19.3%</a:t>
+                      </a:r>
+                    </a:p>
+                  </a:txBody>
+                  <a:tcPr>
+                    <a:solidFill>
+                      <a:srgbClr val="FFFFFF"/>
+                    </a:solidFill>
+                  </a:tcPr>
+                </a:tc>
+                <a:tc>
+                  <a:txBody>
+                    <a:bodyPr/>
+                    <a:lstStyle/>
+                    <a:p>
+                      <a:pPr algn="r"/>
+                      <a:r>
+                        <a:rPr sz="1150" b="0">
+                          <a:solidFill>
+                            <a:srgbClr val="5D6D7E"/>
+                          </a:solidFill>
+                          <a:latin typeface="Arial"/>
+                        </a:rPr>
+                        <a:t>€3.7M</a:t>
+                      </a:r>
+                    </a:p>
+                  </a:txBody>
+                  <a:tcPr>
+                    <a:solidFill>
+                      <a:srgbClr val="FFFFFF"/>
+                    </a:solidFill>
+                  </a:tcPr>
+                </a:tc>
+                <a:tc>
+                  <a:txBody>
+                    <a:bodyPr/>
+                    <a:lstStyle/>
+                    <a:p>
+                      <a:pPr algn="r"/>
+                      <a:r>
+                        <a:rPr sz="1150" b="0">
+                          <a:solidFill>
+                            <a:srgbClr val="5D6D7E"/>
+                          </a:solidFill>
+                          <a:latin typeface="Arial"/>
+                        </a:rPr>
+                        <a:t>4.1%</a:t>
+                      </a:r>
+                    </a:p>
+                  </a:txBody>
+                  <a:tcPr>
+                    <a:solidFill>
+                      <a:srgbClr val="FFFFFF"/>
+                    </a:solidFill>
+                  </a:tcPr>
+                </a:tc>
+              </a:tr>
+              <a:tr h="310896">
+                <a:tc>
+                  <a:txBody>
+                    <a:bodyPr/>
+                    <a:lstStyle/>
+                    <a:p>
+                      <a:pPr algn="l"/>
+                      <a:r>
+                        <a:rPr sz="1150" b="0">
+                          <a:solidFill>
+                            <a:srgbClr val="5D6D7E"/>
+                          </a:solidFill>
+                          <a:latin typeface="Arial"/>
+                        </a:rPr>
+                        <a:t>swap-out: approved today, below cutoff</a:t>
+                      </a:r>
+                    </a:p>
+                  </a:txBody>
+                  <a:tcPr>
+                    <a:solidFill>
+                      <a:srgbClr val="FFFFFF"/>
+                    </a:solidFill>
+                  </a:tcPr>
+                </a:tc>
+                <a:tc>
+                  <a:txBody>
+                    <a:bodyPr/>
+                    <a:lstStyle/>
+                    <a:p>
+                      <a:pPr algn="r"/>
+                      <a:r>
+                        <a:rPr sz="1150" b="0">
+                          <a:solidFill>
+                            <a:srgbClr val="5D6D7E"/>
+                          </a:solidFill>
+                          <a:latin typeface="Arial"/>
+                        </a:rPr>
+                        <a:t>2.0%</a:t>
+                      </a:r>
+                    </a:p>
+                  </a:txBody>
+                  <a:tcPr>
+                    <a:solidFill>
+                      <a:srgbClr val="FFFFFF"/>
+                    </a:solidFill>
+                  </a:tcPr>
+                </a:tc>
+                <a:tc>
+                  <a:txBody>
+                    <a:bodyPr/>
+                    <a:lstStyle/>
+                    <a:p>
+                      <a:pPr algn="r"/>
+                      <a:r>
+                        <a:rPr sz="1150" b="0">
+                          <a:solidFill>
+                            <a:srgbClr val="5D6D7E"/>
+                          </a:solidFill>
+                          <a:latin typeface="Arial"/>
+                        </a:rPr>
+                        <a:t>€0.4M</a:t>
+                      </a:r>
+                    </a:p>
+                  </a:txBody>
+                  <a:tcPr>
+                    <a:solidFill>
+                      <a:srgbClr val="FFFFFF"/>
+                    </a:solidFill>
+                  </a:tcPr>
+                </a:tc>
+                <a:tc>
+                  <a:txBody>
+                    <a:bodyPr/>
+                    <a:lstStyle/>
+                    <a:p>
+                      <a:pPr algn="r"/>
+                      <a:r>
+                        <a:rPr sz="1150" b="0">
+                          <a:solidFill>
+                            <a:srgbClr val="5D6D7E"/>
+                          </a:solidFill>
+                          <a:latin typeface="Arial"/>
+                        </a:rPr>
+                        <a:t>47.6%</a:t>
+                      </a:r>
+                    </a:p>
+                  </a:txBody>
+                  <a:tcPr>
+                    <a:solidFill>
+                      <a:srgbClr val="FFFFFF"/>
+                    </a:solidFill>
+                  </a:tcPr>
+                </a:tc>
+              </a:tr>
+              <a:tr h="310896">
+                <a:tc>
+                  <a:txBody>
+                    <a:bodyPr/>
+                    <a:lstStyle/>
+                    <a:p>
+                      <a:pPr algn="l"/>
+                      <a:r>
+                        <a:rPr sz="1150" b="0">
+                          <a:solidFill>
+                            <a:srgbClr val="5D6D7E"/>
+                          </a:solidFill>
+                          <a:latin typeface="Arial"/>
+                        </a:rPr>
+                        <a:t>stays out: rejected by score, below cutoff</a:t>
+                      </a:r>
+                    </a:p>
+                  </a:txBody>
+                  <a:tcPr>
+                    <a:solidFill>
+                      <a:srgbClr val="FFFFFF"/>
+                    </a:solidFill>
+                  </a:tcPr>
+                </a:tc>
+                <a:tc>
+                  <a:txBody>
+                    <a:bodyPr/>
+                    <a:lstStyle/>
+                    <a:p>
+                      <a:pPr algn="r"/>
+                      <a:r>
+                        <a:rPr sz="1150" b="0">
+                          <a:solidFill>
+                            <a:srgbClr val="5D6D7E"/>
+                          </a:solidFill>
+                          <a:latin typeface="Arial"/>
+                        </a:rPr>
+                        <a:t>1.8%</a:t>
+                      </a:r>
+                    </a:p>
+                  </a:txBody>
+                  <a:tcPr>
+                    <a:solidFill>
+                      <a:srgbClr val="FFFFFF"/>
+                    </a:solidFill>
+                  </a:tcPr>
+                </a:tc>
+                <a:tc>
+                  <a:txBody>
+                    <a:bodyPr/>
+                    <a:lstStyle/>
+                    <a:p>
+                      <a:pPr algn="r"/>
+                      <a:r>
+                        <a:rPr sz="1150" b="0">
+                          <a:solidFill>
+                            <a:srgbClr val="5D6D7E"/>
+                          </a:solidFill>
+                          <a:latin typeface="Arial"/>
+                        </a:rPr>
+                        <a:t>€0.4M</a:t>
+                      </a:r>
+                    </a:p>
+                  </a:txBody>
+                  <a:tcPr>
+                    <a:solidFill>
+                      <a:srgbClr val="FFFFFF"/>
+                    </a:solidFill>
+                  </a:tcPr>
+                </a:tc>
+                <a:tc>
+                  <a:txBody>
+                    <a:bodyPr/>
+                    <a:lstStyle/>
+                    <a:p>
+                      <a:pPr algn="r"/>
+                      <a:r>
+                        <a:rPr sz="1150" b="0">
+                          <a:solidFill>
+                            <a:srgbClr val="5D6D7E"/>
+                          </a:solidFill>
+                          <a:latin typeface="Arial"/>
+                        </a:rPr>
+                        <a:t>41.6%</a:t>
+                      </a:r>
+                    </a:p>
+                  </a:txBody>
+                  <a:tcPr>
+                    <a:solidFill>
+                      <a:srgbClr val="FFFFFF"/>
+                    </a:solidFill>
+                  </a:tcPr>
+                </a:tc>
+              </a:tr>
+              <a:tr h="310896">
+                <a:tc>
+                  <a:txBody>
+                    <a:bodyPr/>
+                    <a:lstStyle/>
+                    <a:p>
+                      <a:pPr algn="l"/>
+                      <a:r>
+                        <a:rPr sz="1150" b="0">
+                          <a:solidFill>
+                            <a:srgbClr val="5D6D7E"/>
+                          </a:solidFill>
+                          <a:latin typeface="Arial"/>
+                        </a:rPr>
+                        <a:t>untouched: rejected by other rules</a:t>
+                      </a:r>
+                    </a:p>
+                  </a:txBody>
+                  <a:tcPr>
+                    <a:solidFill>
+                      <a:srgbClr val="FFFFFF"/>
+                    </a:solidFill>
+                  </a:tcPr>
+                </a:tc>
+                <a:tc>
+                  <a:txBody>
+                    <a:bodyPr/>
+                    <a:lstStyle/>
+                    <a:p>
+                      <a:pPr algn="r"/>
+                      <a:r>
+                        <a:rPr sz="1150" b="0">
+                          <a:solidFill>
+                            <a:srgbClr val="5D6D7E"/>
+                          </a:solidFill>
+                          <a:latin typeface="Arial"/>
+                        </a:rPr>
+                        <a:t>20.1%</a:t>
+                      </a:r>
+                    </a:p>
+                  </a:txBody>
+                  <a:tcPr>
+                    <a:solidFill>
+                      <a:srgbClr val="FFFFFF"/>
+                    </a:solidFill>
+                  </a:tcPr>
+                </a:tc>
+                <a:tc>
+                  <a:txBody>
+                    <a:bodyPr/>
+                    <a:lstStyle/>
+                    <a:p>
+                      <a:pPr algn="r"/>
+                      <a:r>
+                        <a:rPr sz="1150" b="0">
+                          <a:solidFill>
+                            <a:srgbClr val="5D6D7E"/>
+                          </a:solidFill>
+                          <a:latin typeface="Arial"/>
+                        </a:rPr>
+                        <a:t>€3.9M</a:t>
+                      </a:r>
+                    </a:p>
+                  </a:txBody>
+                  <a:tcPr>
+                    <a:solidFill>
+                      <a:srgbClr val="FFFFFF"/>
+                    </a:solidFill>
+                  </a:tcPr>
+                </a:tc>
+                <a:tc>
+                  <a:txBody>
+                    <a:bodyPr/>
+                    <a:lstStyle/>
+                    <a:p>
+                      <a:pPr algn="r"/>
+                      <a:r>
+                        <a:rPr sz="1150" b="0">
+                          <a:solidFill>
+                            <a:srgbClr val="5D6D7E"/>
+                          </a:solidFill>
+                          <a:latin typeface="Arial"/>
+                        </a:rPr>
+                        <a:t>8.0%</a:t>
+                      </a:r>
+                    </a:p>
+                  </a:txBody>
+                  <a:tcPr>
+                    <a:solidFill>
+                      <a:srgbClr val="FFFFFF"/>
+                    </a:solidFill>
+                  </a:tcPr>
+                </a:tc>
+              </a:tr>
+              <a:tr h="310896">
+                <a:tc>
+                  <a:txBody>
+                    <a:bodyPr/>
+                    <a:lstStyle/>
+                    <a:p>
+                      <a:pPr algn="l"/>
+                      <a:r>
+                        <a:rPr sz="1150" b="0">
+                          <a:solidFill>
+                            <a:srgbClr val="5D6D7E"/>
+                          </a:solidFill>
+                          <a:latin typeface="Arial"/>
+                        </a:rPr>
+                        <a:t>Accepted by the grid (kept + swap-in)</a:t>
+                      </a:r>
+                    </a:p>
+                  </a:txBody>
+                  <a:tcPr>
+                    <a:solidFill>
+                      <a:srgbClr val="FFFFFF"/>
+                    </a:solidFill>
+                  </a:tcPr>
+                </a:tc>
+                <a:tc>
+                  <a:txBody>
+                    <a:bodyPr/>
+                    <a:lstStyle/>
+                    <a:p>
+                      <a:pPr algn="r"/>
+                      <a:r>
+                        <a:rPr sz="1150" b="0">
+                          <a:solidFill>
+                            <a:srgbClr val="5D6D7E"/>
+                          </a:solidFill>
+                          <a:latin typeface="Arial"/>
+                        </a:rPr>
+                        <a:t>76.0%</a:t>
+                      </a:r>
+                    </a:p>
+                  </a:txBody>
+                  <a:tcPr>
+                    <a:solidFill>
+                      <a:srgbClr val="FFFFFF"/>
+                    </a:solidFill>
+                  </a:tcPr>
+                </a:tc>
+                <a:tc>
+                  <a:txBody>
+                    <a:bodyPr/>
+                    <a:lstStyle/>
+                    <a:p>
+                      <a:pPr algn="r"/>
+                      <a:r>
+                        <a:rPr sz="1150" b="0">
+                          <a:solidFill>
+                            <a:srgbClr val="5D6D7E"/>
+                          </a:solidFill>
+                          <a:latin typeface="Arial"/>
+                        </a:rPr>
+                        <a:t>€14.6M</a:t>
+                      </a:r>
+                    </a:p>
+                  </a:txBody>
+                  <a:tcPr>
+                    <a:solidFill>
+                      <a:srgbClr val="FFFFFF"/>
+                    </a:solidFill>
+                  </a:tcPr>
+                </a:tc>
+                <a:tc>
+                  <a:txBody>
+                    <a:bodyPr/>
+                    <a:lstStyle/>
+                    <a:p>
+                      <a:pPr algn="r"/>
+                      <a:r>
+                        <a:rPr sz="1150" b="0">
+                          <a:solidFill>
+                            <a:srgbClr val="5D6D7E"/>
+                          </a:solidFill>
+                          <a:latin typeface="Arial"/>
+                        </a:rPr>
+                        <a:t>3.51%</a:t>
+                      </a:r>
+                    </a:p>
+                  </a:txBody>
+                  <a:tcPr>
+                    <a:solidFill>
+                      <a:srgbClr val="FFFFFF"/>
+                    </a:solidFill>
+                  </a:tcPr>
+                </a:tc>
+              </a:tr>
+              <a:tr h="310896">
+                <a:tc>
+                  <a:txBody>
+                    <a:bodyPr/>
+                    <a:lstStyle/>
+                    <a:p>
+                      <a:pPr algn="l"/>
+                      <a:r>
+                        <a:rPr sz="1150" b="0">
+                          <a:solidFill>
+                            <a:srgbClr val="5D6D7E"/>
+                          </a:solidFill>
+                          <a:latin typeface="Arial"/>
+                        </a:rPr>
+                        <a:t>Today's book, valued the same way</a:t>
+                      </a:r>
+                    </a:p>
+                  </a:txBody>
+                  <a:tcPr>
+                    <a:solidFill>
+                      <a:srgbClr val="FFFFFF"/>
+                    </a:solidFill>
+                  </a:tcPr>
+                </a:tc>
+                <a:tc>
+                  <a:txBody>
+                    <a:bodyPr/>
+                    <a:lstStyle/>
+                    <a:p>
+                      <a:pPr algn="r"/>
+                      <a:r>
+                        <a:rPr sz="1150" b="0">
+                          <a:solidFill>
+                            <a:srgbClr val="5D6D7E"/>
+                          </a:solidFill>
+                          <a:latin typeface="Arial"/>
+                        </a:rPr>
+                        <a:t>47.2%</a:t>
+                      </a:r>
+                    </a:p>
+                  </a:txBody>
+                  <a:tcPr>
+                    <a:solidFill>
+                      <a:srgbClr val="FFFFFF"/>
+                    </a:solidFill>
+                  </a:tcPr>
+                </a:tc>
+                <a:tc>
+                  <a:txBody>
+                    <a:bodyPr/>
+                    <a:lstStyle/>
+                    <a:p>
+                      <a:pPr algn="r"/>
+                      <a:r>
+                        <a:rPr sz="1150" b="0">
+                          <a:solidFill>
+                            <a:srgbClr val="5D6D7E"/>
+                          </a:solidFill>
+                          <a:latin typeface="Arial"/>
+                        </a:rPr>
+                        <a:t>€11.3M</a:t>
+                      </a:r>
+                    </a:p>
+                  </a:txBody>
+                  <a:tcPr>
+                    <a:solidFill>
+                      <a:srgbClr val="FFFFFF"/>
+                    </a:solidFill>
+                  </a:tcPr>
+                </a:tc>
+                <a:tc>
+                  <a:txBody>
+                    <a:bodyPr/>
+                    <a:lstStyle/>
+                    <a:p>
+                      <a:pPr algn="r"/>
+                      <a:r>
+                        <a:rPr sz="1150" b="0">
+                          <a:solidFill>
+                            <a:srgbClr val="5D6D7E"/>
+                          </a:solidFill>
+                          <a:latin typeface="Arial"/>
+                        </a:rPr>
+                        <a:t>3.74%</a:t>
+                      </a:r>
+                    </a:p>
+                  </a:txBody>
+                  <a:tcPr>
+                    <a:solidFill>
+                      <a:srgbClr val="FFFFFF"/>
+                    </a:solidFill>
+                  </a:tcPr>
+                </a:tc>
+              </a:tr>
+            </a:tbl>
+          </a:graphicData>
+        </a:graphic>
+      </p:graphicFrame>
+      <p:graphicFrame>
+        <p:nvGraphicFramePr>
+          <p:cNvPr id="7" name="Table 6"/>
+          <p:cNvGraphicFramePr>
+            <a:graphicFrameLocks noGrp="1"/>
+          </p:cNvGraphicFramePr>
           <p:nvPr/>
-        </p:nvSpPr>
-        <p:spPr>
-          <a:xfrm>
-            <a:off x="566928" y="1618488"/>
-            <a:ext cx="420624" cy="310896"/>
-          </a:xfrm>
-          <a:prstGeom prst="rect">
-            <a:avLst/>
-          </a:prstGeom>
-          <a:noFill/>
-        </p:spPr>
-        <p:txBody>
-          <a:bodyPr wrap="square">
-            <a:spAutoFit/>
-          </a:bodyPr>
-          <a:lstStyle/>
-          <a:p>
-            <a:pPr algn="ctr">
-              <a:lnSpc>
-                <a:spcPct val="100000"/>
-              </a:lnSpc>
-            </a:pPr>
-            <a:r>
-              <a:rPr sz="1400" b="1">
-                <a:solidFill>
-                  <a:srgbClr val="FFFFFF"/>
-                </a:solidFill>
-                <a:latin typeface="Arial"/>
-              </a:rPr>
-              <a:t>1</a:t>
-            </a:r>
-          </a:p>
-        </p:txBody>
-      </p:sp>
+        </p:nvGraphicFramePr>
+        <p:xfrm>
+          <a:off x="7699248" y="1563624"/>
+          <a:ext cx="3886198" cy="1865376"/>
+        </p:xfrm>
+        <a:graphic>
+          <a:graphicData uri="http://schemas.openxmlformats.org/drawingml/2006/table">
+            <a:tbl>
+              <a:tblPr firstRow="1" bandRow="1">
+                <a:tableStyleId>{5C22544A-7EE6-4342-B048-85BDC9FD1C3A}</a:tableStyleId>
+              </a:tblPr>
+              <a:tblGrid>
+                <a:gridCol w="1876096"/>
+                <a:gridCol w="670034"/>
+                <a:gridCol w="670034"/>
+                <a:gridCol w="670034"/>
+              </a:tblGrid>
+              <a:tr h="310896">
+                <a:tc>
+                  <a:txBody>
+                    <a:bodyPr/>
+                    <a:lstStyle/>
+                    <a:p>
+                      <a:pPr algn="l"/>
+                      <a:r>
+                        <a:rPr sz="1150" b="1">
+                          <a:solidFill>
+                            <a:srgbClr val="2C3E50"/>
+                          </a:solidFill>
+                          <a:latin typeface="Arial"/>
+                        </a:rPr>
+                        <a:t>Monthly run-rate</a:t>
+                      </a:r>
+                    </a:p>
+                  </a:txBody>
+                  <a:tcPr>
+                    <a:solidFill>
+                      <a:srgbClr val="F6F7F9"/>
+                    </a:solidFill>
+                  </a:tcPr>
+                </a:tc>
+                <a:tc>
+                  <a:txBody>
+                    <a:bodyPr/>
+                    <a:lstStyle/>
+                    <a:p>
+                      <a:pPr algn="r"/>
+                      <a:r>
+                        <a:rPr sz="1150" b="1">
+                          <a:solidFill>
+                            <a:srgbClr val="2C3E50"/>
+                          </a:solidFill>
+                          <a:latin typeface="Arial"/>
+                        </a:rPr>
+                        <a:t>Online</a:t>
+                      </a:r>
+                    </a:p>
+                  </a:txBody>
+                  <a:tcPr>
+                    <a:solidFill>
+                      <a:srgbClr val="F6F7F9"/>
+                    </a:solidFill>
+                  </a:tcPr>
+                </a:tc>
+                <a:tc>
+                  <a:txBody>
+                    <a:bodyPr/>
+                    <a:lstStyle/>
+                    <a:p>
+                      <a:pPr algn="r"/>
+                      <a:r>
+                        <a:rPr sz="1150" b="1">
+                          <a:solidFill>
+                            <a:srgbClr val="2C3E50"/>
+                          </a:solidFill>
+                          <a:latin typeface="Arial"/>
+                        </a:rPr>
+                        <a:t>Stores</a:t>
+                      </a:r>
+                    </a:p>
+                  </a:txBody>
+                  <a:tcPr>
+                    <a:solidFill>
+                      <a:srgbClr val="F6F7F9"/>
+                    </a:solidFill>
+                  </a:tcPr>
+                </a:tc>
+                <a:tc>
+                  <a:txBody>
+                    <a:bodyPr/>
+                    <a:lstStyle/>
+                    <a:p>
+                      <a:pPr algn="r"/>
+                      <a:r>
+                        <a:rPr sz="1150" b="1">
+                          <a:solidFill>
+                            <a:srgbClr val="2C3E50"/>
+                          </a:solidFill>
+                          <a:latin typeface="Arial"/>
+                        </a:rPr>
+                        <a:t>Apple</a:t>
+                      </a:r>
+                    </a:p>
+                  </a:txBody>
+                  <a:tcPr>
+                    <a:solidFill>
+                      <a:srgbClr val="F6F7F9"/>
+                    </a:solidFill>
+                  </a:tcPr>
+                </a:tc>
+              </a:tr>
+              <a:tr h="310896">
+                <a:tc>
+                  <a:txBody>
+                    <a:bodyPr/>
+                    <a:lstStyle/>
+                    <a:p>
+                      <a:pPr algn="l"/>
+                      <a:r>
+                        <a:rPr sz="1150" b="0">
+                          <a:solidFill>
+                            <a:srgbClr val="5D6D7E"/>
+                          </a:solidFill>
+                          <a:latin typeface="Arial"/>
+                        </a:rPr>
+                        <a:t>Effective months</a:t>
+                      </a:r>
+                    </a:p>
+                  </a:txBody>
+                  <a:tcPr>
+                    <a:solidFill>
+                      <a:srgbClr val="FFFFFF"/>
+                    </a:solidFill>
+                  </a:tcPr>
+                </a:tc>
+                <a:tc>
+                  <a:txBody>
+                    <a:bodyPr/>
+                    <a:lstStyle/>
+                    <a:p>
+                      <a:pPr algn="r"/>
+                      <a:r>
+                        <a:rPr sz="1150" b="0">
+                          <a:solidFill>
+                            <a:srgbClr val="5D6D7E"/>
+                          </a:solidFill>
+                          <a:latin typeface="Arial"/>
+                        </a:rPr>
+                        <a:t>12.00</a:t>
+                      </a:r>
+                    </a:p>
+                  </a:txBody>
+                  <a:tcPr>
+                    <a:solidFill>
+                      <a:srgbClr val="FFFFFF"/>
+                    </a:solidFill>
+                  </a:tcPr>
+                </a:tc>
+                <a:tc>
+                  <a:txBody>
+                    <a:bodyPr/>
+                    <a:lstStyle/>
+                    <a:p>
+                      <a:pPr algn="r"/>
+                      <a:r>
+                        <a:rPr sz="1150" b="0">
+                          <a:solidFill>
+                            <a:srgbClr val="5D6D7E"/>
+                          </a:solidFill>
+                          <a:latin typeface="Arial"/>
+                        </a:rPr>
+                        <a:t>1.45</a:t>
+                      </a:r>
+                    </a:p>
+                  </a:txBody>
+                  <a:tcPr>
+                    <a:solidFill>
+                      <a:srgbClr val="FFFFFF"/>
+                    </a:solidFill>
+                  </a:tcPr>
+                </a:tc>
+                <a:tc>
+                  <a:txBody>
+                    <a:bodyPr/>
+                    <a:lstStyle/>
+                    <a:p>
+                      <a:pPr algn="r"/>
+                      <a:r>
+                        <a:rPr sz="1150" b="0">
+                          <a:solidFill>
+                            <a:srgbClr val="5D6D7E"/>
+                          </a:solidFill>
+                          <a:latin typeface="Arial"/>
+                        </a:rPr>
+                        <a:t>—</a:t>
+                      </a:r>
+                    </a:p>
+                  </a:txBody>
+                  <a:tcPr>
+                    <a:solidFill>
+                      <a:srgbClr val="FFFFFF"/>
+                    </a:solidFill>
+                  </a:tcPr>
+                </a:tc>
+              </a:tr>
+              <a:tr h="310896">
+                <a:tc>
+                  <a:txBody>
+                    <a:bodyPr/>
+                    <a:lstStyle/>
+                    <a:p>
+                      <a:pPr algn="l"/>
+                      <a:r>
+                        <a:rPr sz="1150" b="0">
+                          <a:solidFill>
+                            <a:srgbClr val="5D6D7E"/>
+                          </a:solidFill>
+                          <a:latin typeface="Arial"/>
+                        </a:rPr>
+                        <a:t>Demand, €M/mo</a:t>
+                      </a:r>
+                    </a:p>
+                  </a:txBody>
+                  <a:tcPr>
+                    <a:solidFill>
+                      <a:srgbClr val="FFFFFF"/>
+                    </a:solidFill>
+                  </a:tcPr>
+                </a:tc>
+                <a:tc>
+                  <a:txBody>
+                    <a:bodyPr/>
+                    <a:lstStyle/>
+                    <a:p>
+                      <a:pPr algn="r"/>
+                      <a:r>
+                        <a:rPr sz="1150" b="0">
+                          <a:solidFill>
+                            <a:srgbClr val="5D6D7E"/>
+                          </a:solidFill>
+                          <a:latin typeface="Arial"/>
+                        </a:rPr>
+                        <a:t>40.1</a:t>
+                      </a:r>
+                    </a:p>
+                  </a:txBody>
+                  <a:tcPr>
+                    <a:solidFill>
+                      <a:srgbClr val="FFFFFF"/>
+                    </a:solidFill>
+                  </a:tcPr>
+                </a:tc>
+                <a:tc>
+                  <a:txBody>
+                    <a:bodyPr/>
+                    <a:lstStyle/>
+                    <a:p>
+                      <a:pPr algn="r"/>
+                      <a:r>
+                        <a:rPr sz="1150" b="0">
+                          <a:solidFill>
+                            <a:srgbClr val="5D6D7E"/>
+                          </a:solidFill>
+                          <a:latin typeface="Arial"/>
+                        </a:rPr>
+                        <a:t>16.5</a:t>
+                      </a:r>
+                    </a:p>
+                  </a:txBody>
+                  <a:tcPr>
+                    <a:solidFill>
+                      <a:srgbClr val="FFFFFF"/>
+                    </a:solidFill>
+                  </a:tcPr>
+                </a:tc>
+                <a:tc>
+                  <a:txBody>
+                    <a:bodyPr/>
+                    <a:lstStyle/>
+                    <a:p>
+                      <a:pPr algn="r"/>
+                      <a:r>
+                        <a:rPr sz="1150" b="0">
+                          <a:solidFill>
+                            <a:srgbClr val="5D6D7E"/>
+                          </a:solidFill>
+                          <a:latin typeface="Arial"/>
+                        </a:rPr>
+                        <a:t>56.6</a:t>
+                      </a:r>
+                    </a:p>
+                  </a:txBody>
+                  <a:tcPr>
+                    <a:solidFill>
+                      <a:srgbClr val="FFFFFF"/>
+                    </a:solidFill>
+                  </a:tcPr>
+                </a:tc>
+              </a:tr>
+              <a:tr h="310896">
+                <a:tc>
+                  <a:txBody>
+                    <a:bodyPr/>
+                    <a:lstStyle/>
+                    <a:p>
+                      <a:pPr algn="l"/>
+                      <a:r>
+                        <a:rPr sz="1150" b="0">
+                          <a:solidFill>
+                            <a:srgbClr val="5D6D7E"/>
+                          </a:solidFill>
+                          <a:latin typeface="Arial"/>
+                        </a:rPr>
+                        <a:t>Exp. production, €M/mo</a:t>
+                      </a:r>
+                    </a:p>
+                  </a:txBody>
+                  <a:tcPr>
+                    <a:solidFill>
+                      <a:srgbClr val="FFFFFF"/>
+                    </a:solidFill>
+                  </a:tcPr>
+                </a:tc>
+                <a:tc>
+                  <a:txBody>
+                    <a:bodyPr/>
+                    <a:lstStyle/>
+                    <a:p>
+                      <a:pPr algn="r"/>
+                      <a:r>
+                        <a:rPr sz="1150" b="0">
+                          <a:solidFill>
+                            <a:srgbClr val="5D6D7E"/>
+                          </a:solidFill>
+                          <a:latin typeface="Arial"/>
+                        </a:rPr>
+                        <a:t>8.4</a:t>
+                      </a:r>
+                    </a:p>
+                  </a:txBody>
+                  <a:tcPr>
+                    <a:solidFill>
+                      <a:srgbClr val="FFFFFF"/>
+                    </a:solidFill>
+                  </a:tcPr>
+                </a:tc>
+                <a:tc>
+                  <a:txBody>
+                    <a:bodyPr/>
+                    <a:lstStyle/>
+                    <a:p>
+                      <a:pPr algn="r"/>
+                      <a:r>
+                        <a:rPr sz="1150" b="0">
+                          <a:solidFill>
+                            <a:srgbClr val="5D6D7E"/>
+                          </a:solidFill>
+                          <a:latin typeface="Arial"/>
+                        </a:rPr>
+                        <a:t>10.1</a:t>
+                      </a:r>
+                    </a:p>
+                  </a:txBody>
+                  <a:tcPr>
+                    <a:solidFill>
+                      <a:srgbClr val="FFFFFF"/>
+                    </a:solidFill>
+                  </a:tcPr>
+                </a:tc>
+                <a:tc>
+                  <a:txBody>
+                    <a:bodyPr/>
+                    <a:lstStyle/>
+                    <a:p>
+                      <a:pPr algn="r"/>
+                      <a:r>
+                        <a:rPr sz="1150" b="0">
+                          <a:solidFill>
+                            <a:srgbClr val="5D6D7E"/>
+                          </a:solidFill>
+                          <a:latin typeface="Arial"/>
+                        </a:rPr>
+                        <a:t>18.5</a:t>
+                      </a:r>
+                    </a:p>
+                  </a:txBody>
+                  <a:tcPr>
+                    <a:solidFill>
+                      <a:srgbClr val="FFFFFF"/>
+                    </a:solidFill>
+                  </a:tcPr>
+                </a:tc>
+              </a:tr>
+              <a:tr h="310896">
+                <a:tc>
+                  <a:txBody>
+                    <a:bodyPr/>
+                    <a:lstStyle/>
+                    <a:p>
+                      <a:pPr algn="l"/>
+                      <a:r>
+                        <a:rPr sz="1150" b="0">
+                          <a:solidFill>
+                            <a:srgbClr val="5D6D7E"/>
+                          </a:solidFill>
+                          <a:latin typeface="Arial"/>
+                        </a:rPr>
+                        <a:t>Share of exp. H6 exposure</a:t>
+                      </a:r>
+                    </a:p>
+                  </a:txBody>
+                  <a:tcPr>
+                    <a:solidFill>
+                      <a:srgbClr val="FFFFFF"/>
+                    </a:solidFill>
+                  </a:tcPr>
+                </a:tc>
+                <a:tc>
+                  <a:txBody>
+                    <a:bodyPr/>
+                    <a:lstStyle/>
+                    <a:p>
+                      <a:pPr algn="r"/>
+                      <a:r>
+                        <a:rPr sz="1150" b="0">
+                          <a:solidFill>
+                            <a:srgbClr val="5D6D7E"/>
+                          </a:solidFill>
+                          <a:latin typeface="Arial"/>
+                        </a:rPr>
+                        <a:t>45%</a:t>
+                      </a:r>
+                    </a:p>
+                  </a:txBody>
+                  <a:tcPr>
+                    <a:solidFill>
+                      <a:srgbClr val="FFFFFF"/>
+                    </a:solidFill>
+                  </a:tcPr>
+                </a:tc>
+                <a:tc>
+                  <a:txBody>
+                    <a:bodyPr/>
+                    <a:lstStyle/>
+                    <a:p>
+                      <a:pPr algn="r"/>
+                      <a:r>
+                        <a:rPr sz="1150" b="0">
+                          <a:solidFill>
+                            <a:srgbClr val="5D6D7E"/>
+                          </a:solidFill>
+                          <a:latin typeface="Arial"/>
+                        </a:rPr>
+                        <a:t>55%</a:t>
+                      </a:r>
+                    </a:p>
+                  </a:txBody>
+                  <a:tcPr>
+                    <a:solidFill>
+                      <a:srgbClr val="FFFFFF"/>
+                    </a:solidFill>
+                  </a:tcPr>
+                </a:tc>
+                <a:tc>
+                  <a:txBody>
+                    <a:bodyPr/>
+                    <a:lstStyle/>
+                    <a:p>
+                      <a:pPr algn="r"/>
+                      <a:r>
+                        <a:rPr sz="1150" b="0">
+                          <a:solidFill>
+                            <a:srgbClr val="5D6D7E"/>
+                          </a:solidFill>
+                          <a:latin typeface="Arial"/>
+                        </a:rPr>
+                        <a:t>100%</a:t>
+                      </a:r>
+                    </a:p>
+                  </a:txBody>
+                  <a:tcPr>
+                    <a:solidFill>
+                      <a:srgbClr val="FFFFFF"/>
+                    </a:solidFill>
+                  </a:tcPr>
+                </a:tc>
+              </a:tr>
+              <a:tr h="310896">
+                <a:tc>
+                  <a:txBody>
+                    <a:bodyPr/>
+                    <a:lstStyle/>
+                    <a:p>
+                      <a:pPr algn="l"/>
+                      <a:r>
+                        <a:rPr sz="1150" b="0">
+                          <a:solidFill>
+                            <a:srgbClr val="5D6D7E"/>
+                          </a:solidFill>
+                          <a:latin typeface="Arial"/>
+                        </a:rPr>
+                        <a:t>Risk (b2)</a:t>
+                      </a:r>
+                    </a:p>
+                  </a:txBody>
+                  <a:tcPr>
+                    <a:solidFill>
+                      <a:srgbClr val="FFFFFF"/>
+                    </a:solidFill>
+                  </a:tcPr>
+                </a:tc>
+                <a:tc>
+                  <a:txBody>
+                    <a:bodyPr/>
+                    <a:lstStyle/>
+                    <a:p>
+                      <a:pPr algn="r"/>
+                      <a:r>
+                        <a:rPr sz="1150" b="0">
+                          <a:solidFill>
+                            <a:srgbClr val="5D6D7E"/>
+                          </a:solidFill>
+                          <a:latin typeface="Arial"/>
+                        </a:rPr>
+                        <a:t>4.26%</a:t>
+                      </a:r>
+                    </a:p>
+                  </a:txBody>
+                  <a:tcPr>
+                    <a:solidFill>
+                      <a:srgbClr val="FFFFFF"/>
+                    </a:solidFill>
+                  </a:tcPr>
+                </a:tc>
+                <a:tc>
+                  <a:txBody>
+                    <a:bodyPr/>
+                    <a:lstStyle/>
+                    <a:p>
+                      <a:pPr algn="r"/>
+                      <a:r>
+                        <a:rPr sz="1150" b="0">
+                          <a:solidFill>
+                            <a:srgbClr val="5D6D7E"/>
+                          </a:solidFill>
+                          <a:latin typeface="Arial"/>
+                        </a:rPr>
+                        <a:t>3.51%</a:t>
+                      </a:r>
+                    </a:p>
+                  </a:txBody>
+                  <a:tcPr>
+                    <a:solidFill>
+                      <a:srgbClr val="FFFFFF"/>
+                    </a:solidFill>
+                  </a:tcPr>
+                </a:tc>
+                <a:tc>
+                  <a:txBody>
+                    <a:bodyPr/>
+                    <a:lstStyle/>
+                    <a:p>
+                      <a:pPr algn="r"/>
+                      <a:r>
+                        <a:rPr sz="1150" b="0">
+                          <a:solidFill>
+                            <a:srgbClr val="5D6D7E"/>
+                          </a:solidFill>
+                          <a:latin typeface="Arial"/>
+                        </a:rPr>
+                        <a:t>3.85%</a:t>
+                      </a:r>
+                    </a:p>
+                  </a:txBody>
+                  <a:tcPr>
+                    <a:solidFill>
+                      <a:srgbClr val="FFFFFF"/>
+                    </a:solidFill>
+                  </a:tcPr>
+                </a:tc>
+              </a:tr>
+            </a:tbl>
+          </a:graphicData>
+        </a:graphic>
+      </p:graphicFrame>
       <p:sp>
         <p:nvSpPr>
           <p:cNvPr id="8" name="TextBox 7"/>
@@ -3587,725 +4877,8 @@
         </p:nvSpPr>
         <p:spPr>
           <a:xfrm>
-            <a:off x="1188720" y="1563624"/>
-            <a:ext cx="8863279" cy="274320"/>
-          </a:xfrm>
-          <a:prstGeom prst="rect">
-            <a:avLst/>
-          </a:prstGeom>
-          <a:noFill/>
-        </p:spPr>
-        <p:txBody>
-          <a:bodyPr wrap="square">
-            <a:spAutoFit/>
-          </a:bodyPr>
-          <a:lstStyle/>
-          <a:p>
-            <a:pPr algn="l">
-              <a:lnSpc>
-                <a:spcPct val="100000"/>
-              </a:lnSpc>
-            </a:pPr>
-            <a:r>
-              <a:rPr sz="1300" b="1">
-                <a:solidFill>
-                  <a:srgbClr val="2C3E50"/>
-                </a:solidFill>
-                <a:latin typeface="Arial"/>
-              </a:rPr>
-              <a:t>The problem: stores only have the score for Aug–Sep 2026</a:t>
-            </a:r>
-          </a:p>
-        </p:txBody>
-      </p:sp>
-      <p:sp>
-        <p:nvSpPr>
-          <p:cNvPr id="9" name="TextBox 8"/>
-          <p:cNvSpPr txBox="1"/>
-          <p:nvPr/>
-        </p:nvSpPr>
-        <p:spPr>
-          <a:xfrm>
-            <a:off x="1188720" y="1837944"/>
-            <a:ext cx="8863279" cy="603504"/>
-          </a:xfrm>
-          <a:prstGeom prst="rect">
-            <a:avLst/>
-          </a:prstGeom>
-          <a:noFill/>
-        </p:spPr>
-        <p:txBody>
-          <a:bodyPr wrap="square">
-            <a:spAutoFit/>
-          </a:bodyPr>
-          <a:lstStyle/>
-          <a:p>
-            <a:pPr algn="l">
-              <a:lnSpc>
-                <a:spcPct val="118000"/>
-              </a:lnSpc>
-            </a:pPr>
-            <a:r>
-              <a:rPr sz="1100" b="0">
-                <a:solidFill>
-                  <a:srgbClr val="5D6D7E"/>
-                </a:solidFill>
-                <a:latin typeface="Arial"/>
-              </a:rPr>
-              <a:t>The EFX score went live in stores in Aug 2026. Comparing 2 months on their own against a twelve-month average requires knowing what each month is worth.</a:t>
-            </a:r>
-          </a:p>
-        </p:txBody>
-      </p:sp>
-      <p:sp>
-        <p:nvSpPr>
-          <p:cNvPr id="10" name="TextBox 9"/>
-          <p:cNvSpPr txBox="1"/>
-          <p:nvPr/>
-        </p:nvSpPr>
-        <p:spPr>
-          <a:xfrm>
-            <a:off x="10161727" y="1581912"/>
-            <a:ext cx="1463040" cy="274320"/>
-          </a:xfrm>
-          <a:prstGeom prst="rect">
-            <a:avLst/>
-          </a:prstGeom>
-          <a:noFill/>
-        </p:spPr>
-        <p:txBody>
-          <a:bodyPr wrap="square">
-            <a:spAutoFit/>
-          </a:bodyPr>
-          <a:lstStyle/>
-          <a:p>
-            <a:pPr algn="r">
-              <a:lnSpc>
-                <a:spcPct val="100000"/>
-              </a:lnSpc>
-            </a:pPr>
-            <a:r>
-              <a:rPr sz="1000" b="1">
-                <a:solidFill>
-                  <a:srgbClr val="3498DB"/>
-                </a:solidFill>
-                <a:latin typeface="Arial"/>
-              </a:rPr>
-              <a:t>MEASURED</a:t>
-            </a:r>
-          </a:p>
-        </p:txBody>
-      </p:sp>
-      <p:sp>
-        <p:nvSpPr>
-          <p:cNvPr id="11" name="Rectangle 10"/>
-          <p:cNvSpPr/>
-          <p:nvPr/>
-        </p:nvSpPr>
-        <p:spPr>
-          <a:xfrm>
-            <a:off x="566928" y="2496312"/>
-            <a:ext cx="420624" cy="420624"/>
-          </a:xfrm>
-          <a:prstGeom prst="rect">
-            <a:avLst/>
-          </a:prstGeom>
-          <a:solidFill>
-            <a:srgbClr val="2C3E50"/>
-          </a:solidFill>
-          <a:ln>
-            <a:noFill/>
-          </a:ln>
-          <a:effectLst/>
-        </p:spPr>
-        <p:style>
-          <a:lnRef idx="1">
-            <a:schemeClr val="accent1"/>
-          </a:lnRef>
-          <a:fillRef idx="3">
-            <a:schemeClr val="accent1"/>
-          </a:fillRef>
-          <a:effectRef idx="2">
-            <a:schemeClr val="accent1"/>
-          </a:effectRef>
-          <a:fontRef idx="minor">
-            <a:schemeClr val="lt1"/>
-          </a:fontRef>
-        </p:style>
-        <p:txBody>
-          <a:bodyPr rtlCol="0" anchor="ctr"/>
-          <a:lstStyle/>
-          <a:p>
-            <a:pPr algn="ctr"/>
-          </a:p>
-        </p:txBody>
-      </p:sp>
-      <p:sp>
-        <p:nvSpPr>
-          <p:cNvPr id="12" name="TextBox 11"/>
-          <p:cNvSpPr txBox="1"/>
-          <p:nvPr/>
-        </p:nvSpPr>
-        <p:spPr>
-          <a:xfrm>
-            <a:off x="566928" y="2551176"/>
-            <a:ext cx="420624" cy="310896"/>
-          </a:xfrm>
-          <a:prstGeom prst="rect">
-            <a:avLst/>
-          </a:prstGeom>
-          <a:noFill/>
-        </p:spPr>
-        <p:txBody>
-          <a:bodyPr wrap="square">
-            <a:spAutoFit/>
-          </a:bodyPr>
-          <a:lstStyle/>
-          <a:p>
-            <a:pPr algn="ctr">
-              <a:lnSpc>
-                <a:spcPct val="100000"/>
-              </a:lnSpc>
-            </a:pPr>
-            <a:r>
-              <a:rPr sz="1400" b="1">
-                <a:solidFill>
-                  <a:srgbClr val="FFFFFF"/>
-                </a:solidFill>
-                <a:latin typeface="Arial"/>
-              </a:rPr>
-              <a:t>2</a:t>
-            </a:r>
-          </a:p>
-        </p:txBody>
-      </p:sp>
-      <p:sp>
-        <p:nvSpPr>
-          <p:cNvPr id="13" name="TextBox 12"/>
-          <p:cNvSpPr txBox="1"/>
-          <p:nvPr/>
-        </p:nvSpPr>
-        <p:spPr>
-          <a:xfrm>
-            <a:off x="1188720" y="2496312"/>
-            <a:ext cx="8863279" cy="274320"/>
-          </a:xfrm>
-          <a:prstGeom prst="rect">
-            <a:avLst/>
-          </a:prstGeom>
-          <a:noFill/>
-        </p:spPr>
-        <p:txBody>
-          <a:bodyPr wrap="square">
-            <a:spAutoFit/>
-          </a:bodyPr>
-          <a:lstStyle/>
-          <a:p>
-            <a:pPr algn="l">
-              <a:lnSpc>
-                <a:spcPct val="100000"/>
-              </a:lnSpc>
-            </a:pPr>
-            <a:r>
-              <a:rPr sz="1300" b="1">
-                <a:solidFill>
-                  <a:srgbClr val="2C3E50"/>
-                </a:solidFill>
-                <a:latin typeface="Arial"/>
-              </a:rPr>
-              <a:t>August and September: no average month, and each channel has its own</a:t>
-            </a:r>
-          </a:p>
-        </p:txBody>
-      </p:sp>
-      <p:sp>
-        <p:nvSpPr>
-          <p:cNvPr id="14" name="TextBox 13"/>
-          <p:cNvSpPr txBox="1"/>
-          <p:nvPr/>
-        </p:nvSpPr>
-        <p:spPr>
-          <a:xfrm>
-            <a:off x="1188720" y="2770632"/>
-            <a:ext cx="8863279" cy="603504"/>
-          </a:xfrm>
-          <a:prstGeom prst="rect">
-            <a:avLst/>
-          </a:prstGeom>
-          <a:noFill/>
-        </p:spPr>
-        <p:txBody>
-          <a:bodyPr wrap="square">
-            <a:spAutoFit/>
-          </a:bodyPr>
-          <a:lstStyle/>
-          <a:p>
-            <a:pPr algn="l">
-              <a:lnSpc>
-                <a:spcPct val="118000"/>
-              </a:lnSpc>
-            </a:pPr>
-            <a:r>
-              <a:rPr sz="1100" b="0">
-                <a:solidFill>
-                  <a:srgbClr val="5D6D7E"/>
-                </a:solidFill>
-                <a:latin typeface="Arial"/>
-              </a:rPr>
-              <a:t>Index for Aug and Sep: 0.49 / 2.03 in Online and 0.76 / 0.69 in stores. Online concentrates demand around the iPhone launch (Sep 2.03) and stores around Christmas (Dec 1.70). The correlation between the two profiles is 0.39: not the same pattern.</a:t>
-            </a:r>
-          </a:p>
-        </p:txBody>
-      </p:sp>
-      <p:sp>
-        <p:nvSpPr>
-          <p:cNvPr id="15" name="TextBox 14"/>
-          <p:cNvSpPr txBox="1"/>
-          <p:nvPr/>
-        </p:nvSpPr>
-        <p:spPr>
-          <a:xfrm>
-            <a:off x="10161727" y="2514600"/>
-            <a:ext cx="1463040" cy="274320"/>
-          </a:xfrm>
-          <a:prstGeom prst="rect">
-            <a:avLst/>
-          </a:prstGeom>
-          <a:noFill/>
-        </p:spPr>
-        <p:txBody>
-          <a:bodyPr wrap="square">
-            <a:spAutoFit/>
-          </a:bodyPr>
-          <a:lstStyle/>
-          <a:p>
-            <a:pPr algn="r">
-              <a:lnSpc>
-                <a:spcPct val="100000"/>
-              </a:lnSpc>
-            </a:pPr>
-            <a:r>
-              <a:rPr sz="1000" b="1">
-                <a:solidFill>
-                  <a:srgbClr val="3498DB"/>
-                </a:solidFill>
-                <a:latin typeface="Arial"/>
-              </a:rPr>
-              <a:t>MEASURED</a:t>
-            </a:r>
-          </a:p>
-        </p:txBody>
-      </p:sp>
-      <p:sp>
-        <p:nvSpPr>
-          <p:cNvPr id="16" name="Rectangle 15"/>
-          <p:cNvSpPr/>
-          <p:nvPr/>
-        </p:nvSpPr>
-        <p:spPr>
-          <a:xfrm>
-            <a:off x="566928" y="3429000"/>
-            <a:ext cx="420624" cy="420624"/>
-          </a:xfrm>
-          <a:prstGeom prst="rect">
-            <a:avLst/>
-          </a:prstGeom>
-          <a:solidFill>
-            <a:srgbClr val="2C3E50"/>
-          </a:solidFill>
-          <a:ln>
-            <a:noFill/>
-          </a:ln>
-          <a:effectLst/>
-        </p:spPr>
-        <p:style>
-          <a:lnRef idx="1">
-            <a:schemeClr val="accent1"/>
-          </a:lnRef>
-          <a:fillRef idx="3">
-            <a:schemeClr val="accent1"/>
-          </a:fillRef>
-          <a:effectRef idx="2">
-            <a:schemeClr val="accent1"/>
-          </a:effectRef>
-          <a:fontRef idx="minor">
-            <a:schemeClr val="lt1"/>
-          </a:fontRef>
-        </p:style>
-        <p:txBody>
-          <a:bodyPr rtlCol="0" anchor="ctr"/>
-          <a:lstStyle/>
-          <a:p>
-            <a:pPr algn="ctr"/>
-          </a:p>
-        </p:txBody>
-      </p:sp>
-      <p:sp>
-        <p:nvSpPr>
-          <p:cNvPr id="17" name="TextBox 16"/>
-          <p:cNvSpPr txBox="1"/>
-          <p:nvPr/>
-        </p:nvSpPr>
-        <p:spPr>
-          <a:xfrm>
-            <a:off x="566928" y="3483864"/>
-            <a:ext cx="420624" cy="310896"/>
-          </a:xfrm>
-          <a:prstGeom prst="rect">
-            <a:avLst/>
-          </a:prstGeom>
-          <a:noFill/>
-        </p:spPr>
-        <p:txBody>
-          <a:bodyPr wrap="square">
-            <a:spAutoFit/>
-          </a:bodyPr>
-          <a:lstStyle/>
-          <a:p>
-            <a:pPr algn="ctr">
-              <a:lnSpc>
-                <a:spcPct val="100000"/>
-              </a:lnSpc>
-            </a:pPr>
-            <a:r>
-              <a:rPr sz="1400" b="1">
-                <a:solidFill>
-                  <a:srgbClr val="FFFFFF"/>
-                </a:solidFill>
-                <a:latin typeface="Arial"/>
-              </a:rPr>
-              <a:t>3</a:t>
-            </a:r>
-          </a:p>
-        </p:txBody>
-      </p:sp>
-      <p:sp>
-        <p:nvSpPr>
-          <p:cNvPr id="18" name="TextBox 17"/>
-          <p:cNvSpPr txBox="1"/>
-          <p:nvPr/>
-        </p:nvSpPr>
-        <p:spPr>
-          <a:xfrm>
-            <a:off x="1188720" y="3429000"/>
-            <a:ext cx="8863279" cy="274320"/>
-          </a:xfrm>
-          <a:prstGeom prst="rect">
-            <a:avLst/>
-          </a:prstGeom>
-          <a:noFill/>
-        </p:spPr>
-        <p:txBody>
-          <a:bodyPr wrap="square">
-            <a:spAutoFit/>
-          </a:bodyPr>
-          <a:lstStyle/>
-          <a:p>
-            <a:pPr algn="l">
-              <a:lnSpc>
-                <a:spcPct val="100000"/>
-              </a:lnSpc>
-            </a:pPr>
-            <a:r>
-              <a:rPr sz="1300" b="1">
-                <a:solidFill>
-                  <a:srgbClr val="2C3E50"/>
-                </a:solidFill>
-                <a:latin typeface="Arial"/>
-              </a:rPr>
-              <a:t>Effective months instead of calendar months</a:t>
-            </a:r>
-          </a:p>
-        </p:txBody>
-      </p:sp>
-      <p:sp>
-        <p:nvSpPr>
-          <p:cNvPr id="19" name="TextBox 18"/>
-          <p:cNvSpPr txBox="1"/>
-          <p:nvPr/>
-        </p:nvSpPr>
-        <p:spPr>
-          <a:xfrm>
-            <a:off x="1188720" y="3703320"/>
-            <a:ext cx="8863279" cy="603504"/>
-          </a:xfrm>
-          <a:prstGeom prst="rect">
-            <a:avLst/>
-          </a:prstGeom>
-          <a:noFill/>
-        </p:spPr>
-        <p:txBody>
-          <a:bodyPr wrap="square">
-            <a:spAutoFit/>
-          </a:bodyPr>
-          <a:lstStyle/>
-          <a:p>
-            <a:pPr algn="l">
-              <a:lnSpc>
-                <a:spcPct val="118000"/>
-              </a:lnSpc>
-            </a:pPr>
-            <a:r>
-              <a:rPr sz="1100" b="0">
-                <a:solidFill>
-                  <a:srgbClr val="5D6D7E"/>
-                </a:solidFill>
-                <a:latin typeface="Arial"/>
-              </a:rPr>
-              <a:t>The run-rate is divided not by the number of months but by the sum of the seasonal index over the months covered. A full calendar year sums to 12.00 and changes nothing; the stores window (Aug–Sep 2026) sums to 1.45 and corrects for falling in weak store months.</a:t>
-            </a:r>
-          </a:p>
-        </p:txBody>
-      </p:sp>
-      <p:sp>
-        <p:nvSpPr>
-          <p:cNvPr id="20" name="TextBox 19"/>
-          <p:cNvSpPr txBox="1"/>
-          <p:nvPr/>
-        </p:nvSpPr>
-        <p:spPr>
-          <a:xfrm>
-            <a:off x="10161727" y="3447288"/>
-            <a:ext cx="1463040" cy="274320"/>
-          </a:xfrm>
-          <a:prstGeom prst="rect">
-            <a:avLst/>
-          </a:prstGeom>
-          <a:noFill/>
-        </p:spPr>
-        <p:txBody>
-          <a:bodyPr wrap="square">
-            <a:spAutoFit/>
-          </a:bodyPr>
-          <a:lstStyle/>
-          <a:p>
-            <a:pPr algn="r">
-              <a:lnSpc>
-                <a:spcPct val="100000"/>
-              </a:lnSpc>
-            </a:pPr>
-            <a:r>
-              <a:rPr sz="1000" b="1">
-                <a:solidFill>
-                  <a:srgbClr val="5D6D7E"/>
-                </a:solidFill>
-                <a:latin typeface="Arial"/>
-              </a:rPr>
-              <a:t>CORRECTED</a:t>
-            </a:r>
-          </a:p>
-        </p:txBody>
-      </p:sp>
-      <p:sp>
-        <p:nvSpPr>
-          <p:cNvPr id="21" name="Rectangle 20"/>
-          <p:cNvSpPr/>
-          <p:nvPr/>
-        </p:nvSpPr>
-        <p:spPr>
-          <a:xfrm>
-            <a:off x="566928" y="4361688"/>
-            <a:ext cx="420624" cy="420624"/>
-          </a:xfrm>
-          <a:prstGeom prst="rect">
-            <a:avLst/>
-          </a:prstGeom>
-          <a:solidFill>
-            <a:srgbClr val="2C3E50"/>
-          </a:solidFill>
-          <a:ln>
-            <a:noFill/>
-          </a:ln>
-          <a:effectLst/>
-        </p:spPr>
-        <p:style>
-          <a:lnRef idx="1">
-            <a:schemeClr val="accent1"/>
-          </a:lnRef>
-          <a:fillRef idx="3">
-            <a:schemeClr val="accent1"/>
-          </a:fillRef>
-          <a:effectRef idx="2">
-            <a:schemeClr val="accent1"/>
-          </a:effectRef>
-          <a:fontRef idx="minor">
-            <a:schemeClr val="lt1"/>
-          </a:fontRef>
-        </p:style>
-        <p:txBody>
-          <a:bodyPr rtlCol="0" anchor="ctr"/>
-          <a:lstStyle/>
-          <a:p>
-            <a:pPr algn="ctr"/>
-          </a:p>
-        </p:txBody>
-      </p:sp>
-      <p:sp>
-        <p:nvSpPr>
-          <p:cNvPr id="22" name="TextBox 21"/>
-          <p:cNvSpPr txBox="1"/>
-          <p:nvPr/>
-        </p:nvSpPr>
-        <p:spPr>
-          <a:xfrm>
-            <a:off x="566928" y="4416552"/>
-            <a:ext cx="420624" cy="310896"/>
-          </a:xfrm>
-          <a:prstGeom prst="rect">
-            <a:avLst/>
-          </a:prstGeom>
-          <a:noFill/>
-        </p:spPr>
-        <p:txBody>
-          <a:bodyPr wrap="square">
-            <a:spAutoFit/>
-          </a:bodyPr>
-          <a:lstStyle/>
-          <a:p>
-            <a:pPr algn="ctr">
-              <a:lnSpc>
-                <a:spcPct val="100000"/>
-              </a:lnSpc>
-            </a:pPr>
-            <a:r>
-              <a:rPr sz="1400" b="1">
-                <a:solidFill>
-                  <a:srgbClr val="FFFFFF"/>
-                </a:solidFill>
-                <a:latin typeface="Arial"/>
-              </a:rPr>
-              <a:t>4</a:t>
-            </a:r>
-          </a:p>
-        </p:txBody>
-      </p:sp>
-      <p:sp>
-        <p:nvSpPr>
-          <p:cNvPr id="23" name="TextBox 22"/>
-          <p:cNvSpPr txBox="1"/>
-          <p:nvPr/>
-        </p:nvSpPr>
-        <p:spPr>
-          <a:xfrm>
-            <a:off x="1188720" y="4361688"/>
-            <a:ext cx="8863279" cy="274320"/>
-          </a:xfrm>
-          <a:prstGeom prst="rect">
-            <a:avLst/>
-          </a:prstGeom>
-          <a:noFill/>
-        </p:spPr>
-        <p:txBody>
-          <a:bodyPr wrap="square">
-            <a:spAutoFit/>
-          </a:bodyPr>
-          <a:lstStyle/>
-          <a:p>
-            <a:pPr algn="l">
-              <a:lnSpc>
-                <a:spcPct val="100000"/>
-              </a:lnSpc>
-            </a:pPr>
-            <a:r>
-              <a:rPr sz="1300" b="1">
-                <a:solidFill>
-                  <a:srgbClr val="2C3E50"/>
-                </a:solidFill>
-                <a:latin typeface="Arial"/>
-              </a:rPr>
-              <a:t>Effect on stores' weight in Apple Total</a:t>
-            </a:r>
-          </a:p>
-        </p:txBody>
-      </p:sp>
-      <p:sp>
-        <p:nvSpPr>
-          <p:cNvPr id="24" name="TextBox 23"/>
-          <p:cNvSpPr txBox="1"/>
-          <p:nvPr/>
-        </p:nvSpPr>
-        <p:spPr>
-          <a:xfrm>
-            <a:off x="1188720" y="4636008"/>
-            <a:ext cx="8863279" cy="603504"/>
-          </a:xfrm>
-          <a:prstGeom prst="rect">
-            <a:avLst/>
-          </a:prstGeom>
-          <a:noFill/>
-        </p:spPr>
-        <p:txBody>
-          <a:bodyPr wrap="square">
-            <a:spAutoFit/>
-          </a:bodyPr>
-          <a:lstStyle/>
-          <a:p>
-            <a:pPr algn="l">
-              <a:lnSpc>
-                <a:spcPct val="118000"/>
-              </a:lnSpc>
-            </a:pPr>
-            <a:r>
-              <a:rPr sz="1100" b="0">
-                <a:solidFill>
-                  <a:srgbClr val="5D6D7E"/>
-                </a:solidFill>
-                <a:latin typeface="Arial"/>
-              </a:rPr>
-              <a:t>Uncorrected, stores appeared to be 23% of demand. With their own seasonality they are 29%. Had Online's profile been applied —the only option before stores' history was available— we would have said 19%, and every scenario would show less production than there really is.</a:t>
-            </a:r>
-          </a:p>
-        </p:txBody>
-      </p:sp>
-      <p:sp>
-        <p:nvSpPr>
-          <p:cNvPr id="25" name="TextBox 24"/>
-          <p:cNvSpPr txBox="1"/>
-          <p:nvPr/>
-        </p:nvSpPr>
-        <p:spPr>
-          <a:xfrm>
-            <a:off x="10161727" y="4379976"/>
-            <a:ext cx="1463040" cy="274320"/>
-          </a:xfrm>
-          <a:prstGeom prst="rect">
-            <a:avLst/>
-          </a:prstGeom>
-          <a:noFill/>
-        </p:spPr>
-        <p:txBody>
-          <a:bodyPr wrap="square">
-            <a:spAutoFit/>
-          </a:bodyPr>
-          <a:lstStyle/>
-          <a:p>
-            <a:pPr algn="r">
-              <a:lnSpc>
-                <a:spcPct val="100000"/>
-              </a:lnSpc>
-            </a:pPr>
-            <a:r>
-              <a:rPr sz="1000" b="1">
-                <a:solidFill>
-                  <a:srgbClr val="3498DB"/>
-                </a:solidFill>
-                <a:latin typeface="Arial"/>
-              </a:rPr>
-              <a:t>MEASURED</a:t>
-            </a:r>
-          </a:p>
-        </p:txBody>
-      </p:sp>
-      <p:sp>
-        <p:nvSpPr>
-          <p:cNvPr id="26" name="TextBox 25"/>
-          <p:cNvSpPr txBox="1"/>
-          <p:nvPr/>
-        </p:nvSpPr>
-        <p:spPr>
-          <a:xfrm>
-            <a:off x="566928" y="5806440"/>
-            <a:ext cx="11057839" cy="822960"/>
+            <a:off x="7699248" y="3611880"/>
+            <a:ext cx="3886200" cy="1463040"/>
           </a:xfrm>
           <a:prstGeom prst="rect">
             <a:avLst/>
@@ -4324,13 +4897,161 @@
               </a:lnSpc>
             </a:pPr>
             <a:r>
-              <a:rPr sz="1150" b="0">
+              <a:rPr sz="1050" b="0">
                 <a:solidFill>
                   <a:srgbClr val="5D6D7E"/>
                 </a:solidFill>
                 <a:latin typeface="Arial"/>
               </a:rPr>
-              <a:t>The index averages complete calendar years, so year-on-year volume growth is not mistaken for seasonality. What remains open is whether the Aug–Sep 2026 mix in stores is representative of the year.</a:t>
+              <a:t>Risk blends by expected H6 exposure, the base of b2: stores are 29% of demand but 55% of exposure, because they convert 61% of what they are asked for and Online 21%. Online's 4.26% carries the reject-inference uplift on its own book (realized 4.18%).</a:t>
+            </a:r>
+          </a:p>
+        </p:txBody>
+      </p:sp>
+      <p:sp>
+        <p:nvSpPr>
+          <p:cNvPr id="9" name="TextBox 8"/>
+          <p:cNvSpPr txBox="1"/>
+          <p:nvPr/>
+        </p:nvSpPr>
+        <p:spPr>
+          <a:xfrm>
+            <a:off x="566928" y="4215384"/>
+            <a:ext cx="6858000" cy="2276856"/>
+          </a:xfrm>
+          <a:prstGeom prst="rect">
+            <a:avLst/>
+          </a:prstGeom>
+          <a:noFill/>
+        </p:spPr>
+        <p:txBody>
+          <a:bodyPr wrap="square">
+            <a:spAutoFit/>
+          </a:bodyPr>
+          <a:lstStyle/>
+          <a:p>
+            <a:pPr>
+              <a:spcAft>
+                <a:spcPts val="900"/>
+              </a:spcAft>
+            </a:pPr>
+            <a:r>
+              <a:rPr sz="1050" b="1">
+                <a:solidFill>
+                  <a:srgbClr val="2C3E50"/>
+                </a:solidFill>
+                <a:latin typeface="Arial"/>
+              </a:rPr>
+              <a:t>1 · Score and bin.  </a:t>
+            </a:r>
+            <a:r>
+              <a:rPr sz="1050">
+                <a:solidFill>
+                  <a:srgbClr val="5D6D7E"/>
+                </a:solidFill>
+                <a:latin typeface="Arial"/>
+              </a:rPr>
+              <a:t>Every application gets its EFX score and one of the 20 bins of the Online curve.</a:t>
+            </a:r>
+          </a:p>
+          <a:p>
+            <a:pPr>
+              <a:spcAft>
+                <a:spcPts val="900"/>
+              </a:spcAft>
+            </a:pPr>
+            <a:r>
+              <a:rPr sz="1050" b="1">
+                <a:solidFill>
+                  <a:srgbClr val="2C3E50"/>
+                </a:solidFill>
+                <a:latin typeface="Arial"/>
+              </a:rPr>
+              <a:t>2 · Apply the Online grid.  </a:t>
+            </a:r>
+            <a:r>
+              <a:rPr sz="1050">
+                <a:solidFill>
+                  <a:srgbClr val="5D6D7E"/>
+                </a:solidFill>
+                <a:latin typeface="Arial"/>
+              </a:rPr>
+              <a:t>Accepted if above its group's reject threshold and not rejected by another rule — only the score rule is swapped; the engine's other rules stay.</a:t>
+            </a:r>
+          </a:p>
+          <a:p>
+            <a:pPr>
+              <a:spcAft>
+                <a:spcPts val="900"/>
+              </a:spcAft>
+            </a:pPr>
+            <a:r>
+              <a:rPr sz="1050" b="1">
+                <a:solidFill>
+                  <a:srgbClr val="2C3E50"/>
+                </a:solidFill>
+                <a:latin typeface="Arial"/>
+              </a:rPr>
+              <a:t>3 · Expected production.  </a:t>
+            </a:r>
+            <a:r>
+              <a:rPr sz="1050">
+                <a:solidFill>
+                  <a:srgbClr val="5D6D7E"/>
+                </a:solidFill>
+                <a:latin typeface="Arial"/>
+              </a:rPr>
+              <a:t>€ applied for × the actual take-up of its engine decision (stores: approved 82%, referred 18%); cancellations are assumed to behave as today.</a:t>
+            </a:r>
+          </a:p>
+          <a:p>
+            <a:pPr>
+              <a:spcAft>
+                <a:spcPts val="900"/>
+              </a:spcAft>
+            </a:pPr>
+            <a:r>
+              <a:rPr sz="1050" b="1">
+                <a:solidFill>
+                  <a:srgbClr val="2C3E50"/>
+                </a:solidFill>
+                <a:latin typeface="Arial"/>
+              </a:rPr>
+              <a:t>4 · Impute risk.  </a:t>
+            </a:r>
+            <a:r>
+              <a:rPr sz="1050">
+                <a:solidFill>
+                  <a:srgbClr val="5D6D7E"/>
+                </a:solidFill>
+                <a:latin typeface="Arial"/>
+              </a:rPr>
+              <a:t>Each accepted € takes its bin's Online risk (reject-inference blended), weighted by expected H6 exposure; the level is rescaled by 0.952 so that today's store book reproduces its realized 3.74%.</a:t>
+            </a:r>
+          </a:p>
+          <a:p>
+            <a:pPr>
+              <a:spcAft>
+                <a:spcPts val="900"/>
+              </a:spcAft>
+            </a:pPr>
+            <a:r>
+              <a:rPr sz="1050" b="1">
+                <a:solidFill>
+                  <a:srgbClr val="2C3E50"/>
+                </a:solidFill>
+                <a:latin typeface="Arial"/>
+              </a:rPr>
+              <a:t>5 · What the grid leaves out.  </a:t>
+            </a:r>
+            <a:r>
+              <a:rPr sz="1050">
+                <a:solidFill>
+                  <a:srgbClr val="5D6D7E"/>
+                </a:solidFill>
+                <a:latin typeface="Arial"/>
+              </a:rPr>
+              <a:t>The swap-out is 2.0% of demand with 48% imputed risk (median EFX 19): the octroi's weakest approvals. The swap-in brings 19.3% of demand at 4.1%.</a:t>
             </a:r>
           </a:p>
         </p:txBody>
@@ -4387,7 +5108,7 @@
                 </a:solidFill>
                 <a:latin typeface="Arial"/>
               </a:rPr>
-              <a:t>APPENDIX · THE ENGINE OF THE STUDY</a:t>
+              <a:t>METHODOLOGY · SEASONALITY</a:t>
             </a:r>
           </a:p>
         </p:txBody>
@@ -4426,7 +5147,7 @@
                 </a:solidFill>
                 <a:latin typeface="Arial"/>
               </a:rPr>
-              <a:t>Originations Mar 2025 – Feb 2026</a:t>
+              <a:t>Full years 2024 and 2025</a:t>
             </a:r>
           </a:p>
         </p:txBody>
@@ -4465,7 +5186,7 @@
                 </a:solidFill>
                 <a:latin typeface="Arial"/>
               </a:rPr>
-              <a:t>The EFX score ranks risk in e-commerce</a:t>
+              <a:t>How months are annualised</a:t>
             </a:r>
           </a:p>
         </p:txBody>
@@ -4514,30 +5235,50 @@
           </a:p>
         </p:txBody>
       </p:sp>
-      <p:pic>
-        <p:nvPicPr>
-          <p:cNvPr id="6" name="Picture 5" descr="curve.png"/>
-          <p:cNvPicPr>
-            <a:picLocks noChangeAspect="1"/>
-          </p:cNvPicPr>
+      <p:sp>
+        <p:nvSpPr>
+          <p:cNvPr id="6" name="Rectangle 5"/>
+          <p:cNvSpPr/>
           <p:nvPr/>
-        </p:nvPicPr>
-        <p:blipFill>
-          <a:blip r:embed="rId2"/>
-          <a:stretch>
-            <a:fillRect/>
-          </a:stretch>
-        </p:blipFill>
-        <p:spPr>
-          <a:xfrm>
-            <a:off x="1798613" y="1563624"/>
-            <a:ext cx="8594469" cy="4425696"/>
+        </p:nvSpPr>
+        <p:spPr>
+          <a:xfrm>
+            <a:off x="566928" y="1563624"/>
+            <a:ext cx="420624" cy="420624"/>
           </a:xfrm>
           <a:prstGeom prst="rect">
             <a:avLst/>
           </a:prstGeom>
-        </p:spPr>
-      </p:pic>
+          <a:solidFill>
+            <a:srgbClr val="2C3E50"/>
+          </a:solidFill>
+          <a:ln>
+            <a:noFill/>
+          </a:ln>
+          <a:effectLst/>
+        </p:spPr>
+        <p:style>
+          <a:lnRef idx="1">
+            <a:schemeClr val="accent1"/>
+          </a:lnRef>
+          <a:fillRef idx="3">
+            <a:schemeClr val="accent1"/>
+          </a:fillRef>
+          <a:effectRef idx="2">
+            <a:schemeClr val="accent1"/>
+          </a:effectRef>
+          <a:fontRef idx="minor">
+            <a:schemeClr val="lt1"/>
+          </a:fontRef>
+        </p:style>
+        <p:txBody>
+          <a:bodyPr rtlCol="0" anchor="ctr"/>
+          <a:lstStyle/>
+          <a:p>
+            <a:pPr algn="ctr"/>
+          </a:p>
+        </p:txBody>
+      </p:sp>
       <p:sp>
         <p:nvSpPr>
           <p:cNvPr id="7" name="TextBox 6"/>
@@ -4546,8 +5287,764 @@
         </p:nvSpPr>
         <p:spPr>
           <a:xfrm>
-            <a:off x="566928" y="6071616"/>
-            <a:ext cx="11057839" cy="548640"/>
+            <a:off x="566928" y="1618488"/>
+            <a:ext cx="420624" cy="310896"/>
+          </a:xfrm>
+          <a:prstGeom prst="rect">
+            <a:avLst/>
+          </a:prstGeom>
+          <a:noFill/>
+        </p:spPr>
+        <p:txBody>
+          <a:bodyPr wrap="square">
+            <a:spAutoFit/>
+          </a:bodyPr>
+          <a:lstStyle/>
+          <a:p>
+            <a:pPr algn="ctr">
+              <a:lnSpc>
+                <a:spcPct val="100000"/>
+              </a:lnSpc>
+            </a:pPr>
+            <a:r>
+              <a:rPr sz="1400" b="1">
+                <a:solidFill>
+                  <a:srgbClr val="FFFFFF"/>
+                </a:solidFill>
+                <a:latin typeface="Arial"/>
+              </a:rPr>
+              <a:t>1</a:t>
+            </a:r>
+          </a:p>
+        </p:txBody>
+      </p:sp>
+      <p:sp>
+        <p:nvSpPr>
+          <p:cNvPr id="8" name="TextBox 7"/>
+          <p:cNvSpPr txBox="1"/>
+          <p:nvPr/>
+        </p:nvSpPr>
+        <p:spPr>
+          <a:xfrm>
+            <a:off x="1188720" y="1563624"/>
+            <a:ext cx="8863279" cy="274320"/>
+          </a:xfrm>
+          <a:prstGeom prst="rect">
+            <a:avLst/>
+          </a:prstGeom>
+          <a:noFill/>
+        </p:spPr>
+        <p:txBody>
+          <a:bodyPr wrap="square">
+            <a:spAutoFit/>
+          </a:bodyPr>
+          <a:lstStyle/>
+          <a:p>
+            <a:pPr algn="l">
+              <a:lnSpc>
+                <a:spcPct val="100000"/>
+              </a:lnSpc>
+            </a:pPr>
+            <a:r>
+              <a:rPr sz="1300" b="1">
+                <a:solidFill>
+                  <a:srgbClr val="2C3E50"/>
+                </a:solidFill>
+                <a:latin typeface="Arial"/>
+              </a:rPr>
+              <a:t>The problem: stores only have the score for Aug–Sep 2026</a:t>
+            </a:r>
+          </a:p>
+        </p:txBody>
+      </p:sp>
+      <p:sp>
+        <p:nvSpPr>
+          <p:cNvPr id="9" name="TextBox 8"/>
+          <p:cNvSpPr txBox="1"/>
+          <p:nvPr/>
+        </p:nvSpPr>
+        <p:spPr>
+          <a:xfrm>
+            <a:off x="1188720" y="1837944"/>
+            <a:ext cx="8863279" cy="603504"/>
+          </a:xfrm>
+          <a:prstGeom prst="rect">
+            <a:avLst/>
+          </a:prstGeom>
+          <a:noFill/>
+        </p:spPr>
+        <p:txBody>
+          <a:bodyPr wrap="square">
+            <a:spAutoFit/>
+          </a:bodyPr>
+          <a:lstStyle/>
+          <a:p>
+            <a:pPr algn="l">
+              <a:lnSpc>
+                <a:spcPct val="118000"/>
+              </a:lnSpc>
+            </a:pPr>
+            <a:r>
+              <a:rPr sz="1100" b="0">
+                <a:solidFill>
+                  <a:srgbClr val="5D6D7E"/>
+                </a:solidFill>
+                <a:latin typeface="Arial"/>
+              </a:rPr>
+              <a:t>The EFX score went live in stores in Aug 2026. Comparing 2 months on their own against a twelve-month average requires knowing what each month is worth.</a:t>
+            </a:r>
+          </a:p>
+        </p:txBody>
+      </p:sp>
+      <p:sp>
+        <p:nvSpPr>
+          <p:cNvPr id="10" name="TextBox 9"/>
+          <p:cNvSpPr txBox="1"/>
+          <p:nvPr/>
+        </p:nvSpPr>
+        <p:spPr>
+          <a:xfrm>
+            <a:off x="10161727" y="1581912"/>
+            <a:ext cx="1463040" cy="274320"/>
+          </a:xfrm>
+          <a:prstGeom prst="rect">
+            <a:avLst/>
+          </a:prstGeom>
+          <a:noFill/>
+        </p:spPr>
+        <p:txBody>
+          <a:bodyPr wrap="square">
+            <a:spAutoFit/>
+          </a:bodyPr>
+          <a:lstStyle/>
+          <a:p>
+            <a:pPr algn="r">
+              <a:lnSpc>
+                <a:spcPct val="100000"/>
+              </a:lnSpc>
+            </a:pPr>
+            <a:r>
+              <a:rPr sz="1000" b="1">
+                <a:solidFill>
+                  <a:srgbClr val="3498DB"/>
+                </a:solidFill>
+                <a:latin typeface="Arial"/>
+              </a:rPr>
+              <a:t>MEASURED</a:t>
+            </a:r>
+          </a:p>
+        </p:txBody>
+      </p:sp>
+      <p:sp>
+        <p:nvSpPr>
+          <p:cNvPr id="11" name="Rectangle 10"/>
+          <p:cNvSpPr/>
+          <p:nvPr/>
+        </p:nvSpPr>
+        <p:spPr>
+          <a:xfrm>
+            <a:off x="566928" y="2496312"/>
+            <a:ext cx="420624" cy="420624"/>
+          </a:xfrm>
+          <a:prstGeom prst="rect">
+            <a:avLst/>
+          </a:prstGeom>
+          <a:solidFill>
+            <a:srgbClr val="2C3E50"/>
+          </a:solidFill>
+          <a:ln>
+            <a:noFill/>
+          </a:ln>
+          <a:effectLst/>
+        </p:spPr>
+        <p:style>
+          <a:lnRef idx="1">
+            <a:schemeClr val="accent1"/>
+          </a:lnRef>
+          <a:fillRef idx="3">
+            <a:schemeClr val="accent1"/>
+          </a:fillRef>
+          <a:effectRef idx="2">
+            <a:schemeClr val="accent1"/>
+          </a:effectRef>
+          <a:fontRef idx="minor">
+            <a:schemeClr val="lt1"/>
+          </a:fontRef>
+        </p:style>
+        <p:txBody>
+          <a:bodyPr rtlCol="0" anchor="ctr"/>
+          <a:lstStyle/>
+          <a:p>
+            <a:pPr algn="ctr"/>
+          </a:p>
+        </p:txBody>
+      </p:sp>
+      <p:sp>
+        <p:nvSpPr>
+          <p:cNvPr id="12" name="TextBox 11"/>
+          <p:cNvSpPr txBox="1"/>
+          <p:nvPr/>
+        </p:nvSpPr>
+        <p:spPr>
+          <a:xfrm>
+            <a:off x="566928" y="2551176"/>
+            <a:ext cx="420624" cy="310896"/>
+          </a:xfrm>
+          <a:prstGeom prst="rect">
+            <a:avLst/>
+          </a:prstGeom>
+          <a:noFill/>
+        </p:spPr>
+        <p:txBody>
+          <a:bodyPr wrap="square">
+            <a:spAutoFit/>
+          </a:bodyPr>
+          <a:lstStyle/>
+          <a:p>
+            <a:pPr algn="ctr">
+              <a:lnSpc>
+                <a:spcPct val="100000"/>
+              </a:lnSpc>
+            </a:pPr>
+            <a:r>
+              <a:rPr sz="1400" b="1">
+                <a:solidFill>
+                  <a:srgbClr val="FFFFFF"/>
+                </a:solidFill>
+                <a:latin typeface="Arial"/>
+              </a:rPr>
+              <a:t>2</a:t>
+            </a:r>
+          </a:p>
+        </p:txBody>
+      </p:sp>
+      <p:sp>
+        <p:nvSpPr>
+          <p:cNvPr id="13" name="TextBox 12"/>
+          <p:cNvSpPr txBox="1"/>
+          <p:nvPr/>
+        </p:nvSpPr>
+        <p:spPr>
+          <a:xfrm>
+            <a:off x="1188720" y="2496312"/>
+            <a:ext cx="8863279" cy="274320"/>
+          </a:xfrm>
+          <a:prstGeom prst="rect">
+            <a:avLst/>
+          </a:prstGeom>
+          <a:noFill/>
+        </p:spPr>
+        <p:txBody>
+          <a:bodyPr wrap="square">
+            <a:spAutoFit/>
+          </a:bodyPr>
+          <a:lstStyle/>
+          <a:p>
+            <a:pPr algn="l">
+              <a:lnSpc>
+                <a:spcPct val="100000"/>
+              </a:lnSpc>
+            </a:pPr>
+            <a:r>
+              <a:rPr sz="1300" b="1">
+                <a:solidFill>
+                  <a:srgbClr val="2C3E50"/>
+                </a:solidFill>
+                <a:latin typeface="Arial"/>
+              </a:rPr>
+              <a:t>August and September: no average month, and each channel has its own</a:t>
+            </a:r>
+          </a:p>
+        </p:txBody>
+      </p:sp>
+      <p:sp>
+        <p:nvSpPr>
+          <p:cNvPr id="14" name="TextBox 13"/>
+          <p:cNvSpPr txBox="1"/>
+          <p:nvPr/>
+        </p:nvSpPr>
+        <p:spPr>
+          <a:xfrm>
+            <a:off x="1188720" y="2770632"/>
+            <a:ext cx="8863279" cy="603504"/>
+          </a:xfrm>
+          <a:prstGeom prst="rect">
+            <a:avLst/>
+          </a:prstGeom>
+          <a:noFill/>
+        </p:spPr>
+        <p:txBody>
+          <a:bodyPr wrap="square">
+            <a:spAutoFit/>
+          </a:bodyPr>
+          <a:lstStyle/>
+          <a:p>
+            <a:pPr algn="l">
+              <a:lnSpc>
+                <a:spcPct val="118000"/>
+              </a:lnSpc>
+            </a:pPr>
+            <a:r>
+              <a:rPr sz="1100" b="0">
+                <a:solidFill>
+                  <a:srgbClr val="5D6D7E"/>
+                </a:solidFill>
+                <a:latin typeface="Arial"/>
+              </a:rPr>
+              <a:t>Index for Aug and Sep: 0.49 / 2.03 in Online and 0.76 / 0.69 in stores. Online concentrates demand around the iPhone launch (Sep 2.03) and stores around Christmas (Dec 1.70). The correlation between the two profiles is 0.39: not the same pattern.</a:t>
+            </a:r>
+          </a:p>
+        </p:txBody>
+      </p:sp>
+      <p:sp>
+        <p:nvSpPr>
+          <p:cNvPr id="15" name="TextBox 14"/>
+          <p:cNvSpPr txBox="1"/>
+          <p:nvPr/>
+        </p:nvSpPr>
+        <p:spPr>
+          <a:xfrm>
+            <a:off x="10161727" y="2514600"/>
+            <a:ext cx="1463040" cy="274320"/>
+          </a:xfrm>
+          <a:prstGeom prst="rect">
+            <a:avLst/>
+          </a:prstGeom>
+          <a:noFill/>
+        </p:spPr>
+        <p:txBody>
+          <a:bodyPr wrap="square">
+            <a:spAutoFit/>
+          </a:bodyPr>
+          <a:lstStyle/>
+          <a:p>
+            <a:pPr algn="r">
+              <a:lnSpc>
+                <a:spcPct val="100000"/>
+              </a:lnSpc>
+            </a:pPr>
+            <a:r>
+              <a:rPr sz="1000" b="1">
+                <a:solidFill>
+                  <a:srgbClr val="3498DB"/>
+                </a:solidFill>
+                <a:latin typeface="Arial"/>
+              </a:rPr>
+              <a:t>MEASURED</a:t>
+            </a:r>
+          </a:p>
+        </p:txBody>
+      </p:sp>
+      <p:sp>
+        <p:nvSpPr>
+          <p:cNvPr id="16" name="Rectangle 15"/>
+          <p:cNvSpPr/>
+          <p:nvPr/>
+        </p:nvSpPr>
+        <p:spPr>
+          <a:xfrm>
+            <a:off x="566928" y="3429000"/>
+            <a:ext cx="420624" cy="420624"/>
+          </a:xfrm>
+          <a:prstGeom prst="rect">
+            <a:avLst/>
+          </a:prstGeom>
+          <a:solidFill>
+            <a:srgbClr val="2C3E50"/>
+          </a:solidFill>
+          <a:ln>
+            <a:noFill/>
+          </a:ln>
+          <a:effectLst/>
+        </p:spPr>
+        <p:style>
+          <a:lnRef idx="1">
+            <a:schemeClr val="accent1"/>
+          </a:lnRef>
+          <a:fillRef idx="3">
+            <a:schemeClr val="accent1"/>
+          </a:fillRef>
+          <a:effectRef idx="2">
+            <a:schemeClr val="accent1"/>
+          </a:effectRef>
+          <a:fontRef idx="minor">
+            <a:schemeClr val="lt1"/>
+          </a:fontRef>
+        </p:style>
+        <p:txBody>
+          <a:bodyPr rtlCol="0" anchor="ctr"/>
+          <a:lstStyle/>
+          <a:p>
+            <a:pPr algn="ctr"/>
+          </a:p>
+        </p:txBody>
+      </p:sp>
+      <p:sp>
+        <p:nvSpPr>
+          <p:cNvPr id="17" name="TextBox 16"/>
+          <p:cNvSpPr txBox="1"/>
+          <p:nvPr/>
+        </p:nvSpPr>
+        <p:spPr>
+          <a:xfrm>
+            <a:off x="566928" y="3483864"/>
+            <a:ext cx="420624" cy="310896"/>
+          </a:xfrm>
+          <a:prstGeom prst="rect">
+            <a:avLst/>
+          </a:prstGeom>
+          <a:noFill/>
+        </p:spPr>
+        <p:txBody>
+          <a:bodyPr wrap="square">
+            <a:spAutoFit/>
+          </a:bodyPr>
+          <a:lstStyle/>
+          <a:p>
+            <a:pPr algn="ctr">
+              <a:lnSpc>
+                <a:spcPct val="100000"/>
+              </a:lnSpc>
+            </a:pPr>
+            <a:r>
+              <a:rPr sz="1400" b="1">
+                <a:solidFill>
+                  <a:srgbClr val="FFFFFF"/>
+                </a:solidFill>
+                <a:latin typeface="Arial"/>
+              </a:rPr>
+              <a:t>3</a:t>
+            </a:r>
+          </a:p>
+        </p:txBody>
+      </p:sp>
+      <p:sp>
+        <p:nvSpPr>
+          <p:cNvPr id="18" name="TextBox 17"/>
+          <p:cNvSpPr txBox="1"/>
+          <p:nvPr/>
+        </p:nvSpPr>
+        <p:spPr>
+          <a:xfrm>
+            <a:off x="1188720" y="3429000"/>
+            <a:ext cx="8863279" cy="274320"/>
+          </a:xfrm>
+          <a:prstGeom prst="rect">
+            <a:avLst/>
+          </a:prstGeom>
+          <a:noFill/>
+        </p:spPr>
+        <p:txBody>
+          <a:bodyPr wrap="square">
+            <a:spAutoFit/>
+          </a:bodyPr>
+          <a:lstStyle/>
+          <a:p>
+            <a:pPr algn="l">
+              <a:lnSpc>
+                <a:spcPct val="100000"/>
+              </a:lnSpc>
+            </a:pPr>
+            <a:r>
+              <a:rPr sz="1300" b="1">
+                <a:solidFill>
+                  <a:srgbClr val="2C3E50"/>
+                </a:solidFill>
+                <a:latin typeface="Arial"/>
+              </a:rPr>
+              <a:t>Effective months instead of calendar months</a:t>
+            </a:r>
+          </a:p>
+        </p:txBody>
+      </p:sp>
+      <p:sp>
+        <p:nvSpPr>
+          <p:cNvPr id="19" name="TextBox 18"/>
+          <p:cNvSpPr txBox="1"/>
+          <p:nvPr/>
+        </p:nvSpPr>
+        <p:spPr>
+          <a:xfrm>
+            <a:off x="1188720" y="3703320"/>
+            <a:ext cx="8863279" cy="603504"/>
+          </a:xfrm>
+          <a:prstGeom prst="rect">
+            <a:avLst/>
+          </a:prstGeom>
+          <a:noFill/>
+        </p:spPr>
+        <p:txBody>
+          <a:bodyPr wrap="square">
+            <a:spAutoFit/>
+          </a:bodyPr>
+          <a:lstStyle/>
+          <a:p>
+            <a:pPr algn="l">
+              <a:lnSpc>
+                <a:spcPct val="118000"/>
+              </a:lnSpc>
+            </a:pPr>
+            <a:r>
+              <a:rPr sz="1100" b="0">
+                <a:solidFill>
+                  <a:srgbClr val="5D6D7E"/>
+                </a:solidFill>
+                <a:latin typeface="Arial"/>
+              </a:rPr>
+              <a:t>The run-rate is divided not by the number of months but by the sum of the seasonal index over the months covered. A full calendar year sums to 12.00 and changes nothing; the stores window (Aug–Sep 2026) sums to 1.45 and corrects for falling in weak store months.</a:t>
+            </a:r>
+          </a:p>
+        </p:txBody>
+      </p:sp>
+      <p:sp>
+        <p:nvSpPr>
+          <p:cNvPr id="20" name="TextBox 19"/>
+          <p:cNvSpPr txBox="1"/>
+          <p:nvPr/>
+        </p:nvSpPr>
+        <p:spPr>
+          <a:xfrm>
+            <a:off x="10161727" y="3447288"/>
+            <a:ext cx="1463040" cy="274320"/>
+          </a:xfrm>
+          <a:prstGeom prst="rect">
+            <a:avLst/>
+          </a:prstGeom>
+          <a:noFill/>
+        </p:spPr>
+        <p:txBody>
+          <a:bodyPr wrap="square">
+            <a:spAutoFit/>
+          </a:bodyPr>
+          <a:lstStyle/>
+          <a:p>
+            <a:pPr algn="r">
+              <a:lnSpc>
+                <a:spcPct val="100000"/>
+              </a:lnSpc>
+            </a:pPr>
+            <a:r>
+              <a:rPr sz="1000" b="1">
+                <a:solidFill>
+                  <a:srgbClr val="5D6D7E"/>
+                </a:solidFill>
+                <a:latin typeface="Arial"/>
+              </a:rPr>
+              <a:t>CORRECTED</a:t>
+            </a:r>
+          </a:p>
+        </p:txBody>
+      </p:sp>
+      <p:sp>
+        <p:nvSpPr>
+          <p:cNvPr id="21" name="Rectangle 20"/>
+          <p:cNvSpPr/>
+          <p:nvPr/>
+        </p:nvSpPr>
+        <p:spPr>
+          <a:xfrm>
+            <a:off x="566928" y="4361688"/>
+            <a:ext cx="420624" cy="420624"/>
+          </a:xfrm>
+          <a:prstGeom prst="rect">
+            <a:avLst/>
+          </a:prstGeom>
+          <a:solidFill>
+            <a:srgbClr val="2C3E50"/>
+          </a:solidFill>
+          <a:ln>
+            <a:noFill/>
+          </a:ln>
+          <a:effectLst/>
+        </p:spPr>
+        <p:style>
+          <a:lnRef idx="1">
+            <a:schemeClr val="accent1"/>
+          </a:lnRef>
+          <a:fillRef idx="3">
+            <a:schemeClr val="accent1"/>
+          </a:fillRef>
+          <a:effectRef idx="2">
+            <a:schemeClr val="accent1"/>
+          </a:effectRef>
+          <a:fontRef idx="minor">
+            <a:schemeClr val="lt1"/>
+          </a:fontRef>
+        </p:style>
+        <p:txBody>
+          <a:bodyPr rtlCol="0" anchor="ctr"/>
+          <a:lstStyle/>
+          <a:p>
+            <a:pPr algn="ctr"/>
+          </a:p>
+        </p:txBody>
+      </p:sp>
+      <p:sp>
+        <p:nvSpPr>
+          <p:cNvPr id="22" name="TextBox 21"/>
+          <p:cNvSpPr txBox="1"/>
+          <p:nvPr/>
+        </p:nvSpPr>
+        <p:spPr>
+          <a:xfrm>
+            <a:off x="566928" y="4416552"/>
+            <a:ext cx="420624" cy="310896"/>
+          </a:xfrm>
+          <a:prstGeom prst="rect">
+            <a:avLst/>
+          </a:prstGeom>
+          <a:noFill/>
+        </p:spPr>
+        <p:txBody>
+          <a:bodyPr wrap="square">
+            <a:spAutoFit/>
+          </a:bodyPr>
+          <a:lstStyle/>
+          <a:p>
+            <a:pPr algn="ctr">
+              <a:lnSpc>
+                <a:spcPct val="100000"/>
+              </a:lnSpc>
+            </a:pPr>
+            <a:r>
+              <a:rPr sz="1400" b="1">
+                <a:solidFill>
+                  <a:srgbClr val="FFFFFF"/>
+                </a:solidFill>
+                <a:latin typeface="Arial"/>
+              </a:rPr>
+              <a:t>4</a:t>
+            </a:r>
+          </a:p>
+        </p:txBody>
+      </p:sp>
+      <p:sp>
+        <p:nvSpPr>
+          <p:cNvPr id="23" name="TextBox 22"/>
+          <p:cNvSpPr txBox="1"/>
+          <p:nvPr/>
+        </p:nvSpPr>
+        <p:spPr>
+          <a:xfrm>
+            <a:off x="1188720" y="4361688"/>
+            <a:ext cx="8863279" cy="274320"/>
+          </a:xfrm>
+          <a:prstGeom prst="rect">
+            <a:avLst/>
+          </a:prstGeom>
+          <a:noFill/>
+        </p:spPr>
+        <p:txBody>
+          <a:bodyPr wrap="square">
+            <a:spAutoFit/>
+          </a:bodyPr>
+          <a:lstStyle/>
+          <a:p>
+            <a:pPr algn="l">
+              <a:lnSpc>
+                <a:spcPct val="100000"/>
+              </a:lnSpc>
+            </a:pPr>
+            <a:r>
+              <a:rPr sz="1300" b="1">
+                <a:solidFill>
+                  <a:srgbClr val="2C3E50"/>
+                </a:solidFill>
+                <a:latin typeface="Arial"/>
+              </a:rPr>
+              <a:t>Effect on stores' weight in Apple Total</a:t>
+            </a:r>
+          </a:p>
+        </p:txBody>
+      </p:sp>
+      <p:sp>
+        <p:nvSpPr>
+          <p:cNvPr id="24" name="TextBox 23"/>
+          <p:cNvSpPr txBox="1"/>
+          <p:nvPr/>
+        </p:nvSpPr>
+        <p:spPr>
+          <a:xfrm>
+            <a:off x="1188720" y="4636008"/>
+            <a:ext cx="8863279" cy="603504"/>
+          </a:xfrm>
+          <a:prstGeom prst="rect">
+            <a:avLst/>
+          </a:prstGeom>
+          <a:noFill/>
+        </p:spPr>
+        <p:txBody>
+          <a:bodyPr wrap="square">
+            <a:spAutoFit/>
+          </a:bodyPr>
+          <a:lstStyle/>
+          <a:p>
+            <a:pPr algn="l">
+              <a:lnSpc>
+                <a:spcPct val="118000"/>
+              </a:lnSpc>
+            </a:pPr>
+            <a:r>
+              <a:rPr sz="1100" b="0">
+                <a:solidFill>
+                  <a:srgbClr val="5D6D7E"/>
+                </a:solidFill>
+                <a:latin typeface="Arial"/>
+              </a:rPr>
+              <a:t>Uncorrected, stores appeared to be 23% of demand. With their own seasonality they are 29%. Had Online's profile been applied —the only option before stores' history was available— we would have said 19%, and every scenario would show less production than there really is.</a:t>
+            </a:r>
+          </a:p>
+        </p:txBody>
+      </p:sp>
+      <p:sp>
+        <p:nvSpPr>
+          <p:cNvPr id="25" name="TextBox 24"/>
+          <p:cNvSpPr txBox="1"/>
+          <p:nvPr/>
+        </p:nvSpPr>
+        <p:spPr>
+          <a:xfrm>
+            <a:off x="10161727" y="4379976"/>
+            <a:ext cx="1463040" cy="274320"/>
+          </a:xfrm>
+          <a:prstGeom prst="rect">
+            <a:avLst/>
+          </a:prstGeom>
+          <a:noFill/>
+        </p:spPr>
+        <p:txBody>
+          <a:bodyPr wrap="square">
+            <a:spAutoFit/>
+          </a:bodyPr>
+          <a:lstStyle/>
+          <a:p>
+            <a:pPr algn="r">
+              <a:lnSpc>
+                <a:spcPct val="100000"/>
+              </a:lnSpc>
+            </a:pPr>
+            <a:r>
+              <a:rPr sz="1000" b="1">
+                <a:solidFill>
+                  <a:srgbClr val="3498DB"/>
+                </a:solidFill>
+                <a:latin typeface="Arial"/>
+              </a:rPr>
+              <a:t>MEASURED</a:t>
+            </a:r>
+          </a:p>
+        </p:txBody>
+      </p:sp>
+      <p:sp>
+        <p:nvSpPr>
+          <p:cNvPr id="26" name="TextBox 25"/>
+          <p:cNvSpPr txBox="1"/>
+          <p:nvPr/>
+        </p:nvSpPr>
+        <p:spPr>
+          <a:xfrm>
+            <a:off x="566928" y="5806440"/>
+            <a:ext cx="11057839" cy="822960"/>
           </a:xfrm>
           <a:prstGeom prst="rect">
             <a:avLst/>
@@ -4572,7 +6069,7 @@
                 </a:solidFill>
                 <a:latin typeface="Arial"/>
               </a:rPr>
-              <a:t>The risk curve by bin is the only measured piece of the study. Everything else —store risk, the scenarios— derives from it.</a:t>
+              <a:t>The index averages complete calendar years, so year-on-year volume growth is not mistaken for seasonality. What remains open is whether the Aug–Sep 2026 mix in stores is representative of the year.</a:t>
             </a:r>
           </a:p>
         </p:txBody>
@@ -4629,7 +6126,7 @@
                 </a:solidFill>
                 <a:latin typeface="Arial"/>
               </a:rPr>
-              <a:t>APPENDIX · BREAKDOWN BY SEGMENT</a:t>
+              <a:t>APPENDIX · THE ENGINE OF THE STUDY</a:t>
             </a:r>
           </a:p>
         </p:txBody>
@@ -4668,7 +6165,7 @@
                 </a:solidFill>
                 <a:latin typeface="Arial"/>
               </a:rPr>
-              <a:t>Stores Aug–Sep 2026</a:t>
+              <a:t>Originations Mar 2025 – Feb 2026</a:t>
             </a:r>
           </a:p>
         </p:txBody>
@@ -4707,7 +6204,7 @@
                 </a:solidFill>
                 <a:latin typeface="Arial"/>
               </a:rPr>
-              <a:t>Where the stores improvement comes from</a:t>
+              <a:t>The EFX score ranks risk in e-commerce</a:t>
             </a:r>
           </a:p>
         </p:txBody>
@@ -4758,7 +6255,7 @@
       </p:sp>
       <p:pic>
         <p:nvPicPr>
-          <p:cNvPr id="6" name="Picture 5" descr="stores_segments.png"/>
+          <p:cNvPr id="6" name="Picture 5" descr="curve.png"/>
           <p:cNvPicPr>
             <a:picLocks noChangeAspect="1"/>
           </p:cNvPicPr>
@@ -4772,8 +6269,8 @@
         </p:blipFill>
         <p:spPr>
           <a:xfrm>
-            <a:off x="648653" y="1563624"/>
-            <a:ext cx="10894388" cy="4425696"/>
+            <a:off x="1798613" y="1563624"/>
+            <a:ext cx="8594469" cy="4425696"/>
           </a:xfrm>
           <a:prstGeom prst="rect">
             <a:avLst/>
@@ -4814,7 +6311,7 @@
                 </a:solidFill>
                 <a:latin typeface="Arial"/>
               </a:rPr>
-              <a:t>'New' is 81% of store demand and where risk falls. Take-up is measured by segment and by engine decision (approved / referred). '&gt;=G' is absent: it is always rejected, so it has neither acceptance nor risk.</a:t>
+              <a:t>The risk curve by bin is the only measured piece of the study. Everything else —store risk, the scenarios— derives from it.</a:t>
             </a:r>
           </a:p>
         </p:txBody>
@@ -4871,7 +6368,7 @@
                 </a:solidFill>
                 <a:latin typeface="Arial"/>
               </a:rPr>
-              <a:t>APPENDIX · ANNUALISATION</a:t>
+              <a:t>APPENDIX · BREAKDOWN BY SEGMENT</a:t>
             </a:r>
           </a:p>
         </p:txBody>
@@ -4910,7 +6407,7 @@
                 </a:solidFill>
                 <a:latin typeface="Arial"/>
               </a:rPr>
-              <a:t>Full years 2024 and 2025</a:t>
+              <a:t>Stores Aug–Sep 2026</a:t>
             </a:r>
           </a:p>
         </p:txBody>
@@ -4949,7 +6446,7 @@
                 </a:solidFill>
                 <a:latin typeface="Arial"/>
               </a:rPr>
-              <a:t>The two channels do not share a seasonality</a:t>
+              <a:t>Where the stores improvement comes from</a:t>
             </a:r>
           </a:p>
         </p:txBody>
@@ -5000,6 +6497,248 @@
       </p:sp>
       <p:pic>
         <p:nvPicPr>
+          <p:cNvPr id="6" name="Picture 5" descr="stores_segments.png"/>
+          <p:cNvPicPr>
+            <a:picLocks noChangeAspect="1"/>
+          </p:cNvPicPr>
+          <p:nvPr/>
+        </p:nvPicPr>
+        <p:blipFill>
+          <a:blip r:embed="rId2"/>
+          <a:stretch>
+            <a:fillRect/>
+          </a:stretch>
+        </p:blipFill>
+        <p:spPr>
+          <a:xfrm>
+            <a:off x="648653" y="1563624"/>
+            <a:ext cx="10894388" cy="4425696"/>
+          </a:xfrm>
+          <a:prstGeom prst="rect">
+            <a:avLst/>
+          </a:prstGeom>
+        </p:spPr>
+      </p:pic>
+      <p:sp>
+        <p:nvSpPr>
+          <p:cNvPr id="7" name="TextBox 6"/>
+          <p:cNvSpPr txBox="1"/>
+          <p:nvPr/>
+        </p:nvSpPr>
+        <p:spPr>
+          <a:xfrm>
+            <a:off x="566928" y="6071616"/>
+            <a:ext cx="11057839" cy="548640"/>
+          </a:xfrm>
+          <a:prstGeom prst="rect">
+            <a:avLst/>
+          </a:prstGeom>
+          <a:noFill/>
+        </p:spPr>
+        <p:txBody>
+          <a:bodyPr wrap="square">
+            <a:spAutoFit/>
+          </a:bodyPr>
+          <a:lstStyle/>
+          <a:p>
+            <a:pPr algn="l">
+              <a:lnSpc>
+                <a:spcPct val="120000"/>
+              </a:lnSpc>
+            </a:pPr>
+            <a:r>
+              <a:rPr sz="1150" b="0">
+                <a:solidFill>
+                  <a:srgbClr val="5D6D7E"/>
+                </a:solidFill>
+                <a:latin typeface="Arial"/>
+              </a:rPr>
+              <a:t>'New' is 81% of store demand and where risk falls. Take-up is measured by segment and by engine decision (approved / referred). '&gt;=G' is absent: it is always rejected, so it has neither acceptance nor risk.</a:t>
+            </a:r>
+          </a:p>
+        </p:txBody>
+      </p:sp>
+    </p:spTree>
+  </p:cSld>
+  <p:clrMapOvr>
+    <a:masterClrMapping/>
+  </p:clrMapOvr>
+</p:sld>
+</file>
+
+<file path=ppt/slides/slide14.xml><?xml version="1.0" encoding="utf-8"?>
+<p:sld xmlns:a="http://schemas.openxmlformats.org/drawingml/2006/main" xmlns:p="http://schemas.openxmlformats.org/presentationml/2006/main" xmlns:r="http://schemas.openxmlformats.org/officeDocument/2006/relationships">
+  <p:cSld>
+    <p:spTree>
+      <p:nvGrpSpPr>
+        <p:cNvPr id="1" name=""/>
+        <p:cNvGrpSpPr/>
+        <p:nvPr/>
+      </p:nvGrpSpPr>
+      <p:grpSpPr/>
+      <p:sp>
+        <p:nvSpPr>
+          <p:cNvPr id="2" name="TextBox 1"/>
+          <p:cNvSpPr txBox="1"/>
+          <p:nvPr/>
+        </p:nvSpPr>
+        <p:spPr>
+          <a:xfrm>
+            <a:off x="566928" y="384048"/>
+            <a:ext cx="6400800" cy="274320"/>
+          </a:xfrm>
+          <a:prstGeom prst="rect">
+            <a:avLst/>
+          </a:prstGeom>
+          <a:noFill/>
+        </p:spPr>
+        <p:txBody>
+          <a:bodyPr wrap="square">
+            <a:spAutoFit/>
+          </a:bodyPr>
+          <a:lstStyle/>
+          <a:p>
+            <a:pPr algn="l">
+              <a:lnSpc>
+                <a:spcPct val="100000"/>
+              </a:lnSpc>
+            </a:pPr>
+            <a:r>
+              <a:rPr sz="1100" b="1">
+                <a:solidFill>
+                  <a:srgbClr val="3498DB"/>
+                </a:solidFill>
+                <a:latin typeface="Arial"/>
+              </a:rPr>
+              <a:t>APPENDIX · ANNUALISATION</a:t>
+            </a:r>
+          </a:p>
+        </p:txBody>
+      </p:sp>
+      <p:sp>
+        <p:nvSpPr>
+          <p:cNvPr id="3" name="TextBox 2"/>
+          <p:cNvSpPr txBox="1"/>
+          <p:nvPr/>
+        </p:nvSpPr>
+        <p:spPr>
+          <a:xfrm>
+            <a:off x="6869887" y="384048"/>
+            <a:ext cx="4754880" cy="274320"/>
+          </a:xfrm>
+          <a:prstGeom prst="rect">
+            <a:avLst/>
+          </a:prstGeom>
+          <a:noFill/>
+        </p:spPr>
+        <p:txBody>
+          <a:bodyPr wrap="square">
+            <a:spAutoFit/>
+          </a:bodyPr>
+          <a:lstStyle/>
+          <a:p>
+            <a:pPr algn="r">
+              <a:lnSpc>
+                <a:spcPct val="100000"/>
+              </a:lnSpc>
+            </a:pPr>
+            <a:r>
+              <a:rPr sz="1100" b="0">
+                <a:solidFill>
+                  <a:srgbClr val="5D6D7E"/>
+                </a:solidFill>
+                <a:latin typeface="Arial"/>
+              </a:rPr>
+              <a:t>Full years 2024 and 2025</a:t>
+            </a:r>
+          </a:p>
+        </p:txBody>
+      </p:sp>
+      <p:sp>
+        <p:nvSpPr>
+          <p:cNvPr id="4" name="TextBox 3"/>
+          <p:cNvSpPr txBox="1"/>
+          <p:nvPr/>
+        </p:nvSpPr>
+        <p:spPr>
+          <a:xfrm>
+            <a:off x="566928" y="694944"/>
+            <a:ext cx="11057839" cy="548640"/>
+          </a:xfrm>
+          <a:prstGeom prst="rect">
+            <a:avLst/>
+          </a:prstGeom>
+          <a:noFill/>
+        </p:spPr>
+        <p:txBody>
+          <a:bodyPr wrap="square">
+            <a:spAutoFit/>
+          </a:bodyPr>
+          <a:lstStyle/>
+          <a:p>
+            <a:pPr algn="l">
+              <a:lnSpc>
+                <a:spcPct val="100000"/>
+              </a:lnSpc>
+            </a:pPr>
+            <a:r>
+              <a:rPr sz="2600" b="1">
+                <a:solidFill>
+                  <a:srgbClr val="2C3E50"/>
+                </a:solidFill>
+                <a:latin typeface="Arial"/>
+              </a:rPr>
+              <a:t>The two channels do not share a seasonality</a:t>
+            </a:r>
+          </a:p>
+        </p:txBody>
+      </p:sp>
+      <p:sp>
+        <p:nvSpPr>
+          <p:cNvPr id="5" name="Rectangle 4"/>
+          <p:cNvSpPr/>
+          <p:nvPr/>
+        </p:nvSpPr>
+        <p:spPr>
+          <a:xfrm>
+            <a:off x="566928" y="1353312"/>
+            <a:ext cx="11057839" cy="9525"/>
+          </a:xfrm>
+          <a:prstGeom prst="rect">
+            <a:avLst/>
+          </a:prstGeom>
+          <a:solidFill>
+            <a:srgbClr val="E5E7EB"/>
+          </a:solidFill>
+          <a:ln>
+            <a:noFill/>
+          </a:ln>
+          <a:effectLst/>
+        </p:spPr>
+        <p:style>
+          <a:lnRef idx="1">
+            <a:schemeClr val="accent1"/>
+          </a:lnRef>
+          <a:fillRef idx="3">
+            <a:schemeClr val="accent1"/>
+          </a:fillRef>
+          <a:effectRef idx="2">
+            <a:schemeClr val="accent1"/>
+          </a:effectRef>
+          <a:fontRef idx="minor">
+            <a:schemeClr val="lt1"/>
+          </a:fontRef>
+        </p:style>
+        <p:txBody>
+          <a:bodyPr rtlCol="0" anchor="ctr"/>
+          <a:lstStyle/>
+          <a:p>
+            <a:pPr algn="ctr"/>
+          </a:p>
+        </p:txBody>
+      </p:sp>
+      <p:pic>
+        <p:nvPicPr>
           <p:cNvPr id="6" name="Picture 5" descr="seasonality.png"/>
           <p:cNvPicPr>
             <a:picLocks noChangeAspect="1"/>
@@ -5069,7 +6808,7 @@
 </p:sld>
 </file>
 
-<file path=ppt/slides/slide14.xml><?xml version="1.0" encoding="utf-8"?>
+<file path=ppt/slides/slide15.xml><?xml version="1.0" encoding="utf-8"?>
 <p:sld xmlns:a="http://schemas.openxmlformats.org/drawingml/2006/main" xmlns:p="http://schemas.openxmlformats.org/presentationml/2006/main" xmlns:r="http://schemas.openxmlformats.org/officeDocument/2006/relationships">
   <p:cSld>
     <p:spTree>

--- a/output/apple_deck/Apple_EFX_Study.pptx
+++ b/output/apple_deck/Apple_EFX_Study.pptx
@@ -3911,7 +3911,7 @@
                           </a:solidFill>
                           <a:latin typeface="Arial"/>
                         </a:rPr>
-                        <a:t>stays out: rejected by score, below cutoff</a:t>
+                        <a:t>rejected by both scores (today, and by EFX)</a:t>
                       </a:r>
                     </a:p>
                   </a:txBody>

--- a/output/apple_deck/Apple_EFX_Study.pptx
+++ b/output/apple_deck/Apple_EFX_Study.pptx
@@ -3507,7 +3507,7 @@
         </p:nvGraphicFramePr>
         <p:xfrm>
           <a:off x="566928" y="1563624"/>
-          <a:ext cx="6858000" cy="2487168"/>
+          <a:ext cx="6858000" cy="2468880"/>
         </p:xfrm>
         <a:graphic>
           <a:graphicData uri="http://schemas.openxmlformats.org/drawingml/2006/table">
@@ -3521,7 +3521,7 @@
                 <a:gridCol w="1371600"/>
                 <a:gridCol w="1280160"/>
               </a:tblGrid>
-              <a:tr h="310896">
+              <a:tr h="274320">
                 <a:tc>
                   <a:txBody>
                     <a:bodyPr/>
@@ -3584,6 +3584,18 @@
                         <a:t>Exp. production</a:t>
                       </a:r>
                     </a:p>
+                    <a:p>
+                      <a:pPr algn="r"/>
+                      <a:r>
+                        <a:rPr sz="1150" b="1">
+                          <a:solidFill>
+                            <a:srgbClr val="2C3E50"/>
+                          </a:solidFill>
+                          <a:latin typeface="Arial"/>
+                        </a:rPr>
+                        <a:t>Aug–Sep 2026</a:t>
+                      </a:r>
+                    </a:p>
                   </a:txBody>
                   <a:tcPr>
                     <a:solidFill>
@@ -3615,7 +3627,7 @@
                   </a:tcPr>
                 </a:tc>
               </a:tr>
-              <a:tr h="310896">
+              <a:tr h="274320">
                 <a:tc>
                   <a:txBody>
                     <a:bodyPr/>
@@ -3709,7 +3721,7 @@
                   </a:tcPr>
                 </a:tc>
               </a:tr>
-              <a:tr h="310896">
+              <a:tr h="274320">
                 <a:tc>
                   <a:txBody>
                     <a:bodyPr/>
@@ -3803,7 +3815,7 @@
                   </a:tcPr>
                 </a:tc>
               </a:tr>
-              <a:tr h="310896">
+              <a:tr h="274320">
                 <a:tc>
                   <a:txBody>
                     <a:bodyPr/>
@@ -3897,7 +3909,7 @@
                   </a:tcPr>
                 </a:tc>
               </a:tr>
-              <a:tr h="310896">
+              <a:tr h="274320">
                 <a:tc>
                   <a:txBody>
                     <a:bodyPr/>
@@ -3991,7 +4003,7 @@
                   </a:tcPr>
                 </a:tc>
               </a:tr>
-              <a:tr h="310896">
+              <a:tr h="274320">
                 <a:tc>
                   <a:txBody>
                     <a:bodyPr/>
@@ -4085,7 +4097,7 @@
                   </a:tcPr>
                 </a:tc>
               </a:tr>
-              <a:tr h="310896">
+              <a:tr h="274320">
                 <a:tc>
                   <a:txBody>
                     <a:bodyPr/>
@@ -4179,7 +4191,83 @@
                   </a:tcPr>
                 </a:tc>
               </a:tr>
-              <a:tr h="310896">
+              <a:tr h="274320">
+                <a:tc>
+                  <a:txBody>
+                    <a:bodyPr/>
+                    <a:lstStyle/>
+                    <a:p>
+                      <a:pPr algn="l"/>
+                      <a:r>
+                        <a:rPr sz="1150" b="0">
+                          <a:solidFill>
+                            <a:srgbClr val="5D6D7E"/>
+                          </a:solidFill>
+                          <a:latin typeface="Arial"/>
+                        </a:rPr>
+                        <a:t>= monthly run-rate (÷ 1.45 effective months)</a:t>
+                      </a:r>
+                    </a:p>
+                  </a:txBody>
+                  <a:tcPr>
+                    <a:solidFill>
+                      <a:srgbClr val="FFFFFF"/>
+                    </a:solidFill>
+                  </a:tcPr>
+                </a:tc>
+                <a:tc>
+                  <a:txBody>
+                    <a:bodyPr/>
+                    <a:lstStyle/>
+                    <a:p>
+                      <a:pPr algn="r"/>
+                    </a:p>
+                  </a:txBody>
+                  <a:tcPr>
+                    <a:solidFill>
+                      <a:srgbClr val="FFFFFF"/>
+                    </a:solidFill>
+                  </a:tcPr>
+                </a:tc>
+                <a:tc>
+                  <a:txBody>
+                    <a:bodyPr/>
+                    <a:lstStyle/>
+                    <a:p>
+                      <a:pPr algn="r"/>
+                      <a:r>
+                        <a:rPr sz="1150" b="0">
+                          <a:solidFill>
+                            <a:srgbClr val="5D6D7E"/>
+                          </a:solidFill>
+                          <a:latin typeface="Arial"/>
+                        </a:rPr>
+                        <a:t>€10.1M/mo</a:t>
+                      </a:r>
+                    </a:p>
+                  </a:txBody>
+                  <a:tcPr>
+                    <a:solidFill>
+                      <a:srgbClr val="FFFFFF"/>
+                    </a:solidFill>
+                  </a:tcPr>
+                </a:tc>
+                <a:tc>
+                  <a:txBody>
+                    <a:bodyPr/>
+                    <a:lstStyle/>
+                    <a:p>
+                      <a:pPr algn="r"/>
+                    </a:p>
+                  </a:txBody>
+                  <a:tcPr>
+                    <a:solidFill>
+                      <a:srgbClr val="FFFFFF"/>
+                    </a:solidFill>
+                  </a:tcPr>
+                </a:tc>
+              </a:tr>
+              <a:tr h="274320">
                 <a:tc>
                   <a:txBody>
                     <a:bodyPr/>
@@ -4878,7 +4966,7 @@
         <p:spPr>
           <a:xfrm>
             <a:off x="7699248" y="3611880"/>
-            <a:ext cx="3886200" cy="1463040"/>
+            <a:ext cx="3886200" cy="2194560"/>
           </a:xfrm>
           <a:prstGeom prst="rect">
             <a:avLst/>
@@ -4903,7 +4991,7 @@
                 </a:solidFill>
                 <a:latin typeface="Arial"/>
               </a:rPr>
-              <a:t>Risk blends by expected H6 exposure, the base of b2: stores are 29% of demand but 55% of exposure, because they convert 61% of what they are asked for and Online 21%. Online's 4.26% carries the reject-inference uplift on its own book (realized 4.18%).</a:t>
+              <a:t>Window totals become a run-rate by dividing by effective months: €14.6M over Aug–Sep 2026 ÷ 1.45 = €10.1M/mo — not ÷ 2, because Aug and Sep are weak store months (index 0.76 / 0.69). Risk blends by expected H6 exposure, the base of b2: stores are 29% of demand but 55% of exposure, because they convert 61% of what they are asked for and Online 21%. Online's 4.26% carries the reject-inference uplift on its own book (realized 4.18%).</a:t>
             </a:r>
           </a:p>
         </p:txBody>
@@ -4916,8 +5004,8 @@
         </p:nvSpPr>
         <p:spPr>
           <a:xfrm>
-            <a:off x="566928" y="4215384"/>
-            <a:ext cx="6858000" cy="2276856"/>
+            <a:off x="566928" y="4306823"/>
+            <a:ext cx="6858000" cy="2185417"/>
           </a:xfrm>
           <a:prstGeom prst="rect">
             <a:avLst/>

--- a/output/apple_deck/Apple_EFX_Study.pptx
+++ b/output/apple_deck/Apple_EFX_Study.pptx
@@ -4157,7 +4157,7 @@
                           </a:solidFill>
                           <a:latin typeface="Arial"/>
                         </a:rPr>
-                        <a:t>€14.6M</a:t>
+                        <a:t>€14.6M (61.2%)</a:t>
                       </a:r>
                     </a:p>
                   </a:txBody>
@@ -4281,53 +4281,53 @@
                           </a:solidFill>
                           <a:latin typeface="Arial"/>
                         </a:rPr>
-                        <a:t>Today's book, valued the same way</a:t>
-                      </a:r>
-                    </a:p>
-                  </a:txBody>
-                  <a:tcPr>
-                    <a:solidFill>
-                      <a:srgbClr val="FFFFFF"/>
-                    </a:solidFill>
-                  </a:tcPr>
-                </a:tc>
-                <a:tc>
-                  <a:txBody>
-                    <a:bodyPr/>
-                    <a:lstStyle/>
-                    <a:p>
-                      <a:pPr algn="r"/>
-                      <a:r>
-                        <a:rPr sz="1150" b="0">
-                          <a:solidFill>
-                            <a:srgbClr val="5D6D7E"/>
-                          </a:solidFill>
-                          <a:latin typeface="Arial"/>
-                        </a:rPr>
-                        <a:t>47.2%</a:t>
-                      </a:r>
-                    </a:p>
-                  </a:txBody>
-                  <a:tcPr>
-                    <a:solidFill>
-                      <a:srgbClr val="FFFFFF"/>
-                    </a:solidFill>
-                  </a:tcPr>
-                </a:tc>
-                <a:tc>
-                  <a:txBody>
-                    <a:bodyPr/>
-                    <a:lstStyle/>
-                    <a:p>
-                      <a:pPr algn="r"/>
-                      <a:r>
-                        <a:rPr sz="1150" b="0">
-                          <a:solidFill>
-                            <a:srgbClr val="5D6D7E"/>
-                          </a:solidFill>
-                          <a:latin typeface="Arial"/>
-                        </a:rPr>
-                        <a:t>€11.3M</a:t>
+                        <a:t>Engine today: approved → booked</a:t>
+                      </a:r>
+                    </a:p>
+                  </a:txBody>
+                  <a:tcPr>
+                    <a:solidFill>
+                      <a:srgbClr val="FFFFFF"/>
+                    </a:solidFill>
+                  </a:tcPr>
+                </a:tc>
+                <a:tc>
+                  <a:txBody>
+                    <a:bodyPr/>
+                    <a:lstStyle/>
+                    <a:p>
+                      <a:pPr algn="r"/>
+                      <a:r>
+                        <a:rPr sz="1150" b="0">
+                          <a:solidFill>
+                            <a:srgbClr val="5D6D7E"/>
+                          </a:solidFill>
+                          <a:latin typeface="Arial"/>
+                        </a:rPr>
+                        <a:t>58.8%</a:t>
+                      </a:r>
+                    </a:p>
+                  </a:txBody>
+                  <a:tcPr>
+                    <a:solidFill>
+                      <a:srgbClr val="FFFFFF"/>
+                    </a:solidFill>
+                  </a:tcPr>
+                </a:tc>
+                <a:tc>
+                  <a:txBody>
+                    <a:bodyPr/>
+                    <a:lstStyle/>
+                    <a:p>
+                      <a:pPr algn="r"/>
+                      <a:r>
+                        <a:rPr sz="1150" b="0">
+                          <a:solidFill>
+                            <a:srgbClr val="5D6D7E"/>
+                          </a:solidFill>
+                          <a:latin typeface="Arial"/>
+                        </a:rPr>
+                        <a:t>€11.3M (47.2%)</a:t>
                       </a:r>
                     </a:p>
                   </a:txBody>

--- a/output/apple_deck/Apple_EFX_Study.pptx
+++ b/output/apple_deck/Apple_EFX_Study.pptx
@@ -3313,7 +3313,7 @@
                 </a:solidFill>
                 <a:latin typeface="Arial"/>
               </a:rPr>
-              <a:t>Risk  ·  14 Oct 2026  ·  scope: Apple Propio (own channel, no APRS)</a:t>
+              <a:t>Risk  ·  16 Oct 2026  ·  scope: Apple Propio (own channel, no APRS)</a:t>
             </a:r>
           </a:p>
         </p:txBody>
@@ -3507,7 +3507,7 @@
         </p:nvGraphicFramePr>
         <p:xfrm>
           <a:off x="566928" y="1563624"/>
-          <a:ext cx="6858000" cy="2468880"/>
+          <a:ext cx="6858000" cy="2560320"/>
         </p:xfrm>
         <a:graphic>
           <a:graphicData uri="http://schemas.openxmlformats.org/drawingml/2006/table">
@@ -3521,7 +3521,7 @@
                 <a:gridCol w="1371600"/>
                 <a:gridCol w="1280160"/>
               </a:tblGrid>
-              <a:tr h="274320">
+              <a:tr h="256032">
                 <a:tc>
                   <a:txBody>
                     <a:bodyPr/>
@@ -3627,7 +3627,7 @@
                   </a:tcPr>
                 </a:tc>
               </a:tr>
-              <a:tr h="274320">
+              <a:tr h="256032">
                 <a:tc>
                   <a:txBody>
                     <a:bodyPr/>
@@ -3664,7 +3664,7 @@
                           </a:solidFill>
                           <a:latin typeface="Arial"/>
                         </a:rPr>
-                        <a:t>56.8%</a:t>
+                        <a:t>51.7%</a:t>
                       </a:r>
                     </a:p>
                   </a:txBody>
@@ -3721,7 +3721,7 @@
                   </a:tcPr>
                 </a:tc>
               </a:tr>
-              <a:tr h="274320">
+              <a:tr h="256032">
                 <a:tc>
                   <a:txBody>
                     <a:bodyPr/>
@@ -3758,7 +3758,7 @@
                           </a:solidFill>
                           <a:latin typeface="Arial"/>
                         </a:rPr>
-                        <a:t>19.3%</a:t>
+                        <a:t>17.5%</a:t>
                       </a:r>
                     </a:p>
                   </a:txBody>
@@ -3815,7 +3815,7 @@
                   </a:tcPr>
                 </a:tc>
               </a:tr>
-              <a:tr h="274320">
+              <a:tr h="256032">
                 <a:tc>
                   <a:txBody>
                     <a:bodyPr/>
@@ -3852,7 +3852,7 @@
                           </a:solidFill>
                           <a:latin typeface="Arial"/>
                         </a:rPr>
-                        <a:t>2.0%</a:t>
+                        <a:t>1.8%</a:t>
                       </a:r>
                     </a:p>
                   </a:txBody>
@@ -3898,7 +3898,7 @@
                           </a:solidFill>
                           <a:latin typeface="Arial"/>
                         </a:rPr>
-                        <a:t>47.6%</a:t>
+                        <a:t>46.7%</a:t>
                       </a:r>
                     </a:p>
                   </a:txBody>
@@ -3909,7 +3909,7 @@
                   </a:tcPr>
                 </a:tc>
               </a:tr>
-              <a:tr h="274320">
+              <a:tr h="256032">
                 <a:tc>
                   <a:txBody>
                     <a:bodyPr/>
@@ -3946,7 +3946,7 @@
                           </a:solidFill>
                           <a:latin typeface="Arial"/>
                         </a:rPr>
-                        <a:t>1.8%</a:t>
+                        <a:t>1.7%</a:t>
                       </a:r>
                     </a:p>
                   </a:txBody>
@@ -3992,7 +3992,7 @@
                           </a:solidFill>
                           <a:latin typeface="Arial"/>
                         </a:rPr>
-                        <a:t>41.6%</a:t>
+                        <a:t>41.1%</a:t>
                       </a:r>
                     </a:p>
                   </a:txBody>
@@ -4003,7 +4003,7 @@
                   </a:tcPr>
                 </a:tc>
               </a:tr>
-              <a:tr h="274320">
+              <a:tr h="256032">
                 <a:tc>
                   <a:txBody>
                     <a:bodyPr/>
@@ -4040,7 +4040,7 @@
                           </a:solidFill>
                           <a:latin typeface="Arial"/>
                         </a:rPr>
-                        <a:t>20.1%</a:t>
+                        <a:t>18.3%</a:t>
                       </a:r>
                     </a:p>
                   </a:txBody>
@@ -4086,7 +4086,7 @@
                           </a:solidFill>
                           <a:latin typeface="Arial"/>
                         </a:rPr>
-                        <a:t>8.0%</a:t>
+                        <a:t>7.9%</a:t>
                       </a:r>
                     </a:p>
                   </a:txBody>
@@ -4097,7 +4097,7 @@
                   </a:tcPr>
                 </a:tc>
               </a:tr>
-              <a:tr h="274320">
+              <a:tr h="256032">
                 <a:tc>
                   <a:txBody>
                     <a:bodyPr/>
@@ -4111,6 +4111,100 @@
                           </a:solidFill>
                           <a:latin typeface="Arial"/>
                         </a:rPr>
+                        <a:t>untouched: light assessment, no Equifax call</a:t>
+                      </a:r>
+                    </a:p>
+                  </a:txBody>
+                  <a:tcPr>
+                    <a:solidFill>
+                      <a:srgbClr val="FFFFFF"/>
+                    </a:solidFill>
+                  </a:tcPr>
+                </a:tc>
+                <a:tc>
+                  <a:txBody>
+                    <a:bodyPr/>
+                    <a:lstStyle/>
+                    <a:p>
+                      <a:pPr algn="r"/>
+                      <a:r>
+                        <a:rPr sz="1150" b="0">
+                          <a:solidFill>
+                            <a:srgbClr val="5D6D7E"/>
+                          </a:solidFill>
+                          <a:latin typeface="Arial"/>
+                        </a:rPr>
+                        <a:t>9.0%</a:t>
+                      </a:r>
+                    </a:p>
+                  </a:txBody>
+                  <a:tcPr>
+                    <a:solidFill>
+                      <a:srgbClr val="FFFFFF"/>
+                    </a:solidFill>
+                  </a:tcPr>
+                </a:tc>
+                <a:tc>
+                  <a:txBody>
+                    <a:bodyPr/>
+                    <a:lstStyle/>
+                    <a:p>
+                      <a:pPr algn="r"/>
+                      <a:r>
+                        <a:rPr sz="1150" b="0">
+                          <a:solidFill>
+                            <a:srgbClr val="5D6D7E"/>
+                          </a:solidFill>
+                          <a:latin typeface="Arial"/>
+                        </a:rPr>
+                        <a:t>—</a:t>
+                      </a:r>
+                    </a:p>
+                  </a:txBody>
+                  <a:tcPr>
+                    <a:solidFill>
+                      <a:srgbClr val="FFFFFF"/>
+                    </a:solidFill>
+                  </a:tcPr>
+                </a:tc>
+                <a:tc>
+                  <a:txBody>
+                    <a:bodyPr/>
+                    <a:lstStyle/>
+                    <a:p>
+                      <a:pPr algn="r"/>
+                      <a:r>
+                        <a:rPr sz="1150" b="0">
+                          <a:solidFill>
+                            <a:srgbClr val="5D6D7E"/>
+                          </a:solidFill>
+                          <a:latin typeface="Arial"/>
+                        </a:rPr>
+                        <a:t>—</a:t>
+                      </a:r>
+                    </a:p>
+                  </a:txBody>
+                  <a:tcPr>
+                    <a:solidFill>
+                      <a:srgbClr val="FFFFFF"/>
+                    </a:solidFill>
+                  </a:tcPr>
+                </a:tc>
+              </a:tr>
+              <a:tr h="256032">
+                <a:tc>
+                  <a:txBody>
+                    <a:bodyPr/>
+                    <a:lstStyle/>
+                    <a:p>
+                      <a:pPr algn="l"/>
+                      <a:r>
+                        <a:rPr sz="1150" b="0">
+                          <a:solidFill>
+                            <a:srgbClr val="5D6D7E"/>
+                          </a:solidFill>
+                          <a:latin typeface="Arial"/>
+                        </a:rPr>
                         <a:t>Accepted by the grid (kept + swap-in)</a:t>
                       </a:r>
                     </a:p>
@@ -4134,53 +4228,53 @@
                           </a:solidFill>
                           <a:latin typeface="Arial"/>
                         </a:rPr>
-                        <a:t>76.0%</a:t>
-                      </a:r>
-                    </a:p>
-                  </a:txBody>
-                  <a:tcPr>
-                    <a:solidFill>
-                      <a:srgbClr val="FFFFFF"/>
-                    </a:solidFill>
-                  </a:tcPr>
-                </a:tc>
-                <a:tc>
-                  <a:txBody>
-                    <a:bodyPr/>
-                    <a:lstStyle/>
-                    <a:p>
-                      <a:pPr algn="r"/>
-                      <a:r>
-                        <a:rPr sz="1150" b="0">
-                          <a:solidFill>
-                            <a:srgbClr val="5D6D7E"/>
-                          </a:solidFill>
-                          <a:latin typeface="Arial"/>
-                        </a:rPr>
-                        <a:t>€14.6M (61.2%)</a:t>
-                      </a:r>
-                    </a:p>
-                  </a:txBody>
-                  <a:tcPr>
-                    <a:solidFill>
-                      <a:srgbClr val="FFFFFF"/>
-                    </a:solidFill>
-                  </a:tcPr>
-                </a:tc>
-                <a:tc>
-                  <a:txBody>
-                    <a:bodyPr/>
-                    <a:lstStyle/>
-                    <a:p>
-                      <a:pPr algn="r"/>
-                      <a:r>
-                        <a:rPr sz="1150" b="0">
-                          <a:solidFill>
-                            <a:srgbClr val="5D6D7E"/>
-                          </a:solidFill>
-                          <a:latin typeface="Arial"/>
-                        </a:rPr>
-                        <a:t>3.51%</a:t>
+                        <a:t>69.2%</a:t>
+                      </a:r>
+                    </a:p>
+                  </a:txBody>
+                  <a:tcPr>
+                    <a:solidFill>
+                      <a:srgbClr val="FFFFFF"/>
+                    </a:solidFill>
+                  </a:tcPr>
+                </a:tc>
+                <a:tc>
+                  <a:txBody>
+                    <a:bodyPr/>
+                    <a:lstStyle/>
+                    <a:p>
+                      <a:pPr algn="r"/>
+                      <a:r>
+                        <a:rPr sz="1150" b="0">
+                          <a:solidFill>
+                            <a:srgbClr val="5D6D7E"/>
+                          </a:solidFill>
+                          <a:latin typeface="Arial"/>
+                        </a:rPr>
+                        <a:t>€14.6M (55.7%)</a:t>
+                      </a:r>
+                    </a:p>
+                  </a:txBody>
+                  <a:tcPr>
+                    <a:solidFill>
+                      <a:srgbClr val="FFFFFF"/>
+                    </a:solidFill>
+                  </a:tcPr>
+                </a:tc>
+                <a:tc>
+                  <a:txBody>
+                    <a:bodyPr/>
+                    <a:lstStyle/>
+                    <a:p>
+                      <a:pPr algn="r"/>
+                      <a:r>
+                        <a:rPr sz="1150" b="0">
+                          <a:solidFill>
+                            <a:srgbClr val="5D6D7E"/>
+                          </a:solidFill>
+                          <a:latin typeface="Arial"/>
+                        </a:rPr>
+                        <a:t>3.52%</a:t>
                       </a:r>
                     </a:p>
                   </a:txBody>
@@ -4191,7 +4285,7 @@
                   </a:tcPr>
                 </a:tc>
               </a:tr>
-              <a:tr h="274320">
+              <a:tr h="256032">
                 <a:tc>
                   <a:txBody>
                     <a:bodyPr/>
@@ -4267,7 +4361,7 @@
                   </a:tcPr>
                 </a:tc>
               </a:tr>
-              <a:tr h="274320">
+              <a:tr h="256032">
                 <a:tc>
                   <a:txBody>
                     <a:bodyPr/>
@@ -4304,30 +4398,30 @@
                           </a:solidFill>
                           <a:latin typeface="Arial"/>
                         </a:rPr>
-                        <a:t>58.8%</a:t>
-                      </a:r>
-                    </a:p>
-                  </a:txBody>
-                  <a:tcPr>
-                    <a:solidFill>
-                      <a:srgbClr val="FFFFFF"/>
-                    </a:solidFill>
-                  </a:tcPr>
-                </a:tc>
-                <a:tc>
-                  <a:txBody>
-                    <a:bodyPr/>
-                    <a:lstStyle/>
-                    <a:p>
-                      <a:pPr algn="r"/>
-                      <a:r>
-                        <a:rPr sz="1150" b="0">
-                          <a:solidFill>
-                            <a:srgbClr val="5D6D7E"/>
-                          </a:solidFill>
-                          <a:latin typeface="Arial"/>
-                        </a:rPr>
-                        <a:t>€11.3M (47.2%)</a:t>
+                        <a:t>53.5%</a:t>
+                      </a:r>
+                    </a:p>
+                  </a:txBody>
+                  <a:tcPr>
+                    <a:solidFill>
+                      <a:srgbClr val="FFFFFF"/>
+                    </a:solidFill>
+                  </a:tcPr>
+                </a:tc>
+                <a:tc>
+                  <a:txBody>
+                    <a:bodyPr/>
+                    <a:lstStyle/>
+                    <a:p>
+                      <a:pPr algn="r"/>
+                      <a:r>
+                        <a:rPr sz="1150" b="0">
+                          <a:solidFill>
+                            <a:srgbClr val="5D6D7E"/>
+                          </a:solidFill>
+                          <a:latin typeface="Arial"/>
+                        </a:rPr>
+                        <a:t>€11.3M (43.0%)</a:t>
                       </a:r>
                     </a:p>
                   </a:txBody>
@@ -4637,30 +4731,30 @@
                           </a:solidFill>
                           <a:latin typeface="Arial"/>
                         </a:rPr>
-                        <a:t>16.5</a:t>
-                      </a:r>
-                    </a:p>
-                  </a:txBody>
-                  <a:tcPr>
-                    <a:solidFill>
-                      <a:srgbClr val="FFFFFF"/>
-                    </a:solidFill>
-                  </a:tcPr>
-                </a:tc>
-                <a:tc>
-                  <a:txBody>
-                    <a:bodyPr/>
-                    <a:lstStyle/>
-                    <a:p>
-                      <a:pPr algn="r"/>
-                      <a:r>
-                        <a:rPr sz="1150" b="0">
-                          <a:solidFill>
-                            <a:srgbClr val="5D6D7E"/>
-                          </a:solidFill>
-                          <a:latin typeface="Arial"/>
-                        </a:rPr>
-                        <a:t>56.6</a:t>
+                        <a:t>18.1</a:t>
+                      </a:r>
+                    </a:p>
+                  </a:txBody>
+                  <a:tcPr>
+                    <a:solidFill>
+                      <a:srgbClr val="FFFFFF"/>
+                    </a:solidFill>
+                  </a:tcPr>
+                </a:tc>
+                <a:tc>
+                  <a:txBody>
+                    <a:bodyPr/>
+                    <a:lstStyle/>
+                    <a:p>
+                      <a:pPr algn="r"/>
+                      <a:r>
+                        <a:rPr sz="1150" b="0">
+                          <a:solidFill>
+                            <a:srgbClr val="5D6D7E"/>
+                          </a:solidFill>
+                          <a:latin typeface="Arial"/>
+                        </a:rPr>
+                        <a:t>58.2</a:t>
                       </a:r>
                     </a:p>
                   </a:txBody>
@@ -4919,7 +5013,7 @@
                           </a:solidFill>
                           <a:latin typeface="Arial"/>
                         </a:rPr>
-                        <a:t>3.51%</a:t>
+                        <a:t>3.52%</a:t>
                       </a:r>
                     </a:p>
                   </a:txBody>
@@ -4991,7 +5085,7 @@
                 </a:solidFill>
                 <a:latin typeface="Arial"/>
               </a:rPr>
-              <a:t>Window totals become a run-rate by dividing by effective months: €14.6M over Aug–Sep 2026 ÷ 1.45 = €10.1M/mo — not ÷ 2, because Aug and Sep are weak store months (index 0.76 / 0.69). Risk blends by expected H6 exposure, the base of b2: stores are 29% of demand but 55% of exposure, because they convert 61% of what they are asked for and Online 21%. Online's 4.26% carries the reject-inference uplift on its own book (realized 4.18%).</a:t>
+              <a:t>Window totals become a run-rate by dividing by effective months: €14.6M over Aug–Sep 2026 ÷ 1.45 = €10.1M/mo — not ÷ 2, because Aug and Sep are weak store months (index 0.76 / 0.69). Risk blends by expected H6 exposure, the base of b2: stores are 31% of demand but 55% of exposure, because they convert 56% of what they are asked for and Online 21%. Online's 4.26% carries the reject-inference uplift on its own book (realized 4.18%).</a:t>
             </a:r>
           </a:p>
         </p:txBody>
@@ -5004,8 +5098,8 @@
         </p:nvSpPr>
         <p:spPr>
           <a:xfrm>
-            <a:off x="566928" y="4306823"/>
-            <a:ext cx="6858000" cy="2185417"/>
+            <a:off x="566928" y="4352544"/>
+            <a:ext cx="6858000" cy="2139696"/>
           </a:xfrm>
           <a:prstGeom prst="rect">
             <a:avLst/>
@@ -5024,7 +5118,7 @@
               </a:spcAft>
             </a:pPr>
             <a:r>
-              <a:rPr sz="1050" b="1">
+              <a:rPr sz="1000" b="1">
                 <a:solidFill>
                   <a:srgbClr val="2C3E50"/>
                 </a:solidFill>
@@ -5033,7 +5127,7 @@
               <a:t>1 · Score and bin.  </a:t>
             </a:r>
             <a:r>
-              <a:rPr sz="1050">
+              <a:rPr sz="1000">
                 <a:solidFill>
                   <a:srgbClr val="5D6D7E"/>
                 </a:solidFill>
@@ -5049,7 +5143,7 @@
               </a:spcAft>
             </a:pPr>
             <a:r>
-              <a:rPr sz="1050" b="1">
+              <a:rPr sz="1000" b="1">
                 <a:solidFill>
                   <a:srgbClr val="2C3E50"/>
                 </a:solidFill>
@@ -5058,7 +5152,7 @@
               <a:t>2 · Apply the Online grid.  </a:t>
             </a:r>
             <a:r>
-              <a:rPr sz="1050">
+              <a:rPr sz="1000">
                 <a:solidFill>
                   <a:srgbClr val="5D6D7E"/>
                 </a:solidFill>
@@ -5074,7 +5168,7 @@
               </a:spcAft>
             </a:pPr>
             <a:r>
-              <a:rPr sz="1050" b="1">
+              <a:rPr sz="1000" b="1">
                 <a:solidFill>
                   <a:srgbClr val="2C3E50"/>
                 </a:solidFill>
@@ -5083,7 +5177,7 @@
               <a:t>3 · Expected production.  </a:t>
             </a:r>
             <a:r>
-              <a:rPr sz="1050">
+              <a:rPr sz="1000">
                 <a:solidFill>
                   <a:srgbClr val="5D6D7E"/>
                 </a:solidFill>
@@ -5099,7 +5193,7 @@
               </a:spcAft>
             </a:pPr>
             <a:r>
-              <a:rPr sz="1050" b="1">
+              <a:rPr sz="1000" b="1">
                 <a:solidFill>
                   <a:srgbClr val="2C3E50"/>
                 </a:solidFill>
@@ -5108,13 +5202,13 @@
               <a:t>4 · Impute risk.  </a:t>
             </a:r>
             <a:r>
-              <a:rPr sz="1050">
+              <a:rPr sz="1000">
                 <a:solidFill>
                   <a:srgbClr val="5D6D7E"/>
                 </a:solidFill>
                 <a:latin typeface="Arial"/>
               </a:rPr>
-              <a:t>Each accepted € takes its bin's Online risk (reject-inference blended), weighted by expected H6 exposure; the level is rescaled by 0.952 so that today's store book reproduces its realized 3.74%.</a:t>
+              <a:t>Each accepted € takes its bin's Online risk (reject-inference blended), weighted by expected H6 exposure; the level is rescaled by 0.953 so that today's store book reproduces its realized 3.74%.</a:t>
             </a:r>
           </a:p>
           <a:p>
@@ -5124,7 +5218,7 @@
               </a:spcAft>
             </a:pPr>
             <a:r>
-              <a:rPr sz="1050" b="1">
+              <a:rPr sz="1000" b="1">
                 <a:solidFill>
                   <a:srgbClr val="2C3E50"/>
                 </a:solidFill>
@@ -5133,13 +5227,13 @@
               <a:t>5 · What the grid leaves out.  </a:t>
             </a:r>
             <a:r>
-              <a:rPr sz="1050">
+              <a:rPr sz="1000">
                 <a:solidFill>
                   <a:srgbClr val="5D6D7E"/>
                 </a:solidFill>
                 <a:latin typeface="Arial"/>
               </a:rPr>
-              <a:t>The swap-out is 2.0% of demand with 48% imputed risk (median EFX 19): the octroi's weakest approvals. The swap-in brings 19.3% of demand at 4.1%.</a:t>
+              <a:t>The swap-out is 1.8% of demand with 47% imputed risk (median EFX 19): the octroi's weakest approvals. The swap-in brings 17.5% of demand at 4.1%. Light-assessment rejections (9.0% of demand) never reach the grid: no Equifax call, no score.</a:t>
             </a:r>
           </a:p>
         </p:txBody>
@@ -6079,7 +6173,7 @@
                 </a:solidFill>
                 <a:latin typeface="Arial"/>
               </a:rPr>
-              <a:t>Uncorrected, stores appeared to be 23% of demand. With their own seasonality they are 29%. Had Online's profile been applied —the only option before stores' history was available— we would have said 19%, and every scenario would show less production than there really is.</a:t>
+              <a:t>Uncorrected, stores appeared to be 25% of demand. With their own seasonality they are 31%. Had Online's profile been applied —the only option before stores' history was available— we would have said 21%, and every scenario would show less production than there really is.</a:t>
             </a:r>
           </a:p>
         </p:txBody>
@@ -6357,8 +6451,8 @@
         </p:blipFill>
         <p:spPr>
           <a:xfrm>
-            <a:off x="1798613" y="1563624"/>
-            <a:ext cx="8594469" cy="4425696"/>
+            <a:off x="1827620" y="1563624"/>
+            <a:ext cx="8536454" cy="4425696"/>
           </a:xfrm>
           <a:prstGeom prst="rect">
             <a:avLst/>
@@ -6641,7 +6735,7 @@
                 </a:solidFill>
                 <a:latin typeface="Arial"/>
               </a:rPr>
-              <a:t>'New' is 81% of store demand and where risk falls. Take-up is measured by segment and by engine decision (approved / referred). '&gt;=G' is absent: it is always rejected, so it has neither acceptance nor risk.</a:t>
+              <a:t>'New' is 78% of store demand and where risk falls. Take-up is measured by segment and by engine decision (approved / referred). '&gt;=G' is absent: it is always rejected, so it has neither acceptance nor risk.</a:t>
             </a:r>
           </a:p>
         </p:txBody>
@@ -6883,7 +6977,7 @@
                 </a:solidFill>
                 <a:latin typeface="Arial"/>
               </a:rPr>
-              <a:t>Stores only have the score for Aug–Sep 2026, so their weight in Apple depends on how it is annualised. Stores peak in December and September is their weakest month, the opposite of Online: using Online's curve would have cut their weight to 19% when with their own seasonality it is 29%.</a:t>
+              <a:t>Stores only have the score for Aug–Sep 2026, so their weight in Apple depends on how it is annualised. Stores peak in December and September is their weakest month, the opposite of Online: using Online's curve would have cut their weight to 21% when with their own seasonality it is 31%.</a:t>
             </a:r>
           </a:p>
         </p:txBody>
@@ -7160,7 +7254,7 @@
                 </a:solidFill>
                 <a:latin typeface="Arial"/>
               </a:rPr>
-              <a:t>Bins 1-5 carry under 0.5% of production each, and that is where the selection uplift weighs most (2.4x). They are the ones that open the loosest scenario.</a:t>
+              <a:t>Bins 1-5 carry under 0.5% of production each, and that is where the selection uplift weighs most (2.5x). They are the ones that open the loosest scenario.</a:t>
             </a:r>
           </a:p>
           <a:p>
@@ -7976,7 +8070,7 @@
                 </a:solidFill>
                 <a:latin typeface="Arial"/>
               </a:rPr>
-              <a:t>61.2%</a:t>
+              <a:t>55.7%</a:t>
             </a:r>
           </a:p>
         </p:txBody>
@@ -8015,7 +8109,7 @@
                 </a:solidFill>
                 <a:latin typeface="Arial"/>
               </a:rPr>
-              <a:t>acceptance, from 47.2% today</a:t>
+              <a:t>acceptance, from 43.0% today</a:t>
             </a:r>
           </a:p>
         </p:txBody>
@@ -8139,7 +8233,7 @@
                 </a:solidFill>
                 <a:latin typeface="Arial"/>
               </a:rPr>
-              <a:t>3.51%</a:t>
+              <a:t>3.52%</a:t>
             </a:r>
           </a:p>
         </p:txBody>
@@ -8400,7 +8494,7 @@
                           </a:solidFill>
                           <a:latin typeface="Arial"/>
                         </a:rPr>
-                        <a:t>29.5%</a:t>
+                        <a:t>29.0%</a:t>
                       </a:r>
                     </a:p>
                   </a:txBody>
@@ -8494,7 +8588,7 @@
                           </a:solidFill>
                           <a:latin typeface="Arial"/>
                         </a:rPr>
-                        <a:t>32.7%</a:t>
+                        <a:t>31.7%</a:t>
                       </a:r>
                     </a:p>
                   </a:txBody>
@@ -8588,7 +8682,7 @@
                           </a:solidFill>
                           <a:latin typeface="Arial"/>
                         </a:rPr>
-                        <a:t>21.6%</a:t>
+                        <a:t>21.0%</a:t>
                       </a:r>
                     </a:p>
                   </a:txBody>
@@ -8682,7 +8776,7 @@
                           </a:solidFill>
                           <a:latin typeface="Arial"/>
                         </a:rPr>
-                        <a:t>26.5%</a:t>
+                        <a:t>25.7%</a:t>
                       </a:r>
                     </a:p>
                   </a:txBody>
@@ -8776,7 +8870,7 @@
                           </a:solidFill>
                           <a:latin typeface="Arial"/>
                         </a:rPr>
-                        <a:t>30.8%</a:t>
+                        <a:t>30.0%</a:t>
                       </a:r>
                     </a:p>
                   </a:txBody>
@@ -8870,7 +8964,7 @@
                           </a:solidFill>
                           <a:latin typeface="Arial"/>
                         </a:rPr>
-                        <a:t>32.5%</a:t>
+                        <a:t>31.6%</a:t>
                       </a:r>
                     </a:p>
                   </a:txBody>
@@ -9001,7 +9095,7 @@
                 </a:solidFill>
                 <a:latin typeface="Arial"/>
               </a:rPr>
-              <a:t>thinly accepted bins carry an uplift (up to 2.4x). It barely moves the cutoffs: where the decision sits, Online already accepts 84-97%.</a:t>
+              <a:t>thinly accepted bins carry an uplift (up to 2.5x). It barely moves the cutoffs: where the decision sits, Online already accepts 84-97%.</a:t>
             </a:r>
           </a:p>
         </p:txBody>
@@ -9062,7 +9156,7 @@
         <p:spPr>
           <a:xfrm>
             <a:off x="6464808" y="3758184"/>
-            <a:ext cx="5166360" cy="2372584"/>
+            <a:ext cx="5166360" cy="2376448"/>
           </a:xfrm>
           <a:prstGeom prst="rect">
             <a:avLst/>
@@ -9258,7 +9352,7 @@
         </p:nvGraphicFramePr>
         <p:xfrm>
           <a:off x="566928" y="1563624"/>
-          <a:ext cx="6858000" cy="2798064"/>
+          <a:ext cx="6858000" cy="2926080"/>
         </p:xfrm>
         <a:graphic>
           <a:graphicData uri="http://schemas.openxmlformats.org/drawingml/2006/table">
@@ -9272,7 +9366,7 @@
                 <a:gridCol w="1234440"/>
                 <a:gridCol w="1234440"/>
               </a:tblGrid>
-              <a:tr h="310896">
+              <a:tr h="292608">
                 <a:tc>
                   <a:txBody>
                     <a:bodyPr/>
@@ -9402,7 +9496,7 @@
                   </a:tcPr>
                 </a:tc>
               </a:tr>
-              <a:tr h="310896">
+              <a:tr h="292608">
                 <a:tc>
                   <a:txBody>
                     <a:bodyPr/>
@@ -9462,30 +9556,30 @@
                           </a:solidFill>
                           <a:latin typeface="Arial"/>
                         </a:rPr>
-                        <a:t>58.7%</a:t>
-                      </a:r>
-                    </a:p>
-                  </a:txBody>
-                  <a:tcPr>
-                    <a:solidFill>
-                      <a:srgbClr val="FFFFFF"/>
-                    </a:solidFill>
-                  </a:tcPr>
-                </a:tc>
-                <a:tc>
-                  <a:txBody>
-                    <a:bodyPr/>
-                    <a:lstStyle/>
-                    <a:p>
-                      <a:pPr algn="r"/>
-                      <a:r>
-                        <a:rPr sz="1150" b="0">
-                          <a:solidFill>
-                            <a:srgbClr val="5D6D7E"/>
-                          </a:solidFill>
-                          <a:latin typeface="Arial"/>
-                        </a:rPr>
-                        <a:t>47.2%</a:t>
+                        <a:t>55.1%</a:t>
+                      </a:r>
+                    </a:p>
+                  </a:txBody>
+                  <a:tcPr>
+                    <a:solidFill>
+                      <a:srgbClr val="FFFFFF"/>
+                    </a:solidFill>
+                  </a:tcPr>
+                </a:tc>
+                <a:tc>
+                  <a:txBody>
+                    <a:bodyPr/>
+                    <a:lstStyle/>
+                    <a:p>
+                      <a:pPr algn="r"/>
+                      <a:r>
+                        <a:rPr sz="1150" b="0">
+                          <a:solidFill>
+                            <a:srgbClr val="5D6D7E"/>
+                          </a:solidFill>
+                          <a:latin typeface="Arial"/>
+                        </a:rPr>
+                        <a:t>43.0%</a:t>
                       </a:r>
                     </a:p>
                   </a:txBody>
@@ -9496,7 +9590,7 @@
                   </a:tcPr>
                 </a:tc>
               </a:tr>
-              <a:tr h="310896">
+              <a:tr h="292608">
                 <a:tc>
                   <a:txBody>
                     <a:bodyPr/>
@@ -9556,30 +9650,30 @@
                           </a:solidFill>
                           <a:latin typeface="Arial"/>
                         </a:rPr>
-                        <a:t>7.0%</a:t>
-                      </a:r>
-                    </a:p>
-                  </a:txBody>
-                  <a:tcPr>
-                    <a:solidFill>
-                      <a:srgbClr val="FFFFFF"/>
-                    </a:solidFill>
-                  </a:tcPr>
-                </a:tc>
-                <a:tc>
-                  <a:txBody>
-                    <a:bodyPr/>
-                    <a:lstStyle/>
-                    <a:p>
-                      <a:pPr algn="r"/>
-                      <a:r>
-                        <a:rPr sz="1150" b="0">
-                          <a:solidFill>
-                            <a:srgbClr val="5D6D7E"/>
-                          </a:solidFill>
-                          <a:latin typeface="Arial"/>
-                        </a:rPr>
-                        <a:t>9.6%</a:t>
+                        <a:t>6.6%</a:t>
+                      </a:r>
+                    </a:p>
+                  </a:txBody>
+                  <a:tcPr>
+                    <a:solidFill>
+                      <a:srgbClr val="FFFFFF"/>
+                    </a:solidFill>
+                  </a:tcPr>
+                </a:tc>
+                <a:tc>
+                  <a:txBody>
+                    <a:bodyPr/>
+                    <a:lstStyle/>
+                    <a:p>
+                      <a:pPr algn="r"/>
+                      <a:r>
+                        <a:rPr sz="1150" b="0">
+                          <a:solidFill>
+                            <a:srgbClr val="5D6D7E"/>
+                          </a:solidFill>
+                          <a:latin typeface="Arial"/>
+                        </a:rPr>
+                        <a:t>8.7%</a:t>
                       </a:r>
                     </a:p>
                   </a:txBody>
@@ -9590,7 +9684,7 @@
                   </a:tcPr>
                 </a:tc>
               </a:tr>
-              <a:tr h="310896">
+              <a:tr h="292608">
                 <a:tc>
                   <a:txBody>
                     <a:bodyPr/>
@@ -9650,30 +9744,30 @@
                           </a:solidFill>
                           <a:latin typeface="Arial"/>
                         </a:rPr>
-                        <a:t>2.6%</a:t>
-                      </a:r>
-                    </a:p>
-                  </a:txBody>
-                  <a:tcPr>
-                    <a:solidFill>
-                      <a:srgbClr val="FFFFFF"/>
-                    </a:solidFill>
-                  </a:tcPr>
-                </a:tc>
-                <a:tc>
-                  <a:txBody>
-                    <a:bodyPr/>
-                    <a:lstStyle/>
-                    <a:p>
-                      <a:pPr algn="r"/>
-                      <a:r>
-                        <a:rPr sz="1150" b="0">
-                          <a:solidFill>
-                            <a:srgbClr val="5D6D7E"/>
-                          </a:solidFill>
-                          <a:latin typeface="Arial"/>
-                        </a:rPr>
-                        <a:t>2.0%</a:t>
+                        <a:t>2.5%</a:t>
+                      </a:r>
+                    </a:p>
+                  </a:txBody>
+                  <a:tcPr>
+                    <a:solidFill>
+                      <a:srgbClr val="FFFFFF"/>
+                    </a:solidFill>
+                  </a:tcPr>
+                </a:tc>
+                <a:tc>
+                  <a:txBody>
+                    <a:bodyPr/>
+                    <a:lstStyle/>
+                    <a:p>
+                      <a:pPr algn="r"/>
+                      <a:r>
+                        <a:rPr sz="1150" b="0">
+                          <a:solidFill>
+                            <a:srgbClr val="5D6D7E"/>
+                          </a:solidFill>
+                          <a:latin typeface="Arial"/>
+                        </a:rPr>
+                        <a:t>1.8%</a:t>
                       </a:r>
                     </a:p>
                   </a:txBody>
@@ -9684,7 +9778,7 @@
                   </a:tcPr>
                 </a:tc>
               </a:tr>
-              <a:tr h="310896">
+              <a:tr h="292608">
                 <a:tc>
                   <a:txBody>
                     <a:bodyPr/>
@@ -9721,53 +9815,53 @@
                           </a:solidFill>
                           <a:latin typeface="Arial"/>
                         </a:rPr>
-                        <a:t>6.9%</a:t>
-                      </a:r>
-                    </a:p>
-                  </a:txBody>
-                  <a:tcPr>
-                    <a:solidFill>
-                      <a:srgbClr val="FFFFFF"/>
-                    </a:solidFill>
-                  </a:tcPr>
-                </a:tc>
-                <a:tc>
-                  <a:txBody>
-                    <a:bodyPr/>
-                    <a:lstStyle/>
-                    <a:p>
-                      <a:pPr algn="r"/>
-                      <a:r>
-                        <a:rPr sz="1150" b="0">
-                          <a:solidFill>
-                            <a:srgbClr val="5D6D7E"/>
-                          </a:solidFill>
-                          <a:latin typeface="Arial"/>
-                        </a:rPr>
-                        <a:t>11.3%</a:t>
-                      </a:r>
-                    </a:p>
-                  </a:txBody>
-                  <a:tcPr>
-                    <a:solidFill>
-                      <a:srgbClr val="FFFFFF"/>
-                    </a:solidFill>
-                  </a:tcPr>
-                </a:tc>
-                <a:tc>
-                  <a:txBody>
-                    <a:bodyPr/>
-                    <a:lstStyle/>
-                    <a:p>
-                      <a:pPr algn="r"/>
-                      <a:r>
-                        <a:rPr sz="1150" b="0">
-                          <a:solidFill>
-                            <a:srgbClr val="5D6D7E"/>
-                          </a:solidFill>
-                          <a:latin typeface="Arial"/>
-                        </a:rPr>
-                        <a:t>21.1%</a:t>
+                        <a:t>6.8%</a:t>
+                      </a:r>
+                    </a:p>
+                  </a:txBody>
+                  <a:tcPr>
+                    <a:solidFill>
+                      <a:srgbClr val="FFFFFF"/>
+                    </a:solidFill>
+                  </a:tcPr>
+                </a:tc>
+                <a:tc>
+                  <a:txBody>
+                    <a:bodyPr/>
+                    <a:lstStyle/>
+                    <a:p>
+                      <a:pPr algn="r"/>
+                      <a:r>
+                        <a:rPr sz="1150" b="0">
+                          <a:solidFill>
+                            <a:srgbClr val="5D6D7E"/>
+                          </a:solidFill>
+                          <a:latin typeface="Arial"/>
+                        </a:rPr>
+                        <a:t>10.6%</a:t>
+                      </a:r>
+                    </a:p>
+                  </a:txBody>
+                  <a:tcPr>
+                    <a:solidFill>
+                      <a:srgbClr val="FFFFFF"/>
+                    </a:solidFill>
+                  </a:tcPr>
+                </a:tc>
+                <a:tc>
+                  <a:txBody>
+                    <a:bodyPr/>
+                    <a:lstStyle/>
+                    <a:p>
+                      <a:pPr algn="r"/>
+                      <a:r>
+                        <a:rPr sz="1150" b="0">
+                          <a:solidFill>
+                            <a:srgbClr val="5D6D7E"/>
+                          </a:solidFill>
+                          <a:latin typeface="Arial"/>
+                        </a:rPr>
+                        <a:t>19.2%</a:t>
                       </a:r>
                     </a:p>
                   </a:txBody>
@@ -9778,7 +9872,7 @@
                   </a:tcPr>
                 </a:tc>
               </a:tr>
-              <a:tr h="310896">
+              <a:tr h="292608">
                 <a:tc>
                   <a:txBody>
                     <a:bodyPr/>
@@ -9815,53 +9909,53 @@
                           </a:solidFill>
                           <a:latin typeface="Arial"/>
                         </a:rPr>
-                        <a:t>41.2%</a:t>
-                      </a:r>
-                    </a:p>
-                  </a:txBody>
-                  <a:tcPr>
-                    <a:solidFill>
-                      <a:srgbClr val="FFFFFF"/>
-                    </a:solidFill>
-                  </a:tcPr>
-                </a:tc>
-                <a:tc>
-                  <a:txBody>
-                    <a:bodyPr/>
-                    <a:lstStyle/>
-                    <a:p>
-                      <a:pPr algn="r"/>
-                      <a:r>
-                        <a:rPr sz="1150" b="0">
-                          <a:solidFill>
-                            <a:srgbClr val="5D6D7E"/>
-                          </a:solidFill>
-                          <a:latin typeface="Arial"/>
-                        </a:rPr>
-                        <a:t>20.3%</a:t>
-                      </a:r>
-                    </a:p>
-                  </a:txBody>
-                  <a:tcPr>
-                    <a:solidFill>
-                      <a:srgbClr val="FFFFFF"/>
-                    </a:solidFill>
-                  </a:tcPr>
-                </a:tc>
-                <a:tc>
-                  <a:txBody>
-                    <a:bodyPr/>
-                    <a:lstStyle/>
-                    <a:p>
-                      <a:pPr algn="r"/>
-                      <a:r>
-                        <a:rPr sz="1150" b="0">
-                          <a:solidFill>
-                            <a:srgbClr val="5D6D7E"/>
-                          </a:solidFill>
-                          <a:latin typeface="Arial"/>
-                        </a:rPr>
-                        <a:t>20.1%</a:t>
+                        <a:t>37.2%</a:t>
+                      </a:r>
+                    </a:p>
+                  </a:txBody>
+                  <a:tcPr>
+                    <a:solidFill>
+                      <a:srgbClr val="FFFFFF"/>
+                    </a:solidFill>
+                  </a:tcPr>
+                </a:tc>
+                <a:tc>
+                  <a:txBody>
+                    <a:bodyPr/>
+                    <a:lstStyle/>
+                    <a:p>
+                      <a:pPr algn="r"/>
+                      <a:r>
+                        <a:rPr sz="1150" b="0">
+                          <a:solidFill>
+                            <a:srgbClr val="5D6D7E"/>
+                          </a:solidFill>
+                          <a:latin typeface="Arial"/>
+                        </a:rPr>
+                        <a:t>19.1%</a:t>
+                      </a:r>
+                    </a:p>
+                  </a:txBody>
+                  <a:tcPr>
+                    <a:solidFill>
+                      <a:srgbClr val="FFFFFF"/>
+                    </a:solidFill>
+                  </a:tcPr>
+                </a:tc>
+                <a:tc>
+                  <a:txBody>
+                    <a:bodyPr/>
+                    <a:lstStyle/>
+                    <a:p>
+                      <a:pPr algn="r"/>
+                      <a:r>
+                        <a:rPr sz="1150" b="0">
+                          <a:solidFill>
+                            <a:srgbClr val="5D6D7E"/>
+                          </a:solidFill>
+                          <a:latin typeface="Arial"/>
+                        </a:rPr>
+                        <a:t>18.3%</a:t>
                       </a:r>
                     </a:p>
                   </a:txBody>
@@ -9872,7 +9966,7 @@
                   </a:tcPr>
                 </a:tc>
               </a:tr>
-              <a:tr h="310896">
+              <a:tr h="292608">
                 <a:tc>
                   <a:txBody>
                     <a:bodyPr/>
@@ -9886,6 +9980,100 @@
                           </a:solidFill>
                           <a:latin typeface="Arial"/>
                         </a:rPr>
+                        <a:t>rejected at the light assessment (no Equifax call)</a:t>
+                      </a:r>
+                    </a:p>
+                  </a:txBody>
+                  <a:tcPr>
+                    <a:solidFill>
+                      <a:srgbClr val="FFFFFF"/>
+                    </a:solidFill>
+                  </a:tcPr>
+                </a:tc>
+                <a:tc>
+                  <a:txBody>
+                    <a:bodyPr/>
+                    <a:lstStyle/>
+                    <a:p>
+                      <a:pPr algn="r"/>
+                      <a:r>
+                        <a:rPr sz="1150" b="0">
+                          <a:solidFill>
+                            <a:srgbClr val="5D6D7E"/>
+                          </a:solidFill>
+                          <a:latin typeface="Arial"/>
+                        </a:rPr>
+                        <a:t>4.1%</a:t>
+                      </a:r>
+                    </a:p>
+                  </a:txBody>
+                  <a:tcPr>
+                    <a:solidFill>
+                      <a:srgbClr val="FFFFFF"/>
+                    </a:solidFill>
+                  </a:tcPr>
+                </a:tc>
+                <a:tc>
+                  <a:txBody>
+                    <a:bodyPr/>
+                    <a:lstStyle/>
+                    <a:p>
+                      <a:pPr algn="r"/>
+                      <a:r>
+                        <a:rPr sz="1150" b="0">
+                          <a:solidFill>
+                            <a:srgbClr val="5D6D7E"/>
+                          </a:solidFill>
+                          <a:latin typeface="Arial"/>
+                        </a:rPr>
+                        <a:t>6.2%</a:t>
+                      </a:r>
+                    </a:p>
+                  </a:txBody>
+                  <a:tcPr>
+                    <a:solidFill>
+                      <a:srgbClr val="FFFFFF"/>
+                    </a:solidFill>
+                  </a:tcPr>
+                </a:tc>
+                <a:tc>
+                  <a:txBody>
+                    <a:bodyPr/>
+                    <a:lstStyle/>
+                    <a:p>
+                      <a:pPr algn="r"/>
+                      <a:r>
+                        <a:rPr sz="1150" b="0">
+                          <a:solidFill>
+                            <a:srgbClr val="5D6D7E"/>
+                          </a:solidFill>
+                          <a:latin typeface="Arial"/>
+                        </a:rPr>
+                        <a:t>9.0%</a:t>
+                      </a:r>
+                    </a:p>
+                  </a:txBody>
+                  <a:tcPr>
+                    <a:solidFill>
+                      <a:srgbClr val="FFFFFF"/>
+                    </a:solidFill>
+                  </a:tcPr>
+                </a:tc>
+              </a:tr>
+              <a:tr h="292608">
+                <a:tc>
+                  <a:txBody>
+                    <a:bodyPr/>
+                    <a:lstStyle/>
+                    <a:p>
+                      <a:pPr algn="l"/>
+                      <a:r>
+                        <a:rPr sz="1150" b="0">
+                          <a:solidFill>
+                            <a:srgbClr val="5D6D7E"/>
+                          </a:solidFill>
+                          <a:latin typeface="Arial"/>
+                        </a:rPr>
                         <a:t>Total demand</a:t>
                       </a:r>
                     </a:p>
@@ -9966,7 +10154,7 @@
                   </a:tcPr>
                 </a:tc>
               </a:tr>
-              <a:tr h="310896">
+              <a:tr h="292608">
                 <a:tc>
                   <a:txBody>
                     <a:bodyPr/>
@@ -10026,30 +10214,30 @@
                           </a:solidFill>
                           <a:latin typeface="Arial"/>
                         </a:rPr>
-                        <a:t>68.3%</a:t>
-                      </a:r>
-                    </a:p>
-                  </a:txBody>
-                  <a:tcPr>
-                    <a:solidFill>
-                      <a:srgbClr val="FFFFFF"/>
-                    </a:solidFill>
-                  </a:tcPr>
-                </a:tc>
-                <a:tc>
-                  <a:txBody>
-                    <a:bodyPr/>
-                    <a:lstStyle/>
-                    <a:p>
-                      <a:pPr algn="r"/>
-                      <a:r>
-                        <a:rPr sz="1150" b="0">
-                          <a:solidFill>
-                            <a:srgbClr val="5D6D7E"/>
-                          </a:solidFill>
-                          <a:latin typeface="Arial"/>
-                        </a:rPr>
-                        <a:t>58.8%</a:t>
+                        <a:t>64.1%</a:t>
+                      </a:r>
+                    </a:p>
+                  </a:txBody>
+                  <a:tcPr>
+                    <a:solidFill>
+                      <a:srgbClr val="FFFFFF"/>
+                    </a:solidFill>
+                  </a:tcPr>
+                </a:tc>
+                <a:tc>
+                  <a:txBody>
+                    <a:bodyPr/>
+                    <a:lstStyle/>
+                    <a:p>
+                      <a:pPr algn="r"/>
+                      <a:r>
+                        <a:rPr sz="1150" b="0">
+                          <a:solidFill>
+                            <a:srgbClr val="5D6D7E"/>
+                          </a:solidFill>
+                          <a:latin typeface="Arial"/>
+                        </a:rPr>
+                        <a:t>53.5%</a:t>
                       </a:r>
                     </a:p>
                   </a:txBody>
@@ -10060,7 +10248,7 @@
                   </a:tcPr>
                 </a:tc>
               </a:tr>
-              <a:tr h="310896">
+              <a:tr h="292608">
                 <a:tc>
                   <a:txBody>
                     <a:bodyPr/>
@@ -10186,7 +10374,7 @@
               </a:spcAft>
             </a:pPr>
             <a:r>
-              <a:rPr sz="1050" b="1">
+              <a:rPr sz="1000" b="1">
                 <a:solidFill>
                   <a:srgbClr val="2C3E50"/>
                 </a:solidFill>
@@ -10195,7 +10383,7 @@
               <a:t>Acceptance rate (effective).  </a:t>
             </a:r>
             <a:r>
-              <a:rPr sz="1050">
+              <a:rPr sz="1000">
                 <a:solidFill>
                   <a:srgbClr val="5D6D7E"/>
                 </a:solidFill>
@@ -10211,7 +10399,7 @@
               </a:spcAft>
             </a:pPr>
             <a:r>
-              <a:rPr sz="1050" b="1">
+              <a:rPr sz="1000" b="1">
                 <a:solidFill>
                   <a:srgbClr val="2C3E50"/>
                 </a:solidFill>
@@ -10220,7 +10408,7 @@
               <a:t>Score acceptance.  </a:t>
             </a:r>
             <a:r>
-              <a:rPr sz="1050">
+              <a:rPr sz="1000">
                 <a:solidFill>
                   <a:srgbClr val="5D6D7E"/>
                 </a:solidFill>
@@ -10236,7 +10424,7 @@
               </a:spcAft>
             </a:pPr>
             <a:r>
-              <a:rPr sz="1050" b="1">
+              <a:rPr sz="1000" b="1">
                 <a:solidFill>
                   <a:srgbClr val="2C3E50"/>
                 </a:solidFill>
@@ -10245,7 +10433,7 @@
               <a:t>Unfinished demand.  </a:t>
             </a:r>
             <a:r>
-              <a:rPr sz="1050">
+              <a:rPr sz="1000">
                 <a:solidFill>
                   <a:srgbClr val="5D6D7E"/>
                 </a:solidFill>
@@ -10261,7 +10449,7 @@
               </a:spcAft>
             </a:pPr>
             <a:r>
-              <a:rPr sz="1050" b="1">
+              <a:rPr sz="1000" b="1">
                 <a:solidFill>
                   <a:srgbClr val="2C3E50"/>
                 </a:solidFill>
@@ -10270,7 +10458,7 @@
               <a:t>Approved, rejected downstream.  </a:t>
             </a:r>
             <a:r>
-              <a:rPr sz="1050">
+              <a:rPr sz="1000">
                 <a:solidFill>
                   <a:srgbClr val="5D6D7E"/>
                 </a:solidFill>
@@ -10286,7 +10474,32 @@
               </a:spcAft>
             </a:pPr>
             <a:r>
-              <a:rPr sz="1050" b="1">
+              <a:rPr sz="1000" b="1">
+                <a:solidFill>
+                  <a:srgbClr val="2C3E50"/>
+                </a:solidFill>
+                <a:latin typeface="Arial"/>
+              </a:rPr>
+              <a:t>Light assessment.  </a:t>
+            </a:r>
+            <a:r>
+              <a:rPr sz="1000">
+                <a:solidFill>
+                  <a:srgbClr val="5D6D7E"/>
+                </a:solidFill>
+                <a:latin typeface="Arial"/>
+              </a:rPr>
+              <a:t>Applications rejected before the full study: the Equifax API is never called, so they have no score. They count in the denominator like any rejection and are never swap-in candidates nor given an imputed risk. The extract carries them for stores from Jul 2025 and for Online from May 2026 (outside the Online window); the stores 'today' window has them in 8 of its 12 months, so its acceptance rate is a blend. Online's own unscored rejections have always been in its base.</a:t>
+            </a:r>
+          </a:p>
+          <a:p>
+            <a:pPr>
+              <a:spcAft>
+                <a:spcPts val="900"/>
+              </a:spcAft>
+            </a:pPr>
+            <a:r>
+              <a:rPr sz="1000" b="1">
                 <a:solidFill>
                   <a:srgbClr val="2C3E50"/>
                 </a:solidFill>
@@ -10295,13 +10508,13 @@
               <a:t>Reject inference.  </a:t>
             </a:r>
             <a:r>
-              <a:rPr sz="1050">
+              <a:rPr sz="1000">
                 <a:solidFill>
                   <a:srgbClr val="5D6D7E"/>
                 </a:solidFill>
                 <a:latin typeface="Arial"/>
               </a:rPr>
-              <a:t>Neither state enters the per-bin acceptance rate — booked / (booked + score-rejected) — so they do not inflate the uplift.</a:t>
+              <a:t>None of these states enters the per-bin acceptance rate — booked / (booked + score-rejected) — so they do not inflate the uplift.</a:t>
             </a:r>
           </a:p>
         </p:txBody>
@@ -10785,7 +10998,7 @@
                 </a:solidFill>
                 <a:latin typeface="Arial"/>
               </a:rPr>
-              <a:t>Measured on stores' own history, same window as Online: describing where they stand today needs no imputation. They accept almost three times as much as Online and carry less risk. Warning: their acceptance rate is falling (58.7% over Mar 2025 – Feb 2026, 47.2% in Aug–Sep 2026), so the baseline is moving.</a:t>
+              <a:t>Measured on stores' own history, same window as Online: describing where they stand today needs no imputation. They accept almost three times as much as Online and carry less risk. Warning: their acceptance rate is falling (55.1% over Mar 2025 – Feb 2026, 43.0% in Aug–Sep 2026), so the baseline is moving.</a:t>
             </a:r>
           </a:p>
         </p:txBody>
@@ -11027,7 +11240,7 @@
                 </a:solidFill>
                 <a:latin typeface="Arial"/>
               </a:rPr>
-              <a:t>Both columns measure the same population —Aug–Sep 2026, the only period with an EFX score in stores— which is why 'today' here is 47.2% and on the previous slide 58.7%. Only the score rule is swapped; stores' other rules stay. Risk is imputed from the Online curve, with the level anchored to stores' realized figure.</a:t>
+              <a:t>Both columns measure the same population —Aug–Sep 2026, the only period with an EFX score in stores— which is why 'today' here is 43.0% and on the previous slide 55.1%. Only the score rule is swapped; stores' other rules stay. Risk is imputed from the Online curve, with the level anchored to stores' realized figure.</a:t>
             </a:r>
           </a:p>
         </p:txBody>
@@ -11436,7 +11649,7 @@
                           </a:solidFill>
                           <a:latin typeface="Arial"/>
                         </a:rPr>
-                        <a:t>29.5%</a:t>
+                        <a:t>29.0%</a:t>
                       </a:r>
                     </a:p>
                   </a:txBody>
@@ -11530,7 +11743,7 @@
                           </a:solidFill>
                           <a:latin typeface="Arial"/>
                         </a:rPr>
-                        <a:t>28.5%</a:t>
+                        <a:t>27.7%</a:t>
                       </a:r>
                     </a:p>
                   </a:txBody>
@@ -11601,30 +11814,30 @@
                           </a:solidFill>
                           <a:latin typeface="Arial"/>
                         </a:rPr>
-                        <a:t>58.9%</a:t>
-                      </a:r>
-                    </a:p>
-                  </a:txBody>
-                  <a:tcPr>
-                    <a:solidFill>
-                      <a:srgbClr val="FFFFFF"/>
-                    </a:solidFill>
-                  </a:tcPr>
-                </a:tc>
-                <a:tc>
-                  <a:txBody>
-                    <a:bodyPr/>
-                    <a:lstStyle/>
-                    <a:p>
-                      <a:pPr algn="r"/>
-                      <a:r>
-                        <a:rPr sz="1150" b="0">
-                          <a:solidFill>
-                            <a:srgbClr val="5D6D7E"/>
-                          </a:solidFill>
-                          <a:latin typeface="Arial"/>
-                        </a:rPr>
-                        <a:t>32.7%</a:t>
+                        <a:t>57.2%</a:t>
+                      </a:r>
+                    </a:p>
+                  </a:txBody>
+                  <a:tcPr>
+                    <a:solidFill>
+                      <a:srgbClr val="FFFFFF"/>
+                    </a:solidFill>
+                  </a:tcPr>
+                </a:tc>
+                <a:tc>
+                  <a:txBody>
+                    <a:bodyPr/>
+                    <a:lstStyle/>
+                    <a:p>
+                      <a:pPr algn="r"/>
+                      <a:r>
+                        <a:rPr sz="1150" b="0">
+                          <a:solidFill>
+                            <a:srgbClr val="5D6D7E"/>
+                          </a:solidFill>
+                          <a:latin typeface="Arial"/>
+                        </a:rPr>
+                        <a:t>31.7%</a:t>
                       </a:r>
                     </a:p>
                   </a:txBody>
@@ -11695,30 +11908,30 @@
                           </a:solidFill>
                           <a:latin typeface="Arial"/>
                         </a:rPr>
-                        <a:t>38.1%</a:t>
-                      </a:r>
-                    </a:p>
-                  </a:txBody>
-                  <a:tcPr>
-                    <a:solidFill>
-                      <a:srgbClr val="FFFFFF"/>
-                    </a:solidFill>
-                  </a:tcPr>
-                </a:tc>
-                <a:tc>
-                  <a:txBody>
-                    <a:bodyPr/>
-                    <a:lstStyle/>
-                    <a:p>
-                      <a:pPr algn="r"/>
-                      <a:r>
-                        <a:rPr sz="1150" b="0">
-                          <a:solidFill>
-                            <a:srgbClr val="5D6D7E"/>
-                          </a:solidFill>
-                          <a:latin typeface="Arial"/>
-                        </a:rPr>
-                        <a:t>21.6%</a:t>
+                        <a:t>37.0%</a:t>
+                      </a:r>
+                    </a:p>
+                  </a:txBody>
+                  <a:tcPr>
+                    <a:solidFill>
+                      <a:srgbClr val="FFFFFF"/>
+                    </a:solidFill>
+                  </a:tcPr>
+                </a:tc>
+                <a:tc>
+                  <a:txBody>
+                    <a:bodyPr/>
+                    <a:lstStyle/>
+                    <a:p>
+                      <a:pPr algn="r"/>
+                      <a:r>
+                        <a:rPr sz="1150" b="0">
+                          <a:solidFill>
+                            <a:srgbClr val="5D6D7E"/>
+                          </a:solidFill>
+                          <a:latin typeface="Arial"/>
+                        </a:rPr>
+                        <a:t>21.0%</a:t>
                       </a:r>
                     </a:p>
                   </a:txBody>
@@ -11789,30 +12002,30 @@
                           </a:solidFill>
                           <a:latin typeface="Arial"/>
                         </a:rPr>
-                        <a:t>38.2%</a:t>
-                      </a:r>
-                    </a:p>
-                  </a:txBody>
-                  <a:tcPr>
-                    <a:solidFill>
-                      <a:srgbClr val="FFFFFF"/>
-                    </a:solidFill>
-                  </a:tcPr>
-                </a:tc>
-                <a:tc>
-                  <a:txBody>
-                    <a:bodyPr/>
-                    <a:lstStyle/>
-                    <a:p>
-                      <a:pPr algn="r"/>
-                      <a:r>
-                        <a:rPr sz="1150" b="0">
-                          <a:solidFill>
-                            <a:srgbClr val="5D6D7E"/>
-                          </a:solidFill>
-                          <a:latin typeface="Arial"/>
-                        </a:rPr>
-                        <a:t>21.7%</a:t>
+                        <a:t>37.2%</a:t>
+                      </a:r>
+                    </a:p>
+                  </a:txBody>
+                  <a:tcPr>
+                    <a:solidFill>
+                      <a:srgbClr val="FFFFFF"/>
+                    </a:solidFill>
+                  </a:tcPr>
+                </a:tc>
+                <a:tc>
+                  <a:txBody>
+                    <a:bodyPr/>
+                    <a:lstStyle/>
+                    <a:p>
+                      <a:pPr algn="r"/>
+                      <a:r>
+                        <a:rPr sz="1150" b="0">
+                          <a:solidFill>
+                            <a:srgbClr val="5D6D7E"/>
+                          </a:solidFill>
+                          <a:latin typeface="Arial"/>
+                        </a:rPr>
+                        <a:t>21.1%</a:t>
                       </a:r>
                     </a:p>
                   </a:txBody>
@@ -11883,30 +12096,30 @@
                           </a:solidFill>
                           <a:latin typeface="Arial"/>
                         </a:rPr>
-                        <a:t>47.0%</a:t>
-                      </a:r>
-                    </a:p>
-                  </a:txBody>
-                  <a:tcPr>
-                    <a:solidFill>
-                      <a:srgbClr val="FFFFFF"/>
-                    </a:solidFill>
-                  </a:tcPr>
-                </a:tc>
-                <a:tc>
-                  <a:txBody>
-                    <a:bodyPr/>
-                    <a:lstStyle/>
-                    <a:p>
-                      <a:pPr algn="r"/>
-                      <a:r>
-                        <a:rPr sz="1150" b="0">
-                          <a:solidFill>
-                            <a:srgbClr val="5D6D7E"/>
-                          </a:solidFill>
-                          <a:latin typeface="Arial"/>
-                        </a:rPr>
-                        <a:t>26.5%</a:t>
+                        <a:t>45.7%</a:t>
+                      </a:r>
+                    </a:p>
+                  </a:txBody>
+                  <a:tcPr>
+                    <a:solidFill>
+                      <a:srgbClr val="FFFFFF"/>
+                    </a:solidFill>
+                  </a:tcPr>
+                </a:tc>
+                <a:tc>
+                  <a:txBody>
+                    <a:bodyPr/>
+                    <a:lstStyle/>
+                    <a:p>
+                      <a:pPr algn="r"/>
+                      <a:r>
+                        <a:rPr sz="1150" b="0">
+                          <a:solidFill>
+                            <a:srgbClr val="5D6D7E"/>
+                          </a:solidFill>
+                          <a:latin typeface="Arial"/>
+                        </a:rPr>
+                        <a:t>25.7%</a:t>
                       </a:r>
                     </a:p>
                   </a:txBody>
@@ -11977,30 +12190,30 @@
                           </a:solidFill>
                           <a:latin typeface="Arial"/>
                         </a:rPr>
-                        <a:t>48.8%</a:t>
-                      </a:r>
-                    </a:p>
-                  </a:txBody>
-                  <a:tcPr>
-                    <a:solidFill>
-                      <a:srgbClr val="FFFFFF"/>
-                    </a:solidFill>
-                  </a:tcPr>
-                </a:tc>
-                <a:tc>
-                  <a:txBody>
-                    <a:bodyPr/>
-                    <a:lstStyle/>
-                    <a:p>
-                      <a:pPr algn="r"/>
-                      <a:r>
-                        <a:rPr sz="1150" b="0">
-                          <a:solidFill>
-                            <a:srgbClr val="5D6D7E"/>
-                          </a:solidFill>
-                          <a:latin typeface="Arial"/>
-                        </a:rPr>
-                        <a:t>27.5%</a:t>
+                        <a:t>47.5%</a:t>
+                      </a:r>
+                    </a:p>
+                  </a:txBody>
+                  <a:tcPr>
+                    <a:solidFill>
+                      <a:srgbClr val="FFFFFF"/>
+                    </a:solidFill>
+                  </a:tcPr>
+                </a:tc>
+                <a:tc>
+                  <a:txBody>
+                    <a:bodyPr/>
+                    <a:lstStyle/>
+                    <a:p>
+                      <a:pPr algn="r"/>
+                      <a:r>
+                        <a:rPr sz="1150" b="0">
+                          <a:solidFill>
+                            <a:srgbClr val="5D6D7E"/>
+                          </a:solidFill>
+                          <a:latin typeface="Arial"/>
+                        </a:rPr>
+                        <a:t>26.7%</a:t>
                       </a:r>
                     </a:p>
                   </a:txBody>
@@ -12071,30 +12284,30 @@
                           </a:solidFill>
                           <a:latin typeface="Arial"/>
                         </a:rPr>
-                        <a:t>55.2%</a:t>
-                      </a:r>
-                    </a:p>
-                  </a:txBody>
-                  <a:tcPr>
-                    <a:solidFill>
-                      <a:srgbClr val="FFFFFF"/>
-                    </a:solidFill>
-                  </a:tcPr>
-                </a:tc>
-                <a:tc>
-                  <a:txBody>
-                    <a:bodyPr/>
-                    <a:lstStyle/>
-                    <a:p>
-                      <a:pPr algn="r"/>
-                      <a:r>
-                        <a:rPr sz="1150" b="0">
-                          <a:solidFill>
-                            <a:srgbClr val="5D6D7E"/>
-                          </a:solidFill>
-                          <a:latin typeface="Arial"/>
-                        </a:rPr>
-                        <a:t>30.8%</a:t>
+                        <a:t>53.7%</a:t>
+                      </a:r>
+                    </a:p>
+                  </a:txBody>
+                  <a:tcPr>
+                    <a:solidFill>
+                      <a:srgbClr val="FFFFFF"/>
+                    </a:solidFill>
+                  </a:tcPr>
+                </a:tc>
+                <a:tc>
+                  <a:txBody>
+                    <a:bodyPr/>
+                    <a:lstStyle/>
+                    <a:p>
+                      <a:pPr algn="r"/>
+                      <a:r>
+                        <a:rPr sz="1150" b="0">
+                          <a:solidFill>
+                            <a:srgbClr val="5D6D7E"/>
+                          </a:solidFill>
+                          <a:latin typeface="Arial"/>
+                        </a:rPr>
+                        <a:t>30.0%</a:t>
                       </a:r>
                     </a:p>
                   </a:txBody>
@@ -12165,30 +12378,30 @@
                           </a:solidFill>
                           <a:latin typeface="Arial"/>
                         </a:rPr>
-                        <a:t>56.0%</a:t>
-                      </a:r>
-                    </a:p>
-                  </a:txBody>
-                  <a:tcPr>
-                    <a:solidFill>
-                      <a:srgbClr val="FFFFFF"/>
-                    </a:solidFill>
-                  </a:tcPr>
-                </a:tc>
-                <a:tc>
-                  <a:txBody>
-                    <a:bodyPr/>
-                    <a:lstStyle/>
-                    <a:p>
-                      <a:pPr algn="r"/>
-                      <a:r>
-                        <a:rPr sz="1150" b="0">
-                          <a:solidFill>
-                            <a:srgbClr val="5D6D7E"/>
-                          </a:solidFill>
-                          <a:latin typeface="Arial"/>
-                        </a:rPr>
-                        <a:t>31.2%</a:t>
+                        <a:t>54.4%</a:t>
+                      </a:r>
+                    </a:p>
+                  </a:txBody>
+                  <a:tcPr>
+                    <a:solidFill>
+                      <a:srgbClr val="FFFFFF"/>
+                    </a:solidFill>
+                  </a:tcPr>
+                </a:tc>
+                <a:tc>
+                  <a:txBody>
+                    <a:bodyPr/>
+                    <a:lstStyle/>
+                    <a:p>
+                      <a:pPr algn="r"/>
+                      <a:r>
+                        <a:rPr sz="1150" b="0">
+                          <a:solidFill>
+                            <a:srgbClr val="5D6D7E"/>
+                          </a:solidFill>
+                          <a:latin typeface="Arial"/>
+                        </a:rPr>
+                        <a:t>30.4%</a:t>
                       </a:r>
                     </a:p>
                   </a:txBody>
@@ -12259,30 +12472,30 @@
                           </a:solidFill>
                           <a:latin typeface="Arial"/>
                         </a:rPr>
-                        <a:t>58.6%</a:t>
-                      </a:r>
-                    </a:p>
-                  </a:txBody>
-                  <a:tcPr>
-                    <a:solidFill>
-                      <a:srgbClr val="FFFFFF"/>
-                    </a:solidFill>
-                  </a:tcPr>
-                </a:tc>
-                <a:tc>
-                  <a:txBody>
-                    <a:bodyPr/>
-                    <a:lstStyle/>
-                    <a:p>
-                      <a:pPr algn="r"/>
-                      <a:r>
-                        <a:rPr sz="1150" b="0">
-                          <a:solidFill>
-                            <a:srgbClr val="5D6D7E"/>
-                          </a:solidFill>
-                          <a:latin typeface="Arial"/>
-                        </a:rPr>
-                        <a:t>32.5%</a:t>
+                        <a:t>57.0%</a:t>
+                      </a:r>
+                    </a:p>
+                  </a:txBody>
+                  <a:tcPr>
+                    <a:solidFill>
+                      <a:srgbClr val="FFFFFF"/>
+                    </a:solidFill>
+                  </a:tcPr>
+                </a:tc>
+                <a:tc>
+                  <a:txBody>
+                    <a:bodyPr/>
+                    <a:lstStyle/>
+                    <a:p>
+                      <a:pPr algn="r"/>
+                      <a:r>
+                        <a:rPr sz="1150" b="0">
+                          <a:solidFill>
+                            <a:srgbClr val="5D6D7E"/>
+                          </a:solidFill>
+                          <a:latin typeface="Arial"/>
+                        </a:rPr>
+                        <a:t>31.6%</a:t>
                       </a:r>
                     </a:p>
                   </a:txBody>
@@ -12353,30 +12566,30 @@
                           </a:solidFill>
                           <a:latin typeface="Arial"/>
                         </a:rPr>
-                        <a:t>58.9%</a:t>
-                      </a:r>
-                    </a:p>
-                  </a:txBody>
-                  <a:tcPr>
-                    <a:solidFill>
-                      <a:srgbClr val="FFFFFF"/>
-                    </a:solidFill>
-                  </a:tcPr>
-                </a:tc>
-                <a:tc>
-                  <a:txBody>
-                    <a:bodyPr/>
-                    <a:lstStyle/>
-                    <a:p>
-                      <a:pPr algn="r"/>
-                      <a:r>
-                        <a:rPr sz="1150" b="0">
-                          <a:solidFill>
-                            <a:srgbClr val="5D6D7E"/>
-                          </a:solidFill>
-                          <a:latin typeface="Arial"/>
-                        </a:rPr>
-                        <a:t>32.7%</a:t>
+                        <a:t>57.2%</a:t>
+                      </a:r>
+                    </a:p>
+                  </a:txBody>
+                  <a:tcPr>
+                    <a:solidFill>
+                      <a:srgbClr val="FFFFFF"/>
+                    </a:solidFill>
+                  </a:tcPr>
+                </a:tc>
+                <a:tc>
+                  <a:txBody>
+                    <a:bodyPr/>
+                    <a:lstStyle/>
+                    <a:p>
+                      <a:pPr algn="r"/>
+                      <a:r>
+                        <a:rPr sz="1150" b="0">
+                          <a:solidFill>
+                            <a:srgbClr val="5D6D7E"/>
+                          </a:solidFill>
+                          <a:latin typeface="Arial"/>
+                        </a:rPr>
+                        <a:t>31.7%</a:t>
                       </a:r>
                     </a:p>
                   </a:txBody>
@@ -12583,7 +12796,7 @@
                 </a:solidFill>
                 <a:latin typeface="Arial"/>
               </a:rPr>
-              <a:t>Scenario risks carry the reject-inference uplift, a conservative margin that also falls on Online's own book (+0.08 pp vs realized); the two 'today' rows are realized. Like for like, the current grid moves risk by -0.21 pp.</a:t>
+              <a:t>Scenario risks carry the reject-inference uplift, a conservative margin that also falls on Online's own book (+0.08 pp vs realized); the two 'today' rows are realized. Like for like, the current grid moves risk by -0.19 pp.</a:t>
             </a:r>
           </a:p>
         </p:txBody>
@@ -15198,7 +15411,7 @@
                 </a:solidFill>
                 <a:latin typeface="Arial"/>
               </a:rPr>
-              <a:t>Booked contracts in a bin also passed every other rule: they are a selected sample and their delinquency understates that of applicants rejected today. The pipeline's parceling is applied, with an uplift driven by the acceptance rate: 2.4x where only 3% get in, 1.0x where 100% do.</a:t>
+              <a:t>Booked contracts in a bin also passed every other rule: they are a selected sample and their delinquency understates that of applicants rejected today. The pipeline's parceling is applied, with an uplift driven by the acceptance rate: 2.5x where only 3% get in, 1.0x where 100% do.</a:t>
             </a:r>
           </a:p>
         </p:txBody>
@@ -15598,7 +15811,7 @@
                 </a:solidFill>
                 <a:latin typeface="Arial"/>
               </a:rPr>
-              <a:t>The Online curve predicts 3.93% on the book stores actually wrote; the observed figure is 3.74%. The curve is rescaled by 0.952 to reproduce the data. The level is no longer an assumption: only the ranking power remains assumed.</a:t>
+              <a:t>The Online curve predicts 3.92% on the book stores actually wrote; the observed figure is 3.74%. The curve is rescaled by 0.953 to reproduce the data. The level is no longer an assumption: only the ranking power remains assumed.</a:t>
             </a:r>
           </a:p>
         </p:txBody>

--- a/output/apple_deck/Apple_EFX_Study.pptx
+++ b/output/apple_deck/Apple_EFX_Study.pptx
@@ -20,6 +20,7 @@
     <p:sldId id="268" r:id="rId19"/>
     <p:sldId id="269" r:id="rId20"/>
     <p:sldId id="270" r:id="rId21"/>
+    <p:sldId id="271" r:id="rId22"/>
   </p:sldIdLst>
   <p:sldSz cx="12191695" cy="6858000" type="screen4x3"/>
   <p:notesSz cx="6858000" cy="9144000"/>
@@ -3274,7 +3275,7 @@
                 </a:solidFill>
                 <a:latin typeface="Arial"/>
               </a:rPr>
-              <a:t>Applying the Apple Online grid to Apple Stores gains acceptance and lowers risk at the same time. Store risk is still an estimate, but its level is now anchored to the delinquency stores have actually had: the only assumption left is that the score ranks the same way, not how much risk there is.</a:t>
+              <a:t>Applying the Apple Online grid to Apple Stores raises the booking rate and lowers risk at the same time. Store risk is still an estimate, but its level is now anchored to the delinquency stores have actually had: the only assumption left is that the score ranks the same way, not how much risk there is.</a:t>
             </a:r>
           </a:p>
         </p:txBody>
@@ -3370,7 +3371,7 @@
                 </a:solidFill>
                 <a:latin typeface="Arial"/>
               </a:rPr>
-              <a:t>METHODOLOGY · STORE DEMAND</a:t>
+              <a:t>METHODOLOGY · RISK</a:t>
             </a:r>
           </a:p>
         </p:txBody>
@@ -3448,7 +3449,7 @@
                 </a:solidFill>
                 <a:latin typeface="Arial"/>
               </a:rPr>
-              <a:t>Store demand Aug–Sep 2026: from applications to risk</a:t>
+              <a:t>How store risk is estimated</a:t>
             </a:r>
           </a:p>
         </p:txBody>
@@ -3497,6 +3498,1024 @@
           </a:p>
         </p:txBody>
       </p:sp>
+      <p:sp>
+        <p:nvSpPr>
+          <p:cNvPr id="6" name="Rectangle 5"/>
+          <p:cNvSpPr/>
+          <p:nvPr/>
+        </p:nvSpPr>
+        <p:spPr>
+          <a:xfrm>
+            <a:off x="566928" y="1563624"/>
+            <a:ext cx="420624" cy="420624"/>
+          </a:xfrm>
+          <a:prstGeom prst="rect">
+            <a:avLst/>
+          </a:prstGeom>
+          <a:solidFill>
+            <a:srgbClr val="2C3E50"/>
+          </a:solidFill>
+          <a:ln>
+            <a:noFill/>
+          </a:ln>
+          <a:effectLst/>
+        </p:spPr>
+        <p:style>
+          <a:lnRef idx="1">
+            <a:schemeClr val="accent1"/>
+          </a:lnRef>
+          <a:fillRef idx="3">
+            <a:schemeClr val="accent1"/>
+          </a:fillRef>
+          <a:effectRef idx="2">
+            <a:schemeClr val="accent1"/>
+          </a:effectRef>
+          <a:fontRef idx="minor">
+            <a:schemeClr val="lt1"/>
+          </a:fontRef>
+        </p:style>
+        <p:txBody>
+          <a:bodyPr rtlCol="0" anchor="ctr"/>
+          <a:lstStyle/>
+          <a:p>
+            <a:pPr algn="ctr"/>
+          </a:p>
+        </p:txBody>
+      </p:sp>
+      <p:sp>
+        <p:nvSpPr>
+          <p:cNvPr id="7" name="TextBox 6"/>
+          <p:cNvSpPr txBox="1"/>
+          <p:nvPr/>
+        </p:nvSpPr>
+        <p:spPr>
+          <a:xfrm>
+            <a:off x="566928" y="1618488"/>
+            <a:ext cx="420624" cy="310896"/>
+          </a:xfrm>
+          <a:prstGeom prst="rect">
+            <a:avLst/>
+          </a:prstGeom>
+          <a:noFill/>
+        </p:spPr>
+        <p:txBody>
+          <a:bodyPr wrap="square">
+            <a:spAutoFit/>
+          </a:bodyPr>
+          <a:lstStyle/>
+          <a:p>
+            <a:pPr algn="ctr">
+              <a:lnSpc>
+                <a:spcPct val="100000"/>
+              </a:lnSpc>
+            </a:pPr>
+            <a:r>
+              <a:rPr sz="1400" b="1">
+                <a:solidFill>
+                  <a:srgbClr val="FFFFFF"/>
+                </a:solidFill>
+                <a:latin typeface="Arial"/>
+              </a:rPr>
+              <a:t>1</a:t>
+            </a:r>
+          </a:p>
+        </p:txBody>
+      </p:sp>
+      <p:sp>
+        <p:nvSpPr>
+          <p:cNvPr id="8" name="TextBox 7"/>
+          <p:cNvSpPr txBox="1"/>
+          <p:nvPr/>
+        </p:nvSpPr>
+        <p:spPr>
+          <a:xfrm>
+            <a:off x="1188720" y="1563624"/>
+            <a:ext cx="8863279" cy="274320"/>
+          </a:xfrm>
+          <a:prstGeom prst="rect">
+            <a:avLst/>
+          </a:prstGeom>
+          <a:noFill/>
+        </p:spPr>
+        <p:txBody>
+          <a:bodyPr wrap="square">
+            <a:spAutoFit/>
+          </a:bodyPr>
+          <a:lstStyle/>
+          <a:p>
+            <a:pPr algn="l">
+              <a:lnSpc>
+                <a:spcPct val="100000"/>
+              </a:lnSpc>
+            </a:pPr>
+            <a:r>
+              <a:rPr sz="1300" b="1">
+                <a:solidFill>
+                  <a:srgbClr val="2C3E50"/>
+                </a:solidFill>
+                <a:latin typeface="Arial"/>
+              </a:rPr>
+              <a:t>Realized risk by score bin, in Apple Online</a:t>
+            </a:r>
+          </a:p>
+        </p:txBody>
+      </p:sp>
+      <p:sp>
+        <p:nvSpPr>
+          <p:cNvPr id="9" name="TextBox 8"/>
+          <p:cNvSpPr txBox="1"/>
+          <p:nvPr/>
+        </p:nvSpPr>
+        <p:spPr>
+          <a:xfrm>
+            <a:off x="1188720" y="1837944"/>
+            <a:ext cx="8863279" cy="603504"/>
+          </a:xfrm>
+          <a:prstGeom prst="rect">
+            <a:avLst/>
+          </a:prstGeom>
+          <a:noFill/>
+        </p:spPr>
+        <p:txBody>
+          <a:bodyPr wrap="square">
+            <a:spAutoFit/>
+          </a:bodyPr>
+          <a:lstStyle/>
+          <a:p>
+            <a:pPr algn="l">
+              <a:lnSpc>
+                <a:spcPct val="118000"/>
+              </a:lnSpc>
+            </a:pPr>
+            <a:r>
+              <a:rPr sz="1100" b="0">
+                <a:solidFill>
+                  <a:srgbClr val="5D6D7E"/>
+                </a:solidFill>
+                <a:latin typeface="Arial"/>
+              </a:rPr>
+              <a:t>For each of the 20 EFX bins, the observed delinquency of contracts with 6 months on book. The only part of the study that comes straight from the data.</a:t>
+            </a:r>
+          </a:p>
+        </p:txBody>
+      </p:sp>
+      <p:sp>
+        <p:nvSpPr>
+          <p:cNvPr id="10" name="TextBox 9"/>
+          <p:cNvSpPr txBox="1"/>
+          <p:nvPr/>
+        </p:nvSpPr>
+        <p:spPr>
+          <a:xfrm>
+            <a:off x="10161727" y="1581912"/>
+            <a:ext cx="1463040" cy="274320"/>
+          </a:xfrm>
+          <a:prstGeom prst="rect">
+            <a:avLst/>
+          </a:prstGeom>
+          <a:noFill/>
+        </p:spPr>
+        <p:txBody>
+          <a:bodyPr wrap="square">
+            <a:spAutoFit/>
+          </a:bodyPr>
+          <a:lstStyle/>
+          <a:p>
+            <a:pPr algn="r">
+              <a:lnSpc>
+                <a:spcPct val="100000"/>
+              </a:lnSpc>
+            </a:pPr>
+            <a:r>
+              <a:rPr sz="1000" b="1">
+                <a:solidFill>
+                  <a:srgbClr val="3498DB"/>
+                </a:solidFill>
+                <a:latin typeface="Arial"/>
+              </a:rPr>
+              <a:t>MEASURED</a:t>
+            </a:r>
+          </a:p>
+        </p:txBody>
+      </p:sp>
+      <p:sp>
+        <p:nvSpPr>
+          <p:cNvPr id="11" name="Rectangle 10"/>
+          <p:cNvSpPr/>
+          <p:nvPr/>
+        </p:nvSpPr>
+        <p:spPr>
+          <a:xfrm>
+            <a:off x="566928" y="2496312"/>
+            <a:ext cx="420624" cy="420624"/>
+          </a:xfrm>
+          <a:prstGeom prst="rect">
+            <a:avLst/>
+          </a:prstGeom>
+          <a:solidFill>
+            <a:srgbClr val="2C3E50"/>
+          </a:solidFill>
+          <a:ln>
+            <a:noFill/>
+          </a:ln>
+          <a:effectLst/>
+        </p:spPr>
+        <p:style>
+          <a:lnRef idx="1">
+            <a:schemeClr val="accent1"/>
+          </a:lnRef>
+          <a:fillRef idx="3">
+            <a:schemeClr val="accent1"/>
+          </a:fillRef>
+          <a:effectRef idx="2">
+            <a:schemeClr val="accent1"/>
+          </a:effectRef>
+          <a:fontRef idx="minor">
+            <a:schemeClr val="lt1"/>
+          </a:fontRef>
+        </p:style>
+        <p:txBody>
+          <a:bodyPr rtlCol="0" anchor="ctr"/>
+          <a:lstStyle/>
+          <a:p>
+            <a:pPr algn="ctr"/>
+          </a:p>
+        </p:txBody>
+      </p:sp>
+      <p:sp>
+        <p:nvSpPr>
+          <p:cNvPr id="12" name="TextBox 11"/>
+          <p:cNvSpPr txBox="1"/>
+          <p:nvPr/>
+        </p:nvSpPr>
+        <p:spPr>
+          <a:xfrm>
+            <a:off x="566928" y="2551176"/>
+            <a:ext cx="420624" cy="310896"/>
+          </a:xfrm>
+          <a:prstGeom prst="rect">
+            <a:avLst/>
+          </a:prstGeom>
+          <a:noFill/>
+        </p:spPr>
+        <p:txBody>
+          <a:bodyPr wrap="square">
+            <a:spAutoFit/>
+          </a:bodyPr>
+          <a:lstStyle/>
+          <a:p>
+            <a:pPr algn="ctr">
+              <a:lnSpc>
+                <a:spcPct val="100000"/>
+              </a:lnSpc>
+            </a:pPr>
+            <a:r>
+              <a:rPr sz="1400" b="1">
+                <a:solidFill>
+                  <a:srgbClr val="FFFFFF"/>
+                </a:solidFill>
+                <a:latin typeface="Arial"/>
+              </a:rPr>
+              <a:t>2</a:t>
+            </a:r>
+          </a:p>
+        </p:txBody>
+      </p:sp>
+      <p:sp>
+        <p:nvSpPr>
+          <p:cNvPr id="13" name="TextBox 12"/>
+          <p:cNvSpPr txBox="1"/>
+          <p:nvPr/>
+        </p:nvSpPr>
+        <p:spPr>
+          <a:xfrm>
+            <a:off x="1188720" y="2496312"/>
+            <a:ext cx="8863279" cy="274320"/>
+          </a:xfrm>
+          <a:prstGeom prst="rect">
+            <a:avLst/>
+          </a:prstGeom>
+          <a:noFill/>
+        </p:spPr>
+        <p:txBody>
+          <a:bodyPr wrap="square">
+            <a:spAutoFit/>
+          </a:bodyPr>
+          <a:lstStyle/>
+          <a:p>
+            <a:pPr algn="l">
+              <a:lnSpc>
+                <a:spcPct val="100000"/>
+              </a:lnSpc>
+            </a:pPr>
+            <a:r>
+              <a:rPr sz="1300" b="1">
+                <a:solidFill>
+                  <a:srgbClr val="2C3E50"/>
+                </a:solidFill>
+                <a:latin typeface="Arial"/>
+              </a:rPr>
+              <a:t>Selection correction (reject inference)</a:t>
+            </a:r>
+          </a:p>
+        </p:txBody>
+      </p:sp>
+      <p:sp>
+        <p:nvSpPr>
+          <p:cNvPr id="14" name="TextBox 13"/>
+          <p:cNvSpPr txBox="1"/>
+          <p:nvPr/>
+        </p:nvSpPr>
+        <p:spPr>
+          <a:xfrm>
+            <a:off x="1188720" y="2770632"/>
+            <a:ext cx="8863279" cy="603504"/>
+          </a:xfrm>
+          <a:prstGeom prst="rect">
+            <a:avLst/>
+          </a:prstGeom>
+          <a:noFill/>
+        </p:spPr>
+        <p:txBody>
+          <a:bodyPr wrap="square">
+            <a:spAutoFit/>
+          </a:bodyPr>
+          <a:lstStyle/>
+          <a:p>
+            <a:pPr algn="l">
+              <a:lnSpc>
+                <a:spcPct val="118000"/>
+              </a:lnSpc>
+            </a:pPr>
+            <a:r>
+              <a:rPr sz="1100" b="0">
+                <a:solidFill>
+                  <a:srgbClr val="5D6D7E"/>
+                </a:solidFill>
+                <a:latin typeface="Arial"/>
+              </a:rPr>
+              <a:t>Booked contracts in a bin also passed every other rule: they are a selected sample and their delinquency understates that of applicants rejected today. The pipeline's parceling is applied, with an uplift driven by the acceptance rate: 2.5x where only 3% get in, 1.0x where 100% do.</a:t>
+            </a:r>
+          </a:p>
+        </p:txBody>
+      </p:sp>
+      <p:sp>
+        <p:nvSpPr>
+          <p:cNvPr id="15" name="TextBox 14"/>
+          <p:cNvSpPr txBox="1"/>
+          <p:nvPr/>
+        </p:nvSpPr>
+        <p:spPr>
+          <a:xfrm>
+            <a:off x="10161727" y="2514600"/>
+            <a:ext cx="1463040" cy="274320"/>
+          </a:xfrm>
+          <a:prstGeom prst="rect">
+            <a:avLst/>
+          </a:prstGeom>
+          <a:noFill/>
+        </p:spPr>
+        <p:txBody>
+          <a:bodyPr wrap="square">
+            <a:spAutoFit/>
+          </a:bodyPr>
+          <a:lstStyle/>
+          <a:p>
+            <a:pPr algn="r">
+              <a:lnSpc>
+                <a:spcPct val="100000"/>
+              </a:lnSpc>
+            </a:pPr>
+            <a:r>
+              <a:rPr sz="1000" b="1">
+                <a:solidFill>
+                  <a:srgbClr val="5D6D7E"/>
+                </a:solidFill>
+                <a:latin typeface="Arial"/>
+              </a:rPr>
+              <a:t>CORRECTED</a:t>
+            </a:r>
+          </a:p>
+        </p:txBody>
+      </p:sp>
+      <p:sp>
+        <p:nvSpPr>
+          <p:cNvPr id="16" name="Rectangle 15"/>
+          <p:cNvSpPr/>
+          <p:nvPr/>
+        </p:nvSpPr>
+        <p:spPr>
+          <a:xfrm>
+            <a:off x="566928" y="3429000"/>
+            <a:ext cx="420624" cy="420624"/>
+          </a:xfrm>
+          <a:prstGeom prst="rect">
+            <a:avLst/>
+          </a:prstGeom>
+          <a:solidFill>
+            <a:srgbClr val="2C3E50"/>
+          </a:solidFill>
+          <a:ln>
+            <a:noFill/>
+          </a:ln>
+          <a:effectLst/>
+        </p:spPr>
+        <p:style>
+          <a:lnRef idx="1">
+            <a:schemeClr val="accent1"/>
+          </a:lnRef>
+          <a:fillRef idx="3">
+            <a:schemeClr val="accent1"/>
+          </a:fillRef>
+          <a:effectRef idx="2">
+            <a:schemeClr val="accent1"/>
+          </a:effectRef>
+          <a:fontRef idx="minor">
+            <a:schemeClr val="lt1"/>
+          </a:fontRef>
+        </p:style>
+        <p:txBody>
+          <a:bodyPr rtlCol="0" anchor="ctr"/>
+          <a:lstStyle/>
+          <a:p>
+            <a:pPr algn="ctr"/>
+          </a:p>
+        </p:txBody>
+      </p:sp>
+      <p:sp>
+        <p:nvSpPr>
+          <p:cNvPr id="17" name="TextBox 16"/>
+          <p:cNvSpPr txBox="1"/>
+          <p:nvPr/>
+        </p:nvSpPr>
+        <p:spPr>
+          <a:xfrm>
+            <a:off x="566928" y="3483864"/>
+            <a:ext cx="420624" cy="310896"/>
+          </a:xfrm>
+          <a:prstGeom prst="rect">
+            <a:avLst/>
+          </a:prstGeom>
+          <a:noFill/>
+        </p:spPr>
+        <p:txBody>
+          <a:bodyPr wrap="square">
+            <a:spAutoFit/>
+          </a:bodyPr>
+          <a:lstStyle/>
+          <a:p>
+            <a:pPr algn="ctr">
+              <a:lnSpc>
+                <a:spcPct val="100000"/>
+              </a:lnSpc>
+            </a:pPr>
+            <a:r>
+              <a:rPr sz="1400" b="1">
+                <a:solidFill>
+                  <a:srgbClr val="FFFFFF"/>
+                </a:solidFill>
+                <a:latin typeface="Arial"/>
+              </a:rPr>
+              <a:t>3</a:t>
+            </a:r>
+          </a:p>
+        </p:txBody>
+      </p:sp>
+      <p:sp>
+        <p:nvSpPr>
+          <p:cNvPr id="18" name="TextBox 17"/>
+          <p:cNvSpPr txBox="1"/>
+          <p:nvPr/>
+        </p:nvSpPr>
+        <p:spPr>
+          <a:xfrm>
+            <a:off x="1188720" y="3429000"/>
+            <a:ext cx="8863279" cy="274320"/>
+          </a:xfrm>
+          <a:prstGeom prst="rect">
+            <a:avLst/>
+          </a:prstGeom>
+          <a:noFill/>
+        </p:spPr>
+        <p:txBody>
+          <a:bodyPr wrap="square">
+            <a:spAutoFit/>
+          </a:bodyPr>
+          <a:lstStyle/>
+          <a:p>
+            <a:pPr algn="l">
+              <a:lnSpc>
+                <a:spcPct val="100000"/>
+              </a:lnSpc>
+            </a:pPr>
+            <a:r>
+              <a:rPr sz="1300" b="1">
+                <a:solidFill>
+                  <a:srgbClr val="2C3E50"/>
+                </a:solidFill>
+                <a:latin typeface="Arial"/>
+              </a:rPr>
+              <a:t>That curve is carried over to the store population</a:t>
+            </a:r>
+          </a:p>
+        </p:txBody>
+      </p:sp>
+      <p:sp>
+        <p:nvSpPr>
+          <p:cNvPr id="19" name="TextBox 18"/>
+          <p:cNvSpPr txBox="1"/>
+          <p:nvPr/>
+        </p:nvSpPr>
+        <p:spPr>
+          <a:xfrm>
+            <a:off x="1188720" y="3703320"/>
+            <a:ext cx="8863279" cy="603504"/>
+          </a:xfrm>
+          <a:prstGeom prst="rect">
+            <a:avLst/>
+          </a:prstGeom>
+          <a:noFill/>
+        </p:spPr>
+        <p:txBody>
+          <a:bodyPr wrap="square">
+            <a:spAutoFit/>
+          </a:bodyPr>
+          <a:lstStyle/>
+          <a:p>
+            <a:pPr algn="l">
+              <a:lnSpc>
+                <a:spcPct val="118000"/>
+              </a:lnSpc>
+            </a:pPr>
+            <a:r>
+              <a:rPr sz="1100" b="0">
+                <a:solidFill>
+                  <a:srgbClr val="5D6D7E"/>
+                </a:solidFill>
+                <a:latin typeface="Arial"/>
+              </a:rPr>
+              <a:t>Each store application is assigned the risk of the EFX bin it falls in. This is the underlying assumption: that the score ranks store applicants the same way it ranks e-commerce ones.</a:t>
+            </a:r>
+          </a:p>
+        </p:txBody>
+      </p:sp>
+      <p:sp>
+        <p:nvSpPr>
+          <p:cNvPr id="20" name="TextBox 19"/>
+          <p:cNvSpPr txBox="1"/>
+          <p:nvPr/>
+        </p:nvSpPr>
+        <p:spPr>
+          <a:xfrm>
+            <a:off x="10161727" y="3447288"/>
+            <a:ext cx="1463040" cy="274320"/>
+          </a:xfrm>
+          <a:prstGeom prst="rect">
+            <a:avLst/>
+          </a:prstGeom>
+          <a:noFill/>
+        </p:spPr>
+        <p:txBody>
+          <a:bodyPr wrap="square">
+            <a:spAutoFit/>
+          </a:bodyPr>
+          <a:lstStyle/>
+          <a:p>
+            <a:pPr algn="r">
+              <a:lnSpc>
+                <a:spcPct val="100000"/>
+              </a:lnSpc>
+            </a:pPr>
+            <a:r>
+              <a:rPr sz="1000" b="1">
+                <a:solidFill>
+                  <a:srgbClr val="E74C3C"/>
+                </a:solidFill>
+                <a:latin typeface="Arial"/>
+              </a:rPr>
+              <a:t>ASSUMED</a:t>
+            </a:r>
+          </a:p>
+        </p:txBody>
+      </p:sp>
+      <p:sp>
+        <p:nvSpPr>
+          <p:cNvPr id="21" name="Rectangle 20"/>
+          <p:cNvSpPr/>
+          <p:nvPr/>
+        </p:nvSpPr>
+        <p:spPr>
+          <a:xfrm>
+            <a:off x="566928" y="4361688"/>
+            <a:ext cx="420624" cy="420624"/>
+          </a:xfrm>
+          <a:prstGeom prst="rect">
+            <a:avLst/>
+          </a:prstGeom>
+          <a:solidFill>
+            <a:srgbClr val="2C3E50"/>
+          </a:solidFill>
+          <a:ln>
+            <a:noFill/>
+          </a:ln>
+          <a:effectLst/>
+        </p:spPr>
+        <p:style>
+          <a:lnRef idx="1">
+            <a:schemeClr val="accent1"/>
+          </a:lnRef>
+          <a:fillRef idx="3">
+            <a:schemeClr val="accent1"/>
+          </a:fillRef>
+          <a:effectRef idx="2">
+            <a:schemeClr val="accent1"/>
+          </a:effectRef>
+          <a:fontRef idx="minor">
+            <a:schemeClr val="lt1"/>
+          </a:fontRef>
+        </p:style>
+        <p:txBody>
+          <a:bodyPr rtlCol="0" anchor="ctr"/>
+          <a:lstStyle/>
+          <a:p>
+            <a:pPr algn="ctr"/>
+          </a:p>
+        </p:txBody>
+      </p:sp>
+      <p:sp>
+        <p:nvSpPr>
+          <p:cNvPr id="22" name="TextBox 21"/>
+          <p:cNvSpPr txBox="1"/>
+          <p:nvPr/>
+        </p:nvSpPr>
+        <p:spPr>
+          <a:xfrm>
+            <a:off x="566928" y="4416552"/>
+            <a:ext cx="420624" cy="310896"/>
+          </a:xfrm>
+          <a:prstGeom prst="rect">
+            <a:avLst/>
+          </a:prstGeom>
+          <a:noFill/>
+        </p:spPr>
+        <p:txBody>
+          <a:bodyPr wrap="square">
+            <a:spAutoFit/>
+          </a:bodyPr>
+          <a:lstStyle/>
+          <a:p>
+            <a:pPr algn="ctr">
+              <a:lnSpc>
+                <a:spcPct val="100000"/>
+              </a:lnSpc>
+            </a:pPr>
+            <a:r>
+              <a:rPr sz="1400" b="1">
+                <a:solidFill>
+                  <a:srgbClr val="FFFFFF"/>
+                </a:solidFill>
+                <a:latin typeface="Arial"/>
+              </a:rPr>
+              <a:t>4</a:t>
+            </a:r>
+          </a:p>
+        </p:txBody>
+      </p:sp>
+      <p:sp>
+        <p:nvSpPr>
+          <p:cNvPr id="23" name="TextBox 22"/>
+          <p:cNvSpPr txBox="1"/>
+          <p:nvPr/>
+        </p:nvSpPr>
+        <p:spPr>
+          <a:xfrm>
+            <a:off x="1188720" y="4361688"/>
+            <a:ext cx="8863279" cy="274320"/>
+          </a:xfrm>
+          <a:prstGeom prst="rect">
+            <a:avLst/>
+          </a:prstGeom>
+          <a:noFill/>
+        </p:spPr>
+        <p:txBody>
+          <a:bodyPr wrap="square">
+            <a:spAutoFit/>
+          </a:bodyPr>
+          <a:lstStyle/>
+          <a:p>
+            <a:pPr algn="l">
+              <a:lnSpc>
+                <a:spcPct val="100000"/>
+              </a:lnSpc>
+            </a:pPr>
+            <a:r>
+              <a:rPr sz="1300" b="1">
+                <a:solidFill>
+                  <a:srgbClr val="2C3E50"/>
+                </a:solidFill>
+                <a:latin typeface="Arial"/>
+              </a:rPr>
+              <a:t>The level is anchored to stores' actual delinquency</a:t>
+            </a:r>
+          </a:p>
+        </p:txBody>
+      </p:sp>
+      <p:sp>
+        <p:nvSpPr>
+          <p:cNvPr id="24" name="TextBox 23"/>
+          <p:cNvSpPr txBox="1"/>
+          <p:nvPr/>
+        </p:nvSpPr>
+        <p:spPr>
+          <a:xfrm>
+            <a:off x="1188720" y="4636008"/>
+            <a:ext cx="8863279" cy="603504"/>
+          </a:xfrm>
+          <a:prstGeom prst="rect">
+            <a:avLst/>
+          </a:prstGeom>
+          <a:noFill/>
+        </p:spPr>
+        <p:txBody>
+          <a:bodyPr wrap="square">
+            <a:spAutoFit/>
+          </a:bodyPr>
+          <a:lstStyle/>
+          <a:p>
+            <a:pPr algn="l">
+              <a:lnSpc>
+                <a:spcPct val="118000"/>
+              </a:lnSpc>
+            </a:pPr>
+            <a:r>
+              <a:rPr sz="1100" b="0">
+                <a:solidFill>
+                  <a:srgbClr val="5D6D7E"/>
+                </a:solidFill>
+                <a:latin typeface="Arial"/>
+              </a:rPr>
+              <a:t>The Online curve predicts 3.92% on the book stores actually wrote; the observed figure is 3.74%. The curve is rescaled by 0.953 to reproduce the data. The level is no longer an assumption: only the ranking power remains assumed.</a:t>
+            </a:r>
+          </a:p>
+        </p:txBody>
+      </p:sp>
+      <p:sp>
+        <p:nvSpPr>
+          <p:cNvPr id="25" name="TextBox 24"/>
+          <p:cNvSpPr txBox="1"/>
+          <p:nvPr/>
+        </p:nvSpPr>
+        <p:spPr>
+          <a:xfrm>
+            <a:off x="10161727" y="4379976"/>
+            <a:ext cx="1463040" cy="274320"/>
+          </a:xfrm>
+          <a:prstGeom prst="rect">
+            <a:avLst/>
+          </a:prstGeom>
+          <a:noFill/>
+        </p:spPr>
+        <p:txBody>
+          <a:bodyPr wrap="square">
+            <a:spAutoFit/>
+          </a:bodyPr>
+          <a:lstStyle/>
+          <a:p>
+            <a:pPr algn="r">
+              <a:lnSpc>
+                <a:spcPct val="100000"/>
+              </a:lnSpc>
+            </a:pPr>
+            <a:r>
+              <a:rPr sz="1000" b="1">
+                <a:solidFill>
+                  <a:srgbClr val="3498DB"/>
+                </a:solidFill>
+                <a:latin typeface="Arial"/>
+              </a:rPr>
+              <a:t>MEASURED</a:t>
+            </a:r>
+          </a:p>
+        </p:txBody>
+      </p:sp>
+      <p:sp>
+        <p:nvSpPr>
+          <p:cNvPr id="26" name="TextBox 25"/>
+          <p:cNvSpPr txBox="1"/>
+          <p:nvPr/>
+        </p:nvSpPr>
+        <p:spPr>
+          <a:xfrm>
+            <a:off x="566928" y="5806440"/>
+            <a:ext cx="11057839" cy="822960"/>
+          </a:xfrm>
+          <a:prstGeom prst="rect">
+            <a:avLst/>
+          </a:prstGeom>
+          <a:noFill/>
+        </p:spPr>
+        <p:txBody>
+          <a:bodyPr wrap="square">
+            <a:spAutoFit/>
+          </a:bodyPr>
+          <a:lstStyle/>
+          <a:p>
+            <a:pPr algn="l">
+              <a:lnSpc>
+                <a:spcPct val="120000"/>
+              </a:lnSpc>
+            </a:pPr>
+            <a:r>
+              <a:rPr sz="1150" b="0">
+                <a:solidFill>
+                  <a:srgbClr val="5D6D7E"/>
+                </a:solidFill>
+                <a:latin typeface="Arial"/>
+              </a:rPr>
+              <a:t>What this means in practice: if EFX ranks store applicants worse than it ranks Online ones, the scenario cutoffs fall short. What can no longer be wrong is the height of the curve, because it is calibrated against the delinquency stores have actually had.</a:t>
+            </a:r>
+          </a:p>
+        </p:txBody>
+      </p:sp>
+    </p:spTree>
+  </p:cSld>
+  <p:clrMapOvr>
+    <a:masterClrMapping/>
+  </p:clrMapOvr>
+</p:sld>
+</file>
+
+<file path=ppt/slides/slide11.xml><?xml version="1.0" encoding="utf-8"?>
+<p:sld xmlns:a="http://schemas.openxmlformats.org/drawingml/2006/main" xmlns:p="http://schemas.openxmlformats.org/presentationml/2006/main" xmlns:r="http://schemas.openxmlformats.org/officeDocument/2006/relationships">
+  <p:cSld>
+    <p:spTree>
+      <p:nvGrpSpPr>
+        <p:cNvPr id="1" name=""/>
+        <p:cNvGrpSpPr/>
+        <p:nvPr/>
+      </p:nvGrpSpPr>
+      <p:grpSpPr/>
+      <p:sp>
+        <p:nvSpPr>
+          <p:cNvPr id="2" name="TextBox 1"/>
+          <p:cNvSpPr txBox="1"/>
+          <p:nvPr/>
+        </p:nvSpPr>
+        <p:spPr>
+          <a:xfrm>
+            <a:off x="566928" y="384048"/>
+            <a:ext cx="6400800" cy="274320"/>
+          </a:xfrm>
+          <a:prstGeom prst="rect">
+            <a:avLst/>
+          </a:prstGeom>
+          <a:noFill/>
+        </p:spPr>
+        <p:txBody>
+          <a:bodyPr wrap="square">
+            <a:spAutoFit/>
+          </a:bodyPr>
+          <a:lstStyle/>
+          <a:p>
+            <a:pPr algn="l">
+              <a:lnSpc>
+                <a:spcPct val="100000"/>
+              </a:lnSpc>
+            </a:pPr>
+            <a:r>
+              <a:rPr sz="1100" b="1">
+                <a:solidFill>
+                  <a:srgbClr val="3498DB"/>
+                </a:solidFill>
+                <a:latin typeface="Arial"/>
+              </a:rPr>
+              <a:t>METHODOLOGY · STORE DEMAND</a:t>
+            </a:r>
+          </a:p>
+        </p:txBody>
+      </p:sp>
+      <p:sp>
+        <p:nvSpPr>
+          <p:cNvPr id="3" name="TextBox 2"/>
+          <p:cNvSpPr txBox="1"/>
+          <p:nvPr/>
+        </p:nvSpPr>
+        <p:spPr>
+          <a:xfrm>
+            <a:off x="6869887" y="384048"/>
+            <a:ext cx="4754880" cy="274320"/>
+          </a:xfrm>
+          <a:prstGeom prst="rect">
+            <a:avLst/>
+          </a:prstGeom>
+          <a:noFill/>
+        </p:spPr>
+        <p:txBody>
+          <a:bodyPr wrap="square">
+            <a:spAutoFit/>
+          </a:bodyPr>
+          <a:lstStyle/>
+          <a:p>
+            <a:pPr algn="r">
+              <a:lnSpc>
+                <a:spcPct val="100000"/>
+              </a:lnSpc>
+            </a:pPr>
+            <a:r>
+              <a:rPr sz="1100" b="0">
+                <a:solidFill>
+                  <a:srgbClr val="5D6D7E"/>
+                </a:solidFill>
+                <a:latin typeface="Arial"/>
+              </a:rPr>
+              <a:t>Online Mar 2025 – Feb 2026  ·  stores Aug–Sep 2026</a:t>
+            </a:r>
+          </a:p>
+        </p:txBody>
+      </p:sp>
+      <p:sp>
+        <p:nvSpPr>
+          <p:cNvPr id="4" name="TextBox 3"/>
+          <p:cNvSpPr txBox="1"/>
+          <p:nvPr/>
+        </p:nvSpPr>
+        <p:spPr>
+          <a:xfrm>
+            <a:off x="566928" y="694944"/>
+            <a:ext cx="11057839" cy="548640"/>
+          </a:xfrm>
+          <a:prstGeom prst="rect">
+            <a:avLst/>
+          </a:prstGeom>
+          <a:noFill/>
+        </p:spPr>
+        <p:txBody>
+          <a:bodyPr wrap="square">
+            <a:spAutoFit/>
+          </a:bodyPr>
+          <a:lstStyle/>
+          <a:p>
+            <a:pPr algn="l">
+              <a:lnSpc>
+                <a:spcPct val="100000"/>
+              </a:lnSpc>
+            </a:pPr>
+            <a:r>
+              <a:rPr sz="2600" b="1">
+                <a:solidFill>
+                  <a:srgbClr val="2C3E50"/>
+                </a:solidFill>
+                <a:latin typeface="Arial"/>
+              </a:rPr>
+              <a:t>Store demand Aug–Sep 2026: from applications to risk</a:t>
+            </a:r>
+          </a:p>
+        </p:txBody>
+      </p:sp>
+      <p:sp>
+        <p:nvSpPr>
+          <p:cNvPr id="5" name="Rectangle 4"/>
+          <p:cNvSpPr/>
+          <p:nvPr/>
+        </p:nvSpPr>
+        <p:spPr>
+          <a:xfrm>
+            <a:off x="566928" y="1353312"/>
+            <a:ext cx="11057839" cy="9525"/>
+          </a:xfrm>
+          <a:prstGeom prst="rect">
+            <a:avLst/>
+          </a:prstGeom>
+          <a:solidFill>
+            <a:srgbClr val="E5E7EB"/>
+          </a:solidFill>
+          <a:ln>
+            <a:noFill/>
+          </a:ln>
+          <a:effectLst/>
+        </p:spPr>
+        <p:style>
+          <a:lnRef idx="1">
+            <a:schemeClr val="accent1"/>
+          </a:lnRef>
+          <a:fillRef idx="3">
+            <a:schemeClr val="accent1"/>
+          </a:fillRef>
+          <a:effectRef idx="2">
+            <a:schemeClr val="accent1"/>
+          </a:effectRef>
+          <a:fontRef idx="minor">
+            <a:schemeClr val="lt1"/>
+          </a:fontRef>
+        </p:style>
+        <p:txBody>
+          <a:bodyPr rtlCol="0" anchor="ctr"/>
+          <a:lstStyle/>
+          <a:p>
+            <a:pPr algn="ctr"/>
+          </a:p>
+        </p:txBody>
+      </p:sp>
       <p:graphicFrame>
         <p:nvGraphicFramePr>
           <p:cNvPr id="6" name="Table 5"/>
@@ -3558,7 +4577,7 @@
                           </a:solidFill>
                           <a:latin typeface="Arial"/>
                         </a:rPr>
-                        <a:t>Share</a:t>
+                        <a:t>Sys. appr.</a:t>
                       </a:r>
                     </a:p>
                   </a:txBody>
@@ -5246,7 +6265,7 @@
 </p:sld>
 </file>
 
-<file path=ppt/slides/slide11.xml><?xml version="1.0" encoding="utf-8"?>
+<file path=ppt/slides/slide12.xml><?xml version="1.0" encoding="utf-8"?>
 <p:sld xmlns:a="http://schemas.openxmlformats.org/drawingml/2006/main" xmlns:p="http://schemas.openxmlformats.org/presentationml/2006/main" xmlns:r="http://schemas.openxmlformats.org/officeDocument/2006/relationships">
   <p:cSld>
     <p:spTree>
@@ -6264,7 +7283,7 @@
 </p:sld>
 </file>
 
-<file path=ppt/slides/slide12.xml><?xml version="1.0" encoding="utf-8"?>
+<file path=ppt/slides/slide13.xml><?xml version="1.0" encoding="utf-8"?>
 <p:sld xmlns:a="http://schemas.openxmlformats.org/drawingml/2006/main" xmlns:p="http://schemas.openxmlformats.org/presentationml/2006/main" xmlns:r="http://schemas.openxmlformats.org/officeDocument/2006/relationships">
   <p:cSld>
     <p:spTree>
@@ -6506,7 +7525,7 @@
 </p:sld>
 </file>
 
-<file path=ppt/slides/slide13.xml><?xml version="1.0" encoding="utf-8"?>
+<file path=ppt/slides/slide14.xml><?xml version="1.0" encoding="utf-8"?>
 <p:sld xmlns:a="http://schemas.openxmlformats.org/drawingml/2006/main" xmlns:p="http://schemas.openxmlformats.org/presentationml/2006/main" xmlns:r="http://schemas.openxmlformats.org/officeDocument/2006/relationships">
   <p:cSld>
     <p:spTree>
@@ -6748,7 +7767,7 @@
 </p:sld>
 </file>
 
-<file path=ppt/slides/slide14.xml><?xml version="1.0" encoding="utf-8"?>
+<file path=ppt/slides/slide15.xml><?xml version="1.0" encoding="utf-8"?>
 <p:sld xmlns:a="http://schemas.openxmlformats.org/drawingml/2006/main" xmlns:p="http://schemas.openxmlformats.org/presentationml/2006/main" xmlns:r="http://schemas.openxmlformats.org/officeDocument/2006/relationships">
   <p:cSld>
     <p:spTree>
@@ -6990,7 +8009,7 @@
 </p:sld>
 </file>
 
-<file path=ppt/slides/slide15.xml><?xml version="1.0" encoding="utf-8"?>
+<file path=ppt/slides/slide16.xml><?xml version="1.0" encoding="utf-8"?>
 <p:sld xmlns:a="http://schemas.openxmlformats.org/drawingml/2006/main" xmlns:p="http://schemas.openxmlformats.org/presentationml/2006/main" xmlns:r="http://schemas.openxmlformats.org/officeDocument/2006/relationships">
   <p:cSld>
     <p:spTree>
@@ -7868,7 +8887,7 @@
                 </a:solidFill>
                 <a:latin typeface="Arial"/>
               </a:rPr>
-              <a:t>Online acceptance rate</a:t>
+              <a:t>Online booking rate</a:t>
             </a:r>
           </a:p>
         </p:txBody>
@@ -7946,7 +8965,7 @@
                 </a:solidFill>
                 <a:latin typeface="Arial"/>
               </a:rPr>
-              <a:t>on € demand</a:t>
+              <a:t>booked / € demand</a:t>
             </a:r>
           </a:p>
         </p:txBody>
@@ -8109,7 +9128,7 @@
                 </a:solidFill>
                 <a:latin typeface="Arial"/>
               </a:rPr>
-              <a:t>acceptance, from 43.0% today</a:t>
+              <a:t>booking rate, from 43.0% today</a:t>
             </a:r>
           </a:p>
         </p:txBody>
@@ -8326,7 +9345,7 @@
         </p:nvGraphicFramePr>
         <p:xfrm>
           <a:off x="566928" y="3758184"/>
-          <a:ext cx="5623558" cy="1920240"/>
+          <a:ext cx="5623556" cy="1920240"/>
         </p:xfrm>
         <a:graphic>
           <a:graphicData uri="http://schemas.openxmlformats.org/drawingml/2006/table">
@@ -8335,10 +9354,11 @@
                 <a:tableStyleId>{5C22544A-7EE6-4342-B048-85BDC9FD1C3A}</a:tableStyleId>
               </a:tblPr>
               <a:tblGrid>
-                <a:gridCol w="2361895"/>
-                <a:gridCol w="1012240"/>
-                <a:gridCol w="1012240"/>
-                <a:gridCol w="1237183"/>
+                <a:gridCol w="1956020"/>
+                <a:gridCol w="1026910"/>
+                <a:gridCol w="831308"/>
+                <a:gridCol w="831308"/>
+                <a:gridCol w="978010"/>
               </a:tblGrid>
               <a:tr h="274320">
                 <a:tc>
@@ -8400,7 +9420,30 @@
                           </a:solidFill>
                           <a:latin typeface="Arial"/>
                         </a:rPr>
-                        <a:t>Eff. acc.</a:t>
+                        <a:t>Sys. appr.</a:t>
+                      </a:r>
+                    </a:p>
+                  </a:txBody>
+                  <a:tcPr>
+                    <a:solidFill>
+                      <a:srgbClr val="F6F7F9"/>
+                    </a:solidFill>
+                  </a:tcPr>
+                </a:tc>
+                <a:tc>
+                  <a:txBody>
+                    <a:bodyPr/>
+                    <a:lstStyle/>
+                    <a:p>
+                      <a:pPr algn="r"/>
+                      <a:r>
+                        <a:rPr sz="1150" b="1">
+                          <a:solidFill>
+                            <a:srgbClr val="2C3E50"/>
+                          </a:solidFill>
+                          <a:latin typeface="Arial"/>
+                        </a:rPr>
+                        <a:t>Booking</a:t>
                       </a:r>
                     </a:p>
                   </a:txBody>
@@ -8494,6 +9537,29 @@
                           </a:solidFill>
                           <a:latin typeface="Arial"/>
                         </a:rPr>
+                        <a:t>54.8%</a:t>
+                      </a:r>
+                    </a:p>
+                  </a:txBody>
+                  <a:tcPr>
+                    <a:solidFill>
+                      <a:srgbClr val="FFFFFF"/>
+                    </a:solidFill>
+                  </a:tcPr>
+                </a:tc>
+                <a:tc>
+                  <a:txBody>
+                    <a:bodyPr/>
+                    <a:lstStyle/>
+                    <a:p>
+                      <a:pPr algn="r"/>
+                      <a:r>
+                        <a:rPr sz="1150" b="0">
+                          <a:solidFill>
+                            <a:srgbClr val="5D6D7E"/>
+                          </a:solidFill>
+                          <a:latin typeface="Arial"/>
+                        </a:rPr>
                         <a:t>29.0%</a:t>
                       </a:r>
                     </a:p>
@@ -8588,6 +9654,29 @@
                           </a:solidFill>
                           <a:latin typeface="Arial"/>
                         </a:rPr>
+                        <a:t>57.2%</a:t>
+                      </a:r>
+                    </a:p>
+                  </a:txBody>
+                  <a:tcPr>
+                    <a:solidFill>
+                      <a:srgbClr val="FFFFFF"/>
+                    </a:solidFill>
+                  </a:tcPr>
+                </a:tc>
+                <a:tc>
+                  <a:txBody>
+                    <a:bodyPr/>
+                    <a:lstStyle/>
+                    <a:p>
+                      <a:pPr algn="r"/>
+                      <a:r>
+                        <a:rPr sz="1150" b="0">
+                          <a:solidFill>
+                            <a:srgbClr val="5D6D7E"/>
+                          </a:solidFill>
+                          <a:latin typeface="Arial"/>
+                        </a:rPr>
                         <a:t>31.7%</a:t>
                       </a:r>
                     </a:p>
@@ -8682,6 +9771,29 @@
                           </a:solidFill>
                           <a:latin typeface="Arial"/>
                         </a:rPr>
+                        <a:t>37.0%</a:t>
+                      </a:r>
+                    </a:p>
+                  </a:txBody>
+                  <a:tcPr>
+                    <a:solidFill>
+                      <a:srgbClr val="FFFFFF"/>
+                    </a:solidFill>
+                  </a:tcPr>
+                </a:tc>
+                <a:tc>
+                  <a:txBody>
+                    <a:bodyPr/>
+                    <a:lstStyle/>
+                    <a:p>
+                      <a:pPr algn="r"/>
+                      <a:r>
+                        <a:rPr sz="1150" b="0">
+                          <a:solidFill>
+                            <a:srgbClr val="5D6D7E"/>
+                          </a:solidFill>
+                          <a:latin typeface="Arial"/>
+                        </a:rPr>
                         <a:t>21.0%</a:t>
                       </a:r>
                     </a:p>
@@ -8776,6 +9888,29 @@
                           </a:solidFill>
                           <a:latin typeface="Arial"/>
                         </a:rPr>
+                        <a:t>45.7%</a:t>
+                      </a:r>
+                    </a:p>
+                  </a:txBody>
+                  <a:tcPr>
+                    <a:solidFill>
+                      <a:srgbClr val="FFFFFF"/>
+                    </a:solidFill>
+                  </a:tcPr>
+                </a:tc>
+                <a:tc>
+                  <a:txBody>
+                    <a:bodyPr/>
+                    <a:lstStyle/>
+                    <a:p>
+                      <a:pPr algn="r"/>
+                      <a:r>
+                        <a:rPr sz="1150" b="0">
+                          <a:solidFill>
+                            <a:srgbClr val="5D6D7E"/>
+                          </a:solidFill>
+                          <a:latin typeface="Arial"/>
+                        </a:rPr>
                         <a:t>25.7%</a:t>
                       </a:r>
                     </a:p>
@@ -8870,6 +10005,29 @@
                           </a:solidFill>
                           <a:latin typeface="Arial"/>
                         </a:rPr>
+                        <a:t>53.7%</a:t>
+                      </a:r>
+                    </a:p>
+                  </a:txBody>
+                  <a:tcPr>
+                    <a:solidFill>
+                      <a:srgbClr val="FFFFFF"/>
+                    </a:solidFill>
+                  </a:tcPr>
+                </a:tc>
+                <a:tc>
+                  <a:txBody>
+                    <a:bodyPr/>
+                    <a:lstStyle/>
+                    <a:p>
+                      <a:pPr algn="r"/>
+                      <a:r>
+                        <a:rPr sz="1150" b="0">
+                          <a:solidFill>
+                            <a:srgbClr val="5D6D7E"/>
+                          </a:solidFill>
+                          <a:latin typeface="Arial"/>
+                        </a:rPr>
                         <a:t>30.0%</a:t>
                       </a:r>
                     </a:p>
@@ -8942,6 +10100,29 @@
                           <a:latin typeface="Arial"/>
                         </a:rPr>
                         <a:t>&gt; 27</a:t>
+                      </a:r>
+                    </a:p>
+                  </a:txBody>
+                  <a:tcPr>
+                    <a:solidFill>
+                      <a:srgbClr val="FFFFFF"/>
+                    </a:solidFill>
+                  </a:tcPr>
+                </a:tc>
+                <a:tc>
+                  <a:txBody>
+                    <a:bodyPr/>
+                    <a:lstStyle/>
+                    <a:p>
+                      <a:pPr algn="r"/>
+                      <a:r>
+                        <a:rPr sz="1150" b="0">
+                          <a:solidFill>
+                            <a:srgbClr val="5D6D7E"/>
+                          </a:solidFill>
+                          <a:latin typeface="Arial"/>
+                        </a:rPr>
+                        <a:t>57.0%</a:t>
                       </a:r>
                     </a:p>
                   </a:txBody>
@@ -9293,7 +10474,7 @@
                 </a:solidFill>
                 <a:latin typeface="Arial"/>
               </a:rPr>
-              <a:t>How acceptance is measured</a:t>
+              <a:t>System approval, take-up and booking rate</a:t>
             </a:r>
           </a:p>
         </p:txBody>
@@ -9510,7 +10691,7 @@
                           </a:solidFill>
                           <a:latin typeface="Arial"/>
                         </a:rPr>
-                        <a:t>booked  (= acceptance rate)</a:t>
+                        <a:t>booked  (= booking rate)</a:t>
                       </a:r>
                     </a:p>
                   </a:txBody>
@@ -10168,7 +11349,7 @@
                           </a:solidFill>
                           <a:latin typeface="Arial"/>
                         </a:rPr>
-                        <a:t>Engine approval (first three rows)</a:t>
+                        <a:t>System approval: OK + RV (first three rows)</a:t>
                       </a:r>
                     </a:p>
                   </a:txBody>
@@ -10380,7 +11561,7 @@
                 </a:solidFill>
                 <a:latin typeface="Arial"/>
               </a:rPr>
-              <a:t>Acceptance rate (effective).  </a:t>
+              <a:t>Booking rate.  </a:t>
             </a:r>
             <a:r>
               <a:rPr sz="1000">
@@ -10389,7 +11570,7 @@
                 </a:solidFill>
                 <a:latin typeface="Arial"/>
               </a:rPr>
-              <a:t>€ booked / € applied for, over every application that comes through the door — rejected, cancelled and booked alike. The first row of the table. Point 1 and every scenario use it.</a:t>
+              <a:t>€ booked / € applied for, over every application that comes through the door — rejected, cancelled and booked alike. The first row of the table; point 1, the scenarios and the headline use it. It equals system approval × take-up.</a:t>
             </a:r>
           </a:p>
           <a:p>
@@ -10405,7 +11586,7 @@
                 </a:solidFill>
                 <a:latin typeface="Arial"/>
               </a:rPr>
-              <a:t>Score acceptance.  </a:t>
+              <a:t>System approval.  </a:t>
             </a:r>
             <a:r>
               <a:rPr sz="1000">
@@ -10414,7 +11595,7 @@
                 </a:solidFill>
                 <a:latin typeface="Arial"/>
               </a:rPr>
-              <a:t>€ above the score cutoff and not rejected by another rule, over € demand. Comparable with the engine's approval rate, not with the effective one; shown only in the scenario table.</a:t>
+              <a:t>(OK + RV) / € demand: what the engine lets through, before the customer decides. Under a grid it is simulated as demand above the cutoff and not rejected by another rule. Comparable across today and every scenario; not comparable with the booking rate.</a:t>
             </a:r>
           </a:p>
           <a:p>
@@ -10998,7 +12179,7 @@
                 </a:solidFill>
                 <a:latin typeface="Arial"/>
               </a:rPr>
-              <a:t>Measured on stores' own history, same window as Online: describing where they stand today needs no imputation. They accept almost three times as much as Online and carry less risk. Warning: their acceptance rate is falling (55.1% over Mar 2025 – Feb 2026, 43.0% in Aug–Sep 2026), so the baseline is moving.</a:t>
+              <a:t>Measured on stores' own history, same window as Online: describing where they stand today needs no imputation. They accept almost three times as much as Online and carry less risk. Warning: their booking rate is falling (55.1% over Mar 2025 – Feb 2026, 43.0% in Aug–Sep 2026), so the baseline is moving.</a:t>
             </a:r>
           </a:p>
         </p:txBody>
@@ -11441,7 +12622,7 @@
         <p:spPr>
           <a:xfrm>
             <a:off x="566928" y="1563624"/>
-            <a:ext cx="6720840" cy="3316095"/>
+            <a:ext cx="6720840" cy="3285599"/>
           </a:xfrm>
           <a:prstGeom prst="rect">
             <a:avLst/>
@@ -11532,7 +12713,7 @@
                           </a:solidFill>
                           <a:latin typeface="Arial"/>
                         </a:rPr>
-                        <a:t>Score acc.</a:t>
+                        <a:t>Sys. appr.</a:t>
                       </a:r>
                     </a:p>
                   </a:txBody>
@@ -11555,7 +12736,7 @@
                           </a:solidFill>
                           <a:latin typeface="Arial"/>
                         </a:rPr>
-                        <a:t>Eff. acc.</a:t>
+                        <a:t>Booking</a:t>
                       </a:r>
                     </a:p>
                   </a:txBody>
@@ -11626,7 +12807,7 @@
                           </a:solidFill>
                           <a:latin typeface="Arial"/>
                         </a:rPr>
-                        <a:t>—</a:t>
+                        <a:t>54.8%</a:t>
                       </a:r>
                     </a:p>
                   </a:txBody>
@@ -11720,7 +12901,7 @@
                           </a:solidFill>
                           <a:latin typeface="Arial"/>
                         </a:rPr>
-                        <a:t>—</a:t>
+                        <a:t>52.4%</a:t>
                       </a:r>
                     </a:p>
                   </a:txBody>
@@ -12612,7 +13793,7 @@
         </p:nvSpPr>
         <p:spPr>
           <a:xfrm>
-            <a:off x="566928" y="4989447"/>
+            <a:off x="566928" y="4958951"/>
             <a:ext cx="6720840" cy="292608"/>
           </a:xfrm>
           <a:prstGeom prst="rect">
@@ -12651,7 +13832,7 @@
         </p:nvSpPr>
         <p:spPr>
           <a:xfrm>
-            <a:off x="566928" y="5300343"/>
+            <a:off x="566928" y="5269847"/>
             <a:ext cx="6720840" cy="1280160"/>
           </a:xfrm>
           <a:prstGeom prst="rect">
@@ -12716,7 +13897,7 @@
                 </a:solidFill>
                 <a:latin typeface="Arial"/>
               </a:rPr>
-              <a:t>Score acc.: demand above the cutoff.</a:t>
+              <a:t>System approval: demand the engine lets through — (OK + RV) today; above the cutoff and not rejected by another rule under a grid.</a:t>
             </a:r>
           </a:p>
           <a:p>
@@ -12732,7 +13913,7 @@
                 </a:solidFill>
                 <a:latin typeface="Arial"/>
               </a:rPr>
-              <a:t>Eff. acc.: production / demand, the same base as point 1. The two are not comparable.</a:t>
+              <a:t>Booking rate: booked / demand = system approval × take-up. Point 1 and the headline use it.</a:t>
             </a:r>
           </a:p>
           <a:p>
@@ -12853,7 +14034,7 @@
                 </a:solidFill>
                 <a:latin typeface="Arial"/>
               </a:rPr>
-              <a:t>POINT 4 · GRIDS</a:t>
+              <a:t>POINT 3 · E-COMMERCE, STORES AND APPLE</a:t>
             </a:r>
           </a:p>
         </p:txBody>
@@ -12892,7 +14073,7 @@
                 </a:solidFill>
                 <a:latin typeface="Arial"/>
               </a:rPr>
-              <a:t>Policy — no period</a:t>
+              <a:t>Online Mar 2025 – Feb 2026  ·  stores Aug–Sep 2026</a:t>
             </a:r>
           </a:p>
         </p:txBody>
@@ -12931,7 +14112,7 @@
                 </a:solidFill>
                 <a:latin typeface="Arial"/>
               </a:rPr>
-              <a:t>What grid each scenario implies</a:t>
+              <a:t>Scenarios by channel</a:t>
             </a:r>
           </a:p>
         </p:txBody>
@@ -12980,95 +14161,17 @@
           </a:p>
         </p:txBody>
       </p:sp>
-      <p:sp>
-        <p:nvSpPr>
-          <p:cNvPr id="6" name="TextBox 5"/>
-          <p:cNvSpPr txBox="1"/>
-          <p:nvPr/>
-        </p:nvSpPr>
-        <p:spPr>
-          <a:xfrm>
-            <a:off x="566928" y="1563624"/>
-            <a:ext cx="11057839" cy="320040"/>
-          </a:xfrm>
-          <a:prstGeom prst="rect">
-            <a:avLst/>
-          </a:prstGeom>
-          <a:noFill/>
-        </p:spPr>
-        <p:txBody>
-          <a:bodyPr wrap="square">
-            <a:spAutoFit/>
-          </a:bodyPr>
-          <a:lstStyle/>
-          <a:p>
-            <a:pPr algn="l">
-              <a:lnSpc>
-                <a:spcPct val="100000"/>
-              </a:lnSpc>
-            </a:pPr>
-            <a:r>
-              <a:rPr sz="1150" b="0">
-                <a:solidFill>
-                  <a:srgbClr val="5D6D7E"/>
-                </a:solidFill>
-                <a:latin typeface="Arial"/>
-              </a:rPr>
-              <a:t>REJECT threshold by group: applications above the value are accepted.</a:t>
-            </a:r>
-          </a:p>
-        </p:txBody>
-      </p:sp>
-      <p:sp>
-        <p:nvSpPr>
-          <p:cNvPr id="7" name="TextBox 6"/>
-          <p:cNvSpPr txBox="1"/>
-          <p:nvPr/>
-        </p:nvSpPr>
-        <p:spPr>
-          <a:xfrm>
-            <a:off x="566928" y="1975104"/>
-            <a:ext cx="11057839" cy="292608"/>
-          </a:xfrm>
-          <a:prstGeom prst="rect">
-            <a:avLst/>
-          </a:prstGeom>
-          <a:noFill/>
-        </p:spPr>
-        <p:txBody>
-          <a:bodyPr wrap="square">
-            <a:spAutoFit/>
-          </a:bodyPr>
-          <a:lstStyle/>
-          <a:p>
-            <a:pPr algn="l">
-              <a:lnSpc>
-                <a:spcPct val="100000"/>
-              </a:lnSpc>
-            </a:pPr>
-            <a:r>
-              <a:rPr sz="1400" b="1">
-                <a:solidFill>
-                  <a:srgbClr val="2C3E50"/>
-                </a:solidFill>
-                <a:latin typeface="Arial"/>
-              </a:rPr>
-              <a:t>Single cutoff for all of Apple</a:t>
-            </a:r>
-          </a:p>
-        </p:txBody>
-      </p:sp>
       <p:graphicFrame>
         <p:nvGraphicFramePr>
-          <p:cNvPr id="8" name="Table 7"/>
+          <p:cNvPr id="6" name="Table 5"/>
           <p:cNvGraphicFramePr>
             <a:graphicFrameLocks noGrp="1"/>
           </p:cNvGraphicFramePr>
           <p:nvPr/>
         </p:nvGraphicFramePr>
         <p:xfrm>
-          <a:off x="566928" y="2286000"/>
-          <a:ext cx="10058397" cy="1481328"/>
+          <a:off x="566928" y="1563624"/>
+          <a:ext cx="11057837" cy="1984248"/>
         </p:xfrm>
         <a:graphic>
           <a:graphicData uri="http://schemas.openxmlformats.org/drawingml/2006/table">
@@ -13077,14 +14180,15 @@
                 <a:tableStyleId>{5C22544A-7EE6-4342-B048-85BDC9FD1C3A}</a:tableStyleId>
               </a:tblPr>
               <a:tblGrid>
-                <a:gridCol w="2075542"/>
-                <a:gridCol w="1596571"/>
-                <a:gridCol w="1596571"/>
-                <a:gridCol w="1596571"/>
-                <a:gridCol w="1596571"/>
-                <a:gridCol w="1596571"/>
+                <a:gridCol w="3343067"/>
+                <a:gridCol w="1285795"/>
+                <a:gridCol w="1285795"/>
+                <a:gridCol w="1285795"/>
+                <a:gridCol w="1285795"/>
+                <a:gridCol w="1285795"/>
+                <a:gridCol w="1285795"/>
               </a:tblGrid>
-              <a:tr h="246888">
+              <a:tr h="384048">
                 <a:tc>
                   <a:txBody>
                     <a:bodyPr/>
@@ -13092,13 +14196,13 @@
                     <a:p>
                       <a:pPr algn="l"/>
                       <a:r>
-                        <a:rPr sz="1150" b="1">
+                        <a:rPr sz="1050" b="1">
                           <a:solidFill>
                             <a:srgbClr val="2C3E50"/>
                           </a:solidFill>
                           <a:latin typeface="Arial"/>
                         </a:rPr>
-                        <a:t>Group</a:t>
+                        <a:t>Rates, % of € demand</a:t>
                       </a:r>
                     </a:p>
                   </a:txBody>
@@ -13115,13 +14219,25 @@
                     <a:p>
                       <a:pPr algn="r"/>
                       <a:r>
-                        <a:rPr sz="1150" b="1">
+                        <a:rPr sz="1050" b="1">
                           <a:solidFill>
                             <a:srgbClr val="2C3E50"/>
                           </a:solidFill>
                           <a:latin typeface="Arial"/>
                         </a:rPr>
-                        <a:t>Today</a:t>
+                        <a:t>E-com</a:t>
+                      </a:r>
+                    </a:p>
+                    <a:p>
+                      <a:pPr algn="r"/>
+                      <a:r>
+                        <a:rPr sz="1050" b="1">
+                          <a:solidFill>
+                            <a:srgbClr val="2C3E50"/>
+                          </a:solidFill>
+                          <a:latin typeface="Arial"/>
+                        </a:rPr>
+                        <a:t>sys. appr.</a:t>
                       </a:r>
                     </a:p>
                   </a:txBody>
@@ -13138,13 +14254,25 @@
                     <a:p>
                       <a:pPr algn="r"/>
                       <a:r>
-                        <a:rPr sz="1150" b="1">
+                        <a:rPr sz="1050" b="1">
                           <a:solidFill>
                             <a:srgbClr val="2C3E50"/>
                           </a:solidFill>
                           <a:latin typeface="Arial"/>
                         </a:rPr>
-                        <a:t>2.5%</a:t>
+                        <a:t>E-com</a:t>
+                      </a:r>
+                    </a:p>
+                    <a:p>
+                      <a:pPr algn="r"/>
+                      <a:r>
+                        <a:rPr sz="1050" b="1">
+                          <a:solidFill>
+                            <a:srgbClr val="2C3E50"/>
+                          </a:solidFill>
+                          <a:latin typeface="Arial"/>
+                        </a:rPr>
+                        <a:t>booking</a:t>
                       </a:r>
                     </a:p>
                   </a:txBody>
@@ -13161,13 +14289,25 @@
                     <a:p>
                       <a:pPr algn="r"/>
                       <a:r>
-                        <a:rPr sz="1150" b="1">
+                        <a:rPr sz="1050" b="1">
                           <a:solidFill>
                             <a:srgbClr val="2C3E50"/>
                           </a:solidFill>
                           <a:latin typeface="Arial"/>
                         </a:rPr>
-                        <a:t>3%</a:t>
+                        <a:t>Stores</a:t>
+                      </a:r>
+                    </a:p>
+                    <a:p>
+                      <a:pPr algn="r"/>
+                      <a:r>
+                        <a:rPr sz="1050" b="1">
+                          <a:solidFill>
+                            <a:srgbClr val="2C3E50"/>
+                          </a:solidFill>
+                          <a:latin typeface="Arial"/>
+                        </a:rPr>
+                        <a:t>sys. appr.</a:t>
                       </a:r>
                     </a:p>
                   </a:txBody>
@@ -13184,13 +14324,25 @@
                     <a:p>
                       <a:pPr algn="r"/>
                       <a:r>
-                        <a:rPr sz="1150" b="1">
+                        <a:rPr sz="1050" b="1">
                           <a:solidFill>
                             <a:srgbClr val="2C3E50"/>
                           </a:solidFill>
                           <a:latin typeface="Arial"/>
                         </a:rPr>
-                        <a:t>3.5%</a:t>
+                        <a:t>Stores</a:t>
+                      </a:r>
+                    </a:p>
+                    <a:p>
+                      <a:pPr algn="r"/>
+                      <a:r>
+                        <a:rPr sz="1050" b="1">
+                          <a:solidFill>
+                            <a:srgbClr val="2C3E50"/>
+                          </a:solidFill>
+                          <a:latin typeface="Arial"/>
+                        </a:rPr>
+                        <a:t>booking</a:t>
                       </a:r>
                     </a:p>
                   </a:txBody>
@@ -13207,13 +14359,25 @@
                     <a:p>
                       <a:pPr algn="r"/>
                       <a:r>
-                        <a:rPr sz="1150" b="1">
+                        <a:rPr sz="1050" b="1">
                           <a:solidFill>
                             <a:srgbClr val="2C3E50"/>
                           </a:solidFill>
                           <a:latin typeface="Arial"/>
                         </a:rPr>
-                        <a:t>4%</a:t>
+                        <a:t>Apple</a:t>
+                      </a:r>
+                    </a:p>
+                    <a:p>
+                      <a:pPr algn="r"/>
+                      <a:r>
+                        <a:rPr sz="1050" b="1">
+                          <a:solidFill>
+                            <a:srgbClr val="2C3E50"/>
+                          </a:solidFill>
+                          <a:latin typeface="Arial"/>
+                        </a:rPr>
+                        <a:t>sys. appr.</a:t>
                       </a:r>
                     </a:p>
                   </a:txBody>
@@ -13223,8 +14387,43 @@
                     </a:solidFill>
                   </a:tcPr>
                 </a:tc>
+                <a:tc>
+                  <a:txBody>
+                    <a:bodyPr/>
+                    <a:lstStyle/>
+                    <a:p>
+                      <a:pPr algn="r"/>
+                      <a:r>
+                        <a:rPr sz="1050" b="1">
+                          <a:solidFill>
+                            <a:srgbClr val="2C3E50"/>
+                          </a:solidFill>
+                          <a:latin typeface="Arial"/>
+                        </a:rPr>
+                        <a:t>Apple</a:t>
+                      </a:r>
+                    </a:p>
+                    <a:p>
+                      <a:pPr algn="r"/>
+                      <a:r>
+                        <a:rPr sz="1050" b="1">
+                          <a:solidFill>
+                            <a:srgbClr val="2C3E50"/>
+                          </a:solidFill>
+                          <a:latin typeface="Arial"/>
+                        </a:rPr>
+                        <a:t>booking</a:t>
+                      </a:r>
+                    </a:p>
+                  </a:txBody>
+                  <a:tcPr>
+                    <a:solidFill>
+                      <a:srgbClr val="F6F7F9"/>
+                    </a:solidFill>
+                  </a:tcPr>
+                </a:tc>
               </a:tr>
-              <a:tr h="246888">
+              <a:tr h="228600">
                 <a:tc>
                   <a:txBody>
                     <a:bodyPr/>
@@ -13232,128 +14431,151 @@
                     <a:p>
                       <a:pPr algn="l"/>
                       <a:r>
-                        <a:rPr sz="1150" b="0">
-                          <a:solidFill>
-                            <a:srgbClr val="5D6D7E"/>
-                          </a:solidFill>
-                          <a:latin typeface="Arial"/>
-                        </a:rPr>
-                        <a:t>New</a:t>
-                      </a:r>
-                    </a:p>
-                  </a:txBody>
-                  <a:tcPr>
-                    <a:solidFill>
-                      <a:srgbClr val="FFFFFF"/>
-                    </a:solidFill>
-                  </a:tcPr>
-                </a:tc>
-                <a:tc>
-                  <a:txBody>
-                    <a:bodyPr/>
-                    <a:lstStyle/>
-                    <a:p>
-                      <a:pPr algn="r"/>
-                      <a:r>
-                        <a:rPr sz="1150" b="0">
-                          <a:solidFill>
-                            <a:srgbClr val="5D6D7E"/>
-                          </a:solidFill>
-                          <a:latin typeface="Arial"/>
-                        </a:rPr>
-                        <a:t>&gt; 27</a:t>
-                      </a:r>
-                    </a:p>
-                  </a:txBody>
-                  <a:tcPr>
-                    <a:solidFill>
-                      <a:srgbClr val="FFFFFF"/>
-                    </a:solidFill>
-                  </a:tcPr>
-                </a:tc>
-                <a:tc>
-                  <a:txBody>
-                    <a:bodyPr/>
-                    <a:lstStyle/>
-                    <a:p>
-                      <a:pPr algn="r"/>
-                      <a:r>
-                        <a:rPr sz="1150" b="0">
-                          <a:solidFill>
-                            <a:srgbClr val="5D6D7E"/>
-                          </a:solidFill>
-                          <a:latin typeface="Arial"/>
-                        </a:rPr>
-                        <a:t>&gt; 62</a:t>
-                      </a:r>
-                    </a:p>
-                  </a:txBody>
-                  <a:tcPr>
-                    <a:solidFill>
-                      <a:srgbClr val="FFFFFF"/>
-                    </a:solidFill>
-                  </a:tcPr>
-                </a:tc>
-                <a:tc>
-                  <a:txBody>
-                    <a:bodyPr/>
-                    <a:lstStyle/>
-                    <a:p>
-                      <a:pPr algn="r"/>
-                      <a:r>
-                        <a:rPr sz="1150" b="0">
-                          <a:solidFill>
-                            <a:srgbClr val="5D6D7E"/>
-                          </a:solidFill>
-                          <a:latin typeface="Arial"/>
-                        </a:rPr>
-                        <a:t>&gt; 51</a:t>
-                      </a:r>
-                    </a:p>
-                  </a:txBody>
-                  <a:tcPr>
-                    <a:solidFill>
-                      <a:srgbClr val="FFFFFF"/>
-                    </a:solidFill>
-                  </a:tcPr>
-                </a:tc>
-                <a:tc>
-                  <a:txBody>
-                    <a:bodyPr/>
-                    <a:lstStyle/>
-                    <a:p>
-                      <a:pPr algn="r"/>
-                      <a:r>
-                        <a:rPr sz="1150" b="0">
-                          <a:solidFill>
-                            <a:srgbClr val="5D6D7E"/>
-                          </a:solidFill>
-                          <a:latin typeface="Arial"/>
-                        </a:rPr>
-                        <a:t>&gt; 38</a:t>
-                      </a:r>
-                    </a:p>
-                  </a:txBody>
-                  <a:tcPr>
-                    <a:solidFill>
-                      <a:srgbClr val="FFFFFF"/>
-                    </a:solidFill>
-                  </a:tcPr>
-                </a:tc>
-                <a:tc>
-                  <a:txBody>
-                    <a:bodyPr/>
-                    <a:lstStyle/>
-                    <a:p>
-                      <a:pPr algn="r"/>
-                      <a:r>
-                        <a:rPr sz="1150" b="0">
-                          <a:solidFill>
-                            <a:srgbClr val="5D6D7E"/>
-                          </a:solidFill>
-                          <a:latin typeface="Arial"/>
-                        </a:rPr>
-                        <a:t>&gt; 27</a:t>
+                        <a:rPr sz="1050" b="0">
+                          <a:solidFill>
+                            <a:srgbClr val="5D6D7E"/>
+                          </a:solidFill>
+                          <a:latin typeface="Arial"/>
+                        </a:rPr>
+                        <a:t>Today (measured)</a:t>
+                      </a:r>
+                    </a:p>
+                  </a:txBody>
+                  <a:tcPr>
+                    <a:solidFill>
+                      <a:srgbClr val="FFFFFF"/>
+                    </a:solidFill>
+                  </a:tcPr>
+                </a:tc>
+                <a:tc>
+                  <a:txBody>
+                    <a:bodyPr/>
+                    <a:lstStyle/>
+                    <a:p>
+                      <a:pPr algn="r"/>
+                      <a:r>
+                        <a:rPr sz="1050" b="0">
+                          <a:solidFill>
+                            <a:srgbClr val="5D6D7E"/>
+                          </a:solidFill>
+                          <a:latin typeface="Arial"/>
+                        </a:rPr>
+                        <a:t>51.9%</a:t>
+                      </a:r>
+                    </a:p>
+                  </a:txBody>
+                  <a:tcPr>
+                    <a:solidFill>
+                      <a:srgbClr val="FFFFFF"/>
+                    </a:solidFill>
+                  </a:tcPr>
+                </a:tc>
+                <a:tc>
+                  <a:txBody>
+                    <a:bodyPr/>
+                    <a:lstStyle/>
+                    <a:p>
+                      <a:pPr algn="r"/>
+                      <a:r>
+                        <a:rPr sz="1050" b="0">
+                          <a:solidFill>
+                            <a:srgbClr val="5D6D7E"/>
+                          </a:solidFill>
+                          <a:latin typeface="Arial"/>
+                        </a:rPr>
+                        <a:t>20.9%</a:t>
+                      </a:r>
+                    </a:p>
+                  </a:txBody>
+                  <a:tcPr>
+                    <a:solidFill>
+                      <a:srgbClr val="FFFFFF"/>
+                    </a:solidFill>
+                  </a:tcPr>
+                </a:tc>
+                <a:tc>
+                  <a:txBody>
+                    <a:bodyPr/>
+                    <a:lstStyle/>
+                    <a:p>
+                      <a:pPr algn="r"/>
+                      <a:r>
+                        <a:rPr sz="1050" b="0">
+                          <a:solidFill>
+                            <a:srgbClr val="5D6D7E"/>
+                          </a:solidFill>
+                          <a:latin typeface="Arial"/>
+                        </a:rPr>
+                        <a:t>64.1%</a:t>
+                      </a:r>
+                    </a:p>
+                  </a:txBody>
+                  <a:tcPr>
+                    <a:solidFill>
+                      <a:srgbClr val="FFFFFF"/>
+                    </a:solidFill>
+                  </a:tcPr>
+                </a:tc>
+                <a:tc>
+                  <a:txBody>
+                    <a:bodyPr/>
+                    <a:lstStyle/>
+                    <a:p>
+                      <a:pPr algn="r"/>
+                      <a:r>
+                        <a:rPr sz="1050" b="0">
+                          <a:solidFill>
+                            <a:srgbClr val="5D6D7E"/>
+                          </a:solidFill>
+                          <a:latin typeface="Arial"/>
+                        </a:rPr>
+                        <a:t>55.1%</a:t>
+                      </a:r>
+                    </a:p>
+                  </a:txBody>
+                  <a:tcPr>
+                    <a:solidFill>
+                      <a:srgbClr val="FFFFFF"/>
+                    </a:solidFill>
+                  </a:tcPr>
+                </a:tc>
+                <a:tc>
+                  <a:txBody>
+                    <a:bodyPr/>
+                    <a:lstStyle/>
+                    <a:p>
+                      <a:pPr algn="r"/>
+                      <a:r>
+                        <a:rPr sz="1050" b="0">
+                          <a:solidFill>
+                            <a:srgbClr val="5D6D7E"/>
+                          </a:solidFill>
+                          <a:latin typeface="Arial"/>
+                        </a:rPr>
+                        <a:t>54.8%</a:t>
+                      </a:r>
+                    </a:p>
+                  </a:txBody>
+                  <a:tcPr>
+                    <a:solidFill>
+                      <a:srgbClr val="FFFFFF"/>
+                    </a:solidFill>
+                  </a:tcPr>
+                </a:tc>
+                <a:tc>
+                  <a:txBody>
+                    <a:bodyPr/>
+                    <a:lstStyle/>
+                    <a:p>
+                      <a:pPr algn="r"/>
+                      <a:r>
+                        <a:rPr sz="1050" b="0">
+                          <a:solidFill>
+                            <a:srgbClr val="5D6D7E"/>
+                          </a:solidFill>
+                          <a:latin typeface="Arial"/>
+                        </a:rPr>
+                        <a:t>29.0%</a:t>
                       </a:r>
                     </a:p>
                   </a:txBody>
@@ -13364,7 +14586,7 @@
                   </a:tcPr>
                 </a:tc>
               </a:tr>
-              <a:tr h="246888">
+              <a:tr h="228600">
                 <a:tc>
                   <a:txBody>
                     <a:bodyPr/>
@@ -13372,128 +14594,151 @@
                     <a:p>
                       <a:pPr algn="l"/>
                       <a:r>
-                        <a:rPr sz="1150" b="0">
-                          <a:solidFill>
-                            <a:srgbClr val="5D6D7E"/>
-                          </a:solidFill>
-                          <a:latin typeface="Arial"/>
-                        </a:rPr>
-                        <a:t>Inactive</a:t>
-                      </a:r>
-                    </a:p>
-                  </a:txBody>
-                  <a:tcPr>
-                    <a:solidFill>
-                      <a:srgbClr val="FFFFFF"/>
-                    </a:solidFill>
-                  </a:tcPr>
-                </a:tc>
-                <a:tc>
-                  <a:txBody>
-                    <a:bodyPr/>
-                    <a:lstStyle/>
-                    <a:p>
-                      <a:pPr algn="r"/>
-                      <a:r>
-                        <a:rPr sz="1150" b="0">
-                          <a:solidFill>
-                            <a:srgbClr val="5D6D7E"/>
-                          </a:solidFill>
-                          <a:latin typeface="Arial"/>
-                        </a:rPr>
-                        <a:t>&gt; 22</a:t>
-                      </a:r>
-                    </a:p>
-                  </a:txBody>
-                  <a:tcPr>
-                    <a:solidFill>
-                      <a:srgbClr val="FFFFFF"/>
-                    </a:solidFill>
-                  </a:tcPr>
-                </a:tc>
-                <a:tc>
-                  <a:txBody>
-                    <a:bodyPr/>
-                    <a:lstStyle/>
-                    <a:p>
-                      <a:pPr algn="r"/>
-                      <a:r>
-                        <a:rPr sz="1150" b="0">
-                          <a:solidFill>
-                            <a:srgbClr val="5D6D7E"/>
-                          </a:solidFill>
-                          <a:latin typeface="Arial"/>
-                        </a:rPr>
-                        <a:t>&gt; 62</a:t>
-                      </a:r>
-                    </a:p>
-                  </a:txBody>
-                  <a:tcPr>
-                    <a:solidFill>
-                      <a:srgbClr val="FFFFFF"/>
-                    </a:solidFill>
-                  </a:tcPr>
-                </a:tc>
-                <a:tc>
-                  <a:txBody>
-                    <a:bodyPr/>
-                    <a:lstStyle/>
-                    <a:p>
-                      <a:pPr algn="r"/>
-                      <a:r>
-                        <a:rPr sz="1150" b="0">
-                          <a:solidFill>
-                            <a:srgbClr val="5D6D7E"/>
-                          </a:solidFill>
-                          <a:latin typeface="Arial"/>
-                        </a:rPr>
-                        <a:t>&gt; 51</a:t>
-                      </a:r>
-                    </a:p>
-                  </a:txBody>
-                  <a:tcPr>
-                    <a:solidFill>
-                      <a:srgbClr val="FFFFFF"/>
-                    </a:solidFill>
-                  </a:tcPr>
-                </a:tc>
-                <a:tc>
-                  <a:txBody>
-                    <a:bodyPr/>
-                    <a:lstStyle/>
-                    <a:p>
-                      <a:pPr algn="r"/>
-                      <a:r>
-                        <a:rPr sz="1150" b="0">
-                          <a:solidFill>
-                            <a:srgbClr val="5D6D7E"/>
-                          </a:solidFill>
-                          <a:latin typeface="Arial"/>
-                        </a:rPr>
-                        <a:t>&gt; 38</a:t>
-                      </a:r>
-                    </a:p>
-                  </a:txBody>
-                  <a:tcPr>
-                    <a:solidFill>
-                      <a:srgbClr val="FFFFFF"/>
-                    </a:solidFill>
-                  </a:tcPr>
-                </a:tc>
-                <a:tc>
-                  <a:txBody>
-                    <a:bodyPr/>
-                    <a:lstStyle/>
-                    <a:p>
-                      <a:pPr algn="r"/>
-                      <a:r>
-                        <a:rPr sz="1150" b="0">
-                          <a:solidFill>
-                            <a:srgbClr val="5D6D7E"/>
-                          </a:solidFill>
-                          <a:latin typeface="Arial"/>
-                        </a:rPr>
-                        <a:t>&gt; 27</a:t>
+                        <a:rPr sz="1050" b="0">
+                          <a:solidFill>
+                            <a:srgbClr val="5D6D7E"/>
+                          </a:solidFill>
+                          <a:latin typeface="Arial"/>
+                        </a:rPr>
+                        <a:t>Today, current store demand</a:t>
+                      </a:r>
+                    </a:p>
+                  </a:txBody>
+                  <a:tcPr>
+                    <a:solidFill>
+                      <a:srgbClr val="FFFFFF"/>
+                    </a:solidFill>
+                  </a:tcPr>
+                </a:tc>
+                <a:tc>
+                  <a:txBody>
+                    <a:bodyPr/>
+                    <a:lstStyle/>
+                    <a:p>
+                      <a:pPr algn="r"/>
+                      <a:r>
+                        <a:rPr sz="1050" b="0">
+                          <a:solidFill>
+                            <a:srgbClr val="5D6D7E"/>
+                          </a:solidFill>
+                          <a:latin typeface="Arial"/>
+                        </a:rPr>
+                        <a:t>51.9%</a:t>
+                      </a:r>
+                    </a:p>
+                  </a:txBody>
+                  <a:tcPr>
+                    <a:solidFill>
+                      <a:srgbClr val="FFFFFF"/>
+                    </a:solidFill>
+                  </a:tcPr>
+                </a:tc>
+                <a:tc>
+                  <a:txBody>
+                    <a:bodyPr/>
+                    <a:lstStyle/>
+                    <a:p>
+                      <a:pPr algn="r"/>
+                      <a:r>
+                        <a:rPr sz="1050" b="0">
+                          <a:solidFill>
+                            <a:srgbClr val="5D6D7E"/>
+                          </a:solidFill>
+                          <a:latin typeface="Arial"/>
+                        </a:rPr>
+                        <a:t>20.9%</a:t>
+                      </a:r>
+                    </a:p>
+                  </a:txBody>
+                  <a:tcPr>
+                    <a:solidFill>
+                      <a:srgbClr val="FFFFFF"/>
+                    </a:solidFill>
+                  </a:tcPr>
+                </a:tc>
+                <a:tc>
+                  <a:txBody>
+                    <a:bodyPr/>
+                    <a:lstStyle/>
+                    <a:p>
+                      <a:pPr algn="r"/>
+                      <a:r>
+                        <a:rPr sz="1050" b="0">
+                          <a:solidFill>
+                            <a:srgbClr val="5D6D7E"/>
+                          </a:solidFill>
+                          <a:latin typeface="Arial"/>
+                        </a:rPr>
+                        <a:t>53.5%</a:t>
+                      </a:r>
+                    </a:p>
+                  </a:txBody>
+                  <a:tcPr>
+                    <a:solidFill>
+                      <a:srgbClr val="FFFFFF"/>
+                    </a:solidFill>
+                  </a:tcPr>
+                </a:tc>
+                <a:tc>
+                  <a:txBody>
+                    <a:bodyPr/>
+                    <a:lstStyle/>
+                    <a:p>
+                      <a:pPr algn="r"/>
+                      <a:r>
+                        <a:rPr sz="1050" b="0">
+                          <a:solidFill>
+                            <a:srgbClr val="5D6D7E"/>
+                          </a:solidFill>
+                          <a:latin typeface="Arial"/>
+                        </a:rPr>
+                        <a:t>43.0%</a:t>
+                      </a:r>
+                    </a:p>
+                  </a:txBody>
+                  <a:tcPr>
+                    <a:solidFill>
+                      <a:srgbClr val="FFFFFF"/>
+                    </a:solidFill>
+                  </a:tcPr>
+                </a:tc>
+                <a:tc>
+                  <a:txBody>
+                    <a:bodyPr/>
+                    <a:lstStyle/>
+                    <a:p>
+                      <a:pPr algn="r"/>
+                      <a:r>
+                        <a:rPr sz="1050" b="0">
+                          <a:solidFill>
+                            <a:srgbClr val="5D6D7E"/>
+                          </a:solidFill>
+                          <a:latin typeface="Arial"/>
+                        </a:rPr>
+                        <a:t>52.4%</a:t>
+                      </a:r>
+                    </a:p>
+                  </a:txBody>
+                  <a:tcPr>
+                    <a:solidFill>
+                      <a:srgbClr val="FFFFFF"/>
+                    </a:solidFill>
+                  </a:tcPr>
+                </a:tc>
+                <a:tc>
+                  <a:txBody>
+                    <a:bodyPr/>
+                    <a:lstStyle/>
+                    <a:p>
+                      <a:pPr algn="r"/>
+                      <a:r>
+                        <a:rPr sz="1050" b="0">
+                          <a:solidFill>
+                            <a:srgbClr val="5D6D7E"/>
+                          </a:solidFill>
+                          <a:latin typeface="Arial"/>
+                        </a:rPr>
+                        <a:t>27.7%</a:t>
                       </a:r>
                     </a:p>
                   </a:txBody>
@@ -13504,7 +14749,7 @@
                   </a:tcPr>
                 </a:tc>
               </a:tr>
-              <a:tr h="246888">
+              <a:tr h="228600">
                 <a:tc>
                   <a:txBody>
                     <a:bodyPr/>
@@ -13512,128 +14757,151 @@
                     <a:p>
                       <a:pPr algn="l"/>
                       <a:r>
-                        <a:rPr sz="1150" b="0">
-                          <a:solidFill>
-                            <a:srgbClr val="5D6D7E"/>
-                          </a:solidFill>
-                          <a:latin typeface="Arial"/>
-                        </a:rPr>
-                        <a:t>A-C</a:t>
-                      </a:r>
-                    </a:p>
-                  </a:txBody>
-                  <a:tcPr>
-                    <a:solidFill>
-                      <a:srgbClr val="FFFFFF"/>
-                    </a:solidFill>
-                  </a:tcPr>
-                </a:tc>
-                <a:tc>
-                  <a:txBody>
-                    <a:bodyPr/>
-                    <a:lstStyle/>
-                    <a:p>
-                      <a:pPr algn="r"/>
-                      <a:r>
-                        <a:rPr sz="1150" b="0">
-                          <a:solidFill>
-                            <a:srgbClr val="5D6D7E"/>
-                          </a:solidFill>
-                          <a:latin typeface="Arial"/>
-                        </a:rPr>
-                        <a:t>&gt; 16</a:t>
-                      </a:r>
-                    </a:p>
-                  </a:txBody>
-                  <a:tcPr>
-                    <a:solidFill>
-                      <a:srgbClr val="FFFFFF"/>
-                    </a:solidFill>
-                  </a:tcPr>
-                </a:tc>
-                <a:tc>
-                  <a:txBody>
-                    <a:bodyPr/>
-                    <a:lstStyle/>
-                    <a:p>
-                      <a:pPr algn="r"/>
-                      <a:r>
-                        <a:rPr sz="1150" b="0">
-                          <a:solidFill>
-                            <a:srgbClr val="5D6D7E"/>
-                          </a:solidFill>
-                          <a:latin typeface="Arial"/>
-                        </a:rPr>
-                        <a:t>&gt; 62</a:t>
-                      </a:r>
-                    </a:p>
-                  </a:txBody>
-                  <a:tcPr>
-                    <a:solidFill>
-                      <a:srgbClr val="FFFFFF"/>
-                    </a:solidFill>
-                  </a:tcPr>
-                </a:tc>
-                <a:tc>
-                  <a:txBody>
-                    <a:bodyPr/>
-                    <a:lstStyle/>
-                    <a:p>
-                      <a:pPr algn="r"/>
-                      <a:r>
-                        <a:rPr sz="1150" b="0">
-                          <a:solidFill>
-                            <a:srgbClr val="5D6D7E"/>
-                          </a:solidFill>
-                          <a:latin typeface="Arial"/>
-                        </a:rPr>
-                        <a:t>&gt; 51</a:t>
-                      </a:r>
-                    </a:p>
-                  </a:txBody>
-                  <a:tcPr>
-                    <a:solidFill>
-                      <a:srgbClr val="FFFFFF"/>
-                    </a:solidFill>
-                  </a:tcPr>
-                </a:tc>
-                <a:tc>
-                  <a:txBody>
-                    <a:bodyPr/>
-                    <a:lstStyle/>
-                    <a:p>
-                      <a:pPr algn="r"/>
-                      <a:r>
-                        <a:rPr sz="1150" b="0">
-                          <a:solidFill>
-                            <a:srgbClr val="5D6D7E"/>
-                          </a:solidFill>
-                          <a:latin typeface="Arial"/>
-                        </a:rPr>
-                        <a:t>&gt; 38</a:t>
-                      </a:r>
-                    </a:p>
-                  </a:txBody>
-                  <a:tcPr>
-                    <a:solidFill>
-                      <a:srgbClr val="FFFFFF"/>
-                    </a:solidFill>
-                  </a:tcPr>
-                </a:tc>
-                <a:tc>
-                  <a:txBody>
-                    <a:bodyPr/>
-                    <a:lstStyle/>
-                    <a:p>
-                      <a:pPr algn="r"/>
-                      <a:r>
-                        <a:rPr sz="1150" b="0">
-                          <a:solidFill>
-                            <a:srgbClr val="5D6D7E"/>
-                          </a:solidFill>
-                          <a:latin typeface="Arial"/>
-                        </a:rPr>
-                        <a:t>&gt; 27</a:t>
+                        <a:rPr sz="1050" b="0">
+                          <a:solidFill>
+                            <a:srgbClr val="5D6D7E"/>
+                          </a:solidFill>
+                          <a:latin typeface="Arial"/>
+                        </a:rPr>
+                        <a:t>Online grid in both</a:t>
+                      </a:r>
+                    </a:p>
+                  </a:txBody>
+                  <a:tcPr>
+                    <a:solidFill>
+                      <a:srgbClr val="FFFFFF"/>
+                    </a:solidFill>
+                  </a:tcPr>
+                </a:tc>
+                <a:tc>
+                  <a:txBody>
+                    <a:bodyPr/>
+                    <a:lstStyle/>
+                    <a:p>
+                      <a:pPr algn="r"/>
+                      <a:r>
+                        <a:rPr sz="1050" b="0">
+                          <a:solidFill>
+                            <a:srgbClr val="5D6D7E"/>
+                          </a:solidFill>
+                          <a:latin typeface="Arial"/>
+                        </a:rPr>
+                        <a:t>51.8%</a:t>
+                      </a:r>
+                    </a:p>
+                  </a:txBody>
+                  <a:tcPr>
+                    <a:solidFill>
+                      <a:srgbClr val="FFFFFF"/>
+                    </a:solidFill>
+                  </a:tcPr>
+                </a:tc>
+                <a:tc>
+                  <a:txBody>
+                    <a:bodyPr/>
+                    <a:lstStyle/>
+                    <a:p>
+                      <a:pPr algn="r"/>
+                      <a:r>
+                        <a:rPr sz="1050" b="0">
+                          <a:solidFill>
+                            <a:srgbClr val="5D6D7E"/>
+                          </a:solidFill>
+                          <a:latin typeface="Arial"/>
+                        </a:rPr>
+                        <a:t>20.9%</a:t>
+                      </a:r>
+                    </a:p>
+                  </a:txBody>
+                  <a:tcPr>
+                    <a:solidFill>
+                      <a:srgbClr val="FFFFFF"/>
+                    </a:solidFill>
+                  </a:tcPr>
+                </a:tc>
+                <a:tc>
+                  <a:txBody>
+                    <a:bodyPr/>
+                    <a:lstStyle/>
+                    <a:p>
+                      <a:pPr algn="r"/>
+                      <a:r>
+                        <a:rPr sz="1050" b="0">
+                          <a:solidFill>
+                            <a:srgbClr val="5D6D7E"/>
+                          </a:solidFill>
+                          <a:latin typeface="Arial"/>
+                        </a:rPr>
+                        <a:t>69.2%</a:t>
+                      </a:r>
+                    </a:p>
+                  </a:txBody>
+                  <a:tcPr>
+                    <a:solidFill>
+                      <a:srgbClr val="FFFFFF"/>
+                    </a:solidFill>
+                  </a:tcPr>
+                </a:tc>
+                <a:tc>
+                  <a:txBody>
+                    <a:bodyPr/>
+                    <a:lstStyle/>
+                    <a:p>
+                      <a:pPr algn="r"/>
+                      <a:r>
+                        <a:rPr sz="1050" b="0">
+                          <a:solidFill>
+                            <a:srgbClr val="5D6D7E"/>
+                          </a:solidFill>
+                          <a:latin typeface="Arial"/>
+                        </a:rPr>
+                        <a:t>55.9%</a:t>
+                      </a:r>
+                    </a:p>
+                  </a:txBody>
+                  <a:tcPr>
+                    <a:solidFill>
+                      <a:srgbClr val="FFFFFF"/>
+                    </a:solidFill>
+                  </a:tcPr>
+                </a:tc>
+                <a:tc>
+                  <a:txBody>
+                    <a:bodyPr/>
+                    <a:lstStyle/>
+                    <a:p>
+                      <a:pPr algn="r"/>
+                      <a:r>
+                        <a:rPr sz="1050" b="0">
+                          <a:solidFill>
+                            <a:srgbClr val="5D6D7E"/>
+                          </a:solidFill>
+                          <a:latin typeface="Arial"/>
+                        </a:rPr>
+                        <a:t>57.2%</a:t>
+                      </a:r>
+                    </a:p>
+                  </a:txBody>
+                  <a:tcPr>
+                    <a:solidFill>
+                      <a:srgbClr val="FFFFFF"/>
+                    </a:solidFill>
+                  </a:tcPr>
+                </a:tc>
+                <a:tc>
+                  <a:txBody>
+                    <a:bodyPr/>
+                    <a:lstStyle/>
+                    <a:p>
+                      <a:pPr algn="r"/>
+                      <a:r>
+                        <a:rPr sz="1050" b="0">
+                          <a:solidFill>
+                            <a:srgbClr val="5D6D7E"/>
+                          </a:solidFill>
+                          <a:latin typeface="Arial"/>
+                        </a:rPr>
+                        <a:t>31.7%</a:t>
                       </a:r>
                     </a:p>
                   </a:txBody>
@@ -13644,7 +14912,7 @@
                   </a:tcPr>
                 </a:tc>
               </a:tr>
-              <a:tr h="246888">
+              <a:tr h="228600">
                 <a:tc>
                   <a:txBody>
                     <a:bodyPr/>
@@ -13652,128 +14920,151 @@
                     <a:p>
                       <a:pPr algn="l"/>
                       <a:r>
-                        <a:rPr sz="1150" b="0">
-                          <a:solidFill>
-                            <a:srgbClr val="5D6D7E"/>
-                          </a:solidFill>
-                          <a:latin typeface="Arial"/>
-                        </a:rPr>
-                        <a:t>D-F</a:t>
-                      </a:r>
-                    </a:p>
-                  </a:txBody>
-                  <a:tcPr>
-                    <a:solidFill>
-                      <a:srgbClr val="FFFFFF"/>
-                    </a:solidFill>
-                  </a:tcPr>
-                </a:tc>
-                <a:tc>
-                  <a:txBody>
-                    <a:bodyPr/>
-                    <a:lstStyle/>
-                    <a:p>
-                      <a:pPr algn="r"/>
-                      <a:r>
-                        <a:rPr sz="1150" b="0">
-                          <a:solidFill>
-                            <a:srgbClr val="5D6D7E"/>
-                          </a:solidFill>
-                          <a:latin typeface="Arial"/>
-                        </a:rPr>
-                        <a:t>&gt; 22</a:t>
-                      </a:r>
-                    </a:p>
-                  </a:txBody>
-                  <a:tcPr>
-                    <a:solidFill>
-                      <a:srgbClr val="FFFFFF"/>
-                    </a:solidFill>
-                  </a:tcPr>
-                </a:tc>
-                <a:tc>
-                  <a:txBody>
-                    <a:bodyPr/>
-                    <a:lstStyle/>
-                    <a:p>
-                      <a:pPr algn="r"/>
-                      <a:r>
-                        <a:rPr sz="1150" b="0">
-                          <a:solidFill>
-                            <a:srgbClr val="5D6D7E"/>
-                          </a:solidFill>
-                          <a:latin typeface="Arial"/>
-                        </a:rPr>
-                        <a:t>&gt; 62</a:t>
-                      </a:r>
-                    </a:p>
-                  </a:txBody>
-                  <a:tcPr>
-                    <a:solidFill>
-                      <a:srgbClr val="FFFFFF"/>
-                    </a:solidFill>
-                  </a:tcPr>
-                </a:tc>
-                <a:tc>
-                  <a:txBody>
-                    <a:bodyPr/>
-                    <a:lstStyle/>
-                    <a:p>
-                      <a:pPr algn="r"/>
-                      <a:r>
-                        <a:rPr sz="1150" b="0">
-                          <a:solidFill>
-                            <a:srgbClr val="5D6D7E"/>
-                          </a:solidFill>
-                          <a:latin typeface="Arial"/>
-                        </a:rPr>
-                        <a:t>&gt; 51</a:t>
-                      </a:r>
-                    </a:p>
-                  </a:txBody>
-                  <a:tcPr>
-                    <a:solidFill>
-                      <a:srgbClr val="FFFFFF"/>
-                    </a:solidFill>
-                  </a:tcPr>
-                </a:tc>
-                <a:tc>
-                  <a:txBody>
-                    <a:bodyPr/>
-                    <a:lstStyle/>
-                    <a:p>
-                      <a:pPr algn="r"/>
-                      <a:r>
-                        <a:rPr sz="1150" b="0">
-                          <a:solidFill>
-                            <a:srgbClr val="5D6D7E"/>
-                          </a:solidFill>
-                          <a:latin typeface="Arial"/>
-                        </a:rPr>
-                        <a:t>&gt; 38</a:t>
-                      </a:r>
-                    </a:p>
-                  </a:txBody>
-                  <a:tcPr>
-                    <a:solidFill>
-                      <a:srgbClr val="FFFFFF"/>
-                    </a:solidFill>
-                  </a:tcPr>
-                </a:tc>
-                <a:tc>
-                  <a:txBody>
-                    <a:bodyPr/>
-                    <a:lstStyle/>
-                    <a:p>
-                      <a:pPr algn="r"/>
-                      <a:r>
-                        <a:rPr sz="1150" b="0">
-                          <a:solidFill>
-                            <a:srgbClr val="5D6D7E"/>
-                          </a:solidFill>
-                          <a:latin typeface="Arial"/>
-                        </a:rPr>
-                        <a:t>&gt; 27</a:t>
+                        <a:rPr sz="1050" b="0">
+                          <a:solidFill>
+                            <a:srgbClr val="5D6D7E"/>
+                          </a:solidFill>
+                          <a:latin typeface="Arial"/>
+                        </a:rPr>
+                        <a:t>2.5% target · shifted grid</a:t>
+                      </a:r>
+                    </a:p>
+                  </a:txBody>
+                  <a:tcPr>
+                    <a:solidFill>
+                      <a:srgbClr val="FFFFFF"/>
+                    </a:solidFill>
+                  </a:tcPr>
+                </a:tc>
+                <a:tc>
+                  <a:txBody>
+                    <a:bodyPr/>
+                    <a:lstStyle/>
+                    <a:p>
+                      <a:pPr algn="r"/>
+                      <a:r>
+                        <a:rPr sz="1050" b="0">
+                          <a:solidFill>
+                            <a:srgbClr val="5D6D7E"/>
+                          </a:solidFill>
+                          <a:latin typeface="Arial"/>
+                        </a:rPr>
+                        <a:t>32.1%</a:t>
+                      </a:r>
+                    </a:p>
+                  </a:txBody>
+                  <a:tcPr>
+                    <a:solidFill>
+                      <a:srgbClr val="FFFFFF"/>
+                    </a:solidFill>
+                  </a:tcPr>
+                </a:tc>
+                <a:tc>
+                  <a:txBody>
+                    <a:bodyPr/>
+                    <a:lstStyle/>
+                    <a:p>
+                      <a:pPr algn="r"/>
+                      <a:r>
+                        <a:rPr sz="1050" b="0">
+                          <a:solidFill>
+                            <a:srgbClr val="5D6D7E"/>
+                          </a:solidFill>
+                          <a:latin typeface="Arial"/>
+                        </a:rPr>
+                        <a:t>13.0%</a:t>
+                      </a:r>
+                    </a:p>
+                  </a:txBody>
+                  <a:tcPr>
+                    <a:solidFill>
+                      <a:srgbClr val="FFFFFF"/>
+                    </a:solidFill>
+                  </a:tcPr>
+                </a:tc>
+                <a:tc>
+                  <a:txBody>
+                    <a:bodyPr/>
+                    <a:lstStyle/>
+                    <a:p>
+                      <a:pPr algn="r"/>
+                      <a:r>
+                        <a:rPr sz="1050" b="0">
+                          <a:solidFill>
+                            <a:srgbClr val="5D6D7E"/>
+                          </a:solidFill>
+                          <a:latin typeface="Arial"/>
+                        </a:rPr>
+                        <a:t>48.4%</a:t>
+                      </a:r>
+                    </a:p>
+                  </a:txBody>
+                  <a:tcPr>
+                    <a:solidFill>
+                      <a:srgbClr val="FFFFFF"/>
+                    </a:solidFill>
+                  </a:tcPr>
+                </a:tc>
+                <a:tc>
+                  <a:txBody>
+                    <a:bodyPr/>
+                    <a:lstStyle/>
+                    <a:p>
+                      <a:pPr algn="r"/>
+                      <a:r>
+                        <a:rPr sz="1050" b="0">
+                          <a:solidFill>
+                            <a:srgbClr val="5D6D7E"/>
+                          </a:solidFill>
+                          <a:latin typeface="Arial"/>
+                        </a:rPr>
+                        <a:t>39.1%</a:t>
+                      </a:r>
+                    </a:p>
+                  </a:txBody>
+                  <a:tcPr>
+                    <a:solidFill>
+                      <a:srgbClr val="FFFFFF"/>
+                    </a:solidFill>
+                  </a:tcPr>
+                </a:tc>
+                <a:tc>
+                  <a:txBody>
+                    <a:bodyPr/>
+                    <a:lstStyle/>
+                    <a:p>
+                      <a:pPr algn="r"/>
+                      <a:r>
+                        <a:rPr sz="1050" b="0">
+                          <a:solidFill>
+                            <a:srgbClr val="5D6D7E"/>
+                          </a:solidFill>
+                          <a:latin typeface="Arial"/>
+                        </a:rPr>
+                        <a:t>37.2%</a:t>
+                      </a:r>
+                    </a:p>
+                  </a:txBody>
+                  <a:tcPr>
+                    <a:solidFill>
+                      <a:srgbClr val="FFFFFF"/>
+                    </a:solidFill>
+                  </a:tcPr>
+                </a:tc>
+                <a:tc>
+                  <a:txBody>
+                    <a:bodyPr/>
+                    <a:lstStyle/>
+                    <a:p>
+                      <a:pPr algn="r"/>
+                      <a:r>
+                        <a:rPr sz="1050" b="0">
+                          <a:solidFill>
+                            <a:srgbClr val="5D6D7E"/>
+                          </a:solidFill>
+                          <a:latin typeface="Arial"/>
+                        </a:rPr>
+                        <a:t>21.1%</a:t>
                       </a:r>
                     </a:p>
                   </a:txBody>
@@ -13784,7 +15075,7 @@
                   </a:tcPr>
                 </a:tc>
               </a:tr>
-              <a:tr h="246888">
+              <a:tr h="228600">
                 <a:tc>
                   <a:txBody>
                     <a:bodyPr/>
@@ -13792,128 +15083,477 @@
                     <a:p>
                       <a:pPr algn="l"/>
                       <a:r>
-                        <a:rPr sz="1150" b="0">
-                          <a:solidFill>
-                            <a:srgbClr val="5D6D7E"/>
-                          </a:solidFill>
-                          <a:latin typeface="Arial"/>
-                        </a:rPr>
-                        <a:t>&gt;=G</a:t>
-                      </a:r>
-                    </a:p>
-                  </a:txBody>
-                  <a:tcPr>
-                    <a:solidFill>
-                      <a:srgbClr val="FFFFFF"/>
-                    </a:solidFill>
-                  </a:tcPr>
-                </a:tc>
-                <a:tc>
-                  <a:txBody>
-                    <a:bodyPr/>
-                    <a:lstStyle/>
-                    <a:p>
-                      <a:pPr algn="r"/>
-                      <a:r>
-                        <a:rPr sz="1150" b="0">
-                          <a:solidFill>
-                            <a:srgbClr val="5D6D7E"/>
-                          </a:solidFill>
-                          <a:latin typeface="Arial"/>
-                        </a:rPr>
-                        <a:t>reject</a:t>
-                      </a:r>
-                    </a:p>
-                  </a:txBody>
-                  <a:tcPr>
-                    <a:solidFill>
-                      <a:srgbClr val="FFFFFF"/>
-                    </a:solidFill>
-                  </a:tcPr>
-                </a:tc>
-                <a:tc>
-                  <a:txBody>
-                    <a:bodyPr/>
-                    <a:lstStyle/>
-                    <a:p>
-                      <a:pPr algn="r"/>
-                      <a:r>
-                        <a:rPr sz="1150" b="0">
-                          <a:solidFill>
-                            <a:srgbClr val="5D6D7E"/>
-                          </a:solidFill>
-                          <a:latin typeface="Arial"/>
-                        </a:rPr>
-                        <a:t>reject</a:t>
-                      </a:r>
-                    </a:p>
-                  </a:txBody>
-                  <a:tcPr>
-                    <a:solidFill>
-                      <a:srgbClr val="FFFFFF"/>
-                    </a:solidFill>
-                  </a:tcPr>
-                </a:tc>
-                <a:tc>
-                  <a:txBody>
-                    <a:bodyPr/>
-                    <a:lstStyle/>
-                    <a:p>
-                      <a:pPr algn="r"/>
-                      <a:r>
-                        <a:rPr sz="1150" b="0">
-                          <a:solidFill>
-                            <a:srgbClr val="5D6D7E"/>
-                          </a:solidFill>
-                          <a:latin typeface="Arial"/>
-                        </a:rPr>
-                        <a:t>reject</a:t>
-                      </a:r>
-                    </a:p>
-                  </a:txBody>
-                  <a:tcPr>
-                    <a:solidFill>
-                      <a:srgbClr val="FFFFFF"/>
-                    </a:solidFill>
-                  </a:tcPr>
-                </a:tc>
-                <a:tc>
-                  <a:txBody>
-                    <a:bodyPr/>
-                    <a:lstStyle/>
-                    <a:p>
-                      <a:pPr algn="r"/>
-                      <a:r>
-                        <a:rPr sz="1150" b="0">
-                          <a:solidFill>
-                            <a:srgbClr val="5D6D7E"/>
-                          </a:solidFill>
-                          <a:latin typeface="Arial"/>
-                        </a:rPr>
-                        <a:t>reject</a:t>
-                      </a:r>
-                    </a:p>
-                  </a:txBody>
-                  <a:tcPr>
-                    <a:solidFill>
-                      <a:srgbClr val="FFFFFF"/>
-                    </a:solidFill>
-                  </a:tcPr>
-                </a:tc>
-                <a:tc>
-                  <a:txBody>
-                    <a:bodyPr/>
-                    <a:lstStyle/>
-                    <a:p>
-                      <a:pPr algn="r"/>
-                      <a:r>
-                        <a:rPr sz="1150" b="0">
-                          <a:solidFill>
-                            <a:srgbClr val="5D6D7E"/>
-                          </a:solidFill>
-                          <a:latin typeface="Arial"/>
-                        </a:rPr>
-                        <a:t>reject</a:t>
+                        <a:rPr sz="1050" b="0">
+                          <a:solidFill>
+                            <a:srgbClr val="5D6D7E"/>
+                          </a:solidFill>
+                          <a:latin typeface="Arial"/>
+                        </a:rPr>
+                        <a:t>3% target · shifted grid</a:t>
+                      </a:r>
+                    </a:p>
+                  </a:txBody>
+                  <a:tcPr>
+                    <a:solidFill>
+                      <a:srgbClr val="FFFFFF"/>
+                    </a:solidFill>
+                  </a:tcPr>
+                </a:tc>
+                <a:tc>
+                  <a:txBody>
+                    <a:bodyPr/>
+                    <a:lstStyle/>
+                    <a:p>
+                      <a:pPr algn="r"/>
+                      <a:r>
+                        <a:rPr sz="1050" b="0">
+                          <a:solidFill>
+                            <a:srgbClr val="5D6D7E"/>
+                          </a:solidFill>
+                          <a:latin typeface="Arial"/>
+                        </a:rPr>
+                        <a:t>41.8%</a:t>
+                      </a:r>
+                    </a:p>
+                  </a:txBody>
+                  <a:tcPr>
+                    <a:solidFill>
+                      <a:srgbClr val="FFFFFF"/>
+                    </a:solidFill>
+                  </a:tcPr>
+                </a:tc>
+                <a:tc>
+                  <a:txBody>
+                    <a:bodyPr/>
+                    <a:lstStyle/>
+                    <a:p>
+                      <a:pPr algn="r"/>
+                      <a:r>
+                        <a:rPr sz="1050" b="0">
+                          <a:solidFill>
+                            <a:srgbClr val="5D6D7E"/>
+                          </a:solidFill>
+                          <a:latin typeface="Arial"/>
+                        </a:rPr>
+                        <a:t>16.9%</a:t>
+                      </a:r>
+                    </a:p>
+                  </a:txBody>
+                  <a:tcPr>
+                    <a:solidFill>
+                      <a:srgbClr val="FFFFFF"/>
+                    </a:solidFill>
+                  </a:tcPr>
+                </a:tc>
+                <a:tc>
+                  <a:txBody>
+                    <a:bodyPr/>
+                    <a:lstStyle/>
+                    <a:p>
+                      <a:pPr algn="r"/>
+                      <a:r>
+                        <a:rPr sz="1050" b="0">
+                          <a:solidFill>
+                            <a:srgbClr val="5D6D7E"/>
+                          </a:solidFill>
+                          <a:latin typeface="Arial"/>
+                        </a:rPr>
+                        <a:t>60.1%</a:t>
+                      </a:r>
+                    </a:p>
+                  </a:txBody>
+                  <a:tcPr>
+                    <a:solidFill>
+                      <a:srgbClr val="FFFFFF"/>
+                    </a:solidFill>
+                  </a:tcPr>
+                </a:tc>
+                <a:tc>
+                  <a:txBody>
+                    <a:bodyPr/>
+                    <a:lstStyle/>
+                    <a:p>
+                      <a:pPr algn="r"/>
+                      <a:r>
+                        <a:rPr sz="1050" b="0">
+                          <a:solidFill>
+                            <a:srgbClr val="5D6D7E"/>
+                          </a:solidFill>
+                          <a:latin typeface="Arial"/>
+                        </a:rPr>
+                        <a:t>48.5%</a:t>
+                      </a:r>
+                    </a:p>
+                  </a:txBody>
+                  <a:tcPr>
+                    <a:solidFill>
+                      <a:srgbClr val="FFFFFF"/>
+                    </a:solidFill>
+                  </a:tcPr>
+                </a:tc>
+                <a:tc>
+                  <a:txBody>
+                    <a:bodyPr/>
+                    <a:lstStyle/>
+                    <a:p>
+                      <a:pPr algn="r"/>
+                      <a:r>
+                        <a:rPr sz="1050" b="0">
+                          <a:solidFill>
+                            <a:srgbClr val="5D6D7E"/>
+                          </a:solidFill>
+                          <a:latin typeface="Arial"/>
+                        </a:rPr>
+                        <a:t>47.5%</a:t>
+                      </a:r>
+                    </a:p>
+                  </a:txBody>
+                  <a:tcPr>
+                    <a:solidFill>
+                      <a:srgbClr val="FFFFFF"/>
+                    </a:solidFill>
+                  </a:tcPr>
+                </a:tc>
+                <a:tc>
+                  <a:txBody>
+                    <a:bodyPr/>
+                    <a:lstStyle/>
+                    <a:p>
+                      <a:pPr algn="r"/>
+                      <a:r>
+                        <a:rPr sz="1050" b="0">
+                          <a:solidFill>
+                            <a:srgbClr val="5D6D7E"/>
+                          </a:solidFill>
+                          <a:latin typeface="Arial"/>
+                        </a:rPr>
+                        <a:t>26.7%</a:t>
+                      </a:r>
+                    </a:p>
+                  </a:txBody>
+                  <a:tcPr>
+                    <a:solidFill>
+                      <a:srgbClr val="FFFFFF"/>
+                    </a:solidFill>
+                  </a:tcPr>
+                </a:tc>
+              </a:tr>
+              <a:tr h="228600">
+                <a:tc>
+                  <a:txBody>
+                    <a:bodyPr/>
+                    <a:lstStyle/>
+                    <a:p>
+                      <a:pPr algn="l"/>
+                      <a:r>
+                        <a:rPr sz="1050" b="0">
+                          <a:solidFill>
+                            <a:srgbClr val="5D6D7E"/>
+                          </a:solidFill>
+                          <a:latin typeface="Arial"/>
+                        </a:rPr>
+                        <a:t>3.5% target · shifted grid</a:t>
+                      </a:r>
+                    </a:p>
+                  </a:txBody>
+                  <a:tcPr>
+                    <a:solidFill>
+                      <a:srgbClr val="FFFFFF"/>
+                    </a:solidFill>
+                  </a:tcPr>
+                </a:tc>
+                <a:tc>
+                  <a:txBody>
+                    <a:bodyPr/>
+                    <a:lstStyle/>
+                    <a:p>
+                      <a:pPr algn="r"/>
+                      <a:r>
+                        <a:rPr sz="1050" b="0">
+                          <a:solidFill>
+                            <a:srgbClr val="5D6D7E"/>
+                          </a:solidFill>
+                          <a:latin typeface="Arial"/>
+                        </a:rPr>
+                        <a:t>48.8%</a:t>
+                      </a:r>
+                    </a:p>
+                  </a:txBody>
+                  <a:tcPr>
+                    <a:solidFill>
+                      <a:srgbClr val="FFFFFF"/>
+                    </a:solidFill>
+                  </a:tcPr>
+                </a:tc>
+                <a:tc>
+                  <a:txBody>
+                    <a:bodyPr/>
+                    <a:lstStyle/>
+                    <a:p>
+                      <a:pPr algn="r"/>
+                      <a:r>
+                        <a:rPr sz="1050" b="0">
+                          <a:solidFill>
+                            <a:srgbClr val="5D6D7E"/>
+                          </a:solidFill>
+                          <a:latin typeface="Arial"/>
+                        </a:rPr>
+                        <a:t>19.7%</a:t>
+                      </a:r>
+                    </a:p>
+                  </a:txBody>
+                  <a:tcPr>
+                    <a:solidFill>
+                      <a:srgbClr val="FFFFFF"/>
+                    </a:solidFill>
+                  </a:tcPr>
+                </a:tc>
+                <a:tc>
+                  <a:txBody>
+                    <a:bodyPr/>
+                    <a:lstStyle/>
+                    <a:p>
+                      <a:pPr algn="r"/>
+                      <a:r>
+                        <a:rPr sz="1050" b="0">
+                          <a:solidFill>
+                            <a:srgbClr val="5D6D7E"/>
+                          </a:solidFill>
+                          <a:latin typeface="Arial"/>
+                        </a:rPr>
+                        <a:t>67.0%</a:t>
+                      </a:r>
+                    </a:p>
+                  </a:txBody>
+                  <a:tcPr>
+                    <a:solidFill>
+                      <a:srgbClr val="FFFFFF"/>
+                    </a:solidFill>
+                  </a:tcPr>
+                </a:tc>
+                <a:tc>
+                  <a:txBody>
+                    <a:bodyPr/>
+                    <a:lstStyle/>
+                    <a:p>
+                      <a:pPr algn="r"/>
+                      <a:r>
+                        <a:rPr sz="1050" b="0">
+                          <a:solidFill>
+                            <a:srgbClr val="5D6D7E"/>
+                          </a:solidFill>
+                          <a:latin typeface="Arial"/>
+                        </a:rPr>
+                        <a:t>54.1%</a:t>
+                      </a:r>
+                    </a:p>
+                  </a:txBody>
+                  <a:tcPr>
+                    <a:solidFill>
+                      <a:srgbClr val="FFFFFF"/>
+                    </a:solidFill>
+                  </a:tcPr>
+                </a:tc>
+                <a:tc>
+                  <a:txBody>
+                    <a:bodyPr/>
+                    <a:lstStyle/>
+                    <a:p>
+                      <a:pPr algn="r"/>
+                      <a:r>
+                        <a:rPr sz="1050" b="0">
+                          <a:solidFill>
+                            <a:srgbClr val="5D6D7E"/>
+                          </a:solidFill>
+                          <a:latin typeface="Arial"/>
+                        </a:rPr>
+                        <a:t>54.4%</a:t>
+                      </a:r>
+                    </a:p>
+                  </a:txBody>
+                  <a:tcPr>
+                    <a:solidFill>
+                      <a:srgbClr val="FFFFFF"/>
+                    </a:solidFill>
+                  </a:tcPr>
+                </a:tc>
+                <a:tc>
+                  <a:txBody>
+                    <a:bodyPr/>
+                    <a:lstStyle/>
+                    <a:p>
+                      <a:pPr algn="r"/>
+                      <a:r>
+                        <a:rPr sz="1050" b="0">
+                          <a:solidFill>
+                            <a:srgbClr val="5D6D7E"/>
+                          </a:solidFill>
+                          <a:latin typeface="Arial"/>
+                        </a:rPr>
+                        <a:t>30.4%</a:t>
+                      </a:r>
+                    </a:p>
+                  </a:txBody>
+                  <a:tcPr>
+                    <a:solidFill>
+                      <a:srgbClr val="FFFFFF"/>
+                    </a:solidFill>
+                  </a:tcPr>
+                </a:tc>
+              </a:tr>
+              <a:tr h="228600">
+                <a:tc>
+                  <a:txBody>
+                    <a:bodyPr/>
+                    <a:lstStyle/>
+                    <a:p>
+                      <a:pPr algn="l"/>
+                      <a:r>
+                        <a:rPr sz="1050" b="0">
+                          <a:solidFill>
+                            <a:srgbClr val="5D6D7E"/>
+                          </a:solidFill>
+                          <a:latin typeface="Arial"/>
+                        </a:rPr>
+                        <a:t>4% target · shifted grid</a:t>
+                      </a:r>
+                    </a:p>
+                  </a:txBody>
+                  <a:tcPr>
+                    <a:solidFill>
+                      <a:srgbClr val="FFFFFF"/>
+                    </a:solidFill>
+                  </a:tcPr>
+                </a:tc>
+                <a:tc>
+                  <a:txBody>
+                    <a:bodyPr/>
+                    <a:lstStyle/>
+                    <a:p>
+                      <a:pPr algn="r"/>
+                      <a:r>
+                        <a:rPr sz="1050" b="0">
+                          <a:solidFill>
+                            <a:srgbClr val="5D6D7E"/>
+                          </a:solidFill>
+                          <a:latin typeface="Arial"/>
+                        </a:rPr>
+                        <a:t>51.8%</a:t>
+                      </a:r>
+                    </a:p>
+                  </a:txBody>
+                  <a:tcPr>
+                    <a:solidFill>
+                      <a:srgbClr val="FFFFFF"/>
+                    </a:solidFill>
+                  </a:tcPr>
+                </a:tc>
+                <a:tc>
+                  <a:txBody>
+                    <a:bodyPr/>
+                    <a:lstStyle/>
+                    <a:p>
+                      <a:pPr algn="r"/>
+                      <a:r>
+                        <a:rPr sz="1050" b="0">
+                          <a:solidFill>
+                            <a:srgbClr val="5D6D7E"/>
+                          </a:solidFill>
+                          <a:latin typeface="Arial"/>
+                        </a:rPr>
+                        <a:t>20.9%</a:t>
+                      </a:r>
+                    </a:p>
+                  </a:txBody>
+                  <a:tcPr>
+                    <a:solidFill>
+                      <a:srgbClr val="FFFFFF"/>
+                    </a:solidFill>
+                  </a:tcPr>
+                </a:tc>
+                <a:tc>
+                  <a:txBody>
+                    <a:bodyPr/>
+                    <a:lstStyle/>
+                    <a:p>
+                      <a:pPr algn="r"/>
+                      <a:r>
+                        <a:rPr sz="1050" b="0">
+                          <a:solidFill>
+                            <a:srgbClr val="5D6D7E"/>
+                          </a:solidFill>
+                          <a:latin typeface="Arial"/>
+                        </a:rPr>
+                        <a:t>69.2%</a:t>
+                      </a:r>
+                    </a:p>
+                  </a:txBody>
+                  <a:tcPr>
+                    <a:solidFill>
+                      <a:srgbClr val="FFFFFF"/>
+                    </a:solidFill>
+                  </a:tcPr>
+                </a:tc>
+                <a:tc>
+                  <a:txBody>
+                    <a:bodyPr/>
+                    <a:lstStyle/>
+                    <a:p>
+                      <a:pPr algn="r"/>
+                      <a:r>
+                        <a:rPr sz="1050" b="0">
+                          <a:solidFill>
+                            <a:srgbClr val="5D6D7E"/>
+                          </a:solidFill>
+                          <a:latin typeface="Arial"/>
+                        </a:rPr>
+                        <a:t>55.9%</a:t>
+                      </a:r>
+                    </a:p>
+                  </a:txBody>
+                  <a:tcPr>
+                    <a:solidFill>
+                      <a:srgbClr val="FFFFFF"/>
+                    </a:solidFill>
+                  </a:tcPr>
+                </a:tc>
+                <a:tc>
+                  <a:txBody>
+                    <a:bodyPr/>
+                    <a:lstStyle/>
+                    <a:p>
+                      <a:pPr algn="r"/>
+                      <a:r>
+                        <a:rPr sz="1050" b="0">
+                          <a:solidFill>
+                            <a:srgbClr val="5D6D7E"/>
+                          </a:solidFill>
+                          <a:latin typeface="Arial"/>
+                        </a:rPr>
+                        <a:t>57.2%</a:t>
+                      </a:r>
+                    </a:p>
+                  </a:txBody>
+                  <a:tcPr>
+                    <a:solidFill>
+                      <a:srgbClr val="FFFFFF"/>
+                    </a:solidFill>
+                  </a:tcPr>
+                </a:tc>
+                <a:tc>
+                  <a:txBody>
+                    <a:bodyPr/>
+                    <a:lstStyle/>
+                    <a:p>
+                      <a:pPr algn="r"/>
+                      <a:r>
+                        <a:rPr sz="1050" b="0">
+                          <a:solidFill>
+                            <a:srgbClr val="5D6D7E"/>
+                          </a:solidFill>
+                          <a:latin typeface="Arial"/>
+                        </a:rPr>
+                        <a:t>31.7%</a:t>
                       </a:r>
                     </a:p>
                   </a:txBody>
@@ -13928,56 +15568,17 @@
           </a:graphicData>
         </a:graphic>
       </p:graphicFrame>
-      <p:sp>
-        <p:nvSpPr>
-          <p:cNvPr id="9" name="TextBox 8"/>
-          <p:cNvSpPr txBox="1"/>
-          <p:nvPr/>
-        </p:nvSpPr>
-        <p:spPr>
-          <a:xfrm>
-            <a:off x="566928" y="4059936"/>
-            <a:ext cx="11057839" cy="292608"/>
-          </a:xfrm>
-          <a:prstGeom prst="rect">
-            <a:avLst/>
-          </a:prstGeom>
-          <a:noFill/>
-        </p:spPr>
-        <p:txBody>
-          <a:bodyPr wrap="square">
-            <a:spAutoFit/>
-          </a:bodyPr>
-          <a:lstStyle/>
-          <a:p>
-            <a:pPr algn="l">
-              <a:lnSpc>
-                <a:spcPct val="100000"/>
-              </a:lnSpc>
-            </a:pPr>
-            <a:r>
-              <a:rPr sz="1400" b="1">
-                <a:solidFill>
-                  <a:srgbClr val="2C3E50"/>
-                </a:solidFill>
-                <a:latin typeface="Arial"/>
-              </a:rPr>
-              <a:t>Current grid, shifted</a:t>
-            </a:r>
-          </a:p>
-        </p:txBody>
-      </p:sp>
       <p:graphicFrame>
         <p:nvGraphicFramePr>
-          <p:cNvPr id="10" name="Table 9"/>
+          <p:cNvPr id="7" name="Table 6"/>
           <p:cNvGraphicFramePr>
             <a:graphicFrameLocks noGrp="1"/>
           </p:cNvGraphicFramePr>
           <p:nvPr/>
         </p:nvGraphicFramePr>
         <p:xfrm>
-          <a:off x="566928" y="4370832"/>
-          <a:ext cx="10058397" cy="1481328"/>
+          <a:off x="566928" y="3685032"/>
+          <a:ext cx="11057837" cy="1984248"/>
         </p:xfrm>
         <a:graphic>
           <a:graphicData uri="http://schemas.openxmlformats.org/drawingml/2006/table">
@@ -13986,14 +15587,15 @@
                 <a:tableStyleId>{5C22544A-7EE6-4342-B048-85BDC9FD1C3A}</a:tableStyleId>
               </a:tblPr>
               <a:tblGrid>
-                <a:gridCol w="2075542"/>
-                <a:gridCol w="1596571"/>
-                <a:gridCol w="1596571"/>
-                <a:gridCol w="1596571"/>
-                <a:gridCol w="1596571"/>
-                <a:gridCol w="1596571"/>
+                <a:gridCol w="3343067"/>
+                <a:gridCol w="1285795"/>
+                <a:gridCol w="1285795"/>
+                <a:gridCol w="1285795"/>
+                <a:gridCol w="1285795"/>
+                <a:gridCol w="1285795"/>
+                <a:gridCol w="1285795"/>
               </a:tblGrid>
-              <a:tr h="246888">
+              <a:tr h="384048">
                 <a:tc>
                   <a:txBody>
                     <a:bodyPr/>
@@ -14001,13 +15603,13 @@
                     <a:p>
                       <a:pPr algn="l"/>
                       <a:r>
-                        <a:rPr sz="1150" b="1">
+                        <a:rPr sz="1050" b="1">
                           <a:solidFill>
                             <a:srgbClr val="2C3E50"/>
                           </a:solidFill>
                           <a:latin typeface="Arial"/>
                         </a:rPr>
-                        <a:t>Group</a:t>
+                        <a:t>Production €M/mo · risk (b2)</a:t>
                       </a:r>
                     </a:p>
                   </a:txBody>
@@ -14024,13 +15626,25 @@
                     <a:p>
                       <a:pPr algn="r"/>
                       <a:r>
-                        <a:rPr sz="1150" b="1">
+                        <a:rPr sz="1050" b="1">
                           <a:solidFill>
                             <a:srgbClr val="2C3E50"/>
                           </a:solidFill>
                           <a:latin typeface="Arial"/>
                         </a:rPr>
-                        <a:t>Today</a:t>
+                        <a:t>E-com</a:t>
+                      </a:r>
+                    </a:p>
+                    <a:p>
+                      <a:pPr algn="r"/>
+                      <a:r>
+                        <a:rPr sz="1050" b="1">
+                          <a:solidFill>
+                            <a:srgbClr val="2C3E50"/>
+                          </a:solidFill>
+                          <a:latin typeface="Arial"/>
+                        </a:rPr>
+                        <a:t>prod./mo</a:t>
                       </a:r>
                     </a:p>
                   </a:txBody>
@@ -14047,13 +15661,25 @@
                     <a:p>
                       <a:pPr algn="r"/>
                       <a:r>
-                        <a:rPr sz="1150" b="1">
+                        <a:rPr sz="1050" b="1">
                           <a:solidFill>
                             <a:srgbClr val="2C3E50"/>
                           </a:solidFill>
                           <a:latin typeface="Arial"/>
                         </a:rPr>
-                        <a:t>2.5%</a:t>
+                        <a:t>E-com</a:t>
+                      </a:r>
+                    </a:p>
+                    <a:p>
+                      <a:pPr algn="r"/>
+                      <a:r>
+                        <a:rPr sz="1050" b="1">
+                          <a:solidFill>
+                            <a:srgbClr val="2C3E50"/>
+                          </a:solidFill>
+                          <a:latin typeface="Arial"/>
+                        </a:rPr>
+                        <a:t>risk</a:t>
                       </a:r>
                     </a:p>
                   </a:txBody>
@@ -14070,13 +15696,25 @@
                     <a:p>
                       <a:pPr algn="r"/>
                       <a:r>
-                        <a:rPr sz="1150" b="1">
+                        <a:rPr sz="1050" b="1">
                           <a:solidFill>
                             <a:srgbClr val="2C3E50"/>
                           </a:solidFill>
                           <a:latin typeface="Arial"/>
                         </a:rPr>
-                        <a:t>3%</a:t>
+                        <a:t>Stores</a:t>
+                      </a:r>
+                    </a:p>
+                    <a:p>
+                      <a:pPr algn="r"/>
+                      <a:r>
+                        <a:rPr sz="1050" b="1">
+                          <a:solidFill>
+                            <a:srgbClr val="2C3E50"/>
+                          </a:solidFill>
+                          <a:latin typeface="Arial"/>
+                        </a:rPr>
+                        <a:t>prod./mo</a:t>
                       </a:r>
                     </a:p>
                   </a:txBody>
@@ -14093,13 +15731,25 @@
                     <a:p>
                       <a:pPr algn="r"/>
                       <a:r>
-                        <a:rPr sz="1150" b="1">
+                        <a:rPr sz="1050" b="1">
                           <a:solidFill>
                             <a:srgbClr val="2C3E50"/>
                           </a:solidFill>
                           <a:latin typeface="Arial"/>
                         </a:rPr>
-                        <a:t>3.5%</a:t>
+                        <a:t>Stores</a:t>
+                      </a:r>
+                    </a:p>
+                    <a:p>
+                      <a:pPr algn="r"/>
+                      <a:r>
+                        <a:rPr sz="1050" b="1">
+                          <a:solidFill>
+                            <a:srgbClr val="2C3E50"/>
+                          </a:solidFill>
+                          <a:latin typeface="Arial"/>
+                        </a:rPr>
+                        <a:t>risk</a:t>
                       </a:r>
                     </a:p>
                   </a:txBody>
@@ -14116,13 +15766,25 @@
                     <a:p>
                       <a:pPr algn="r"/>
                       <a:r>
-                        <a:rPr sz="1150" b="1">
+                        <a:rPr sz="1050" b="1">
                           <a:solidFill>
                             <a:srgbClr val="2C3E50"/>
                           </a:solidFill>
                           <a:latin typeface="Arial"/>
                         </a:rPr>
-                        <a:t>4%</a:t>
+                        <a:t>Apple</a:t>
+                      </a:r>
+                    </a:p>
+                    <a:p>
+                      <a:pPr algn="r"/>
+                      <a:r>
+                        <a:rPr sz="1050" b="1">
+                          <a:solidFill>
+                            <a:srgbClr val="2C3E50"/>
+                          </a:solidFill>
+                          <a:latin typeface="Arial"/>
+                        </a:rPr>
+                        <a:t>prod./mo</a:t>
                       </a:r>
                     </a:p>
                   </a:txBody>
@@ -14132,8 +15794,43 @@
                     </a:solidFill>
                   </a:tcPr>
                 </a:tc>
+                <a:tc>
+                  <a:txBody>
+                    <a:bodyPr/>
+                    <a:lstStyle/>
+                    <a:p>
+                      <a:pPr algn="r"/>
+                      <a:r>
+                        <a:rPr sz="1050" b="1">
+                          <a:solidFill>
+                            <a:srgbClr val="2C3E50"/>
+                          </a:solidFill>
+                          <a:latin typeface="Arial"/>
+                        </a:rPr>
+                        <a:t>Apple</a:t>
+                      </a:r>
+                    </a:p>
+                    <a:p>
+                      <a:pPr algn="r"/>
+                      <a:r>
+                        <a:rPr sz="1050" b="1">
+                          <a:solidFill>
+                            <a:srgbClr val="2C3E50"/>
+                          </a:solidFill>
+                          <a:latin typeface="Arial"/>
+                        </a:rPr>
+                        <a:t>risk</a:t>
+                      </a:r>
+                    </a:p>
+                  </a:txBody>
+                  <a:tcPr>
+                    <a:solidFill>
+                      <a:srgbClr val="F6F7F9"/>
+                    </a:solidFill>
+                  </a:tcPr>
+                </a:tc>
               </a:tr>
-              <a:tr h="246888">
+              <a:tr h="228600">
                 <a:tc>
                   <a:txBody>
                     <a:bodyPr/>
@@ -14141,128 +15838,151 @@
                     <a:p>
                       <a:pPr algn="l"/>
                       <a:r>
-                        <a:rPr sz="1150" b="0">
-                          <a:solidFill>
-                            <a:srgbClr val="5D6D7E"/>
-                          </a:solidFill>
-                          <a:latin typeface="Arial"/>
-                        </a:rPr>
-                        <a:t>New</a:t>
-                      </a:r>
-                    </a:p>
-                  </a:txBody>
-                  <a:tcPr>
-                    <a:solidFill>
-                      <a:srgbClr val="FFFFFF"/>
-                    </a:solidFill>
-                  </a:tcPr>
-                </a:tc>
-                <a:tc>
-                  <a:txBody>
-                    <a:bodyPr/>
-                    <a:lstStyle/>
-                    <a:p>
-                      <a:pPr algn="r"/>
-                      <a:r>
-                        <a:rPr sz="1150" b="0">
-                          <a:solidFill>
-                            <a:srgbClr val="5D6D7E"/>
-                          </a:solidFill>
-                          <a:latin typeface="Arial"/>
-                        </a:rPr>
-                        <a:t>&gt; 27</a:t>
-                      </a:r>
-                    </a:p>
-                  </a:txBody>
-                  <a:tcPr>
-                    <a:solidFill>
-                      <a:srgbClr val="FFFFFF"/>
-                    </a:solidFill>
-                  </a:tcPr>
-                </a:tc>
-                <a:tc>
-                  <a:txBody>
-                    <a:bodyPr/>
-                    <a:lstStyle/>
-                    <a:p>
-                      <a:pPr algn="r"/>
-                      <a:r>
-                        <a:rPr sz="1150" b="0">
-                          <a:solidFill>
-                            <a:srgbClr val="5D6D7E"/>
-                          </a:solidFill>
-                          <a:latin typeface="Arial"/>
-                        </a:rPr>
-                        <a:t>&gt; 63</a:t>
-                      </a:r>
-                    </a:p>
-                  </a:txBody>
-                  <a:tcPr>
-                    <a:solidFill>
-                      <a:srgbClr val="FFFFFF"/>
-                    </a:solidFill>
-                  </a:tcPr>
-                </a:tc>
-                <a:tc>
-                  <a:txBody>
-                    <a:bodyPr/>
-                    <a:lstStyle/>
-                    <a:p>
-                      <a:pPr algn="r"/>
-                      <a:r>
-                        <a:rPr sz="1150" b="0">
-                          <a:solidFill>
-                            <a:srgbClr val="5D6D7E"/>
-                          </a:solidFill>
-                          <a:latin typeface="Arial"/>
-                        </a:rPr>
-                        <a:t>&gt; 50</a:t>
-                      </a:r>
-                    </a:p>
-                  </a:txBody>
-                  <a:tcPr>
-                    <a:solidFill>
-                      <a:srgbClr val="FFFFFF"/>
-                    </a:solidFill>
-                  </a:tcPr>
-                </a:tc>
-                <a:tc>
-                  <a:txBody>
-                    <a:bodyPr/>
-                    <a:lstStyle/>
-                    <a:p>
-                      <a:pPr algn="r"/>
-                      <a:r>
-                        <a:rPr sz="1150" b="0">
-                          <a:solidFill>
-                            <a:srgbClr val="5D6D7E"/>
-                          </a:solidFill>
-                          <a:latin typeface="Arial"/>
-                        </a:rPr>
-                        <a:t>&gt; 37</a:t>
-                      </a:r>
-                    </a:p>
-                  </a:txBody>
-                  <a:tcPr>
-                    <a:solidFill>
-                      <a:srgbClr val="FFFFFF"/>
-                    </a:solidFill>
-                  </a:tcPr>
-                </a:tc>
-                <a:tc>
-                  <a:txBody>
-                    <a:bodyPr/>
-                    <a:lstStyle/>
-                    <a:p>
-                      <a:pPr algn="r"/>
-                      <a:r>
-                        <a:rPr sz="1150" b="0">
-                          <a:solidFill>
-                            <a:srgbClr val="5D6D7E"/>
-                          </a:solidFill>
-                          <a:latin typeface="Arial"/>
-                        </a:rPr>
-                        <a:t>&gt; 27</a:t>
+                        <a:rPr sz="1050" b="0">
+                          <a:solidFill>
+                            <a:srgbClr val="5D6D7E"/>
+                          </a:solidFill>
+                          <a:latin typeface="Arial"/>
+                        </a:rPr>
+                        <a:t>Today (measured)</a:t>
+                      </a:r>
+                    </a:p>
+                  </a:txBody>
+                  <a:tcPr>
+                    <a:solidFill>
+                      <a:srgbClr val="FFFFFF"/>
+                    </a:solidFill>
+                  </a:tcPr>
+                </a:tc>
+                <a:tc>
+                  <a:txBody>
+                    <a:bodyPr/>
+                    <a:lstStyle/>
+                    <a:p>
+                      <a:pPr algn="r"/>
+                      <a:r>
+                        <a:rPr sz="1050" b="0">
+                          <a:solidFill>
+                            <a:srgbClr val="5D6D7E"/>
+                          </a:solidFill>
+                          <a:latin typeface="Arial"/>
+                        </a:rPr>
+                        <a:t>€8.4M</a:t>
+                      </a:r>
+                    </a:p>
+                  </a:txBody>
+                  <a:tcPr>
+                    <a:solidFill>
+                      <a:srgbClr val="FFFFFF"/>
+                    </a:solidFill>
+                  </a:tcPr>
+                </a:tc>
+                <a:tc>
+                  <a:txBody>
+                    <a:bodyPr/>
+                    <a:lstStyle/>
+                    <a:p>
+                      <a:pPr algn="r"/>
+                      <a:r>
+                        <a:rPr sz="1050" b="0">
+                          <a:solidFill>
+                            <a:srgbClr val="5D6D7E"/>
+                          </a:solidFill>
+                          <a:latin typeface="Arial"/>
+                        </a:rPr>
+                        <a:t>4.18%</a:t>
+                      </a:r>
+                    </a:p>
+                  </a:txBody>
+                  <a:tcPr>
+                    <a:solidFill>
+                      <a:srgbClr val="FFFFFF"/>
+                    </a:solidFill>
+                  </a:tcPr>
+                </a:tc>
+                <a:tc>
+                  <a:txBody>
+                    <a:bodyPr/>
+                    <a:lstStyle/>
+                    <a:p>
+                      <a:pPr algn="r"/>
+                      <a:r>
+                        <a:rPr sz="1050" b="0">
+                          <a:solidFill>
+                            <a:srgbClr val="5D6D7E"/>
+                          </a:solidFill>
+                          <a:latin typeface="Arial"/>
+                        </a:rPr>
+                        <a:t>€6.9M</a:t>
+                      </a:r>
+                    </a:p>
+                  </a:txBody>
+                  <a:tcPr>
+                    <a:solidFill>
+                      <a:srgbClr val="FFFFFF"/>
+                    </a:solidFill>
+                  </a:tcPr>
+                </a:tc>
+                <a:tc>
+                  <a:txBody>
+                    <a:bodyPr/>
+                    <a:lstStyle/>
+                    <a:p>
+                      <a:pPr algn="r"/>
+                      <a:r>
+                        <a:rPr sz="1050" b="0">
+                          <a:solidFill>
+                            <a:srgbClr val="5D6D7E"/>
+                          </a:solidFill>
+                          <a:latin typeface="Arial"/>
+                        </a:rPr>
+                        <a:t>3.74%</a:t>
+                      </a:r>
+                    </a:p>
+                  </a:txBody>
+                  <a:tcPr>
+                    <a:solidFill>
+                      <a:srgbClr val="FFFFFF"/>
+                    </a:solidFill>
+                  </a:tcPr>
+                </a:tc>
+                <a:tc>
+                  <a:txBody>
+                    <a:bodyPr/>
+                    <a:lstStyle/>
+                    <a:p>
+                      <a:pPr algn="r"/>
+                      <a:r>
+                        <a:rPr sz="1050" b="0">
+                          <a:solidFill>
+                            <a:srgbClr val="5D6D7E"/>
+                          </a:solidFill>
+                          <a:latin typeface="Arial"/>
+                        </a:rPr>
+                        <a:t>€15.3M</a:t>
+                      </a:r>
+                    </a:p>
+                  </a:txBody>
+                  <a:tcPr>
+                    <a:solidFill>
+                      <a:srgbClr val="FFFFFF"/>
+                    </a:solidFill>
+                  </a:tcPr>
+                </a:tc>
+                <a:tc>
+                  <a:txBody>
+                    <a:bodyPr/>
+                    <a:lstStyle/>
+                    <a:p>
+                      <a:pPr algn="r"/>
+                      <a:r>
+                        <a:rPr sz="1050" b="0">
+                          <a:solidFill>
+                            <a:srgbClr val="5D6D7E"/>
+                          </a:solidFill>
+                          <a:latin typeface="Arial"/>
+                        </a:rPr>
+                        <a:t>3.99%</a:t>
                       </a:r>
                     </a:p>
                   </a:txBody>
@@ -14273,7 +15993,7 @@
                   </a:tcPr>
                 </a:tc>
               </a:tr>
-              <a:tr h="246888">
+              <a:tr h="228600">
                 <a:tc>
                   <a:txBody>
                     <a:bodyPr/>
@@ -14281,128 +16001,151 @@
                     <a:p>
                       <a:pPr algn="l"/>
                       <a:r>
-                        <a:rPr sz="1150" b="0">
-                          <a:solidFill>
-                            <a:srgbClr val="5D6D7E"/>
-                          </a:solidFill>
-                          <a:latin typeface="Arial"/>
-                        </a:rPr>
-                        <a:t>Inactive</a:t>
-                      </a:r>
-                    </a:p>
-                  </a:txBody>
-                  <a:tcPr>
-                    <a:solidFill>
-                      <a:srgbClr val="FFFFFF"/>
-                    </a:solidFill>
-                  </a:tcPr>
-                </a:tc>
-                <a:tc>
-                  <a:txBody>
-                    <a:bodyPr/>
-                    <a:lstStyle/>
-                    <a:p>
-                      <a:pPr algn="r"/>
-                      <a:r>
-                        <a:rPr sz="1150" b="0">
-                          <a:solidFill>
-                            <a:srgbClr val="5D6D7E"/>
-                          </a:solidFill>
-                          <a:latin typeface="Arial"/>
-                        </a:rPr>
-                        <a:t>&gt; 22</a:t>
-                      </a:r>
-                    </a:p>
-                  </a:txBody>
-                  <a:tcPr>
-                    <a:solidFill>
-                      <a:srgbClr val="FFFFFF"/>
-                    </a:solidFill>
-                  </a:tcPr>
-                </a:tc>
-                <a:tc>
-                  <a:txBody>
-                    <a:bodyPr/>
-                    <a:lstStyle/>
-                    <a:p>
-                      <a:pPr algn="r"/>
-                      <a:r>
-                        <a:rPr sz="1150" b="0">
-                          <a:solidFill>
-                            <a:srgbClr val="5D6D7E"/>
-                          </a:solidFill>
-                          <a:latin typeface="Arial"/>
-                        </a:rPr>
-                        <a:t>&gt; 58</a:t>
-                      </a:r>
-                    </a:p>
-                  </a:txBody>
-                  <a:tcPr>
-                    <a:solidFill>
-                      <a:srgbClr val="FFFFFF"/>
-                    </a:solidFill>
-                  </a:tcPr>
-                </a:tc>
-                <a:tc>
-                  <a:txBody>
-                    <a:bodyPr/>
-                    <a:lstStyle/>
-                    <a:p>
-                      <a:pPr algn="r"/>
-                      <a:r>
-                        <a:rPr sz="1150" b="0">
-                          <a:solidFill>
-                            <a:srgbClr val="5D6D7E"/>
-                          </a:solidFill>
-                          <a:latin typeface="Arial"/>
-                        </a:rPr>
-                        <a:t>&gt; 45</a:t>
-                      </a:r>
-                    </a:p>
-                  </a:txBody>
-                  <a:tcPr>
-                    <a:solidFill>
-                      <a:srgbClr val="FFFFFF"/>
-                    </a:solidFill>
-                  </a:tcPr>
-                </a:tc>
-                <a:tc>
-                  <a:txBody>
-                    <a:bodyPr/>
-                    <a:lstStyle/>
-                    <a:p>
-                      <a:pPr algn="r"/>
-                      <a:r>
-                        <a:rPr sz="1150" b="0">
-                          <a:solidFill>
-                            <a:srgbClr val="5D6D7E"/>
-                          </a:solidFill>
-                          <a:latin typeface="Arial"/>
-                        </a:rPr>
-                        <a:t>&gt; 32</a:t>
-                      </a:r>
-                    </a:p>
-                  </a:txBody>
-                  <a:tcPr>
-                    <a:solidFill>
-                      <a:srgbClr val="FFFFFF"/>
-                    </a:solidFill>
-                  </a:tcPr>
-                </a:tc>
-                <a:tc>
-                  <a:txBody>
-                    <a:bodyPr/>
-                    <a:lstStyle/>
-                    <a:p>
-                      <a:pPr algn="r"/>
-                      <a:r>
-                        <a:rPr sz="1150" b="0">
-                          <a:solidFill>
-                            <a:srgbClr val="5D6D7E"/>
-                          </a:solidFill>
-                          <a:latin typeface="Arial"/>
-                        </a:rPr>
-                        <a:t>&gt; 22</a:t>
+                        <a:rPr sz="1050" b="0">
+                          <a:solidFill>
+                            <a:srgbClr val="5D6D7E"/>
+                          </a:solidFill>
+                          <a:latin typeface="Arial"/>
+                        </a:rPr>
+                        <a:t>Today, current store demand</a:t>
+                      </a:r>
+                    </a:p>
+                  </a:txBody>
+                  <a:tcPr>
+                    <a:solidFill>
+                      <a:srgbClr val="FFFFFF"/>
+                    </a:solidFill>
+                  </a:tcPr>
+                </a:tc>
+                <a:tc>
+                  <a:txBody>
+                    <a:bodyPr/>
+                    <a:lstStyle/>
+                    <a:p>
+                      <a:pPr algn="r"/>
+                      <a:r>
+                        <a:rPr sz="1050" b="0">
+                          <a:solidFill>
+                            <a:srgbClr val="5D6D7E"/>
+                          </a:solidFill>
+                          <a:latin typeface="Arial"/>
+                        </a:rPr>
+                        <a:t>€8.4M</a:t>
+                      </a:r>
+                    </a:p>
+                  </a:txBody>
+                  <a:tcPr>
+                    <a:solidFill>
+                      <a:srgbClr val="FFFFFF"/>
+                    </a:solidFill>
+                  </a:tcPr>
+                </a:tc>
+                <a:tc>
+                  <a:txBody>
+                    <a:bodyPr/>
+                    <a:lstStyle/>
+                    <a:p>
+                      <a:pPr algn="r"/>
+                      <a:r>
+                        <a:rPr sz="1050" b="0">
+                          <a:solidFill>
+                            <a:srgbClr val="5D6D7E"/>
+                          </a:solidFill>
+                          <a:latin typeface="Arial"/>
+                        </a:rPr>
+                        <a:t>4.15%</a:t>
+                      </a:r>
+                    </a:p>
+                  </a:txBody>
+                  <a:tcPr>
+                    <a:solidFill>
+                      <a:srgbClr val="FFFFFF"/>
+                    </a:solidFill>
+                  </a:tcPr>
+                </a:tc>
+                <a:tc>
+                  <a:txBody>
+                    <a:bodyPr/>
+                    <a:lstStyle/>
+                    <a:p>
+                      <a:pPr algn="r"/>
+                      <a:r>
+                        <a:rPr sz="1050" b="0">
+                          <a:solidFill>
+                            <a:srgbClr val="5D6D7E"/>
+                          </a:solidFill>
+                          <a:latin typeface="Arial"/>
+                        </a:rPr>
+                        <a:t>€7.8M</a:t>
+                      </a:r>
+                    </a:p>
+                  </a:txBody>
+                  <a:tcPr>
+                    <a:solidFill>
+                      <a:srgbClr val="FFFFFF"/>
+                    </a:solidFill>
+                  </a:tcPr>
+                </a:tc>
+                <a:tc>
+                  <a:txBody>
+                    <a:bodyPr/>
+                    <a:lstStyle/>
+                    <a:p>
+                      <a:pPr algn="r"/>
+                      <a:r>
+                        <a:rPr sz="1050" b="0">
+                          <a:solidFill>
+                            <a:srgbClr val="5D6D7E"/>
+                          </a:solidFill>
+                          <a:latin typeface="Arial"/>
+                        </a:rPr>
+                        <a:t>3.74%</a:t>
+                      </a:r>
+                    </a:p>
+                  </a:txBody>
+                  <a:tcPr>
+                    <a:solidFill>
+                      <a:srgbClr val="FFFFFF"/>
+                    </a:solidFill>
+                  </a:tcPr>
+                </a:tc>
+                <a:tc>
+                  <a:txBody>
+                    <a:bodyPr/>
+                    <a:lstStyle/>
+                    <a:p>
+                      <a:pPr algn="r"/>
+                      <a:r>
+                        <a:rPr sz="1050" b="0">
+                          <a:solidFill>
+                            <a:srgbClr val="5D6D7E"/>
+                          </a:solidFill>
+                          <a:latin typeface="Arial"/>
+                        </a:rPr>
+                        <a:t>€16.2M</a:t>
+                      </a:r>
+                    </a:p>
+                  </a:txBody>
+                  <a:tcPr>
+                    <a:solidFill>
+                      <a:srgbClr val="FFFFFF"/>
+                    </a:solidFill>
+                  </a:tcPr>
+                </a:tc>
+                <a:tc>
+                  <a:txBody>
+                    <a:bodyPr/>
+                    <a:lstStyle/>
+                    <a:p>
+                      <a:pPr algn="r"/>
+                      <a:r>
+                        <a:rPr sz="1050" b="0">
+                          <a:solidFill>
+                            <a:srgbClr val="5D6D7E"/>
+                          </a:solidFill>
+                          <a:latin typeface="Arial"/>
+                        </a:rPr>
+                        <a:t>3.95%</a:t>
                       </a:r>
                     </a:p>
                   </a:txBody>
@@ -14413,7 +16156,7 @@
                   </a:tcPr>
                 </a:tc>
               </a:tr>
-              <a:tr h="246888">
+              <a:tr h="228600">
                 <a:tc>
                   <a:txBody>
                     <a:bodyPr/>
@@ -14421,128 +16164,151 @@
                     <a:p>
                       <a:pPr algn="l"/>
                       <a:r>
-                        <a:rPr sz="1150" b="0">
-                          <a:solidFill>
-                            <a:srgbClr val="5D6D7E"/>
-                          </a:solidFill>
-                          <a:latin typeface="Arial"/>
-                        </a:rPr>
-                        <a:t>A-C</a:t>
-                      </a:r>
-                    </a:p>
-                  </a:txBody>
-                  <a:tcPr>
-                    <a:solidFill>
-                      <a:srgbClr val="FFFFFF"/>
-                    </a:solidFill>
-                  </a:tcPr>
-                </a:tc>
-                <a:tc>
-                  <a:txBody>
-                    <a:bodyPr/>
-                    <a:lstStyle/>
-                    <a:p>
-                      <a:pPr algn="r"/>
-                      <a:r>
-                        <a:rPr sz="1150" b="0">
-                          <a:solidFill>
-                            <a:srgbClr val="5D6D7E"/>
-                          </a:solidFill>
-                          <a:latin typeface="Arial"/>
-                        </a:rPr>
-                        <a:t>&gt; 16</a:t>
-                      </a:r>
-                    </a:p>
-                  </a:txBody>
-                  <a:tcPr>
-                    <a:solidFill>
-                      <a:srgbClr val="FFFFFF"/>
-                    </a:solidFill>
-                  </a:tcPr>
-                </a:tc>
-                <a:tc>
-                  <a:txBody>
-                    <a:bodyPr/>
-                    <a:lstStyle/>
-                    <a:p>
-                      <a:pPr algn="r"/>
-                      <a:r>
-                        <a:rPr sz="1150" b="0">
-                          <a:solidFill>
-                            <a:srgbClr val="5D6D7E"/>
-                          </a:solidFill>
-                          <a:latin typeface="Arial"/>
-                        </a:rPr>
-                        <a:t>&gt; 52</a:t>
-                      </a:r>
-                    </a:p>
-                  </a:txBody>
-                  <a:tcPr>
-                    <a:solidFill>
-                      <a:srgbClr val="FFFFFF"/>
-                    </a:solidFill>
-                  </a:tcPr>
-                </a:tc>
-                <a:tc>
-                  <a:txBody>
-                    <a:bodyPr/>
-                    <a:lstStyle/>
-                    <a:p>
-                      <a:pPr algn="r"/>
-                      <a:r>
-                        <a:rPr sz="1150" b="0">
-                          <a:solidFill>
-                            <a:srgbClr val="5D6D7E"/>
-                          </a:solidFill>
-                          <a:latin typeface="Arial"/>
-                        </a:rPr>
-                        <a:t>&gt; 39</a:t>
-                      </a:r>
-                    </a:p>
-                  </a:txBody>
-                  <a:tcPr>
-                    <a:solidFill>
-                      <a:srgbClr val="FFFFFF"/>
-                    </a:solidFill>
-                  </a:tcPr>
-                </a:tc>
-                <a:tc>
-                  <a:txBody>
-                    <a:bodyPr/>
-                    <a:lstStyle/>
-                    <a:p>
-                      <a:pPr algn="r"/>
-                      <a:r>
-                        <a:rPr sz="1150" b="0">
-                          <a:solidFill>
-                            <a:srgbClr val="5D6D7E"/>
-                          </a:solidFill>
-                          <a:latin typeface="Arial"/>
-                        </a:rPr>
-                        <a:t>&gt; 26</a:t>
-                      </a:r>
-                    </a:p>
-                  </a:txBody>
-                  <a:tcPr>
-                    <a:solidFill>
-                      <a:srgbClr val="FFFFFF"/>
-                    </a:solidFill>
-                  </a:tcPr>
-                </a:tc>
-                <a:tc>
-                  <a:txBody>
-                    <a:bodyPr/>
-                    <a:lstStyle/>
-                    <a:p>
-                      <a:pPr algn="r"/>
-                      <a:r>
-                        <a:rPr sz="1150" b="0">
-                          <a:solidFill>
-                            <a:srgbClr val="5D6D7E"/>
-                          </a:solidFill>
-                          <a:latin typeface="Arial"/>
-                        </a:rPr>
-                        <a:t>&gt; 16</a:t>
+                        <a:rPr sz="1050" b="0">
+                          <a:solidFill>
+                            <a:srgbClr val="5D6D7E"/>
+                          </a:solidFill>
+                          <a:latin typeface="Arial"/>
+                        </a:rPr>
+                        <a:t>Online grid in both</a:t>
+                      </a:r>
+                    </a:p>
+                  </a:txBody>
+                  <a:tcPr>
+                    <a:solidFill>
+                      <a:srgbClr val="FFFFFF"/>
+                    </a:solidFill>
+                  </a:tcPr>
+                </a:tc>
+                <a:tc>
+                  <a:txBody>
+                    <a:bodyPr/>
+                    <a:lstStyle/>
+                    <a:p>
+                      <a:pPr algn="r"/>
+                      <a:r>
+                        <a:rPr sz="1050" b="0">
+                          <a:solidFill>
+                            <a:srgbClr val="5D6D7E"/>
+                          </a:solidFill>
+                          <a:latin typeface="Arial"/>
+                        </a:rPr>
+                        <a:t>€8.4M</a:t>
+                      </a:r>
+                    </a:p>
+                  </a:txBody>
+                  <a:tcPr>
+                    <a:solidFill>
+                      <a:srgbClr val="FFFFFF"/>
+                    </a:solidFill>
+                  </a:tcPr>
+                </a:tc>
+                <a:tc>
+                  <a:txBody>
+                    <a:bodyPr/>
+                    <a:lstStyle/>
+                    <a:p>
+                      <a:pPr algn="r"/>
+                      <a:r>
+                        <a:rPr sz="1050" b="0">
+                          <a:solidFill>
+                            <a:srgbClr val="5D6D7E"/>
+                          </a:solidFill>
+                          <a:latin typeface="Arial"/>
+                        </a:rPr>
+                        <a:t>4.26%</a:t>
+                      </a:r>
+                    </a:p>
+                  </a:txBody>
+                  <a:tcPr>
+                    <a:solidFill>
+                      <a:srgbClr val="FFFFFF"/>
+                    </a:solidFill>
+                  </a:tcPr>
+                </a:tc>
+                <a:tc>
+                  <a:txBody>
+                    <a:bodyPr/>
+                    <a:lstStyle/>
+                    <a:p>
+                      <a:pPr algn="r"/>
+                      <a:r>
+                        <a:rPr sz="1050" b="0">
+                          <a:solidFill>
+                            <a:srgbClr val="5D6D7E"/>
+                          </a:solidFill>
+                          <a:latin typeface="Arial"/>
+                        </a:rPr>
+                        <a:t>€10.1M</a:t>
+                      </a:r>
+                    </a:p>
+                  </a:txBody>
+                  <a:tcPr>
+                    <a:solidFill>
+                      <a:srgbClr val="FFFFFF"/>
+                    </a:solidFill>
+                  </a:tcPr>
+                </a:tc>
+                <a:tc>
+                  <a:txBody>
+                    <a:bodyPr/>
+                    <a:lstStyle/>
+                    <a:p>
+                      <a:pPr algn="r"/>
+                      <a:r>
+                        <a:rPr sz="1050" b="0">
+                          <a:solidFill>
+                            <a:srgbClr val="5D6D7E"/>
+                          </a:solidFill>
+                          <a:latin typeface="Arial"/>
+                        </a:rPr>
+                        <a:t>3.52%</a:t>
+                      </a:r>
+                    </a:p>
+                  </a:txBody>
+                  <a:tcPr>
+                    <a:solidFill>
+                      <a:srgbClr val="FFFFFF"/>
+                    </a:solidFill>
+                  </a:tcPr>
+                </a:tc>
+                <a:tc>
+                  <a:txBody>
+                    <a:bodyPr/>
+                    <a:lstStyle/>
+                    <a:p>
+                      <a:pPr algn="r"/>
+                      <a:r>
+                        <a:rPr sz="1050" b="0">
+                          <a:solidFill>
+                            <a:srgbClr val="5D6D7E"/>
+                          </a:solidFill>
+                          <a:latin typeface="Arial"/>
+                        </a:rPr>
+                        <a:t>€18.5M</a:t>
+                      </a:r>
+                    </a:p>
+                  </a:txBody>
+                  <a:tcPr>
+                    <a:solidFill>
+                      <a:srgbClr val="FFFFFF"/>
+                    </a:solidFill>
+                  </a:tcPr>
+                </a:tc>
+                <a:tc>
+                  <a:txBody>
+                    <a:bodyPr/>
+                    <a:lstStyle/>
+                    <a:p>
+                      <a:pPr algn="r"/>
+                      <a:r>
+                        <a:rPr sz="1050" b="0">
+                          <a:solidFill>
+                            <a:srgbClr val="5D6D7E"/>
+                          </a:solidFill>
+                          <a:latin typeface="Arial"/>
+                        </a:rPr>
+                        <a:t>3.85%</a:t>
                       </a:r>
                     </a:p>
                   </a:txBody>
@@ -14553,7 +16319,7 @@
                   </a:tcPr>
                 </a:tc>
               </a:tr>
-              <a:tr h="246888">
+              <a:tr h="228600">
                 <a:tc>
                   <a:txBody>
                     <a:bodyPr/>
@@ -14561,128 +16327,151 @@
                     <a:p>
                       <a:pPr algn="l"/>
                       <a:r>
-                        <a:rPr sz="1150" b="0">
-                          <a:solidFill>
-                            <a:srgbClr val="5D6D7E"/>
-                          </a:solidFill>
-                          <a:latin typeface="Arial"/>
-                        </a:rPr>
-                        <a:t>D-F</a:t>
-                      </a:r>
-                    </a:p>
-                  </a:txBody>
-                  <a:tcPr>
-                    <a:solidFill>
-                      <a:srgbClr val="FFFFFF"/>
-                    </a:solidFill>
-                  </a:tcPr>
-                </a:tc>
-                <a:tc>
-                  <a:txBody>
-                    <a:bodyPr/>
-                    <a:lstStyle/>
-                    <a:p>
-                      <a:pPr algn="r"/>
-                      <a:r>
-                        <a:rPr sz="1150" b="0">
-                          <a:solidFill>
-                            <a:srgbClr val="5D6D7E"/>
-                          </a:solidFill>
-                          <a:latin typeface="Arial"/>
-                        </a:rPr>
-                        <a:t>&gt; 22</a:t>
-                      </a:r>
-                    </a:p>
-                  </a:txBody>
-                  <a:tcPr>
-                    <a:solidFill>
-                      <a:srgbClr val="FFFFFF"/>
-                    </a:solidFill>
-                  </a:tcPr>
-                </a:tc>
-                <a:tc>
-                  <a:txBody>
-                    <a:bodyPr/>
-                    <a:lstStyle/>
-                    <a:p>
-                      <a:pPr algn="r"/>
-                      <a:r>
-                        <a:rPr sz="1150" b="0">
-                          <a:solidFill>
-                            <a:srgbClr val="5D6D7E"/>
-                          </a:solidFill>
-                          <a:latin typeface="Arial"/>
-                        </a:rPr>
-                        <a:t>&gt; 58</a:t>
-                      </a:r>
-                    </a:p>
-                  </a:txBody>
-                  <a:tcPr>
-                    <a:solidFill>
-                      <a:srgbClr val="FFFFFF"/>
-                    </a:solidFill>
-                  </a:tcPr>
-                </a:tc>
-                <a:tc>
-                  <a:txBody>
-                    <a:bodyPr/>
-                    <a:lstStyle/>
-                    <a:p>
-                      <a:pPr algn="r"/>
-                      <a:r>
-                        <a:rPr sz="1150" b="0">
-                          <a:solidFill>
-                            <a:srgbClr val="5D6D7E"/>
-                          </a:solidFill>
-                          <a:latin typeface="Arial"/>
-                        </a:rPr>
-                        <a:t>&gt; 45</a:t>
-                      </a:r>
-                    </a:p>
-                  </a:txBody>
-                  <a:tcPr>
-                    <a:solidFill>
-                      <a:srgbClr val="FFFFFF"/>
-                    </a:solidFill>
-                  </a:tcPr>
-                </a:tc>
-                <a:tc>
-                  <a:txBody>
-                    <a:bodyPr/>
-                    <a:lstStyle/>
-                    <a:p>
-                      <a:pPr algn="r"/>
-                      <a:r>
-                        <a:rPr sz="1150" b="0">
-                          <a:solidFill>
-                            <a:srgbClr val="5D6D7E"/>
-                          </a:solidFill>
-                          <a:latin typeface="Arial"/>
-                        </a:rPr>
-                        <a:t>&gt; 32</a:t>
-                      </a:r>
-                    </a:p>
-                  </a:txBody>
-                  <a:tcPr>
-                    <a:solidFill>
-                      <a:srgbClr val="FFFFFF"/>
-                    </a:solidFill>
-                  </a:tcPr>
-                </a:tc>
-                <a:tc>
-                  <a:txBody>
-                    <a:bodyPr/>
-                    <a:lstStyle/>
-                    <a:p>
-                      <a:pPr algn="r"/>
-                      <a:r>
-                        <a:rPr sz="1150" b="0">
-                          <a:solidFill>
-                            <a:srgbClr val="5D6D7E"/>
-                          </a:solidFill>
-                          <a:latin typeface="Arial"/>
-                        </a:rPr>
-                        <a:t>&gt; 22</a:t>
+                        <a:rPr sz="1050" b="0">
+                          <a:solidFill>
+                            <a:srgbClr val="5D6D7E"/>
+                          </a:solidFill>
+                          <a:latin typeface="Arial"/>
+                        </a:rPr>
+                        <a:t>2.5% target · shifted grid</a:t>
+                      </a:r>
+                    </a:p>
+                  </a:txBody>
+                  <a:tcPr>
+                    <a:solidFill>
+                      <a:srgbClr val="FFFFFF"/>
+                    </a:solidFill>
+                  </a:tcPr>
+                </a:tc>
+                <a:tc>
+                  <a:txBody>
+                    <a:bodyPr/>
+                    <a:lstStyle/>
+                    <a:p>
+                      <a:pPr algn="r"/>
+                      <a:r>
+                        <a:rPr sz="1050" b="0">
+                          <a:solidFill>
+                            <a:srgbClr val="5D6D7E"/>
+                          </a:solidFill>
+                          <a:latin typeface="Arial"/>
+                        </a:rPr>
+                        <a:t>€5.2M</a:t>
+                      </a:r>
+                    </a:p>
+                  </a:txBody>
+                  <a:tcPr>
+                    <a:solidFill>
+                      <a:srgbClr val="FFFFFF"/>
+                    </a:solidFill>
+                  </a:tcPr>
+                </a:tc>
+                <a:tc>
+                  <a:txBody>
+                    <a:bodyPr/>
+                    <a:lstStyle/>
+                    <a:p>
+                      <a:pPr algn="r"/>
+                      <a:r>
+                        <a:rPr sz="1050" b="0">
+                          <a:solidFill>
+                            <a:srgbClr val="5D6D7E"/>
+                          </a:solidFill>
+                          <a:latin typeface="Arial"/>
+                        </a:rPr>
+                        <a:t>2.61%</a:t>
+                      </a:r>
+                    </a:p>
+                  </a:txBody>
+                  <a:tcPr>
+                    <a:solidFill>
+                      <a:srgbClr val="FFFFFF"/>
+                    </a:solidFill>
+                  </a:tcPr>
+                </a:tc>
+                <a:tc>
+                  <a:txBody>
+                    <a:bodyPr/>
+                    <a:lstStyle/>
+                    <a:p>
+                      <a:pPr algn="r"/>
+                      <a:r>
+                        <a:rPr sz="1050" b="0">
+                          <a:solidFill>
+                            <a:srgbClr val="5D6D7E"/>
+                          </a:solidFill>
+                          <a:latin typeface="Arial"/>
+                        </a:rPr>
+                        <a:t>€7.1M</a:t>
+                      </a:r>
+                    </a:p>
+                  </a:txBody>
+                  <a:tcPr>
+                    <a:solidFill>
+                      <a:srgbClr val="FFFFFF"/>
+                    </a:solidFill>
+                  </a:tcPr>
+                </a:tc>
+                <a:tc>
+                  <a:txBody>
+                    <a:bodyPr/>
+                    <a:lstStyle/>
+                    <a:p>
+                      <a:pPr algn="r"/>
+                      <a:r>
+                        <a:rPr sz="1050" b="0">
+                          <a:solidFill>
+                            <a:srgbClr val="5D6D7E"/>
+                          </a:solidFill>
+                          <a:latin typeface="Arial"/>
+                        </a:rPr>
+                        <a:t>2.40%</a:t>
+                      </a:r>
+                    </a:p>
+                  </a:txBody>
+                  <a:tcPr>
+                    <a:solidFill>
+                      <a:srgbClr val="FFFFFF"/>
+                    </a:solidFill>
+                  </a:tcPr>
+                </a:tc>
+                <a:tc>
+                  <a:txBody>
+                    <a:bodyPr/>
+                    <a:lstStyle/>
+                    <a:p>
+                      <a:pPr algn="r"/>
+                      <a:r>
+                        <a:rPr sz="1050" b="0">
+                          <a:solidFill>
+                            <a:srgbClr val="5D6D7E"/>
+                          </a:solidFill>
+                          <a:latin typeface="Arial"/>
+                        </a:rPr>
+                        <a:t>€12.3M</a:t>
+                      </a:r>
+                    </a:p>
+                  </a:txBody>
+                  <a:tcPr>
+                    <a:solidFill>
+                      <a:srgbClr val="FFFFFF"/>
+                    </a:solidFill>
+                  </a:tcPr>
+                </a:tc>
+                <a:tc>
+                  <a:txBody>
+                    <a:bodyPr/>
+                    <a:lstStyle/>
+                    <a:p>
+                      <a:pPr algn="r"/>
+                      <a:r>
+                        <a:rPr sz="1050" b="0">
+                          <a:solidFill>
+                            <a:srgbClr val="5D6D7E"/>
+                          </a:solidFill>
+                          <a:latin typeface="Arial"/>
+                        </a:rPr>
+                        <a:t>2.48%</a:t>
                       </a:r>
                     </a:p>
                   </a:txBody>
@@ -14693,7 +16482,7 @@
                   </a:tcPr>
                 </a:tc>
               </a:tr>
-              <a:tr h="246888">
+              <a:tr h="228600">
                 <a:tc>
                   <a:txBody>
                     <a:bodyPr/>
@@ -14701,128 +16490,477 @@
                     <a:p>
                       <a:pPr algn="l"/>
                       <a:r>
-                        <a:rPr sz="1150" b="0">
-                          <a:solidFill>
-                            <a:srgbClr val="5D6D7E"/>
-                          </a:solidFill>
-                          <a:latin typeface="Arial"/>
-                        </a:rPr>
-                        <a:t>&gt;=G</a:t>
-                      </a:r>
-                    </a:p>
-                  </a:txBody>
-                  <a:tcPr>
-                    <a:solidFill>
-                      <a:srgbClr val="FFFFFF"/>
-                    </a:solidFill>
-                  </a:tcPr>
-                </a:tc>
-                <a:tc>
-                  <a:txBody>
-                    <a:bodyPr/>
-                    <a:lstStyle/>
-                    <a:p>
-                      <a:pPr algn="r"/>
-                      <a:r>
-                        <a:rPr sz="1150" b="0">
-                          <a:solidFill>
-                            <a:srgbClr val="5D6D7E"/>
-                          </a:solidFill>
-                          <a:latin typeface="Arial"/>
-                        </a:rPr>
-                        <a:t>reject</a:t>
-                      </a:r>
-                    </a:p>
-                  </a:txBody>
-                  <a:tcPr>
-                    <a:solidFill>
-                      <a:srgbClr val="FFFFFF"/>
-                    </a:solidFill>
-                  </a:tcPr>
-                </a:tc>
-                <a:tc>
-                  <a:txBody>
-                    <a:bodyPr/>
-                    <a:lstStyle/>
-                    <a:p>
-                      <a:pPr algn="r"/>
-                      <a:r>
-                        <a:rPr sz="1150" b="0">
-                          <a:solidFill>
-                            <a:srgbClr val="5D6D7E"/>
-                          </a:solidFill>
-                          <a:latin typeface="Arial"/>
-                        </a:rPr>
-                        <a:t>reject</a:t>
-                      </a:r>
-                    </a:p>
-                  </a:txBody>
-                  <a:tcPr>
-                    <a:solidFill>
-                      <a:srgbClr val="FFFFFF"/>
-                    </a:solidFill>
-                  </a:tcPr>
-                </a:tc>
-                <a:tc>
-                  <a:txBody>
-                    <a:bodyPr/>
-                    <a:lstStyle/>
-                    <a:p>
-                      <a:pPr algn="r"/>
-                      <a:r>
-                        <a:rPr sz="1150" b="0">
-                          <a:solidFill>
-                            <a:srgbClr val="5D6D7E"/>
-                          </a:solidFill>
-                          <a:latin typeface="Arial"/>
-                        </a:rPr>
-                        <a:t>reject</a:t>
-                      </a:r>
-                    </a:p>
-                  </a:txBody>
-                  <a:tcPr>
-                    <a:solidFill>
-                      <a:srgbClr val="FFFFFF"/>
-                    </a:solidFill>
-                  </a:tcPr>
-                </a:tc>
-                <a:tc>
-                  <a:txBody>
-                    <a:bodyPr/>
-                    <a:lstStyle/>
-                    <a:p>
-                      <a:pPr algn="r"/>
-                      <a:r>
-                        <a:rPr sz="1150" b="0">
-                          <a:solidFill>
-                            <a:srgbClr val="5D6D7E"/>
-                          </a:solidFill>
-                          <a:latin typeface="Arial"/>
-                        </a:rPr>
-                        <a:t>reject</a:t>
-                      </a:r>
-                    </a:p>
-                  </a:txBody>
-                  <a:tcPr>
-                    <a:solidFill>
-                      <a:srgbClr val="FFFFFF"/>
-                    </a:solidFill>
-                  </a:tcPr>
-                </a:tc>
-                <a:tc>
-                  <a:txBody>
-                    <a:bodyPr/>
-                    <a:lstStyle/>
-                    <a:p>
-                      <a:pPr algn="r"/>
-                      <a:r>
-                        <a:rPr sz="1150" b="0">
-                          <a:solidFill>
-                            <a:srgbClr val="5D6D7E"/>
-                          </a:solidFill>
-                          <a:latin typeface="Arial"/>
-                        </a:rPr>
-                        <a:t>reject</a:t>
+                        <a:rPr sz="1050" b="0">
+                          <a:solidFill>
+                            <a:srgbClr val="5D6D7E"/>
+                          </a:solidFill>
+                          <a:latin typeface="Arial"/>
+                        </a:rPr>
+                        <a:t>3% target · shifted grid</a:t>
+                      </a:r>
+                    </a:p>
+                  </a:txBody>
+                  <a:tcPr>
+                    <a:solidFill>
+                      <a:srgbClr val="FFFFFF"/>
+                    </a:solidFill>
+                  </a:tcPr>
+                </a:tc>
+                <a:tc>
+                  <a:txBody>
+                    <a:bodyPr/>
+                    <a:lstStyle/>
+                    <a:p>
+                      <a:pPr algn="r"/>
+                      <a:r>
+                        <a:rPr sz="1050" b="0">
+                          <a:solidFill>
+                            <a:srgbClr val="5D6D7E"/>
+                          </a:solidFill>
+                          <a:latin typeface="Arial"/>
+                        </a:rPr>
+                        <a:t>€6.8M</a:t>
+                      </a:r>
+                    </a:p>
+                  </a:txBody>
+                  <a:tcPr>
+                    <a:solidFill>
+                      <a:srgbClr val="FFFFFF"/>
+                    </a:solidFill>
+                  </a:tcPr>
+                </a:tc>
+                <a:tc>
+                  <a:txBody>
+                    <a:bodyPr/>
+                    <a:lstStyle/>
+                    <a:p>
+                      <a:pPr algn="r"/>
+                      <a:r>
+                        <a:rPr sz="1050" b="0">
+                          <a:solidFill>
+                            <a:srgbClr val="5D6D7E"/>
+                          </a:solidFill>
+                          <a:latin typeface="Arial"/>
+                        </a:rPr>
+                        <a:t>3.14%</a:t>
+                      </a:r>
+                    </a:p>
+                  </a:txBody>
+                  <a:tcPr>
+                    <a:solidFill>
+                      <a:srgbClr val="FFFFFF"/>
+                    </a:solidFill>
+                  </a:tcPr>
+                </a:tc>
+                <a:tc>
+                  <a:txBody>
+                    <a:bodyPr/>
+                    <a:lstStyle/>
+                    <a:p>
+                      <a:pPr algn="r"/>
+                      <a:r>
+                        <a:rPr sz="1050" b="0">
+                          <a:solidFill>
+                            <a:srgbClr val="5D6D7E"/>
+                          </a:solidFill>
+                          <a:latin typeface="Arial"/>
+                        </a:rPr>
+                        <a:t>€8.8M</a:t>
+                      </a:r>
+                    </a:p>
+                  </a:txBody>
+                  <a:tcPr>
+                    <a:solidFill>
+                      <a:srgbClr val="FFFFFF"/>
+                    </a:solidFill>
+                  </a:tcPr>
+                </a:tc>
+                <a:tc>
+                  <a:txBody>
+                    <a:bodyPr/>
+                    <a:lstStyle/>
+                    <a:p>
+                      <a:pPr algn="r"/>
+                      <a:r>
+                        <a:rPr sz="1050" b="0">
+                          <a:solidFill>
+                            <a:srgbClr val="5D6D7E"/>
+                          </a:solidFill>
+                          <a:latin typeface="Arial"/>
+                        </a:rPr>
+                        <a:t>2.83%</a:t>
+                      </a:r>
+                    </a:p>
+                  </a:txBody>
+                  <a:tcPr>
+                    <a:solidFill>
+                      <a:srgbClr val="FFFFFF"/>
+                    </a:solidFill>
+                  </a:tcPr>
+                </a:tc>
+                <a:tc>
+                  <a:txBody>
+                    <a:bodyPr/>
+                    <a:lstStyle/>
+                    <a:p>
+                      <a:pPr algn="r"/>
+                      <a:r>
+                        <a:rPr sz="1050" b="0">
+                          <a:solidFill>
+                            <a:srgbClr val="5D6D7E"/>
+                          </a:solidFill>
+                          <a:latin typeface="Arial"/>
+                        </a:rPr>
+                        <a:t>€15.6M</a:t>
+                      </a:r>
+                    </a:p>
+                  </a:txBody>
+                  <a:tcPr>
+                    <a:solidFill>
+                      <a:srgbClr val="FFFFFF"/>
+                    </a:solidFill>
+                  </a:tcPr>
+                </a:tc>
+                <a:tc>
+                  <a:txBody>
+                    <a:bodyPr/>
+                    <a:lstStyle/>
+                    <a:p>
+                      <a:pPr algn="r"/>
+                      <a:r>
+                        <a:rPr sz="1050" b="0">
+                          <a:solidFill>
+                            <a:srgbClr val="5D6D7E"/>
+                          </a:solidFill>
+                          <a:latin typeface="Arial"/>
+                        </a:rPr>
+                        <a:t>2.97%</a:t>
+                      </a:r>
+                    </a:p>
+                  </a:txBody>
+                  <a:tcPr>
+                    <a:solidFill>
+                      <a:srgbClr val="FFFFFF"/>
+                    </a:solidFill>
+                  </a:tcPr>
+                </a:tc>
+              </a:tr>
+              <a:tr h="228600">
+                <a:tc>
+                  <a:txBody>
+                    <a:bodyPr/>
+                    <a:lstStyle/>
+                    <a:p>
+                      <a:pPr algn="l"/>
+                      <a:r>
+                        <a:rPr sz="1050" b="0">
+                          <a:solidFill>
+                            <a:srgbClr val="5D6D7E"/>
+                          </a:solidFill>
+                          <a:latin typeface="Arial"/>
+                        </a:rPr>
+                        <a:t>3.5% target · shifted grid</a:t>
+                      </a:r>
+                    </a:p>
+                  </a:txBody>
+                  <a:tcPr>
+                    <a:solidFill>
+                      <a:srgbClr val="FFFFFF"/>
+                    </a:solidFill>
+                  </a:tcPr>
+                </a:tc>
+                <a:tc>
+                  <a:txBody>
+                    <a:bodyPr/>
+                    <a:lstStyle/>
+                    <a:p>
+                      <a:pPr algn="r"/>
+                      <a:r>
+                        <a:rPr sz="1050" b="0">
+                          <a:solidFill>
+                            <a:srgbClr val="5D6D7E"/>
+                          </a:solidFill>
+                          <a:latin typeface="Arial"/>
+                        </a:rPr>
+                        <a:t>€7.9M</a:t>
+                      </a:r>
+                    </a:p>
+                  </a:txBody>
+                  <a:tcPr>
+                    <a:solidFill>
+                      <a:srgbClr val="FFFFFF"/>
+                    </a:solidFill>
+                  </a:tcPr>
+                </a:tc>
+                <a:tc>
+                  <a:txBody>
+                    <a:bodyPr/>
+                    <a:lstStyle/>
+                    <a:p>
+                      <a:pPr algn="r"/>
+                      <a:r>
+                        <a:rPr sz="1050" b="0">
+                          <a:solidFill>
+                            <a:srgbClr val="5D6D7E"/>
+                          </a:solidFill>
+                          <a:latin typeface="Arial"/>
+                        </a:rPr>
+                        <a:t>3.75%</a:t>
+                      </a:r>
+                    </a:p>
+                  </a:txBody>
+                  <a:tcPr>
+                    <a:solidFill>
+                      <a:srgbClr val="FFFFFF"/>
+                    </a:solidFill>
+                  </a:tcPr>
+                </a:tc>
+                <a:tc>
+                  <a:txBody>
+                    <a:bodyPr/>
+                    <a:lstStyle/>
+                    <a:p>
+                      <a:pPr algn="r"/>
+                      <a:r>
+                        <a:rPr sz="1050" b="0">
+                          <a:solidFill>
+                            <a:srgbClr val="5D6D7E"/>
+                          </a:solidFill>
+                          <a:latin typeface="Arial"/>
+                        </a:rPr>
+                        <a:t>€9.8M</a:t>
+                      </a:r>
+                    </a:p>
+                  </a:txBody>
+                  <a:tcPr>
+                    <a:solidFill>
+                      <a:srgbClr val="FFFFFF"/>
+                    </a:solidFill>
+                  </a:tcPr>
+                </a:tc>
+                <a:tc>
+                  <a:txBody>
+                    <a:bodyPr/>
+                    <a:lstStyle/>
+                    <a:p>
+                      <a:pPr algn="r"/>
+                      <a:r>
+                        <a:rPr sz="1050" b="0">
+                          <a:solidFill>
+                            <a:srgbClr val="5D6D7E"/>
+                          </a:solidFill>
+                          <a:latin typeface="Arial"/>
+                        </a:rPr>
+                        <a:t>3.27%</a:t>
+                      </a:r>
+                    </a:p>
+                  </a:txBody>
+                  <a:tcPr>
+                    <a:solidFill>
+                      <a:srgbClr val="FFFFFF"/>
+                    </a:solidFill>
+                  </a:tcPr>
+                </a:tc>
+                <a:tc>
+                  <a:txBody>
+                    <a:bodyPr/>
+                    <a:lstStyle/>
+                    <a:p>
+                      <a:pPr algn="r"/>
+                      <a:r>
+                        <a:rPr sz="1050" b="0">
+                          <a:solidFill>
+                            <a:srgbClr val="5D6D7E"/>
+                          </a:solidFill>
+                          <a:latin typeface="Arial"/>
+                        </a:rPr>
+                        <a:t>€17.7M</a:t>
+                      </a:r>
+                    </a:p>
+                  </a:txBody>
+                  <a:tcPr>
+                    <a:solidFill>
+                      <a:srgbClr val="FFFFFF"/>
+                    </a:solidFill>
+                  </a:tcPr>
+                </a:tc>
+                <a:tc>
+                  <a:txBody>
+                    <a:bodyPr/>
+                    <a:lstStyle/>
+                    <a:p>
+                      <a:pPr algn="r"/>
+                      <a:r>
+                        <a:rPr sz="1050" b="0">
+                          <a:solidFill>
+                            <a:srgbClr val="5D6D7E"/>
+                          </a:solidFill>
+                          <a:latin typeface="Arial"/>
+                        </a:rPr>
+                        <a:t>3.48%</a:t>
+                      </a:r>
+                    </a:p>
+                  </a:txBody>
+                  <a:tcPr>
+                    <a:solidFill>
+                      <a:srgbClr val="FFFFFF"/>
+                    </a:solidFill>
+                  </a:tcPr>
+                </a:tc>
+              </a:tr>
+              <a:tr h="228600">
+                <a:tc>
+                  <a:txBody>
+                    <a:bodyPr/>
+                    <a:lstStyle/>
+                    <a:p>
+                      <a:pPr algn="l"/>
+                      <a:r>
+                        <a:rPr sz="1050" b="0">
+                          <a:solidFill>
+                            <a:srgbClr val="5D6D7E"/>
+                          </a:solidFill>
+                          <a:latin typeface="Arial"/>
+                        </a:rPr>
+                        <a:t>4% target · shifted grid</a:t>
+                      </a:r>
+                    </a:p>
+                  </a:txBody>
+                  <a:tcPr>
+                    <a:solidFill>
+                      <a:srgbClr val="FFFFFF"/>
+                    </a:solidFill>
+                  </a:tcPr>
+                </a:tc>
+                <a:tc>
+                  <a:txBody>
+                    <a:bodyPr/>
+                    <a:lstStyle/>
+                    <a:p>
+                      <a:pPr algn="r"/>
+                      <a:r>
+                        <a:rPr sz="1050" b="0">
+                          <a:solidFill>
+                            <a:srgbClr val="5D6D7E"/>
+                          </a:solidFill>
+                          <a:latin typeface="Arial"/>
+                        </a:rPr>
+                        <a:t>€8.4M</a:t>
+                      </a:r>
+                    </a:p>
+                  </a:txBody>
+                  <a:tcPr>
+                    <a:solidFill>
+                      <a:srgbClr val="FFFFFF"/>
+                    </a:solidFill>
+                  </a:tcPr>
+                </a:tc>
+                <a:tc>
+                  <a:txBody>
+                    <a:bodyPr/>
+                    <a:lstStyle/>
+                    <a:p>
+                      <a:pPr algn="r"/>
+                      <a:r>
+                        <a:rPr sz="1050" b="0">
+                          <a:solidFill>
+                            <a:srgbClr val="5D6D7E"/>
+                          </a:solidFill>
+                          <a:latin typeface="Arial"/>
+                        </a:rPr>
+                        <a:t>4.26%</a:t>
+                      </a:r>
+                    </a:p>
+                  </a:txBody>
+                  <a:tcPr>
+                    <a:solidFill>
+                      <a:srgbClr val="FFFFFF"/>
+                    </a:solidFill>
+                  </a:tcPr>
+                </a:tc>
+                <a:tc>
+                  <a:txBody>
+                    <a:bodyPr/>
+                    <a:lstStyle/>
+                    <a:p>
+                      <a:pPr algn="r"/>
+                      <a:r>
+                        <a:rPr sz="1050" b="0">
+                          <a:solidFill>
+                            <a:srgbClr val="5D6D7E"/>
+                          </a:solidFill>
+                          <a:latin typeface="Arial"/>
+                        </a:rPr>
+                        <a:t>€10.1M</a:t>
+                      </a:r>
+                    </a:p>
+                  </a:txBody>
+                  <a:tcPr>
+                    <a:solidFill>
+                      <a:srgbClr val="FFFFFF"/>
+                    </a:solidFill>
+                  </a:tcPr>
+                </a:tc>
+                <a:tc>
+                  <a:txBody>
+                    <a:bodyPr/>
+                    <a:lstStyle/>
+                    <a:p>
+                      <a:pPr algn="r"/>
+                      <a:r>
+                        <a:rPr sz="1050" b="0">
+                          <a:solidFill>
+                            <a:srgbClr val="5D6D7E"/>
+                          </a:solidFill>
+                          <a:latin typeface="Arial"/>
+                        </a:rPr>
+                        <a:t>3.52%</a:t>
+                      </a:r>
+                    </a:p>
+                  </a:txBody>
+                  <a:tcPr>
+                    <a:solidFill>
+                      <a:srgbClr val="FFFFFF"/>
+                    </a:solidFill>
+                  </a:tcPr>
+                </a:tc>
+                <a:tc>
+                  <a:txBody>
+                    <a:bodyPr/>
+                    <a:lstStyle/>
+                    <a:p>
+                      <a:pPr algn="r"/>
+                      <a:r>
+                        <a:rPr sz="1050" b="0">
+                          <a:solidFill>
+                            <a:srgbClr val="5D6D7E"/>
+                          </a:solidFill>
+                          <a:latin typeface="Arial"/>
+                        </a:rPr>
+                        <a:t>€18.5M</a:t>
+                      </a:r>
+                    </a:p>
+                  </a:txBody>
+                  <a:tcPr>
+                    <a:solidFill>
+                      <a:srgbClr val="FFFFFF"/>
+                    </a:solidFill>
+                  </a:tcPr>
+                </a:tc>
+                <a:tc>
+                  <a:txBody>
+                    <a:bodyPr/>
+                    <a:lstStyle/>
+                    <a:p>
+                      <a:pPr algn="r"/>
+                      <a:r>
+                        <a:rPr sz="1050" b="0">
+                          <a:solidFill>
+                            <a:srgbClr val="5D6D7E"/>
+                          </a:solidFill>
+                          <a:latin typeface="Arial"/>
+                        </a:rPr>
+                        <a:t>3.85%</a:t>
                       </a:r>
                     </a:p>
                   </a:txBody>
@@ -14839,14 +16977,14 @@
       </p:graphicFrame>
       <p:sp>
         <p:nvSpPr>
-          <p:cNvPr id="11" name="TextBox 10"/>
+          <p:cNvPr id="8" name="TextBox 7"/>
           <p:cNvSpPr txBox="1"/>
           <p:nvPr/>
         </p:nvSpPr>
         <p:spPr>
           <a:xfrm>
-            <a:off x="566928" y="6144768"/>
-            <a:ext cx="11057839" cy="640080"/>
+            <a:off x="566928" y="5779008"/>
+            <a:ext cx="11057839" cy="896112"/>
           </a:xfrm>
           <a:prstGeom prst="rect">
             <a:avLst/>
@@ -14865,13 +17003,13 @@
               </a:lnSpc>
             </a:pPr>
             <a:r>
-              <a:rPr sz="1100" b="0">
+              <a:rPr sz="1000" b="0">
                 <a:solidFill>
                   <a:srgbClr val="5D6D7E"/>
                 </a:solidFill>
                 <a:latin typeface="Arial"/>
               </a:rPr>
-              <a:t>A single cutoff is simpler to operate; shifting the grid keeps its shape —looser where the group is good— and gives slightly more acceptance at the same risk. '&gt;=G' is always rejected in both.</a:t>
+              <a:t>Stores: 'Today (measured)' is the Mar 2025 – Feb 2026 window with the internal score; every other row is Aug–Sep 2026, the only period with an EFX score. Online is always Mar 2025 – Feb 2026. Store booking rates here use the channel take-up; point 2 uses per-segment take-up, hence a 0.1 pp difference. Online's risk in the grid rows carries the reject-inference uplift on its own book (realized 4.18%).</a:t>
             </a:r>
           </a:p>
         </p:txBody>
@@ -14928,7 +17066,7 @@
                 </a:solidFill>
                 <a:latin typeface="Arial"/>
               </a:rPr>
-              <a:t>METHODOLOGY · RISK</a:t>
+              <a:t>POINT 4 · GRIDS</a:t>
             </a:r>
           </a:p>
         </p:txBody>
@@ -14967,7 +17105,7 @@
                 </a:solidFill>
                 <a:latin typeface="Arial"/>
               </a:rPr>
-              <a:t>Online Mar 2025 – Feb 2026  ·  stores Aug–Sep 2026</a:t>
+              <a:t>Policy — no period</a:t>
             </a:r>
           </a:p>
         </p:txBody>
@@ -15006,7 +17144,7 @@
                 </a:solidFill>
                 <a:latin typeface="Arial"/>
               </a:rPr>
-              <a:t>How store risk is estimated</a:t>
+              <a:t>What grid each scenario implies</a:t>
             </a:r>
           </a:p>
         </p:txBody>
@@ -15057,58 +17195,14 @@
       </p:sp>
       <p:sp>
         <p:nvSpPr>
-          <p:cNvPr id="6" name="Rectangle 5"/>
-          <p:cNvSpPr/>
+          <p:cNvPr id="6" name="TextBox 5"/>
+          <p:cNvSpPr txBox="1"/>
           <p:nvPr/>
         </p:nvSpPr>
         <p:spPr>
           <a:xfrm>
             <a:off x="566928" y="1563624"/>
-            <a:ext cx="420624" cy="420624"/>
-          </a:xfrm>
-          <a:prstGeom prst="rect">
-            <a:avLst/>
-          </a:prstGeom>
-          <a:solidFill>
-            <a:srgbClr val="2C3E50"/>
-          </a:solidFill>
-          <a:ln>
-            <a:noFill/>
-          </a:ln>
-          <a:effectLst/>
-        </p:spPr>
-        <p:style>
-          <a:lnRef idx="1">
-            <a:schemeClr val="accent1"/>
-          </a:lnRef>
-          <a:fillRef idx="3">
-            <a:schemeClr val="accent1"/>
-          </a:fillRef>
-          <a:effectRef idx="2">
-            <a:schemeClr val="accent1"/>
-          </a:effectRef>
-          <a:fontRef idx="minor">
-            <a:schemeClr val="lt1"/>
-          </a:fontRef>
-        </p:style>
-        <p:txBody>
-          <a:bodyPr rtlCol="0" anchor="ctr"/>
-          <a:lstStyle/>
-          <a:p>
-            <a:pPr algn="ctr"/>
-          </a:p>
-        </p:txBody>
-      </p:sp>
-      <p:sp>
-        <p:nvSpPr>
-          <p:cNvPr id="7" name="TextBox 6"/>
-          <p:cNvSpPr txBox="1"/>
-          <p:nvPr/>
-        </p:nvSpPr>
-        <p:spPr>
-          <a:xfrm>
-            <a:off x="566928" y="1618488"/>
-            <a:ext cx="420624" cy="310896"/>
+            <a:ext cx="11057839" cy="320040"/>
           </a:xfrm>
           <a:prstGeom prst="rect">
             <a:avLst/>
@@ -15121,33 +17215,33 @@
           </a:bodyPr>
           <a:lstStyle/>
           <a:p>
-            <a:pPr algn="ctr">
+            <a:pPr algn="l">
               <a:lnSpc>
                 <a:spcPct val="100000"/>
               </a:lnSpc>
             </a:pPr>
             <a:r>
-              <a:rPr sz="1400" b="1">
+              <a:rPr sz="1150" b="0">
                 <a:solidFill>
-                  <a:srgbClr val="FFFFFF"/>
+                  <a:srgbClr val="5D6D7E"/>
                 </a:solidFill>
                 <a:latin typeface="Arial"/>
               </a:rPr>
-              <a:t>1</a:t>
-            </a:r>
-          </a:p>
-        </p:txBody>
-      </p:sp>
-      <p:sp>
-        <p:nvSpPr>
-          <p:cNvPr id="8" name="TextBox 7"/>
+              <a:t>REJECT threshold by group: applications above the value are accepted.</a:t>
+            </a:r>
+          </a:p>
+        </p:txBody>
+      </p:sp>
+      <p:sp>
+        <p:nvSpPr>
+          <p:cNvPr id="7" name="TextBox 6"/>
           <p:cNvSpPr txBox="1"/>
           <p:nvPr/>
         </p:nvSpPr>
         <p:spPr>
           <a:xfrm>
-            <a:off x="1188720" y="1563624"/>
-            <a:ext cx="8863279" cy="274320"/>
+            <a:off x="566928" y="1975104"/>
+            <a:ext cx="11057839" cy="292608"/>
           </a:xfrm>
           <a:prstGeom prst="rect">
             <a:avLst/>
@@ -15166,17 +17260,887 @@
               </a:lnSpc>
             </a:pPr>
             <a:r>
-              <a:rPr sz="1300" b="1">
+              <a:rPr sz="1400" b="1">
                 <a:solidFill>
                   <a:srgbClr val="2C3E50"/>
                 </a:solidFill>
                 <a:latin typeface="Arial"/>
               </a:rPr>
-              <a:t>Realized risk by score bin, in Apple Online</a:t>
-            </a:r>
-          </a:p>
-        </p:txBody>
-      </p:sp>
+              <a:t>Single cutoff for all of Apple</a:t>
+            </a:r>
+          </a:p>
+        </p:txBody>
+      </p:sp>
+      <p:graphicFrame>
+        <p:nvGraphicFramePr>
+          <p:cNvPr id="8" name="Table 7"/>
+          <p:cNvGraphicFramePr>
+            <a:graphicFrameLocks noGrp="1"/>
+          </p:cNvGraphicFramePr>
+          <p:nvPr/>
+        </p:nvGraphicFramePr>
+        <p:xfrm>
+          <a:off x="566928" y="2286000"/>
+          <a:ext cx="10058397" cy="1481328"/>
+        </p:xfrm>
+        <a:graphic>
+          <a:graphicData uri="http://schemas.openxmlformats.org/drawingml/2006/table">
+            <a:tbl>
+              <a:tblPr firstRow="1" bandRow="1">
+                <a:tableStyleId>{5C22544A-7EE6-4342-B048-85BDC9FD1C3A}</a:tableStyleId>
+              </a:tblPr>
+              <a:tblGrid>
+                <a:gridCol w="2075542"/>
+                <a:gridCol w="1596571"/>
+                <a:gridCol w="1596571"/>
+                <a:gridCol w="1596571"/>
+                <a:gridCol w="1596571"/>
+                <a:gridCol w="1596571"/>
+              </a:tblGrid>
+              <a:tr h="246888">
+                <a:tc>
+                  <a:txBody>
+                    <a:bodyPr/>
+                    <a:lstStyle/>
+                    <a:p>
+                      <a:pPr algn="l"/>
+                      <a:r>
+                        <a:rPr sz="1150" b="1">
+                          <a:solidFill>
+                            <a:srgbClr val="2C3E50"/>
+                          </a:solidFill>
+                          <a:latin typeface="Arial"/>
+                        </a:rPr>
+                        <a:t>Group</a:t>
+                      </a:r>
+                    </a:p>
+                  </a:txBody>
+                  <a:tcPr>
+                    <a:solidFill>
+                      <a:srgbClr val="F6F7F9"/>
+                    </a:solidFill>
+                  </a:tcPr>
+                </a:tc>
+                <a:tc>
+                  <a:txBody>
+                    <a:bodyPr/>
+                    <a:lstStyle/>
+                    <a:p>
+                      <a:pPr algn="r"/>
+                      <a:r>
+                        <a:rPr sz="1150" b="1">
+                          <a:solidFill>
+                            <a:srgbClr val="2C3E50"/>
+                          </a:solidFill>
+                          <a:latin typeface="Arial"/>
+                        </a:rPr>
+                        <a:t>Today</a:t>
+                      </a:r>
+                    </a:p>
+                  </a:txBody>
+                  <a:tcPr>
+                    <a:solidFill>
+                      <a:srgbClr val="F6F7F9"/>
+                    </a:solidFill>
+                  </a:tcPr>
+                </a:tc>
+                <a:tc>
+                  <a:txBody>
+                    <a:bodyPr/>
+                    <a:lstStyle/>
+                    <a:p>
+                      <a:pPr algn="r"/>
+                      <a:r>
+                        <a:rPr sz="1150" b="1">
+                          <a:solidFill>
+                            <a:srgbClr val="2C3E50"/>
+                          </a:solidFill>
+                          <a:latin typeface="Arial"/>
+                        </a:rPr>
+                        <a:t>2.5%</a:t>
+                      </a:r>
+                    </a:p>
+                  </a:txBody>
+                  <a:tcPr>
+                    <a:solidFill>
+                      <a:srgbClr val="F6F7F9"/>
+                    </a:solidFill>
+                  </a:tcPr>
+                </a:tc>
+                <a:tc>
+                  <a:txBody>
+                    <a:bodyPr/>
+                    <a:lstStyle/>
+                    <a:p>
+                      <a:pPr algn="r"/>
+                      <a:r>
+                        <a:rPr sz="1150" b="1">
+                          <a:solidFill>
+                            <a:srgbClr val="2C3E50"/>
+                          </a:solidFill>
+                          <a:latin typeface="Arial"/>
+                        </a:rPr>
+                        <a:t>3%</a:t>
+                      </a:r>
+                    </a:p>
+                  </a:txBody>
+                  <a:tcPr>
+                    <a:solidFill>
+                      <a:srgbClr val="F6F7F9"/>
+                    </a:solidFill>
+                  </a:tcPr>
+                </a:tc>
+                <a:tc>
+                  <a:txBody>
+                    <a:bodyPr/>
+                    <a:lstStyle/>
+                    <a:p>
+                      <a:pPr algn="r"/>
+                      <a:r>
+                        <a:rPr sz="1150" b="1">
+                          <a:solidFill>
+                            <a:srgbClr val="2C3E50"/>
+                          </a:solidFill>
+                          <a:latin typeface="Arial"/>
+                        </a:rPr>
+                        <a:t>3.5%</a:t>
+                      </a:r>
+                    </a:p>
+                  </a:txBody>
+                  <a:tcPr>
+                    <a:solidFill>
+                      <a:srgbClr val="F6F7F9"/>
+                    </a:solidFill>
+                  </a:tcPr>
+                </a:tc>
+                <a:tc>
+                  <a:txBody>
+                    <a:bodyPr/>
+                    <a:lstStyle/>
+                    <a:p>
+                      <a:pPr algn="r"/>
+                      <a:r>
+                        <a:rPr sz="1150" b="1">
+                          <a:solidFill>
+                            <a:srgbClr val="2C3E50"/>
+                          </a:solidFill>
+                          <a:latin typeface="Arial"/>
+                        </a:rPr>
+                        <a:t>4%</a:t>
+                      </a:r>
+                    </a:p>
+                  </a:txBody>
+                  <a:tcPr>
+                    <a:solidFill>
+                      <a:srgbClr val="F6F7F9"/>
+                    </a:solidFill>
+                  </a:tcPr>
+                </a:tc>
+              </a:tr>
+              <a:tr h="246888">
+                <a:tc>
+                  <a:txBody>
+                    <a:bodyPr/>
+                    <a:lstStyle/>
+                    <a:p>
+                      <a:pPr algn="l"/>
+                      <a:r>
+                        <a:rPr sz="1150" b="0">
+                          <a:solidFill>
+                            <a:srgbClr val="5D6D7E"/>
+                          </a:solidFill>
+                          <a:latin typeface="Arial"/>
+                        </a:rPr>
+                        <a:t>New</a:t>
+                      </a:r>
+                    </a:p>
+                  </a:txBody>
+                  <a:tcPr>
+                    <a:solidFill>
+                      <a:srgbClr val="FFFFFF"/>
+                    </a:solidFill>
+                  </a:tcPr>
+                </a:tc>
+                <a:tc>
+                  <a:txBody>
+                    <a:bodyPr/>
+                    <a:lstStyle/>
+                    <a:p>
+                      <a:pPr algn="r"/>
+                      <a:r>
+                        <a:rPr sz="1150" b="0">
+                          <a:solidFill>
+                            <a:srgbClr val="5D6D7E"/>
+                          </a:solidFill>
+                          <a:latin typeface="Arial"/>
+                        </a:rPr>
+                        <a:t>&gt; 27</a:t>
+                      </a:r>
+                    </a:p>
+                  </a:txBody>
+                  <a:tcPr>
+                    <a:solidFill>
+                      <a:srgbClr val="FFFFFF"/>
+                    </a:solidFill>
+                  </a:tcPr>
+                </a:tc>
+                <a:tc>
+                  <a:txBody>
+                    <a:bodyPr/>
+                    <a:lstStyle/>
+                    <a:p>
+                      <a:pPr algn="r"/>
+                      <a:r>
+                        <a:rPr sz="1150" b="0">
+                          <a:solidFill>
+                            <a:srgbClr val="5D6D7E"/>
+                          </a:solidFill>
+                          <a:latin typeface="Arial"/>
+                        </a:rPr>
+                        <a:t>&gt; 62</a:t>
+                      </a:r>
+                    </a:p>
+                  </a:txBody>
+                  <a:tcPr>
+                    <a:solidFill>
+                      <a:srgbClr val="FFFFFF"/>
+                    </a:solidFill>
+                  </a:tcPr>
+                </a:tc>
+                <a:tc>
+                  <a:txBody>
+                    <a:bodyPr/>
+                    <a:lstStyle/>
+                    <a:p>
+                      <a:pPr algn="r"/>
+                      <a:r>
+                        <a:rPr sz="1150" b="0">
+                          <a:solidFill>
+                            <a:srgbClr val="5D6D7E"/>
+                          </a:solidFill>
+                          <a:latin typeface="Arial"/>
+                        </a:rPr>
+                        <a:t>&gt; 51</a:t>
+                      </a:r>
+                    </a:p>
+                  </a:txBody>
+                  <a:tcPr>
+                    <a:solidFill>
+                      <a:srgbClr val="FFFFFF"/>
+                    </a:solidFill>
+                  </a:tcPr>
+                </a:tc>
+                <a:tc>
+                  <a:txBody>
+                    <a:bodyPr/>
+                    <a:lstStyle/>
+                    <a:p>
+                      <a:pPr algn="r"/>
+                      <a:r>
+                        <a:rPr sz="1150" b="0">
+                          <a:solidFill>
+                            <a:srgbClr val="5D6D7E"/>
+                          </a:solidFill>
+                          <a:latin typeface="Arial"/>
+                        </a:rPr>
+                        <a:t>&gt; 38</a:t>
+                      </a:r>
+                    </a:p>
+                  </a:txBody>
+                  <a:tcPr>
+                    <a:solidFill>
+                      <a:srgbClr val="FFFFFF"/>
+                    </a:solidFill>
+                  </a:tcPr>
+                </a:tc>
+                <a:tc>
+                  <a:txBody>
+                    <a:bodyPr/>
+                    <a:lstStyle/>
+                    <a:p>
+                      <a:pPr algn="r"/>
+                      <a:r>
+                        <a:rPr sz="1150" b="0">
+                          <a:solidFill>
+                            <a:srgbClr val="5D6D7E"/>
+                          </a:solidFill>
+                          <a:latin typeface="Arial"/>
+                        </a:rPr>
+                        <a:t>&gt; 27</a:t>
+                      </a:r>
+                    </a:p>
+                  </a:txBody>
+                  <a:tcPr>
+                    <a:solidFill>
+                      <a:srgbClr val="FFFFFF"/>
+                    </a:solidFill>
+                  </a:tcPr>
+                </a:tc>
+              </a:tr>
+              <a:tr h="246888">
+                <a:tc>
+                  <a:txBody>
+                    <a:bodyPr/>
+                    <a:lstStyle/>
+                    <a:p>
+                      <a:pPr algn="l"/>
+                      <a:r>
+                        <a:rPr sz="1150" b="0">
+                          <a:solidFill>
+                            <a:srgbClr val="5D6D7E"/>
+                          </a:solidFill>
+                          <a:latin typeface="Arial"/>
+                        </a:rPr>
+                        <a:t>Inactive</a:t>
+                      </a:r>
+                    </a:p>
+                  </a:txBody>
+                  <a:tcPr>
+                    <a:solidFill>
+                      <a:srgbClr val="FFFFFF"/>
+                    </a:solidFill>
+                  </a:tcPr>
+                </a:tc>
+                <a:tc>
+                  <a:txBody>
+                    <a:bodyPr/>
+                    <a:lstStyle/>
+                    <a:p>
+                      <a:pPr algn="r"/>
+                      <a:r>
+                        <a:rPr sz="1150" b="0">
+                          <a:solidFill>
+                            <a:srgbClr val="5D6D7E"/>
+                          </a:solidFill>
+                          <a:latin typeface="Arial"/>
+                        </a:rPr>
+                        <a:t>&gt; 22</a:t>
+                      </a:r>
+                    </a:p>
+                  </a:txBody>
+                  <a:tcPr>
+                    <a:solidFill>
+                      <a:srgbClr val="FFFFFF"/>
+                    </a:solidFill>
+                  </a:tcPr>
+                </a:tc>
+                <a:tc>
+                  <a:txBody>
+                    <a:bodyPr/>
+                    <a:lstStyle/>
+                    <a:p>
+                      <a:pPr algn="r"/>
+                      <a:r>
+                        <a:rPr sz="1150" b="0">
+                          <a:solidFill>
+                            <a:srgbClr val="5D6D7E"/>
+                          </a:solidFill>
+                          <a:latin typeface="Arial"/>
+                        </a:rPr>
+                        <a:t>&gt; 62</a:t>
+                      </a:r>
+                    </a:p>
+                  </a:txBody>
+                  <a:tcPr>
+                    <a:solidFill>
+                      <a:srgbClr val="FFFFFF"/>
+                    </a:solidFill>
+                  </a:tcPr>
+                </a:tc>
+                <a:tc>
+                  <a:txBody>
+                    <a:bodyPr/>
+                    <a:lstStyle/>
+                    <a:p>
+                      <a:pPr algn="r"/>
+                      <a:r>
+                        <a:rPr sz="1150" b="0">
+                          <a:solidFill>
+                            <a:srgbClr val="5D6D7E"/>
+                          </a:solidFill>
+                          <a:latin typeface="Arial"/>
+                        </a:rPr>
+                        <a:t>&gt; 51</a:t>
+                      </a:r>
+                    </a:p>
+                  </a:txBody>
+                  <a:tcPr>
+                    <a:solidFill>
+                      <a:srgbClr val="FFFFFF"/>
+                    </a:solidFill>
+                  </a:tcPr>
+                </a:tc>
+                <a:tc>
+                  <a:txBody>
+                    <a:bodyPr/>
+                    <a:lstStyle/>
+                    <a:p>
+                      <a:pPr algn="r"/>
+                      <a:r>
+                        <a:rPr sz="1150" b="0">
+                          <a:solidFill>
+                            <a:srgbClr val="5D6D7E"/>
+                          </a:solidFill>
+                          <a:latin typeface="Arial"/>
+                        </a:rPr>
+                        <a:t>&gt; 38</a:t>
+                      </a:r>
+                    </a:p>
+                  </a:txBody>
+                  <a:tcPr>
+                    <a:solidFill>
+                      <a:srgbClr val="FFFFFF"/>
+                    </a:solidFill>
+                  </a:tcPr>
+                </a:tc>
+                <a:tc>
+                  <a:txBody>
+                    <a:bodyPr/>
+                    <a:lstStyle/>
+                    <a:p>
+                      <a:pPr algn="r"/>
+                      <a:r>
+                        <a:rPr sz="1150" b="0">
+                          <a:solidFill>
+                            <a:srgbClr val="5D6D7E"/>
+                          </a:solidFill>
+                          <a:latin typeface="Arial"/>
+                        </a:rPr>
+                        <a:t>&gt; 27</a:t>
+                      </a:r>
+                    </a:p>
+                  </a:txBody>
+                  <a:tcPr>
+                    <a:solidFill>
+                      <a:srgbClr val="FFFFFF"/>
+                    </a:solidFill>
+                  </a:tcPr>
+                </a:tc>
+              </a:tr>
+              <a:tr h="246888">
+                <a:tc>
+                  <a:txBody>
+                    <a:bodyPr/>
+                    <a:lstStyle/>
+                    <a:p>
+                      <a:pPr algn="l"/>
+                      <a:r>
+                        <a:rPr sz="1150" b="0">
+                          <a:solidFill>
+                            <a:srgbClr val="5D6D7E"/>
+                          </a:solidFill>
+                          <a:latin typeface="Arial"/>
+                        </a:rPr>
+                        <a:t>A-C</a:t>
+                      </a:r>
+                    </a:p>
+                  </a:txBody>
+                  <a:tcPr>
+                    <a:solidFill>
+                      <a:srgbClr val="FFFFFF"/>
+                    </a:solidFill>
+                  </a:tcPr>
+                </a:tc>
+                <a:tc>
+                  <a:txBody>
+                    <a:bodyPr/>
+                    <a:lstStyle/>
+                    <a:p>
+                      <a:pPr algn="r"/>
+                      <a:r>
+                        <a:rPr sz="1150" b="0">
+                          <a:solidFill>
+                            <a:srgbClr val="5D6D7E"/>
+                          </a:solidFill>
+                          <a:latin typeface="Arial"/>
+                        </a:rPr>
+                        <a:t>&gt; 16</a:t>
+                      </a:r>
+                    </a:p>
+                  </a:txBody>
+                  <a:tcPr>
+                    <a:solidFill>
+                      <a:srgbClr val="FFFFFF"/>
+                    </a:solidFill>
+                  </a:tcPr>
+                </a:tc>
+                <a:tc>
+                  <a:txBody>
+                    <a:bodyPr/>
+                    <a:lstStyle/>
+                    <a:p>
+                      <a:pPr algn="r"/>
+                      <a:r>
+                        <a:rPr sz="1150" b="0">
+                          <a:solidFill>
+                            <a:srgbClr val="5D6D7E"/>
+                          </a:solidFill>
+                          <a:latin typeface="Arial"/>
+                        </a:rPr>
+                        <a:t>&gt; 62</a:t>
+                      </a:r>
+                    </a:p>
+                  </a:txBody>
+                  <a:tcPr>
+                    <a:solidFill>
+                      <a:srgbClr val="FFFFFF"/>
+                    </a:solidFill>
+                  </a:tcPr>
+                </a:tc>
+                <a:tc>
+                  <a:txBody>
+                    <a:bodyPr/>
+                    <a:lstStyle/>
+                    <a:p>
+                      <a:pPr algn="r"/>
+                      <a:r>
+                        <a:rPr sz="1150" b="0">
+                          <a:solidFill>
+                            <a:srgbClr val="5D6D7E"/>
+                          </a:solidFill>
+                          <a:latin typeface="Arial"/>
+                        </a:rPr>
+                        <a:t>&gt; 51</a:t>
+                      </a:r>
+                    </a:p>
+                  </a:txBody>
+                  <a:tcPr>
+                    <a:solidFill>
+                      <a:srgbClr val="FFFFFF"/>
+                    </a:solidFill>
+                  </a:tcPr>
+                </a:tc>
+                <a:tc>
+                  <a:txBody>
+                    <a:bodyPr/>
+                    <a:lstStyle/>
+                    <a:p>
+                      <a:pPr algn="r"/>
+                      <a:r>
+                        <a:rPr sz="1150" b="0">
+                          <a:solidFill>
+                            <a:srgbClr val="5D6D7E"/>
+                          </a:solidFill>
+                          <a:latin typeface="Arial"/>
+                        </a:rPr>
+                        <a:t>&gt; 38</a:t>
+                      </a:r>
+                    </a:p>
+                  </a:txBody>
+                  <a:tcPr>
+                    <a:solidFill>
+                      <a:srgbClr val="FFFFFF"/>
+                    </a:solidFill>
+                  </a:tcPr>
+                </a:tc>
+                <a:tc>
+                  <a:txBody>
+                    <a:bodyPr/>
+                    <a:lstStyle/>
+                    <a:p>
+                      <a:pPr algn="r"/>
+                      <a:r>
+                        <a:rPr sz="1150" b="0">
+                          <a:solidFill>
+                            <a:srgbClr val="5D6D7E"/>
+                          </a:solidFill>
+                          <a:latin typeface="Arial"/>
+                        </a:rPr>
+                        <a:t>&gt; 27</a:t>
+                      </a:r>
+                    </a:p>
+                  </a:txBody>
+                  <a:tcPr>
+                    <a:solidFill>
+                      <a:srgbClr val="FFFFFF"/>
+                    </a:solidFill>
+                  </a:tcPr>
+                </a:tc>
+              </a:tr>
+              <a:tr h="246888">
+                <a:tc>
+                  <a:txBody>
+                    <a:bodyPr/>
+                    <a:lstStyle/>
+                    <a:p>
+                      <a:pPr algn="l"/>
+                      <a:r>
+                        <a:rPr sz="1150" b="0">
+                          <a:solidFill>
+                            <a:srgbClr val="5D6D7E"/>
+                          </a:solidFill>
+                          <a:latin typeface="Arial"/>
+                        </a:rPr>
+                        <a:t>D-F</a:t>
+                      </a:r>
+                    </a:p>
+                  </a:txBody>
+                  <a:tcPr>
+                    <a:solidFill>
+                      <a:srgbClr val="FFFFFF"/>
+                    </a:solidFill>
+                  </a:tcPr>
+                </a:tc>
+                <a:tc>
+                  <a:txBody>
+                    <a:bodyPr/>
+                    <a:lstStyle/>
+                    <a:p>
+                      <a:pPr algn="r"/>
+                      <a:r>
+                        <a:rPr sz="1150" b="0">
+                          <a:solidFill>
+                            <a:srgbClr val="5D6D7E"/>
+                          </a:solidFill>
+                          <a:latin typeface="Arial"/>
+                        </a:rPr>
+                        <a:t>&gt; 22</a:t>
+                      </a:r>
+                    </a:p>
+                  </a:txBody>
+                  <a:tcPr>
+                    <a:solidFill>
+                      <a:srgbClr val="FFFFFF"/>
+                    </a:solidFill>
+                  </a:tcPr>
+                </a:tc>
+                <a:tc>
+                  <a:txBody>
+                    <a:bodyPr/>
+                    <a:lstStyle/>
+                    <a:p>
+                      <a:pPr algn="r"/>
+                      <a:r>
+                        <a:rPr sz="1150" b="0">
+                          <a:solidFill>
+                            <a:srgbClr val="5D6D7E"/>
+                          </a:solidFill>
+                          <a:latin typeface="Arial"/>
+                        </a:rPr>
+                        <a:t>&gt; 62</a:t>
+                      </a:r>
+                    </a:p>
+                  </a:txBody>
+                  <a:tcPr>
+                    <a:solidFill>
+                      <a:srgbClr val="FFFFFF"/>
+                    </a:solidFill>
+                  </a:tcPr>
+                </a:tc>
+                <a:tc>
+                  <a:txBody>
+                    <a:bodyPr/>
+                    <a:lstStyle/>
+                    <a:p>
+                      <a:pPr algn="r"/>
+                      <a:r>
+                        <a:rPr sz="1150" b="0">
+                          <a:solidFill>
+                            <a:srgbClr val="5D6D7E"/>
+                          </a:solidFill>
+                          <a:latin typeface="Arial"/>
+                        </a:rPr>
+                        <a:t>&gt; 51</a:t>
+                      </a:r>
+                    </a:p>
+                  </a:txBody>
+                  <a:tcPr>
+                    <a:solidFill>
+                      <a:srgbClr val="FFFFFF"/>
+                    </a:solidFill>
+                  </a:tcPr>
+                </a:tc>
+                <a:tc>
+                  <a:txBody>
+                    <a:bodyPr/>
+                    <a:lstStyle/>
+                    <a:p>
+                      <a:pPr algn="r"/>
+                      <a:r>
+                        <a:rPr sz="1150" b="0">
+                          <a:solidFill>
+                            <a:srgbClr val="5D6D7E"/>
+                          </a:solidFill>
+                          <a:latin typeface="Arial"/>
+                        </a:rPr>
+                        <a:t>&gt; 38</a:t>
+                      </a:r>
+                    </a:p>
+                  </a:txBody>
+                  <a:tcPr>
+                    <a:solidFill>
+                      <a:srgbClr val="FFFFFF"/>
+                    </a:solidFill>
+                  </a:tcPr>
+                </a:tc>
+                <a:tc>
+                  <a:txBody>
+                    <a:bodyPr/>
+                    <a:lstStyle/>
+                    <a:p>
+                      <a:pPr algn="r"/>
+                      <a:r>
+                        <a:rPr sz="1150" b="0">
+                          <a:solidFill>
+                            <a:srgbClr val="5D6D7E"/>
+                          </a:solidFill>
+                          <a:latin typeface="Arial"/>
+                        </a:rPr>
+                        <a:t>&gt; 27</a:t>
+                      </a:r>
+                    </a:p>
+                  </a:txBody>
+                  <a:tcPr>
+                    <a:solidFill>
+                      <a:srgbClr val="FFFFFF"/>
+                    </a:solidFill>
+                  </a:tcPr>
+                </a:tc>
+              </a:tr>
+              <a:tr h="246888">
+                <a:tc>
+                  <a:txBody>
+                    <a:bodyPr/>
+                    <a:lstStyle/>
+                    <a:p>
+                      <a:pPr algn="l"/>
+                      <a:r>
+                        <a:rPr sz="1150" b="0">
+                          <a:solidFill>
+                            <a:srgbClr val="5D6D7E"/>
+                          </a:solidFill>
+                          <a:latin typeface="Arial"/>
+                        </a:rPr>
+                        <a:t>&gt;=G</a:t>
+                      </a:r>
+                    </a:p>
+                  </a:txBody>
+                  <a:tcPr>
+                    <a:solidFill>
+                      <a:srgbClr val="FFFFFF"/>
+                    </a:solidFill>
+                  </a:tcPr>
+                </a:tc>
+                <a:tc>
+                  <a:txBody>
+                    <a:bodyPr/>
+                    <a:lstStyle/>
+                    <a:p>
+                      <a:pPr algn="r"/>
+                      <a:r>
+                        <a:rPr sz="1150" b="0">
+                          <a:solidFill>
+                            <a:srgbClr val="5D6D7E"/>
+                          </a:solidFill>
+                          <a:latin typeface="Arial"/>
+                        </a:rPr>
+                        <a:t>reject</a:t>
+                      </a:r>
+                    </a:p>
+                  </a:txBody>
+                  <a:tcPr>
+                    <a:solidFill>
+                      <a:srgbClr val="FFFFFF"/>
+                    </a:solidFill>
+                  </a:tcPr>
+                </a:tc>
+                <a:tc>
+                  <a:txBody>
+                    <a:bodyPr/>
+                    <a:lstStyle/>
+                    <a:p>
+                      <a:pPr algn="r"/>
+                      <a:r>
+                        <a:rPr sz="1150" b="0">
+                          <a:solidFill>
+                            <a:srgbClr val="5D6D7E"/>
+                          </a:solidFill>
+                          <a:latin typeface="Arial"/>
+                        </a:rPr>
+                        <a:t>reject</a:t>
+                      </a:r>
+                    </a:p>
+                  </a:txBody>
+                  <a:tcPr>
+                    <a:solidFill>
+                      <a:srgbClr val="FFFFFF"/>
+                    </a:solidFill>
+                  </a:tcPr>
+                </a:tc>
+                <a:tc>
+                  <a:txBody>
+                    <a:bodyPr/>
+                    <a:lstStyle/>
+                    <a:p>
+                      <a:pPr algn="r"/>
+                      <a:r>
+                        <a:rPr sz="1150" b="0">
+                          <a:solidFill>
+                            <a:srgbClr val="5D6D7E"/>
+                          </a:solidFill>
+                          <a:latin typeface="Arial"/>
+                        </a:rPr>
+                        <a:t>reject</a:t>
+                      </a:r>
+                    </a:p>
+                  </a:txBody>
+                  <a:tcPr>
+                    <a:solidFill>
+                      <a:srgbClr val="FFFFFF"/>
+                    </a:solidFill>
+                  </a:tcPr>
+                </a:tc>
+                <a:tc>
+                  <a:txBody>
+                    <a:bodyPr/>
+                    <a:lstStyle/>
+                    <a:p>
+                      <a:pPr algn="r"/>
+                      <a:r>
+                        <a:rPr sz="1150" b="0">
+                          <a:solidFill>
+                            <a:srgbClr val="5D6D7E"/>
+                          </a:solidFill>
+                          <a:latin typeface="Arial"/>
+                        </a:rPr>
+                        <a:t>reject</a:t>
+                      </a:r>
+                    </a:p>
+                  </a:txBody>
+                  <a:tcPr>
+                    <a:solidFill>
+                      <a:srgbClr val="FFFFFF"/>
+                    </a:solidFill>
+                  </a:tcPr>
+                </a:tc>
+                <a:tc>
+                  <a:txBody>
+                    <a:bodyPr/>
+                    <a:lstStyle/>
+                    <a:p>
+                      <a:pPr algn="r"/>
+                      <a:r>
+                        <a:rPr sz="1150" b="0">
+                          <a:solidFill>
+                            <a:srgbClr val="5D6D7E"/>
+                          </a:solidFill>
+                          <a:latin typeface="Arial"/>
+                        </a:rPr>
+                        <a:t>reject</a:t>
+                      </a:r>
+                    </a:p>
+                  </a:txBody>
+                  <a:tcPr>
+                    <a:solidFill>
+                      <a:srgbClr val="FFFFFF"/>
+                    </a:solidFill>
+                  </a:tcPr>
+                </a:tc>
+              </a:tr>
+            </a:tbl>
+          </a:graphicData>
+        </a:graphic>
+      </p:graphicFrame>
       <p:sp>
         <p:nvSpPr>
           <p:cNvPr id="9" name="TextBox 8"/>
@@ -15185,8 +18149,8 @@
         </p:nvSpPr>
         <p:spPr>
           <a:xfrm>
-            <a:off x="1188720" y="1837944"/>
-            <a:ext cx="8863279" cy="603504"/>
+            <a:off x="566928" y="4059936"/>
+            <a:ext cx="11057839" cy="292608"/>
           </a:xfrm>
           <a:prstGeom prst="rect">
             <a:avLst/>
@@ -15201,7 +18165,916 @@
           <a:p>
             <a:pPr algn="l">
               <a:lnSpc>
-                <a:spcPct val="118000"/>
+                <a:spcPct val="100000"/>
+              </a:lnSpc>
+            </a:pPr>
+            <a:r>
+              <a:rPr sz="1400" b="1">
+                <a:solidFill>
+                  <a:srgbClr val="2C3E50"/>
+                </a:solidFill>
+                <a:latin typeface="Arial"/>
+              </a:rPr>
+              <a:t>Current grid, shifted</a:t>
+            </a:r>
+          </a:p>
+        </p:txBody>
+      </p:sp>
+      <p:graphicFrame>
+        <p:nvGraphicFramePr>
+          <p:cNvPr id="10" name="Table 9"/>
+          <p:cNvGraphicFramePr>
+            <a:graphicFrameLocks noGrp="1"/>
+          </p:cNvGraphicFramePr>
+          <p:nvPr/>
+        </p:nvGraphicFramePr>
+        <p:xfrm>
+          <a:off x="566928" y="4370832"/>
+          <a:ext cx="10058397" cy="1481328"/>
+        </p:xfrm>
+        <a:graphic>
+          <a:graphicData uri="http://schemas.openxmlformats.org/drawingml/2006/table">
+            <a:tbl>
+              <a:tblPr firstRow="1" bandRow="1">
+                <a:tableStyleId>{5C22544A-7EE6-4342-B048-85BDC9FD1C3A}</a:tableStyleId>
+              </a:tblPr>
+              <a:tblGrid>
+                <a:gridCol w="2075542"/>
+                <a:gridCol w="1596571"/>
+                <a:gridCol w="1596571"/>
+                <a:gridCol w="1596571"/>
+                <a:gridCol w="1596571"/>
+                <a:gridCol w="1596571"/>
+              </a:tblGrid>
+              <a:tr h="246888">
+                <a:tc>
+                  <a:txBody>
+                    <a:bodyPr/>
+                    <a:lstStyle/>
+                    <a:p>
+                      <a:pPr algn="l"/>
+                      <a:r>
+                        <a:rPr sz="1150" b="1">
+                          <a:solidFill>
+                            <a:srgbClr val="2C3E50"/>
+                          </a:solidFill>
+                          <a:latin typeface="Arial"/>
+                        </a:rPr>
+                        <a:t>Group</a:t>
+                      </a:r>
+                    </a:p>
+                  </a:txBody>
+                  <a:tcPr>
+                    <a:solidFill>
+                      <a:srgbClr val="F6F7F9"/>
+                    </a:solidFill>
+                  </a:tcPr>
+                </a:tc>
+                <a:tc>
+                  <a:txBody>
+                    <a:bodyPr/>
+                    <a:lstStyle/>
+                    <a:p>
+                      <a:pPr algn="r"/>
+                      <a:r>
+                        <a:rPr sz="1150" b="1">
+                          <a:solidFill>
+                            <a:srgbClr val="2C3E50"/>
+                          </a:solidFill>
+                          <a:latin typeface="Arial"/>
+                        </a:rPr>
+                        <a:t>Today</a:t>
+                      </a:r>
+                    </a:p>
+                  </a:txBody>
+                  <a:tcPr>
+                    <a:solidFill>
+                      <a:srgbClr val="F6F7F9"/>
+                    </a:solidFill>
+                  </a:tcPr>
+                </a:tc>
+                <a:tc>
+                  <a:txBody>
+                    <a:bodyPr/>
+                    <a:lstStyle/>
+                    <a:p>
+                      <a:pPr algn="r"/>
+                      <a:r>
+                        <a:rPr sz="1150" b="1">
+                          <a:solidFill>
+                            <a:srgbClr val="2C3E50"/>
+                          </a:solidFill>
+                          <a:latin typeface="Arial"/>
+                        </a:rPr>
+                        <a:t>2.5%</a:t>
+                      </a:r>
+                    </a:p>
+                  </a:txBody>
+                  <a:tcPr>
+                    <a:solidFill>
+                      <a:srgbClr val="F6F7F9"/>
+                    </a:solidFill>
+                  </a:tcPr>
+                </a:tc>
+                <a:tc>
+                  <a:txBody>
+                    <a:bodyPr/>
+                    <a:lstStyle/>
+                    <a:p>
+                      <a:pPr algn="r"/>
+                      <a:r>
+                        <a:rPr sz="1150" b="1">
+                          <a:solidFill>
+                            <a:srgbClr val="2C3E50"/>
+                          </a:solidFill>
+                          <a:latin typeface="Arial"/>
+                        </a:rPr>
+                        <a:t>3%</a:t>
+                      </a:r>
+                    </a:p>
+                  </a:txBody>
+                  <a:tcPr>
+                    <a:solidFill>
+                      <a:srgbClr val="F6F7F9"/>
+                    </a:solidFill>
+                  </a:tcPr>
+                </a:tc>
+                <a:tc>
+                  <a:txBody>
+                    <a:bodyPr/>
+                    <a:lstStyle/>
+                    <a:p>
+                      <a:pPr algn="r"/>
+                      <a:r>
+                        <a:rPr sz="1150" b="1">
+                          <a:solidFill>
+                            <a:srgbClr val="2C3E50"/>
+                          </a:solidFill>
+                          <a:latin typeface="Arial"/>
+                        </a:rPr>
+                        <a:t>3.5%</a:t>
+                      </a:r>
+                    </a:p>
+                  </a:txBody>
+                  <a:tcPr>
+                    <a:solidFill>
+                      <a:srgbClr val="F6F7F9"/>
+                    </a:solidFill>
+                  </a:tcPr>
+                </a:tc>
+                <a:tc>
+                  <a:txBody>
+                    <a:bodyPr/>
+                    <a:lstStyle/>
+                    <a:p>
+                      <a:pPr algn="r"/>
+                      <a:r>
+                        <a:rPr sz="1150" b="1">
+                          <a:solidFill>
+                            <a:srgbClr val="2C3E50"/>
+                          </a:solidFill>
+                          <a:latin typeface="Arial"/>
+                        </a:rPr>
+                        <a:t>4%</a:t>
+                      </a:r>
+                    </a:p>
+                  </a:txBody>
+                  <a:tcPr>
+                    <a:solidFill>
+                      <a:srgbClr val="F6F7F9"/>
+                    </a:solidFill>
+                  </a:tcPr>
+                </a:tc>
+              </a:tr>
+              <a:tr h="246888">
+                <a:tc>
+                  <a:txBody>
+                    <a:bodyPr/>
+                    <a:lstStyle/>
+                    <a:p>
+                      <a:pPr algn="l"/>
+                      <a:r>
+                        <a:rPr sz="1150" b="0">
+                          <a:solidFill>
+                            <a:srgbClr val="5D6D7E"/>
+                          </a:solidFill>
+                          <a:latin typeface="Arial"/>
+                        </a:rPr>
+                        <a:t>New</a:t>
+                      </a:r>
+                    </a:p>
+                  </a:txBody>
+                  <a:tcPr>
+                    <a:solidFill>
+                      <a:srgbClr val="FFFFFF"/>
+                    </a:solidFill>
+                  </a:tcPr>
+                </a:tc>
+                <a:tc>
+                  <a:txBody>
+                    <a:bodyPr/>
+                    <a:lstStyle/>
+                    <a:p>
+                      <a:pPr algn="r"/>
+                      <a:r>
+                        <a:rPr sz="1150" b="0">
+                          <a:solidFill>
+                            <a:srgbClr val="5D6D7E"/>
+                          </a:solidFill>
+                          <a:latin typeface="Arial"/>
+                        </a:rPr>
+                        <a:t>&gt; 27</a:t>
+                      </a:r>
+                    </a:p>
+                  </a:txBody>
+                  <a:tcPr>
+                    <a:solidFill>
+                      <a:srgbClr val="FFFFFF"/>
+                    </a:solidFill>
+                  </a:tcPr>
+                </a:tc>
+                <a:tc>
+                  <a:txBody>
+                    <a:bodyPr/>
+                    <a:lstStyle/>
+                    <a:p>
+                      <a:pPr algn="r"/>
+                      <a:r>
+                        <a:rPr sz="1150" b="0">
+                          <a:solidFill>
+                            <a:srgbClr val="5D6D7E"/>
+                          </a:solidFill>
+                          <a:latin typeface="Arial"/>
+                        </a:rPr>
+                        <a:t>&gt; 63</a:t>
+                      </a:r>
+                    </a:p>
+                  </a:txBody>
+                  <a:tcPr>
+                    <a:solidFill>
+                      <a:srgbClr val="FFFFFF"/>
+                    </a:solidFill>
+                  </a:tcPr>
+                </a:tc>
+                <a:tc>
+                  <a:txBody>
+                    <a:bodyPr/>
+                    <a:lstStyle/>
+                    <a:p>
+                      <a:pPr algn="r"/>
+                      <a:r>
+                        <a:rPr sz="1150" b="0">
+                          <a:solidFill>
+                            <a:srgbClr val="5D6D7E"/>
+                          </a:solidFill>
+                          <a:latin typeface="Arial"/>
+                        </a:rPr>
+                        <a:t>&gt; 50</a:t>
+                      </a:r>
+                    </a:p>
+                  </a:txBody>
+                  <a:tcPr>
+                    <a:solidFill>
+                      <a:srgbClr val="FFFFFF"/>
+                    </a:solidFill>
+                  </a:tcPr>
+                </a:tc>
+                <a:tc>
+                  <a:txBody>
+                    <a:bodyPr/>
+                    <a:lstStyle/>
+                    <a:p>
+                      <a:pPr algn="r"/>
+                      <a:r>
+                        <a:rPr sz="1150" b="0">
+                          <a:solidFill>
+                            <a:srgbClr val="5D6D7E"/>
+                          </a:solidFill>
+                          <a:latin typeface="Arial"/>
+                        </a:rPr>
+                        <a:t>&gt; 37</a:t>
+                      </a:r>
+                    </a:p>
+                  </a:txBody>
+                  <a:tcPr>
+                    <a:solidFill>
+                      <a:srgbClr val="FFFFFF"/>
+                    </a:solidFill>
+                  </a:tcPr>
+                </a:tc>
+                <a:tc>
+                  <a:txBody>
+                    <a:bodyPr/>
+                    <a:lstStyle/>
+                    <a:p>
+                      <a:pPr algn="r"/>
+                      <a:r>
+                        <a:rPr sz="1150" b="0">
+                          <a:solidFill>
+                            <a:srgbClr val="5D6D7E"/>
+                          </a:solidFill>
+                          <a:latin typeface="Arial"/>
+                        </a:rPr>
+                        <a:t>&gt; 27</a:t>
+                      </a:r>
+                    </a:p>
+                  </a:txBody>
+                  <a:tcPr>
+                    <a:solidFill>
+                      <a:srgbClr val="FFFFFF"/>
+                    </a:solidFill>
+                  </a:tcPr>
+                </a:tc>
+              </a:tr>
+              <a:tr h="246888">
+                <a:tc>
+                  <a:txBody>
+                    <a:bodyPr/>
+                    <a:lstStyle/>
+                    <a:p>
+                      <a:pPr algn="l"/>
+                      <a:r>
+                        <a:rPr sz="1150" b="0">
+                          <a:solidFill>
+                            <a:srgbClr val="5D6D7E"/>
+                          </a:solidFill>
+                          <a:latin typeface="Arial"/>
+                        </a:rPr>
+                        <a:t>Inactive</a:t>
+                      </a:r>
+                    </a:p>
+                  </a:txBody>
+                  <a:tcPr>
+                    <a:solidFill>
+                      <a:srgbClr val="FFFFFF"/>
+                    </a:solidFill>
+                  </a:tcPr>
+                </a:tc>
+                <a:tc>
+                  <a:txBody>
+                    <a:bodyPr/>
+                    <a:lstStyle/>
+                    <a:p>
+                      <a:pPr algn="r"/>
+                      <a:r>
+                        <a:rPr sz="1150" b="0">
+                          <a:solidFill>
+                            <a:srgbClr val="5D6D7E"/>
+                          </a:solidFill>
+                          <a:latin typeface="Arial"/>
+                        </a:rPr>
+                        <a:t>&gt; 22</a:t>
+                      </a:r>
+                    </a:p>
+                  </a:txBody>
+                  <a:tcPr>
+                    <a:solidFill>
+                      <a:srgbClr val="FFFFFF"/>
+                    </a:solidFill>
+                  </a:tcPr>
+                </a:tc>
+                <a:tc>
+                  <a:txBody>
+                    <a:bodyPr/>
+                    <a:lstStyle/>
+                    <a:p>
+                      <a:pPr algn="r"/>
+                      <a:r>
+                        <a:rPr sz="1150" b="0">
+                          <a:solidFill>
+                            <a:srgbClr val="5D6D7E"/>
+                          </a:solidFill>
+                          <a:latin typeface="Arial"/>
+                        </a:rPr>
+                        <a:t>&gt; 58</a:t>
+                      </a:r>
+                    </a:p>
+                  </a:txBody>
+                  <a:tcPr>
+                    <a:solidFill>
+                      <a:srgbClr val="FFFFFF"/>
+                    </a:solidFill>
+                  </a:tcPr>
+                </a:tc>
+                <a:tc>
+                  <a:txBody>
+                    <a:bodyPr/>
+                    <a:lstStyle/>
+                    <a:p>
+                      <a:pPr algn="r"/>
+                      <a:r>
+                        <a:rPr sz="1150" b="0">
+                          <a:solidFill>
+                            <a:srgbClr val="5D6D7E"/>
+                          </a:solidFill>
+                          <a:latin typeface="Arial"/>
+                        </a:rPr>
+                        <a:t>&gt; 45</a:t>
+                      </a:r>
+                    </a:p>
+                  </a:txBody>
+                  <a:tcPr>
+                    <a:solidFill>
+                      <a:srgbClr val="FFFFFF"/>
+                    </a:solidFill>
+                  </a:tcPr>
+                </a:tc>
+                <a:tc>
+                  <a:txBody>
+                    <a:bodyPr/>
+                    <a:lstStyle/>
+                    <a:p>
+                      <a:pPr algn="r"/>
+                      <a:r>
+                        <a:rPr sz="1150" b="0">
+                          <a:solidFill>
+                            <a:srgbClr val="5D6D7E"/>
+                          </a:solidFill>
+                          <a:latin typeface="Arial"/>
+                        </a:rPr>
+                        <a:t>&gt; 32</a:t>
+                      </a:r>
+                    </a:p>
+                  </a:txBody>
+                  <a:tcPr>
+                    <a:solidFill>
+                      <a:srgbClr val="FFFFFF"/>
+                    </a:solidFill>
+                  </a:tcPr>
+                </a:tc>
+                <a:tc>
+                  <a:txBody>
+                    <a:bodyPr/>
+                    <a:lstStyle/>
+                    <a:p>
+                      <a:pPr algn="r"/>
+                      <a:r>
+                        <a:rPr sz="1150" b="0">
+                          <a:solidFill>
+                            <a:srgbClr val="5D6D7E"/>
+                          </a:solidFill>
+                          <a:latin typeface="Arial"/>
+                        </a:rPr>
+                        <a:t>&gt; 22</a:t>
+                      </a:r>
+                    </a:p>
+                  </a:txBody>
+                  <a:tcPr>
+                    <a:solidFill>
+                      <a:srgbClr val="FFFFFF"/>
+                    </a:solidFill>
+                  </a:tcPr>
+                </a:tc>
+              </a:tr>
+              <a:tr h="246888">
+                <a:tc>
+                  <a:txBody>
+                    <a:bodyPr/>
+                    <a:lstStyle/>
+                    <a:p>
+                      <a:pPr algn="l"/>
+                      <a:r>
+                        <a:rPr sz="1150" b="0">
+                          <a:solidFill>
+                            <a:srgbClr val="5D6D7E"/>
+                          </a:solidFill>
+                          <a:latin typeface="Arial"/>
+                        </a:rPr>
+                        <a:t>A-C</a:t>
+                      </a:r>
+                    </a:p>
+                  </a:txBody>
+                  <a:tcPr>
+                    <a:solidFill>
+                      <a:srgbClr val="FFFFFF"/>
+                    </a:solidFill>
+                  </a:tcPr>
+                </a:tc>
+                <a:tc>
+                  <a:txBody>
+                    <a:bodyPr/>
+                    <a:lstStyle/>
+                    <a:p>
+                      <a:pPr algn="r"/>
+                      <a:r>
+                        <a:rPr sz="1150" b="0">
+                          <a:solidFill>
+                            <a:srgbClr val="5D6D7E"/>
+                          </a:solidFill>
+                          <a:latin typeface="Arial"/>
+                        </a:rPr>
+                        <a:t>&gt; 16</a:t>
+                      </a:r>
+                    </a:p>
+                  </a:txBody>
+                  <a:tcPr>
+                    <a:solidFill>
+                      <a:srgbClr val="FFFFFF"/>
+                    </a:solidFill>
+                  </a:tcPr>
+                </a:tc>
+                <a:tc>
+                  <a:txBody>
+                    <a:bodyPr/>
+                    <a:lstStyle/>
+                    <a:p>
+                      <a:pPr algn="r"/>
+                      <a:r>
+                        <a:rPr sz="1150" b="0">
+                          <a:solidFill>
+                            <a:srgbClr val="5D6D7E"/>
+                          </a:solidFill>
+                          <a:latin typeface="Arial"/>
+                        </a:rPr>
+                        <a:t>&gt; 52</a:t>
+                      </a:r>
+                    </a:p>
+                  </a:txBody>
+                  <a:tcPr>
+                    <a:solidFill>
+                      <a:srgbClr val="FFFFFF"/>
+                    </a:solidFill>
+                  </a:tcPr>
+                </a:tc>
+                <a:tc>
+                  <a:txBody>
+                    <a:bodyPr/>
+                    <a:lstStyle/>
+                    <a:p>
+                      <a:pPr algn="r"/>
+                      <a:r>
+                        <a:rPr sz="1150" b="0">
+                          <a:solidFill>
+                            <a:srgbClr val="5D6D7E"/>
+                          </a:solidFill>
+                          <a:latin typeface="Arial"/>
+                        </a:rPr>
+                        <a:t>&gt; 39</a:t>
+                      </a:r>
+                    </a:p>
+                  </a:txBody>
+                  <a:tcPr>
+                    <a:solidFill>
+                      <a:srgbClr val="FFFFFF"/>
+                    </a:solidFill>
+                  </a:tcPr>
+                </a:tc>
+                <a:tc>
+                  <a:txBody>
+                    <a:bodyPr/>
+                    <a:lstStyle/>
+                    <a:p>
+                      <a:pPr algn="r"/>
+                      <a:r>
+                        <a:rPr sz="1150" b="0">
+                          <a:solidFill>
+                            <a:srgbClr val="5D6D7E"/>
+                          </a:solidFill>
+                          <a:latin typeface="Arial"/>
+                        </a:rPr>
+                        <a:t>&gt; 26</a:t>
+                      </a:r>
+                    </a:p>
+                  </a:txBody>
+                  <a:tcPr>
+                    <a:solidFill>
+                      <a:srgbClr val="FFFFFF"/>
+                    </a:solidFill>
+                  </a:tcPr>
+                </a:tc>
+                <a:tc>
+                  <a:txBody>
+                    <a:bodyPr/>
+                    <a:lstStyle/>
+                    <a:p>
+                      <a:pPr algn="r"/>
+                      <a:r>
+                        <a:rPr sz="1150" b="0">
+                          <a:solidFill>
+                            <a:srgbClr val="5D6D7E"/>
+                          </a:solidFill>
+                          <a:latin typeface="Arial"/>
+                        </a:rPr>
+                        <a:t>&gt; 16</a:t>
+                      </a:r>
+                    </a:p>
+                  </a:txBody>
+                  <a:tcPr>
+                    <a:solidFill>
+                      <a:srgbClr val="FFFFFF"/>
+                    </a:solidFill>
+                  </a:tcPr>
+                </a:tc>
+              </a:tr>
+              <a:tr h="246888">
+                <a:tc>
+                  <a:txBody>
+                    <a:bodyPr/>
+                    <a:lstStyle/>
+                    <a:p>
+                      <a:pPr algn="l"/>
+                      <a:r>
+                        <a:rPr sz="1150" b="0">
+                          <a:solidFill>
+                            <a:srgbClr val="5D6D7E"/>
+                          </a:solidFill>
+                          <a:latin typeface="Arial"/>
+                        </a:rPr>
+                        <a:t>D-F</a:t>
+                      </a:r>
+                    </a:p>
+                  </a:txBody>
+                  <a:tcPr>
+                    <a:solidFill>
+                      <a:srgbClr val="FFFFFF"/>
+                    </a:solidFill>
+                  </a:tcPr>
+                </a:tc>
+                <a:tc>
+                  <a:txBody>
+                    <a:bodyPr/>
+                    <a:lstStyle/>
+                    <a:p>
+                      <a:pPr algn="r"/>
+                      <a:r>
+                        <a:rPr sz="1150" b="0">
+                          <a:solidFill>
+                            <a:srgbClr val="5D6D7E"/>
+                          </a:solidFill>
+                          <a:latin typeface="Arial"/>
+                        </a:rPr>
+                        <a:t>&gt; 22</a:t>
+                      </a:r>
+                    </a:p>
+                  </a:txBody>
+                  <a:tcPr>
+                    <a:solidFill>
+                      <a:srgbClr val="FFFFFF"/>
+                    </a:solidFill>
+                  </a:tcPr>
+                </a:tc>
+                <a:tc>
+                  <a:txBody>
+                    <a:bodyPr/>
+                    <a:lstStyle/>
+                    <a:p>
+                      <a:pPr algn="r"/>
+                      <a:r>
+                        <a:rPr sz="1150" b="0">
+                          <a:solidFill>
+                            <a:srgbClr val="5D6D7E"/>
+                          </a:solidFill>
+                          <a:latin typeface="Arial"/>
+                        </a:rPr>
+                        <a:t>&gt; 58</a:t>
+                      </a:r>
+                    </a:p>
+                  </a:txBody>
+                  <a:tcPr>
+                    <a:solidFill>
+                      <a:srgbClr val="FFFFFF"/>
+                    </a:solidFill>
+                  </a:tcPr>
+                </a:tc>
+                <a:tc>
+                  <a:txBody>
+                    <a:bodyPr/>
+                    <a:lstStyle/>
+                    <a:p>
+                      <a:pPr algn="r"/>
+                      <a:r>
+                        <a:rPr sz="1150" b="0">
+                          <a:solidFill>
+                            <a:srgbClr val="5D6D7E"/>
+                          </a:solidFill>
+                          <a:latin typeface="Arial"/>
+                        </a:rPr>
+                        <a:t>&gt; 45</a:t>
+                      </a:r>
+                    </a:p>
+                  </a:txBody>
+                  <a:tcPr>
+                    <a:solidFill>
+                      <a:srgbClr val="FFFFFF"/>
+                    </a:solidFill>
+                  </a:tcPr>
+                </a:tc>
+                <a:tc>
+                  <a:txBody>
+                    <a:bodyPr/>
+                    <a:lstStyle/>
+                    <a:p>
+                      <a:pPr algn="r"/>
+                      <a:r>
+                        <a:rPr sz="1150" b="0">
+                          <a:solidFill>
+                            <a:srgbClr val="5D6D7E"/>
+                          </a:solidFill>
+                          <a:latin typeface="Arial"/>
+                        </a:rPr>
+                        <a:t>&gt; 32</a:t>
+                      </a:r>
+                    </a:p>
+                  </a:txBody>
+                  <a:tcPr>
+                    <a:solidFill>
+                      <a:srgbClr val="FFFFFF"/>
+                    </a:solidFill>
+                  </a:tcPr>
+                </a:tc>
+                <a:tc>
+                  <a:txBody>
+                    <a:bodyPr/>
+                    <a:lstStyle/>
+                    <a:p>
+                      <a:pPr algn="r"/>
+                      <a:r>
+                        <a:rPr sz="1150" b="0">
+                          <a:solidFill>
+                            <a:srgbClr val="5D6D7E"/>
+                          </a:solidFill>
+                          <a:latin typeface="Arial"/>
+                        </a:rPr>
+                        <a:t>&gt; 22</a:t>
+                      </a:r>
+                    </a:p>
+                  </a:txBody>
+                  <a:tcPr>
+                    <a:solidFill>
+                      <a:srgbClr val="FFFFFF"/>
+                    </a:solidFill>
+                  </a:tcPr>
+                </a:tc>
+              </a:tr>
+              <a:tr h="246888">
+                <a:tc>
+                  <a:txBody>
+                    <a:bodyPr/>
+                    <a:lstStyle/>
+                    <a:p>
+                      <a:pPr algn="l"/>
+                      <a:r>
+                        <a:rPr sz="1150" b="0">
+                          <a:solidFill>
+                            <a:srgbClr val="5D6D7E"/>
+                          </a:solidFill>
+                          <a:latin typeface="Arial"/>
+                        </a:rPr>
+                        <a:t>&gt;=G</a:t>
+                      </a:r>
+                    </a:p>
+                  </a:txBody>
+                  <a:tcPr>
+                    <a:solidFill>
+                      <a:srgbClr val="FFFFFF"/>
+                    </a:solidFill>
+                  </a:tcPr>
+                </a:tc>
+                <a:tc>
+                  <a:txBody>
+                    <a:bodyPr/>
+                    <a:lstStyle/>
+                    <a:p>
+                      <a:pPr algn="r"/>
+                      <a:r>
+                        <a:rPr sz="1150" b="0">
+                          <a:solidFill>
+                            <a:srgbClr val="5D6D7E"/>
+                          </a:solidFill>
+                          <a:latin typeface="Arial"/>
+                        </a:rPr>
+                        <a:t>reject</a:t>
+                      </a:r>
+                    </a:p>
+                  </a:txBody>
+                  <a:tcPr>
+                    <a:solidFill>
+                      <a:srgbClr val="FFFFFF"/>
+                    </a:solidFill>
+                  </a:tcPr>
+                </a:tc>
+                <a:tc>
+                  <a:txBody>
+                    <a:bodyPr/>
+                    <a:lstStyle/>
+                    <a:p>
+                      <a:pPr algn="r"/>
+                      <a:r>
+                        <a:rPr sz="1150" b="0">
+                          <a:solidFill>
+                            <a:srgbClr val="5D6D7E"/>
+                          </a:solidFill>
+                          <a:latin typeface="Arial"/>
+                        </a:rPr>
+                        <a:t>reject</a:t>
+                      </a:r>
+                    </a:p>
+                  </a:txBody>
+                  <a:tcPr>
+                    <a:solidFill>
+                      <a:srgbClr val="FFFFFF"/>
+                    </a:solidFill>
+                  </a:tcPr>
+                </a:tc>
+                <a:tc>
+                  <a:txBody>
+                    <a:bodyPr/>
+                    <a:lstStyle/>
+                    <a:p>
+                      <a:pPr algn="r"/>
+                      <a:r>
+                        <a:rPr sz="1150" b="0">
+                          <a:solidFill>
+                            <a:srgbClr val="5D6D7E"/>
+                          </a:solidFill>
+                          <a:latin typeface="Arial"/>
+                        </a:rPr>
+                        <a:t>reject</a:t>
+                      </a:r>
+                    </a:p>
+                  </a:txBody>
+                  <a:tcPr>
+                    <a:solidFill>
+                      <a:srgbClr val="FFFFFF"/>
+                    </a:solidFill>
+                  </a:tcPr>
+                </a:tc>
+                <a:tc>
+                  <a:txBody>
+                    <a:bodyPr/>
+                    <a:lstStyle/>
+                    <a:p>
+                      <a:pPr algn="r"/>
+                      <a:r>
+                        <a:rPr sz="1150" b="0">
+                          <a:solidFill>
+                            <a:srgbClr val="5D6D7E"/>
+                          </a:solidFill>
+                          <a:latin typeface="Arial"/>
+                        </a:rPr>
+                        <a:t>reject</a:t>
+                      </a:r>
+                    </a:p>
+                  </a:txBody>
+                  <a:tcPr>
+                    <a:solidFill>
+                      <a:srgbClr val="FFFFFF"/>
+                    </a:solidFill>
+                  </a:tcPr>
+                </a:tc>
+                <a:tc>
+                  <a:txBody>
+                    <a:bodyPr/>
+                    <a:lstStyle/>
+                    <a:p>
+                      <a:pPr algn="r"/>
+                      <a:r>
+                        <a:rPr sz="1150" b="0">
+                          <a:solidFill>
+                            <a:srgbClr val="5D6D7E"/>
+                          </a:solidFill>
+                          <a:latin typeface="Arial"/>
+                        </a:rPr>
+                        <a:t>reject</a:t>
+                      </a:r>
+                    </a:p>
+                  </a:txBody>
+                  <a:tcPr>
+                    <a:solidFill>
+                      <a:srgbClr val="FFFFFF"/>
+                    </a:solidFill>
+                  </a:tcPr>
+                </a:tc>
+              </a:tr>
+            </a:tbl>
+          </a:graphicData>
+        </a:graphic>
+      </p:graphicFrame>
+      <p:sp>
+        <p:nvSpPr>
+          <p:cNvPr id="11" name="TextBox 10"/>
+          <p:cNvSpPr txBox="1"/>
+          <p:nvPr/>
+        </p:nvSpPr>
+        <p:spPr>
+          <a:xfrm>
+            <a:off x="566928" y="6144768"/>
+            <a:ext cx="11057839" cy="640080"/>
+          </a:xfrm>
+          <a:prstGeom prst="rect">
+            <a:avLst/>
+          </a:prstGeom>
+          <a:noFill/>
+        </p:spPr>
+        <p:txBody>
+          <a:bodyPr wrap="square">
+            <a:spAutoFit/>
+          </a:bodyPr>
+          <a:lstStyle/>
+          <a:p>
+            <a:pPr algn="l">
+              <a:lnSpc>
+                <a:spcPct val="120000"/>
               </a:lnSpc>
             </a:pPr>
             <a:r>
@@ -15211,685 +19084,7 @@
                 </a:solidFill>
                 <a:latin typeface="Arial"/>
               </a:rPr>
-              <a:t>For each of the 20 EFX bins, the observed delinquency of contracts with 6 months on book. The only part of the study that comes straight from the data.</a:t>
-            </a:r>
-          </a:p>
-        </p:txBody>
-      </p:sp>
-      <p:sp>
-        <p:nvSpPr>
-          <p:cNvPr id="10" name="TextBox 9"/>
-          <p:cNvSpPr txBox="1"/>
-          <p:nvPr/>
-        </p:nvSpPr>
-        <p:spPr>
-          <a:xfrm>
-            <a:off x="10161727" y="1581912"/>
-            <a:ext cx="1463040" cy="274320"/>
-          </a:xfrm>
-          <a:prstGeom prst="rect">
-            <a:avLst/>
-          </a:prstGeom>
-          <a:noFill/>
-        </p:spPr>
-        <p:txBody>
-          <a:bodyPr wrap="square">
-            <a:spAutoFit/>
-          </a:bodyPr>
-          <a:lstStyle/>
-          <a:p>
-            <a:pPr algn="r">
-              <a:lnSpc>
-                <a:spcPct val="100000"/>
-              </a:lnSpc>
-            </a:pPr>
-            <a:r>
-              <a:rPr sz="1000" b="1">
-                <a:solidFill>
-                  <a:srgbClr val="3498DB"/>
-                </a:solidFill>
-                <a:latin typeface="Arial"/>
-              </a:rPr>
-              <a:t>MEASURED</a:t>
-            </a:r>
-          </a:p>
-        </p:txBody>
-      </p:sp>
-      <p:sp>
-        <p:nvSpPr>
-          <p:cNvPr id="11" name="Rectangle 10"/>
-          <p:cNvSpPr/>
-          <p:nvPr/>
-        </p:nvSpPr>
-        <p:spPr>
-          <a:xfrm>
-            <a:off x="566928" y="2496312"/>
-            <a:ext cx="420624" cy="420624"/>
-          </a:xfrm>
-          <a:prstGeom prst="rect">
-            <a:avLst/>
-          </a:prstGeom>
-          <a:solidFill>
-            <a:srgbClr val="2C3E50"/>
-          </a:solidFill>
-          <a:ln>
-            <a:noFill/>
-          </a:ln>
-          <a:effectLst/>
-        </p:spPr>
-        <p:style>
-          <a:lnRef idx="1">
-            <a:schemeClr val="accent1"/>
-          </a:lnRef>
-          <a:fillRef idx="3">
-            <a:schemeClr val="accent1"/>
-          </a:fillRef>
-          <a:effectRef idx="2">
-            <a:schemeClr val="accent1"/>
-          </a:effectRef>
-          <a:fontRef idx="minor">
-            <a:schemeClr val="lt1"/>
-          </a:fontRef>
-        </p:style>
-        <p:txBody>
-          <a:bodyPr rtlCol="0" anchor="ctr"/>
-          <a:lstStyle/>
-          <a:p>
-            <a:pPr algn="ctr"/>
-          </a:p>
-        </p:txBody>
-      </p:sp>
-      <p:sp>
-        <p:nvSpPr>
-          <p:cNvPr id="12" name="TextBox 11"/>
-          <p:cNvSpPr txBox="1"/>
-          <p:nvPr/>
-        </p:nvSpPr>
-        <p:spPr>
-          <a:xfrm>
-            <a:off x="566928" y="2551176"/>
-            <a:ext cx="420624" cy="310896"/>
-          </a:xfrm>
-          <a:prstGeom prst="rect">
-            <a:avLst/>
-          </a:prstGeom>
-          <a:noFill/>
-        </p:spPr>
-        <p:txBody>
-          <a:bodyPr wrap="square">
-            <a:spAutoFit/>
-          </a:bodyPr>
-          <a:lstStyle/>
-          <a:p>
-            <a:pPr algn="ctr">
-              <a:lnSpc>
-                <a:spcPct val="100000"/>
-              </a:lnSpc>
-            </a:pPr>
-            <a:r>
-              <a:rPr sz="1400" b="1">
-                <a:solidFill>
-                  <a:srgbClr val="FFFFFF"/>
-                </a:solidFill>
-                <a:latin typeface="Arial"/>
-              </a:rPr>
-              <a:t>2</a:t>
-            </a:r>
-          </a:p>
-        </p:txBody>
-      </p:sp>
-      <p:sp>
-        <p:nvSpPr>
-          <p:cNvPr id="13" name="TextBox 12"/>
-          <p:cNvSpPr txBox="1"/>
-          <p:nvPr/>
-        </p:nvSpPr>
-        <p:spPr>
-          <a:xfrm>
-            <a:off x="1188720" y="2496312"/>
-            <a:ext cx="8863279" cy="274320"/>
-          </a:xfrm>
-          <a:prstGeom prst="rect">
-            <a:avLst/>
-          </a:prstGeom>
-          <a:noFill/>
-        </p:spPr>
-        <p:txBody>
-          <a:bodyPr wrap="square">
-            <a:spAutoFit/>
-          </a:bodyPr>
-          <a:lstStyle/>
-          <a:p>
-            <a:pPr algn="l">
-              <a:lnSpc>
-                <a:spcPct val="100000"/>
-              </a:lnSpc>
-            </a:pPr>
-            <a:r>
-              <a:rPr sz="1300" b="1">
-                <a:solidFill>
-                  <a:srgbClr val="2C3E50"/>
-                </a:solidFill>
-                <a:latin typeface="Arial"/>
-              </a:rPr>
-              <a:t>Selection correction (reject inference)</a:t>
-            </a:r>
-          </a:p>
-        </p:txBody>
-      </p:sp>
-      <p:sp>
-        <p:nvSpPr>
-          <p:cNvPr id="14" name="TextBox 13"/>
-          <p:cNvSpPr txBox="1"/>
-          <p:nvPr/>
-        </p:nvSpPr>
-        <p:spPr>
-          <a:xfrm>
-            <a:off x="1188720" y="2770632"/>
-            <a:ext cx="8863279" cy="603504"/>
-          </a:xfrm>
-          <a:prstGeom prst="rect">
-            <a:avLst/>
-          </a:prstGeom>
-          <a:noFill/>
-        </p:spPr>
-        <p:txBody>
-          <a:bodyPr wrap="square">
-            <a:spAutoFit/>
-          </a:bodyPr>
-          <a:lstStyle/>
-          <a:p>
-            <a:pPr algn="l">
-              <a:lnSpc>
-                <a:spcPct val="118000"/>
-              </a:lnSpc>
-            </a:pPr>
-            <a:r>
-              <a:rPr sz="1100" b="0">
-                <a:solidFill>
-                  <a:srgbClr val="5D6D7E"/>
-                </a:solidFill>
-                <a:latin typeface="Arial"/>
-              </a:rPr>
-              <a:t>Booked contracts in a bin also passed every other rule: they are a selected sample and their delinquency understates that of applicants rejected today. The pipeline's parceling is applied, with an uplift driven by the acceptance rate: 2.5x where only 3% get in, 1.0x where 100% do.</a:t>
-            </a:r>
-          </a:p>
-        </p:txBody>
-      </p:sp>
-      <p:sp>
-        <p:nvSpPr>
-          <p:cNvPr id="15" name="TextBox 14"/>
-          <p:cNvSpPr txBox="1"/>
-          <p:nvPr/>
-        </p:nvSpPr>
-        <p:spPr>
-          <a:xfrm>
-            <a:off x="10161727" y="2514600"/>
-            <a:ext cx="1463040" cy="274320"/>
-          </a:xfrm>
-          <a:prstGeom prst="rect">
-            <a:avLst/>
-          </a:prstGeom>
-          <a:noFill/>
-        </p:spPr>
-        <p:txBody>
-          <a:bodyPr wrap="square">
-            <a:spAutoFit/>
-          </a:bodyPr>
-          <a:lstStyle/>
-          <a:p>
-            <a:pPr algn="r">
-              <a:lnSpc>
-                <a:spcPct val="100000"/>
-              </a:lnSpc>
-            </a:pPr>
-            <a:r>
-              <a:rPr sz="1000" b="1">
-                <a:solidFill>
-                  <a:srgbClr val="5D6D7E"/>
-                </a:solidFill>
-                <a:latin typeface="Arial"/>
-              </a:rPr>
-              <a:t>CORRECTED</a:t>
-            </a:r>
-          </a:p>
-        </p:txBody>
-      </p:sp>
-      <p:sp>
-        <p:nvSpPr>
-          <p:cNvPr id="16" name="Rectangle 15"/>
-          <p:cNvSpPr/>
-          <p:nvPr/>
-        </p:nvSpPr>
-        <p:spPr>
-          <a:xfrm>
-            <a:off x="566928" y="3429000"/>
-            <a:ext cx="420624" cy="420624"/>
-          </a:xfrm>
-          <a:prstGeom prst="rect">
-            <a:avLst/>
-          </a:prstGeom>
-          <a:solidFill>
-            <a:srgbClr val="2C3E50"/>
-          </a:solidFill>
-          <a:ln>
-            <a:noFill/>
-          </a:ln>
-          <a:effectLst/>
-        </p:spPr>
-        <p:style>
-          <a:lnRef idx="1">
-            <a:schemeClr val="accent1"/>
-          </a:lnRef>
-          <a:fillRef idx="3">
-            <a:schemeClr val="accent1"/>
-          </a:fillRef>
-          <a:effectRef idx="2">
-            <a:schemeClr val="accent1"/>
-          </a:effectRef>
-          <a:fontRef idx="minor">
-            <a:schemeClr val="lt1"/>
-          </a:fontRef>
-        </p:style>
-        <p:txBody>
-          <a:bodyPr rtlCol="0" anchor="ctr"/>
-          <a:lstStyle/>
-          <a:p>
-            <a:pPr algn="ctr"/>
-          </a:p>
-        </p:txBody>
-      </p:sp>
-      <p:sp>
-        <p:nvSpPr>
-          <p:cNvPr id="17" name="TextBox 16"/>
-          <p:cNvSpPr txBox="1"/>
-          <p:nvPr/>
-        </p:nvSpPr>
-        <p:spPr>
-          <a:xfrm>
-            <a:off x="566928" y="3483864"/>
-            <a:ext cx="420624" cy="310896"/>
-          </a:xfrm>
-          <a:prstGeom prst="rect">
-            <a:avLst/>
-          </a:prstGeom>
-          <a:noFill/>
-        </p:spPr>
-        <p:txBody>
-          <a:bodyPr wrap="square">
-            <a:spAutoFit/>
-          </a:bodyPr>
-          <a:lstStyle/>
-          <a:p>
-            <a:pPr algn="ctr">
-              <a:lnSpc>
-                <a:spcPct val="100000"/>
-              </a:lnSpc>
-            </a:pPr>
-            <a:r>
-              <a:rPr sz="1400" b="1">
-                <a:solidFill>
-                  <a:srgbClr val="FFFFFF"/>
-                </a:solidFill>
-                <a:latin typeface="Arial"/>
-              </a:rPr>
-              <a:t>3</a:t>
-            </a:r>
-          </a:p>
-        </p:txBody>
-      </p:sp>
-      <p:sp>
-        <p:nvSpPr>
-          <p:cNvPr id="18" name="TextBox 17"/>
-          <p:cNvSpPr txBox="1"/>
-          <p:nvPr/>
-        </p:nvSpPr>
-        <p:spPr>
-          <a:xfrm>
-            <a:off x="1188720" y="3429000"/>
-            <a:ext cx="8863279" cy="274320"/>
-          </a:xfrm>
-          <a:prstGeom prst="rect">
-            <a:avLst/>
-          </a:prstGeom>
-          <a:noFill/>
-        </p:spPr>
-        <p:txBody>
-          <a:bodyPr wrap="square">
-            <a:spAutoFit/>
-          </a:bodyPr>
-          <a:lstStyle/>
-          <a:p>
-            <a:pPr algn="l">
-              <a:lnSpc>
-                <a:spcPct val="100000"/>
-              </a:lnSpc>
-            </a:pPr>
-            <a:r>
-              <a:rPr sz="1300" b="1">
-                <a:solidFill>
-                  <a:srgbClr val="2C3E50"/>
-                </a:solidFill>
-                <a:latin typeface="Arial"/>
-              </a:rPr>
-              <a:t>That curve is carried over to the store population</a:t>
-            </a:r>
-          </a:p>
-        </p:txBody>
-      </p:sp>
-      <p:sp>
-        <p:nvSpPr>
-          <p:cNvPr id="19" name="TextBox 18"/>
-          <p:cNvSpPr txBox="1"/>
-          <p:nvPr/>
-        </p:nvSpPr>
-        <p:spPr>
-          <a:xfrm>
-            <a:off x="1188720" y="3703320"/>
-            <a:ext cx="8863279" cy="603504"/>
-          </a:xfrm>
-          <a:prstGeom prst="rect">
-            <a:avLst/>
-          </a:prstGeom>
-          <a:noFill/>
-        </p:spPr>
-        <p:txBody>
-          <a:bodyPr wrap="square">
-            <a:spAutoFit/>
-          </a:bodyPr>
-          <a:lstStyle/>
-          <a:p>
-            <a:pPr algn="l">
-              <a:lnSpc>
-                <a:spcPct val="118000"/>
-              </a:lnSpc>
-            </a:pPr>
-            <a:r>
-              <a:rPr sz="1100" b="0">
-                <a:solidFill>
-                  <a:srgbClr val="5D6D7E"/>
-                </a:solidFill>
-                <a:latin typeface="Arial"/>
-              </a:rPr>
-              <a:t>Each store application is assigned the risk of the EFX bin it falls in. This is the underlying assumption: that the score ranks store applicants the same way it ranks e-commerce ones.</a:t>
-            </a:r>
-          </a:p>
-        </p:txBody>
-      </p:sp>
-      <p:sp>
-        <p:nvSpPr>
-          <p:cNvPr id="20" name="TextBox 19"/>
-          <p:cNvSpPr txBox="1"/>
-          <p:nvPr/>
-        </p:nvSpPr>
-        <p:spPr>
-          <a:xfrm>
-            <a:off x="10161727" y="3447288"/>
-            <a:ext cx="1463040" cy="274320"/>
-          </a:xfrm>
-          <a:prstGeom prst="rect">
-            <a:avLst/>
-          </a:prstGeom>
-          <a:noFill/>
-        </p:spPr>
-        <p:txBody>
-          <a:bodyPr wrap="square">
-            <a:spAutoFit/>
-          </a:bodyPr>
-          <a:lstStyle/>
-          <a:p>
-            <a:pPr algn="r">
-              <a:lnSpc>
-                <a:spcPct val="100000"/>
-              </a:lnSpc>
-            </a:pPr>
-            <a:r>
-              <a:rPr sz="1000" b="1">
-                <a:solidFill>
-                  <a:srgbClr val="E74C3C"/>
-                </a:solidFill>
-                <a:latin typeface="Arial"/>
-              </a:rPr>
-              <a:t>ASSUMED</a:t>
-            </a:r>
-          </a:p>
-        </p:txBody>
-      </p:sp>
-      <p:sp>
-        <p:nvSpPr>
-          <p:cNvPr id="21" name="Rectangle 20"/>
-          <p:cNvSpPr/>
-          <p:nvPr/>
-        </p:nvSpPr>
-        <p:spPr>
-          <a:xfrm>
-            <a:off x="566928" y="4361688"/>
-            <a:ext cx="420624" cy="420624"/>
-          </a:xfrm>
-          <a:prstGeom prst="rect">
-            <a:avLst/>
-          </a:prstGeom>
-          <a:solidFill>
-            <a:srgbClr val="2C3E50"/>
-          </a:solidFill>
-          <a:ln>
-            <a:noFill/>
-          </a:ln>
-          <a:effectLst/>
-        </p:spPr>
-        <p:style>
-          <a:lnRef idx="1">
-            <a:schemeClr val="accent1"/>
-          </a:lnRef>
-          <a:fillRef idx="3">
-            <a:schemeClr val="accent1"/>
-          </a:fillRef>
-          <a:effectRef idx="2">
-            <a:schemeClr val="accent1"/>
-          </a:effectRef>
-          <a:fontRef idx="minor">
-            <a:schemeClr val="lt1"/>
-          </a:fontRef>
-        </p:style>
-        <p:txBody>
-          <a:bodyPr rtlCol="0" anchor="ctr"/>
-          <a:lstStyle/>
-          <a:p>
-            <a:pPr algn="ctr"/>
-          </a:p>
-        </p:txBody>
-      </p:sp>
-      <p:sp>
-        <p:nvSpPr>
-          <p:cNvPr id="22" name="TextBox 21"/>
-          <p:cNvSpPr txBox="1"/>
-          <p:nvPr/>
-        </p:nvSpPr>
-        <p:spPr>
-          <a:xfrm>
-            <a:off x="566928" y="4416552"/>
-            <a:ext cx="420624" cy="310896"/>
-          </a:xfrm>
-          <a:prstGeom prst="rect">
-            <a:avLst/>
-          </a:prstGeom>
-          <a:noFill/>
-        </p:spPr>
-        <p:txBody>
-          <a:bodyPr wrap="square">
-            <a:spAutoFit/>
-          </a:bodyPr>
-          <a:lstStyle/>
-          <a:p>
-            <a:pPr algn="ctr">
-              <a:lnSpc>
-                <a:spcPct val="100000"/>
-              </a:lnSpc>
-            </a:pPr>
-            <a:r>
-              <a:rPr sz="1400" b="1">
-                <a:solidFill>
-                  <a:srgbClr val="FFFFFF"/>
-                </a:solidFill>
-                <a:latin typeface="Arial"/>
-              </a:rPr>
-              <a:t>4</a:t>
-            </a:r>
-          </a:p>
-        </p:txBody>
-      </p:sp>
-      <p:sp>
-        <p:nvSpPr>
-          <p:cNvPr id="23" name="TextBox 22"/>
-          <p:cNvSpPr txBox="1"/>
-          <p:nvPr/>
-        </p:nvSpPr>
-        <p:spPr>
-          <a:xfrm>
-            <a:off x="1188720" y="4361688"/>
-            <a:ext cx="8863279" cy="274320"/>
-          </a:xfrm>
-          <a:prstGeom prst="rect">
-            <a:avLst/>
-          </a:prstGeom>
-          <a:noFill/>
-        </p:spPr>
-        <p:txBody>
-          <a:bodyPr wrap="square">
-            <a:spAutoFit/>
-          </a:bodyPr>
-          <a:lstStyle/>
-          <a:p>
-            <a:pPr algn="l">
-              <a:lnSpc>
-                <a:spcPct val="100000"/>
-              </a:lnSpc>
-            </a:pPr>
-            <a:r>
-              <a:rPr sz="1300" b="1">
-                <a:solidFill>
-                  <a:srgbClr val="2C3E50"/>
-                </a:solidFill>
-                <a:latin typeface="Arial"/>
-              </a:rPr>
-              <a:t>The level is anchored to stores' actual delinquency</a:t>
-            </a:r>
-          </a:p>
-        </p:txBody>
-      </p:sp>
-      <p:sp>
-        <p:nvSpPr>
-          <p:cNvPr id="24" name="TextBox 23"/>
-          <p:cNvSpPr txBox="1"/>
-          <p:nvPr/>
-        </p:nvSpPr>
-        <p:spPr>
-          <a:xfrm>
-            <a:off x="1188720" y="4636008"/>
-            <a:ext cx="8863279" cy="603504"/>
-          </a:xfrm>
-          <a:prstGeom prst="rect">
-            <a:avLst/>
-          </a:prstGeom>
-          <a:noFill/>
-        </p:spPr>
-        <p:txBody>
-          <a:bodyPr wrap="square">
-            <a:spAutoFit/>
-          </a:bodyPr>
-          <a:lstStyle/>
-          <a:p>
-            <a:pPr algn="l">
-              <a:lnSpc>
-                <a:spcPct val="118000"/>
-              </a:lnSpc>
-            </a:pPr>
-            <a:r>
-              <a:rPr sz="1100" b="0">
-                <a:solidFill>
-                  <a:srgbClr val="5D6D7E"/>
-                </a:solidFill>
-                <a:latin typeface="Arial"/>
-              </a:rPr>
-              <a:t>The Online curve predicts 3.92% on the book stores actually wrote; the observed figure is 3.74%. The curve is rescaled by 0.953 to reproduce the data. The level is no longer an assumption: only the ranking power remains assumed.</a:t>
-            </a:r>
-          </a:p>
-        </p:txBody>
-      </p:sp>
-      <p:sp>
-        <p:nvSpPr>
-          <p:cNvPr id="25" name="TextBox 24"/>
-          <p:cNvSpPr txBox="1"/>
-          <p:nvPr/>
-        </p:nvSpPr>
-        <p:spPr>
-          <a:xfrm>
-            <a:off x="10161727" y="4379976"/>
-            <a:ext cx="1463040" cy="274320"/>
-          </a:xfrm>
-          <a:prstGeom prst="rect">
-            <a:avLst/>
-          </a:prstGeom>
-          <a:noFill/>
-        </p:spPr>
-        <p:txBody>
-          <a:bodyPr wrap="square">
-            <a:spAutoFit/>
-          </a:bodyPr>
-          <a:lstStyle/>
-          <a:p>
-            <a:pPr algn="r">
-              <a:lnSpc>
-                <a:spcPct val="100000"/>
-              </a:lnSpc>
-            </a:pPr>
-            <a:r>
-              <a:rPr sz="1000" b="1">
-                <a:solidFill>
-                  <a:srgbClr val="3498DB"/>
-                </a:solidFill>
-                <a:latin typeface="Arial"/>
-              </a:rPr>
-              <a:t>MEASURED</a:t>
-            </a:r>
-          </a:p>
-        </p:txBody>
-      </p:sp>
-      <p:sp>
-        <p:nvSpPr>
-          <p:cNvPr id="26" name="TextBox 25"/>
-          <p:cNvSpPr txBox="1"/>
-          <p:nvPr/>
-        </p:nvSpPr>
-        <p:spPr>
-          <a:xfrm>
-            <a:off x="566928" y="5806440"/>
-            <a:ext cx="11057839" cy="822960"/>
-          </a:xfrm>
-          <a:prstGeom prst="rect">
-            <a:avLst/>
-          </a:prstGeom>
-          <a:noFill/>
-        </p:spPr>
-        <p:txBody>
-          <a:bodyPr wrap="square">
-            <a:spAutoFit/>
-          </a:bodyPr>
-          <a:lstStyle/>
-          <a:p>
-            <a:pPr algn="l">
-              <a:lnSpc>
-                <a:spcPct val="120000"/>
-              </a:lnSpc>
-            </a:pPr>
-            <a:r>
-              <a:rPr sz="1150" b="0">
-                <a:solidFill>
-                  <a:srgbClr val="5D6D7E"/>
-                </a:solidFill>
-                <a:latin typeface="Arial"/>
-              </a:rPr>
-              <a:t>What this means in practice: if EFX ranks store applicants worse than it ranks Online ones, the scenario cutoffs fall short. What can no longer be wrong is the height of the curve, because it is calibrated against the delinquency stores have actually had.</a:t>
+              <a:t>A single cutoff is simpler to operate; shifting the grid keeps its shape —looser where the group is good— and gives slightly more acceptance at the same risk. '&gt;=G' is always rejected in both.</a:t>
             </a:r>
           </a:p>
         </p:txBody>

--- a/output/apple_deck/Apple_EFX_Study.pptx
+++ b/output/apple_deck/Apple_EFX_Study.pptx
@@ -3275,7 +3275,7 @@
                 </a:solidFill>
                 <a:latin typeface="Arial"/>
               </a:rPr>
-              <a:t>Applying the Apple Online grid to Apple Stores raises the booking rate and lowers risk at the same time. Store risk is still an estimate, but its level is now anchored to the delinquency stores have actually had: the only assumption left is that the score ranks the same way, not how much risk there is.</a:t>
+              <a:t>Applying the Apple Online grid to Apple Stores raises system approval and lowers risk at the same time. Store risk is still an estimate, but its level is now anchored to the delinquency stores have actually had: the only assumption left is that the score ranks the same way, not how much risk there is.</a:t>
             </a:r>
           </a:p>
         </p:txBody>
@@ -5270,7 +5270,7 @@
                           </a:solidFill>
                           <a:latin typeface="Arial"/>
                         </a:rPr>
-                        <a:t>€14.6M (55.7%)</a:t>
+                        <a:t>€14.6M</a:t>
                       </a:r>
                     </a:p>
                   </a:txBody>
@@ -5440,7 +5440,7 @@
                           </a:solidFill>
                           <a:latin typeface="Arial"/>
                         </a:rPr>
-                        <a:t>€11.3M (43.0%)</a:t>
+                        <a:t>€11.3M</a:t>
                       </a:r>
                     </a:p>
                   </a:txBody>
@@ -6104,7 +6104,7 @@
                 </a:solidFill>
                 <a:latin typeface="Arial"/>
               </a:rPr>
-              <a:t>Window totals become a run-rate by dividing by effective months: €14.6M over Aug–Sep 2026 ÷ 1.45 = €10.1M/mo — not ÷ 2, because Aug and Sep are weak store months (index 0.76 / 0.69). Risk blends by expected H6 exposure, the base of b2: stores are 31% of demand but 55% of exposure, because they convert 56% of what they are asked for and Online 21%. Online's 4.26% carries the reject-inference uplift on its own book (realized 4.18%).</a:t>
+              <a:t>Window totals become a run-rate by dividing by effective months: €14.6M over Aug–Sep 2026 ÷ 1.45 = €10.1M/mo — not ÷ 2, because Aug and Sep are weak store months (index 0.76 / 0.69). Risk blends by expected H6 exposure, the base of b2: stores are 31% of demand but 55% of exposure, because stores book 80% of what the engine approves and Online 40%. Online's 4.26% carries the reject-inference uplift on its own book (realized 4.18%).</a:t>
             </a:r>
           </a:p>
         </p:txBody>
@@ -7754,7 +7754,7 @@
                 </a:solidFill>
                 <a:latin typeface="Arial"/>
               </a:rPr>
-              <a:t>'New' is 78% of store demand and where risk falls. Take-up is measured by segment and by engine decision (approved / referred). '&gt;=G' is absent: it is always rejected, so it has neither acceptance nor risk.</a:t>
+              <a:t>'New' is 78% of store demand and where risk falls. '&gt;=G' is absent: it is always rejected, so it has neither approval nor risk.</a:t>
             </a:r>
           </a:p>
         </p:txBody>
@@ -8887,7 +8887,7 @@
                 </a:solidFill>
                 <a:latin typeface="Arial"/>
               </a:rPr>
-              <a:t>Online booking rate</a:t>
+              <a:t>Online system approval</a:t>
             </a:r>
           </a:p>
         </p:txBody>
@@ -8926,7 +8926,7 @@
                 </a:solidFill>
                 <a:latin typeface="Arial"/>
               </a:rPr>
-              <a:t>20.9%</a:t>
+              <a:t>51.9%</a:t>
             </a:r>
           </a:p>
         </p:txBody>
@@ -8965,7 +8965,7 @@
                 </a:solidFill>
                 <a:latin typeface="Arial"/>
               </a:rPr>
-              <a:t>booked / € demand</a:t>
+              <a:t>(OK + RV) / € demand</a:t>
             </a:r>
           </a:p>
         </p:txBody>
@@ -9089,7 +9089,7 @@
                 </a:solidFill>
                 <a:latin typeface="Arial"/>
               </a:rPr>
-              <a:t>55.7%</a:t>
+              <a:t>69.2%</a:t>
             </a:r>
           </a:p>
         </p:txBody>
@@ -9128,7 +9128,7 @@
                 </a:solidFill>
                 <a:latin typeface="Arial"/>
               </a:rPr>
-              <a:t>booking rate, from 43.0% today</a:t>
+              <a:t>system approval, from 53.5% today</a:t>
             </a:r>
           </a:p>
         </p:txBody>
@@ -9345,7 +9345,7 @@
         </p:nvGraphicFramePr>
         <p:xfrm>
           <a:off x="566928" y="3758184"/>
-          <a:ext cx="5623556" cy="1920240"/>
+          <a:ext cx="5623557" cy="1920240"/>
         </p:xfrm>
         <a:graphic>
           <a:graphicData uri="http://schemas.openxmlformats.org/drawingml/2006/table">
@@ -9354,11 +9354,10 @@
                 <a:tableStyleId>{5C22544A-7EE6-4342-B048-85BDC9FD1C3A}</a:tableStyleId>
               </a:tblPr>
               <a:tblGrid>
-                <a:gridCol w="1956020"/>
-                <a:gridCol w="1026910"/>
-                <a:gridCol w="831308"/>
-                <a:gridCol w="831308"/>
-                <a:gridCol w="978010"/>
+                <a:gridCol w="2183906"/>
+                <a:gridCol w="1201148"/>
+                <a:gridCol w="1037355"/>
+                <a:gridCol w="1201148"/>
               </a:tblGrid>
               <a:tr h="274320">
                 <a:tc>
@@ -9443,29 +9442,6 @@
                           </a:solidFill>
                           <a:latin typeface="Arial"/>
                         </a:rPr>
-                        <a:t>Booking</a:t>
-                      </a:r>
-                    </a:p>
-                  </a:txBody>
-                  <a:tcPr>
-                    <a:solidFill>
-                      <a:srgbClr val="F6F7F9"/>
-                    </a:solidFill>
-                  </a:tcPr>
-                </a:tc>
-                <a:tc>
-                  <a:txBody>
-                    <a:bodyPr/>
-                    <a:lstStyle/>
-                    <a:p>
-                      <a:pPr algn="r"/>
-                      <a:r>
-                        <a:rPr sz="1150" b="1">
-                          <a:solidFill>
-                            <a:srgbClr val="2C3E50"/>
-                          </a:solidFill>
-                          <a:latin typeface="Arial"/>
-                        </a:rPr>
                         <a:t>Production</a:t>
                       </a:r>
                     </a:p>
@@ -9560,29 +9536,6 @@
                           </a:solidFill>
                           <a:latin typeface="Arial"/>
                         </a:rPr>
-                        <a:t>29.0%</a:t>
-                      </a:r>
-                    </a:p>
-                  </a:txBody>
-                  <a:tcPr>
-                    <a:solidFill>
-                      <a:srgbClr val="FFFFFF"/>
-                    </a:solidFill>
-                  </a:tcPr>
-                </a:tc>
-                <a:tc>
-                  <a:txBody>
-                    <a:bodyPr/>
-                    <a:lstStyle/>
-                    <a:p>
-                      <a:pPr algn="r"/>
-                      <a:r>
-                        <a:rPr sz="1150" b="0">
-                          <a:solidFill>
-                            <a:srgbClr val="5D6D7E"/>
-                          </a:solidFill>
-                          <a:latin typeface="Arial"/>
-                        </a:rPr>
                         <a:t>€15.3M/mo</a:t>
                       </a:r>
                     </a:p>
@@ -9677,29 +9630,6 @@
                           </a:solidFill>
                           <a:latin typeface="Arial"/>
                         </a:rPr>
-                        <a:t>31.7%</a:t>
-                      </a:r>
-                    </a:p>
-                  </a:txBody>
-                  <a:tcPr>
-                    <a:solidFill>
-                      <a:srgbClr val="FFFFFF"/>
-                    </a:solidFill>
-                  </a:tcPr>
-                </a:tc>
-                <a:tc>
-                  <a:txBody>
-                    <a:bodyPr/>
-                    <a:lstStyle/>
-                    <a:p>
-                      <a:pPr algn="r"/>
-                      <a:r>
-                        <a:rPr sz="1150" b="0">
-                          <a:solidFill>
-                            <a:srgbClr val="5D6D7E"/>
-                          </a:solidFill>
-                          <a:latin typeface="Arial"/>
-                        </a:rPr>
                         <a:t>€18.5M/mo</a:t>
                       </a:r>
                     </a:p>
@@ -9794,29 +9724,6 @@
                           </a:solidFill>
                           <a:latin typeface="Arial"/>
                         </a:rPr>
-                        <a:t>21.0%</a:t>
-                      </a:r>
-                    </a:p>
-                  </a:txBody>
-                  <a:tcPr>
-                    <a:solidFill>
-                      <a:srgbClr val="FFFFFF"/>
-                    </a:solidFill>
-                  </a:tcPr>
-                </a:tc>
-                <a:tc>
-                  <a:txBody>
-                    <a:bodyPr/>
-                    <a:lstStyle/>
-                    <a:p>
-                      <a:pPr algn="r"/>
-                      <a:r>
-                        <a:rPr sz="1150" b="0">
-                          <a:solidFill>
-                            <a:srgbClr val="5D6D7E"/>
-                          </a:solidFill>
-                          <a:latin typeface="Arial"/>
-                        </a:rPr>
                         <a:t>€12.2M/mo</a:t>
                       </a:r>
                     </a:p>
@@ -9911,29 +9818,6 @@
                           </a:solidFill>
                           <a:latin typeface="Arial"/>
                         </a:rPr>
-                        <a:t>25.7%</a:t>
-                      </a:r>
-                    </a:p>
-                  </a:txBody>
-                  <a:tcPr>
-                    <a:solidFill>
-                      <a:srgbClr val="FFFFFF"/>
-                    </a:solidFill>
-                  </a:tcPr>
-                </a:tc>
-                <a:tc>
-                  <a:txBody>
-                    <a:bodyPr/>
-                    <a:lstStyle/>
-                    <a:p>
-                      <a:pPr algn="r"/>
-                      <a:r>
-                        <a:rPr sz="1150" b="0">
-                          <a:solidFill>
-                            <a:srgbClr val="5D6D7E"/>
-                          </a:solidFill>
-                          <a:latin typeface="Arial"/>
-                        </a:rPr>
                         <a:t>€15.0M/mo</a:t>
                       </a:r>
                     </a:p>
@@ -10028,29 +9912,6 @@
                           </a:solidFill>
                           <a:latin typeface="Arial"/>
                         </a:rPr>
-                        <a:t>30.0%</a:t>
-                      </a:r>
-                    </a:p>
-                  </a:txBody>
-                  <a:tcPr>
-                    <a:solidFill>
-                      <a:srgbClr val="FFFFFF"/>
-                    </a:solidFill>
-                  </a:tcPr>
-                </a:tc>
-                <a:tc>
-                  <a:txBody>
-                    <a:bodyPr/>
-                    <a:lstStyle/>
-                    <a:p>
-                      <a:pPr algn="r"/>
-                      <a:r>
-                        <a:rPr sz="1150" b="0">
-                          <a:solidFill>
-                            <a:srgbClr val="5D6D7E"/>
-                          </a:solidFill>
-                          <a:latin typeface="Arial"/>
-                        </a:rPr>
                         <a:t>€17.4M/mo</a:t>
                       </a:r>
                     </a:p>
@@ -10123,29 +9984,6 @@
                           <a:latin typeface="Arial"/>
                         </a:rPr>
                         <a:t>57.0%</a:t>
-                      </a:r>
-                    </a:p>
-                  </a:txBody>
-                  <a:tcPr>
-                    <a:solidFill>
-                      <a:srgbClr val="FFFFFF"/>
-                    </a:solidFill>
-                  </a:tcPr>
-                </a:tc>
-                <a:tc>
-                  <a:txBody>
-                    <a:bodyPr/>
-                    <a:lstStyle/>
-                    <a:p>
-                      <a:pPr algn="r"/>
-                      <a:r>
-                        <a:rPr sz="1150" b="0">
-                          <a:solidFill>
-                            <a:srgbClr val="5D6D7E"/>
-                          </a:solidFill>
-                          <a:latin typeface="Arial"/>
-                        </a:rPr>
-                        <a:t>31.6%</a:t>
                       </a:r>
                     </a:p>
                   </a:txBody>
@@ -10474,7 +10312,7 @@
                 </a:solidFill>
                 <a:latin typeface="Arial"/>
               </a:rPr>
-              <a:t>System approval, take-up and booking rate</a:t>
+              <a:t>How system approval is measured</a:t>
             </a:r>
           </a:p>
         </p:txBody>
@@ -10533,7 +10371,7 @@
         </p:nvGraphicFramePr>
         <p:xfrm>
           <a:off x="566928" y="1563624"/>
-          <a:ext cx="6858000" cy="2926080"/>
+          <a:ext cx="6858000" cy="2633472"/>
         </p:xfrm>
         <a:graphic>
           <a:graphicData uri="http://schemas.openxmlformats.org/drawingml/2006/table">
@@ -10691,7 +10529,7 @@
                           </a:solidFill>
                           <a:latin typeface="Arial"/>
                         </a:rPr>
-                        <a:t>booked  (= booking rate)</a:t>
+                        <a:t>booked</a:t>
                       </a:r>
                     </a:p>
                   </a:txBody>
@@ -11419,100 +11257,6 @@
                           <a:latin typeface="Arial"/>
                         </a:rPr>
                         <a:t>53.5%</a:t>
-                      </a:r>
-                    </a:p>
-                  </a:txBody>
-                  <a:tcPr>
-                    <a:solidFill>
-                      <a:srgbClr val="FFFFFF"/>
-                    </a:solidFill>
-                  </a:tcPr>
-                </a:tc>
-              </a:tr>
-              <a:tr h="292608">
-                <a:tc>
-                  <a:txBody>
-                    <a:bodyPr/>
-                    <a:lstStyle/>
-                    <a:p>
-                      <a:pPr algn="l"/>
-                      <a:r>
-                        <a:rPr sz="1150" b="0">
-                          <a:solidFill>
-                            <a:srgbClr val="5D6D7E"/>
-                          </a:solidFill>
-                          <a:latin typeface="Arial"/>
-                        </a:rPr>
-                        <a:t>Take-up: booked / approved</a:t>
-                      </a:r>
-                    </a:p>
-                  </a:txBody>
-                  <a:tcPr>
-                    <a:solidFill>
-                      <a:srgbClr val="FFFFFF"/>
-                    </a:solidFill>
-                  </a:tcPr>
-                </a:tc>
-                <a:tc>
-                  <a:txBody>
-                    <a:bodyPr/>
-                    <a:lstStyle/>
-                    <a:p>
-                      <a:pPr algn="r"/>
-                      <a:r>
-                        <a:rPr sz="1150" b="0">
-                          <a:solidFill>
-                            <a:srgbClr val="5D6D7E"/>
-                          </a:solidFill>
-                          <a:latin typeface="Arial"/>
-                        </a:rPr>
-                        <a:t>40%</a:t>
-                      </a:r>
-                    </a:p>
-                  </a:txBody>
-                  <a:tcPr>
-                    <a:solidFill>
-                      <a:srgbClr val="FFFFFF"/>
-                    </a:solidFill>
-                  </a:tcPr>
-                </a:tc>
-                <a:tc>
-                  <a:txBody>
-                    <a:bodyPr/>
-                    <a:lstStyle/>
-                    <a:p>
-                      <a:pPr algn="r"/>
-                      <a:r>
-                        <a:rPr sz="1150" b="0">
-                          <a:solidFill>
-                            <a:srgbClr val="5D6D7E"/>
-                          </a:solidFill>
-                          <a:latin typeface="Arial"/>
-                        </a:rPr>
-                        <a:t>86%</a:t>
-                      </a:r>
-                    </a:p>
-                  </a:txBody>
-                  <a:tcPr>
-                    <a:solidFill>
-                      <a:srgbClr val="FFFFFF"/>
-                    </a:solidFill>
-                  </a:tcPr>
-                </a:tc>
-                <a:tc>
-                  <a:txBody>
-                    <a:bodyPr/>
-                    <a:lstStyle/>
-                    <a:p>
-                      <a:pPr algn="r"/>
-                      <a:r>
-                        <a:rPr sz="1150" b="0">
-                          <a:solidFill>
-                            <a:srgbClr val="5D6D7E"/>
-                          </a:solidFill>
-                          <a:latin typeface="Arial"/>
-                        </a:rPr>
-                        <a:t>80%</a:t>
                       </a:r>
                     </a:p>
                   </a:txBody>
@@ -11561,7 +11305,7 @@
                 </a:solidFill>
                 <a:latin typeface="Arial"/>
               </a:rPr>
-              <a:t>Booking rate.  </a:t>
+              <a:t>System approval.  </a:t>
             </a:r>
             <a:r>
               <a:rPr sz="1000">
@@ -11570,32 +11314,7 @@
                 </a:solidFill>
                 <a:latin typeface="Arial"/>
               </a:rPr>
-              <a:t>€ booked / € applied for, over every application that comes through the door — rejected, cancelled and booked alike. The first row of the table; point 1, the scenarios and the headline use it. It equals system approval × take-up.</a:t>
-            </a:r>
-          </a:p>
-          <a:p>
-            <a:pPr>
-              <a:spcAft>
-                <a:spcPts val="900"/>
-              </a:spcAft>
-            </a:pPr>
-            <a:r>
-              <a:rPr sz="1000" b="1">
-                <a:solidFill>
-                  <a:srgbClr val="2C3E50"/>
-                </a:solidFill>
-                <a:latin typeface="Arial"/>
-              </a:rPr>
-              <a:t>System approval.  </a:t>
-            </a:r>
-            <a:r>
-              <a:rPr sz="1000">
-                <a:solidFill>
-                  <a:srgbClr val="5D6D7E"/>
-                </a:solidFill>
-                <a:latin typeface="Arial"/>
-              </a:rPr>
-              <a:t>(OK + RV) / € demand: what the engine lets through, before the customer decides. Under a grid it is simulated as demand above the cutoff and not rejected by another rule. Comparable across today and every scenario; not comparable with the booking rate.</a:t>
+              <a:t>(OK + RV) / € demand: what the engine lets through, before the customer decides — the first three rows of the table. Under a grid it is simulated as demand above the cutoff and not rejected by another rule, so today and every scenario are comparable.</a:t>
             </a:r>
           </a:p>
           <a:p>
@@ -11620,7 +11339,7 @@
                 </a:solidFill>
                 <a:latin typeface="Arial"/>
               </a:rPr>
-              <a:t>Approved by the engine, then cancelled by the customer. It counts in the denominator and not in the numerator, like a rejection. In the scenarios every accepted application converts at the actual take-up of its decision, so cancellations are assumed to behave as today: a looser grid does not recover them.</a:t>
+              <a:t>Approved by the engine, then cancelled by the customer. It is approved, so it counts in system approval; it only lowers production. In the scenarios every accepted application converts at the actual take-up of its decision, so cancellations are assumed to behave as today.</a:t>
             </a:r>
           </a:p>
           <a:p>
@@ -11645,7 +11364,7 @@
                 </a:solidFill>
                 <a:latin typeface="Arial"/>
               </a:rPr>
-              <a:t>Approved by the engine, rejected at a later step (no reason in the extract). Treated like unfinished demand.</a:t>
+              <a:t>Approved by the engine, rejected at a later step (no reason in the extract). Counts as approved; treated like unfinished demand for production.</a:t>
             </a:r>
           </a:p>
           <a:p>
@@ -11670,7 +11389,7 @@
                 </a:solidFill>
                 <a:latin typeface="Arial"/>
               </a:rPr>
-              <a:t>Applications rejected before the full study: the Equifax API is never called, so they have no score. They count in the denominator like any rejection and are never swap-in candidates nor given an imputed risk. The extract carries them for stores from Jul 2025 and for Online from May 2026 (outside the Online window); the stores 'today' window has them in 8 of its 12 months, so its acceptance rate is a blend. Online's own unscored rejections have always been in its base.</a:t>
+              <a:t>Applications rejected before the full study: the Equifax API is never called, so they have no score. They count in the denominator like any rejection and are never swap-in candidates nor given an imputed risk. The extract carries them for stores from Jul 2025 and for Online from May 2026 (outside the Online window); the stores 'today' window has them in 8 of its 12 months, so its system approval is a blend. Online's own unscored rejections have always been in its base.</a:t>
             </a:r>
           </a:p>
           <a:p>
@@ -12179,7 +11898,7 @@
                 </a:solidFill>
                 <a:latin typeface="Arial"/>
               </a:rPr>
-              <a:t>Measured on stores' own history, same window as Online: describing where they stand today needs no imputation. They accept almost three times as much as Online and carry less risk. Warning: their booking rate is falling (55.1% over Mar 2025 – Feb 2026, 43.0% in Aug–Sep 2026), so the baseline is moving.</a:t>
+              <a:t>Measured on stores' own history, same window as Online: describing where they stand today needs no imputation. They approve more of their demand than Online and carry less risk. Warning: their system approval is falling (64.1% over Mar 2025 – Feb 2026, 53.5% in Aug–Sep 2026), so the baseline is moving.</a:t>
             </a:r>
           </a:p>
         </p:txBody>
@@ -12421,7 +12140,7 @@
                 </a:solidFill>
                 <a:latin typeface="Arial"/>
               </a:rPr>
-              <a:t>Both columns measure the same population —Aug–Sep 2026, the only period with an EFX score in stores— which is why 'today' here is 43.0% and on the previous slide 55.1%. Only the score rule is swapped; stores' other rules stay. Risk is imputed from the Online curve, with the level anchored to stores' realized figure.</a:t>
+              <a:t>Both columns measure the same population —Aug–Sep 2026, the only period with an EFX score in stores— which is why 'today' here is 53.5% and on the previous slide 64.1%. Only the score rule is swapped; stores' other rules stay. Risk is imputed from the Online curve, with the level anchored to stores' realized figure.</a:t>
             </a:r>
           </a:p>
         </p:txBody>
@@ -12622,7 +12341,7 @@
         <p:spPr>
           <a:xfrm>
             <a:off x="566928" y="1563624"/>
-            <a:ext cx="6720840" cy="3285599"/>
+            <a:ext cx="6720840" cy="3195879"/>
           </a:xfrm>
           <a:prstGeom prst="rect">
             <a:avLst/>
@@ -12639,7 +12358,7 @@
         </p:nvGraphicFramePr>
         <p:xfrm>
           <a:off x="7543800" y="1655064"/>
-          <a:ext cx="4343399" cy="2852928"/>
+          <a:ext cx="4343398" cy="2852928"/>
         </p:xfrm>
         <a:graphic>
           <a:graphicData uri="http://schemas.openxmlformats.org/drawingml/2006/table">
@@ -12648,10 +12367,9 @@
                 <a:tableStyleId>{5C22544A-7EE6-4342-B048-85BDC9FD1C3A}</a:tableStyleId>
               </a:tblPr>
               <a:tblGrid>
-                <a:gridCol w="1868129"/>
-                <a:gridCol w="840658"/>
-                <a:gridCol w="793954"/>
-                <a:gridCol w="840658"/>
+                <a:gridCol w="2275114"/>
+                <a:gridCol w="1034142"/>
+                <a:gridCol w="1034142"/>
               </a:tblGrid>
               <a:tr h="237744">
                 <a:tc>
@@ -12723,29 +12441,6 @@
                     </a:solidFill>
                   </a:tcPr>
                 </a:tc>
-                <a:tc>
-                  <a:txBody>
-                    <a:bodyPr/>
-                    <a:lstStyle/>
-                    <a:p>
-                      <a:pPr algn="r"/>
-                      <a:r>
-                        <a:rPr sz="1150" b="1">
-                          <a:solidFill>
-                            <a:srgbClr val="2C3E50"/>
-                          </a:solidFill>
-                          <a:latin typeface="Arial"/>
-                        </a:rPr>
-                        <a:t>Booking</a:t>
-                      </a:r>
-                    </a:p>
-                  </a:txBody>
-                  <a:tcPr>
-                    <a:solidFill>
-                      <a:srgbClr val="F6F7F9"/>
-                    </a:solidFill>
-                  </a:tcPr>
-                </a:tc>
               </a:tr>
               <a:tr h="237744">
                 <a:tc>
@@ -12817,29 +12512,6 @@
                     </a:solidFill>
                   </a:tcPr>
                 </a:tc>
-                <a:tc>
-                  <a:txBody>
-                    <a:bodyPr/>
-                    <a:lstStyle/>
-                    <a:p>
-                      <a:pPr algn="r"/>
-                      <a:r>
-                        <a:rPr sz="1150" b="0">
-                          <a:solidFill>
-                            <a:srgbClr val="5D6D7E"/>
-                          </a:solidFill>
-                          <a:latin typeface="Arial"/>
-                        </a:rPr>
-                        <a:t>29.0%</a:t>
-                      </a:r>
-                    </a:p>
-                  </a:txBody>
-                  <a:tcPr>
-                    <a:solidFill>
-                      <a:srgbClr val="FFFFFF"/>
-                    </a:solidFill>
-                  </a:tcPr>
-                </a:tc>
               </a:tr>
               <a:tr h="237744">
                 <a:tc>
@@ -12911,29 +12583,6 @@
                     </a:solidFill>
                   </a:tcPr>
                 </a:tc>
-                <a:tc>
-                  <a:txBody>
-                    <a:bodyPr/>
-                    <a:lstStyle/>
-                    <a:p>
-                      <a:pPr algn="r"/>
-                      <a:r>
-                        <a:rPr sz="1150" b="0">
-                          <a:solidFill>
-                            <a:srgbClr val="5D6D7E"/>
-                          </a:solidFill>
-                          <a:latin typeface="Arial"/>
-                        </a:rPr>
-                        <a:t>27.7%</a:t>
-                      </a:r>
-                    </a:p>
-                  </a:txBody>
-                  <a:tcPr>
-                    <a:solidFill>
-                      <a:srgbClr val="FFFFFF"/>
-                    </a:solidFill>
-                  </a:tcPr>
-                </a:tc>
               </a:tr>
               <a:tr h="237744">
                 <a:tc>
@@ -13005,29 +12654,6 @@
                     </a:solidFill>
                   </a:tcPr>
                 </a:tc>
-                <a:tc>
-                  <a:txBody>
-                    <a:bodyPr/>
-                    <a:lstStyle/>
-                    <a:p>
-                      <a:pPr algn="r"/>
-                      <a:r>
-                        <a:rPr sz="1150" b="0">
-                          <a:solidFill>
-                            <a:srgbClr val="5D6D7E"/>
-                          </a:solidFill>
-                          <a:latin typeface="Arial"/>
-                        </a:rPr>
-                        <a:t>31.7%</a:t>
-                      </a:r>
-                    </a:p>
-                  </a:txBody>
-                  <a:tcPr>
-                    <a:solidFill>
-                      <a:srgbClr val="FFFFFF"/>
-                    </a:solidFill>
-                  </a:tcPr>
-                </a:tc>
               </a:tr>
               <a:tr h="237744">
                 <a:tc>
@@ -13099,29 +12725,6 @@
                     </a:solidFill>
                   </a:tcPr>
                 </a:tc>
-                <a:tc>
-                  <a:txBody>
-                    <a:bodyPr/>
-                    <a:lstStyle/>
-                    <a:p>
-                      <a:pPr algn="r"/>
-                      <a:r>
-                        <a:rPr sz="1150" b="0">
-                          <a:solidFill>
-                            <a:srgbClr val="5D6D7E"/>
-                          </a:solidFill>
-                          <a:latin typeface="Arial"/>
-                        </a:rPr>
-                        <a:t>21.0%</a:t>
-                      </a:r>
-                    </a:p>
-                  </a:txBody>
-                  <a:tcPr>
-                    <a:solidFill>
-                      <a:srgbClr val="FFFFFF"/>
-                    </a:solidFill>
-                  </a:tcPr>
-                </a:tc>
               </a:tr>
               <a:tr h="237744">
                 <a:tc>
@@ -13193,29 +12796,6 @@
                     </a:solidFill>
                   </a:tcPr>
                 </a:tc>
-                <a:tc>
-                  <a:txBody>
-                    <a:bodyPr/>
-                    <a:lstStyle/>
-                    <a:p>
-                      <a:pPr algn="r"/>
-                      <a:r>
-                        <a:rPr sz="1150" b="0">
-                          <a:solidFill>
-                            <a:srgbClr val="5D6D7E"/>
-                          </a:solidFill>
-                          <a:latin typeface="Arial"/>
-                        </a:rPr>
-                        <a:t>21.1%</a:t>
-                      </a:r>
-                    </a:p>
-                  </a:txBody>
-                  <a:tcPr>
-                    <a:solidFill>
-                      <a:srgbClr val="FFFFFF"/>
-                    </a:solidFill>
-                  </a:tcPr>
-                </a:tc>
               </a:tr>
               <a:tr h="237744">
                 <a:tc>
@@ -13287,29 +12867,6 @@
                     </a:solidFill>
                   </a:tcPr>
                 </a:tc>
-                <a:tc>
-                  <a:txBody>
-                    <a:bodyPr/>
-                    <a:lstStyle/>
-                    <a:p>
-                      <a:pPr algn="r"/>
-                      <a:r>
-                        <a:rPr sz="1150" b="0">
-                          <a:solidFill>
-                            <a:srgbClr val="5D6D7E"/>
-                          </a:solidFill>
-                          <a:latin typeface="Arial"/>
-                        </a:rPr>
-                        <a:t>25.7%</a:t>
-                      </a:r>
-                    </a:p>
-                  </a:txBody>
-                  <a:tcPr>
-                    <a:solidFill>
-                      <a:srgbClr val="FFFFFF"/>
-                    </a:solidFill>
-                  </a:tcPr>
-                </a:tc>
               </a:tr>
               <a:tr h="237744">
                 <a:tc>
@@ -13381,29 +12938,6 @@
                     </a:solidFill>
                   </a:tcPr>
                 </a:tc>
-                <a:tc>
-                  <a:txBody>
-                    <a:bodyPr/>
-                    <a:lstStyle/>
-                    <a:p>
-                      <a:pPr algn="r"/>
-                      <a:r>
-                        <a:rPr sz="1150" b="0">
-                          <a:solidFill>
-                            <a:srgbClr val="5D6D7E"/>
-                          </a:solidFill>
-                          <a:latin typeface="Arial"/>
-                        </a:rPr>
-                        <a:t>26.7%</a:t>
-                      </a:r>
-                    </a:p>
-                  </a:txBody>
-                  <a:tcPr>
-                    <a:solidFill>
-                      <a:srgbClr val="FFFFFF"/>
-                    </a:solidFill>
-                  </a:tcPr>
-                </a:tc>
               </a:tr>
               <a:tr h="237744">
                 <a:tc>
@@ -13475,29 +13009,6 @@
                     </a:solidFill>
                   </a:tcPr>
                 </a:tc>
-                <a:tc>
-                  <a:txBody>
-                    <a:bodyPr/>
-                    <a:lstStyle/>
-                    <a:p>
-                      <a:pPr algn="r"/>
-                      <a:r>
-                        <a:rPr sz="1150" b="0">
-                          <a:solidFill>
-                            <a:srgbClr val="5D6D7E"/>
-                          </a:solidFill>
-                          <a:latin typeface="Arial"/>
-                        </a:rPr>
-                        <a:t>30.0%</a:t>
-                      </a:r>
-                    </a:p>
-                  </a:txBody>
-                  <a:tcPr>
-                    <a:solidFill>
-                      <a:srgbClr val="FFFFFF"/>
-                    </a:solidFill>
-                  </a:tcPr>
-                </a:tc>
               </a:tr>
               <a:tr h="237744">
                 <a:tc>
@@ -13569,29 +13080,6 @@
                     </a:solidFill>
                   </a:tcPr>
                 </a:tc>
-                <a:tc>
-                  <a:txBody>
-                    <a:bodyPr/>
-                    <a:lstStyle/>
-                    <a:p>
-                      <a:pPr algn="r"/>
-                      <a:r>
-                        <a:rPr sz="1150" b="0">
-                          <a:solidFill>
-                            <a:srgbClr val="5D6D7E"/>
-                          </a:solidFill>
-                          <a:latin typeface="Arial"/>
-                        </a:rPr>
-                        <a:t>30.4%</a:t>
-                      </a:r>
-                    </a:p>
-                  </a:txBody>
-                  <a:tcPr>
-                    <a:solidFill>
-                      <a:srgbClr val="FFFFFF"/>
-                    </a:solidFill>
-                  </a:tcPr>
-                </a:tc>
               </a:tr>
               <a:tr h="237744">
                 <a:tc>
@@ -13663,29 +13151,6 @@
                     </a:solidFill>
                   </a:tcPr>
                 </a:tc>
-                <a:tc>
-                  <a:txBody>
-                    <a:bodyPr/>
-                    <a:lstStyle/>
-                    <a:p>
-                      <a:pPr algn="r"/>
-                      <a:r>
-                        <a:rPr sz="1150" b="0">
-                          <a:solidFill>
-                            <a:srgbClr val="5D6D7E"/>
-                          </a:solidFill>
-                          <a:latin typeface="Arial"/>
-                        </a:rPr>
-                        <a:t>31.6%</a:t>
-                      </a:r>
-                    </a:p>
-                  </a:txBody>
-                  <a:tcPr>
-                    <a:solidFill>
-                      <a:srgbClr val="FFFFFF"/>
-                    </a:solidFill>
-                  </a:tcPr>
-                </a:tc>
               </a:tr>
               <a:tr h="237744">
                 <a:tc>
@@ -13748,29 +13213,6 @@
                           <a:latin typeface="Arial"/>
                         </a:rPr>
                         <a:t>57.2%</a:t>
-                      </a:r>
-                    </a:p>
-                  </a:txBody>
-                  <a:tcPr>
-                    <a:solidFill>
-                      <a:srgbClr val="FFFFFF"/>
-                    </a:solidFill>
-                  </a:tcPr>
-                </a:tc>
-                <a:tc>
-                  <a:txBody>
-                    <a:bodyPr/>
-                    <a:lstStyle/>
-                    <a:p>
-                      <a:pPr algn="r"/>
-                      <a:r>
-                        <a:rPr sz="1150" b="0">
-                          <a:solidFill>
-                            <a:srgbClr val="5D6D7E"/>
-                          </a:solidFill>
-                          <a:latin typeface="Arial"/>
-                        </a:rPr>
-                        <a:t>31.7%</a:t>
                       </a:r>
                     </a:p>
                   </a:txBody>
@@ -13793,7 +13235,7 @@
         </p:nvSpPr>
         <p:spPr>
           <a:xfrm>
-            <a:off x="566928" y="4958951"/>
+            <a:off x="566928" y="4869231"/>
             <a:ext cx="6720840" cy="292608"/>
           </a:xfrm>
           <a:prstGeom prst="rect">
@@ -13832,7 +13274,7 @@
         </p:nvSpPr>
         <p:spPr>
           <a:xfrm>
-            <a:off x="566928" y="5269847"/>
+            <a:off x="566928" y="5180127"/>
             <a:ext cx="6720840" cy="1280160"/>
           </a:xfrm>
           <a:prstGeom prst="rect">
@@ -13913,7 +13355,7 @@
                 </a:solidFill>
                 <a:latin typeface="Arial"/>
               </a:rPr>
-              <a:t>Booking rate: booked / demand = system approval × take-up. Point 1 and the headline use it.</a:t>
+              <a:t/>
             </a:r>
           </a:p>
           <a:p>
@@ -13929,23 +13371,7 @@
                 </a:solidFill>
                 <a:latin typeface="Arial"/>
               </a:rPr>
-              <a:t/>
-            </a:r>
-          </a:p>
-          <a:p>
-            <a:pPr algn="l">
-              <a:lnSpc>
-                <a:spcPct val="125000"/>
-              </a:lnSpc>
-            </a:pPr>
-            <a:r>
-              <a:rPr sz="1050" b="0">
-                <a:solidFill>
-                  <a:srgbClr val="5D6D7E"/>
-                </a:solidFill>
-                <a:latin typeface="Arial"/>
-              </a:rPr>
-              <a:t>Shifting the current grid keeps its shape —looser where the group is good— and gives slightly more acceptance at the same risk.</a:t>
+              <a:t>Shifting the current grid keeps its shape —looser where the group is good— and gives slightly higher system approval at the same risk.</a:t>
             </a:r>
           </a:p>
           <a:p>
@@ -14171,7 +13597,7 @@
         </p:nvGraphicFramePr>
         <p:xfrm>
           <a:off x="566928" y="1563624"/>
-          <a:ext cx="11057837" cy="1984248"/>
+          <a:ext cx="11057831" cy="2304288"/>
         </p:xfrm>
         <a:graphic>
           <a:graphicData uri="http://schemas.openxmlformats.org/drawingml/2006/table">
@@ -14180,13 +13606,16 @@
                 <a:tableStyleId>{5C22544A-7EE6-4342-B048-85BDC9FD1C3A}</a:tableStyleId>
               </a:tblPr>
               <a:tblGrid>
-                <a:gridCol w="3343067"/>
-                <a:gridCol w="1285795"/>
-                <a:gridCol w="1285795"/>
-                <a:gridCol w="1285795"/>
-                <a:gridCol w="1285795"/>
-                <a:gridCol w="1285795"/>
-                <a:gridCol w="1285795"/>
+                <a:gridCol w="2250710"/>
+                <a:gridCol w="978569"/>
+                <a:gridCol w="978569"/>
+                <a:gridCol w="978569"/>
+                <a:gridCol w="978569"/>
+                <a:gridCol w="978569"/>
+                <a:gridCol w="978569"/>
+                <a:gridCol w="978569"/>
+                <a:gridCol w="978569"/>
+                <a:gridCol w="978569"/>
               </a:tblGrid>
               <a:tr h="384048">
                 <a:tc>
@@ -14202,7 +13631,7 @@
                           </a:solidFill>
                           <a:latin typeface="Arial"/>
                         </a:rPr>
-                        <a:t>Rates, % of € demand</a:t>
+                        <a:t>Scenario</a:t>
                       </a:r>
                     </a:p>
                   </a:txBody>
@@ -14272,7 +13701,7 @@
                           </a:solidFill>
                           <a:latin typeface="Arial"/>
                         </a:rPr>
-                        <a:t>booking</a:t>
+                        <a:t>prod./mo</a:t>
                       </a:r>
                     </a:p>
                   </a:txBody>
@@ -14295,6 +13724,41 @@
                           </a:solidFill>
                           <a:latin typeface="Arial"/>
                         </a:rPr>
+                        <a:t>E-com</a:t>
+                      </a:r>
+                    </a:p>
+                    <a:p>
+                      <a:pPr algn="r"/>
+                      <a:r>
+                        <a:rPr sz="1050" b="1">
+                          <a:solidFill>
+                            <a:srgbClr val="2C3E50"/>
+                          </a:solidFill>
+                          <a:latin typeface="Arial"/>
+                        </a:rPr>
+                        <a:t>risk</a:t>
+                      </a:r>
+                    </a:p>
+                  </a:txBody>
+                  <a:tcPr>
+                    <a:solidFill>
+                      <a:srgbClr val="F6F7F9"/>
+                    </a:solidFill>
+                  </a:tcPr>
+                </a:tc>
+                <a:tc>
+                  <a:txBody>
+                    <a:bodyPr/>
+                    <a:lstStyle/>
+                    <a:p>
+                      <a:pPr algn="r"/>
+                      <a:r>
+                        <a:rPr sz="1050" b="1">
+                          <a:solidFill>
+                            <a:srgbClr val="2C3E50"/>
+                          </a:solidFill>
+                          <a:latin typeface="Arial"/>
+                        </a:rPr>
                         <a:t>Stores</a:t>
                       </a:r>
                     </a:p>
@@ -14342,7 +13806,7 @@
                           </a:solidFill>
                           <a:latin typeface="Arial"/>
                         </a:rPr>
-                        <a:t>booking</a:t>
+                        <a:t>prod./mo</a:t>
                       </a:r>
                     </a:p>
                   </a:txBody>
@@ -14365,6 +13829,41 @@
                           </a:solidFill>
                           <a:latin typeface="Arial"/>
                         </a:rPr>
+                        <a:t>Stores</a:t>
+                      </a:r>
+                    </a:p>
+                    <a:p>
+                      <a:pPr algn="r"/>
+                      <a:r>
+                        <a:rPr sz="1050" b="1">
+                          <a:solidFill>
+                            <a:srgbClr val="2C3E50"/>
+                          </a:solidFill>
+                          <a:latin typeface="Arial"/>
+                        </a:rPr>
+                        <a:t>risk</a:t>
+                      </a:r>
+                    </a:p>
+                  </a:txBody>
+                  <a:tcPr>
+                    <a:solidFill>
+                      <a:srgbClr val="F6F7F9"/>
+                    </a:solidFill>
+                  </a:tcPr>
+                </a:tc>
+                <a:tc>
+                  <a:txBody>
+                    <a:bodyPr/>
+                    <a:lstStyle/>
+                    <a:p>
+                      <a:pPr algn="r"/>
+                      <a:r>
+                        <a:rPr sz="1050" b="1">
+                          <a:solidFill>
+                            <a:srgbClr val="2C3E50"/>
+                          </a:solidFill>
+                          <a:latin typeface="Arial"/>
+                        </a:rPr>
                         <a:t>Apple</a:t>
                       </a:r>
                     </a:p>
@@ -14412,7 +13911,7 @@
                           </a:solidFill>
                           <a:latin typeface="Arial"/>
                         </a:rPr>
-                        <a:t>booking</a:t>
+                        <a:t>prod./mo</a:t>
                       </a:r>
                     </a:p>
                   </a:txBody>
@@ -14422,8 +13921,43 @@
                     </a:solidFill>
                   </a:tcPr>
                 </a:tc>
+                <a:tc>
+                  <a:txBody>
+                    <a:bodyPr/>
+                    <a:lstStyle/>
+                    <a:p>
+                      <a:pPr algn="r"/>
+                      <a:r>
+                        <a:rPr sz="1050" b="1">
+                          <a:solidFill>
+                            <a:srgbClr val="2C3E50"/>
+                          </a:solidFill>
+                          <a:latin typeface="Arial"/>
+                        </a:rPr>
+                        <a:t>Apple</a:t>
+                      </a:r>
+                    </a:p>
+                    <a:p>
+                      <a:pPr algn="r"/>
+                      <a:r>
+                        <a:rPr sz="1050" b="1">
+                          <a:solidFill>
+                            <a:srgbClr val="2C3E50"/>
+                          </a:solidFill>
+                          <a:latin typeface="Arial"/>
+                        </a:rPr>
+                        <a:t>risk</a:t>
+                      </a:r>
+                    </a:p>
+                  </a:txBody>
+                  <a:tcPr>
+                    <a:solidFill>
+                      <a:srgbClr val="F6F7F9"/>
+                    </a:solidFill>
+                  </a:tcPr>
+                </a:tc>
               </a:tr>
-              <a:tr h="228600">
+              <a:tr h="274320">
                 <a:tc>
                   <a:txBody>
                     <a:bodyPr/>
@@ -14483,7 +14017,7 @@
                           </a:solidFill>
                           <a:latin typeface="Arial"/>
                         </a:rPr>
-                        <a:t>20.9%</a:t>
+                        <a:t>€8.4M</a:t>
                       </a:r>
                     </a:p>
                   </a:txBody>
@@ -14506,6 +14040,29 @@
                           </a:solidFill>
                           <a:latin typeface="Arial"/>
                         </a:rPr>
+                        <a:t>4.18%</a:t>
+                      </a:r>
+                    </a:p>
+                  </a:txBody>
+                  <a:tcPr>
+                    <a:solidFill>
+                      <a:srgbClr val="FFFFFF"/>
+                    </a:solidFill>
+                  </a:tcPr>
+                </a:tc>
+                <a:tc>
+                  <a:txBody>
+                    <a:bodyPr/>
+                    <a:lstStyle/>
+                    <a:p>
+                      <a:pPr algn="r"/>
+                      <a:r>
+                        <a:rPr sz="1050" b="0">
+                          <a:solidFill>
+                            <a:srgbClr val="5D6D7E"/>
+                          </a:solidFill>
+                          <a:latin typeface="Arial"/>
+                        </a:rPr>
                         <a:t>64.1%</a:t>
                       </a:r>
                     </a:p>
@@ -14529,7 +14086,7 @@
                           </a:solidFill>
                           <a:latin typeface="Arial"/>
                         </a:rPr>
-                        <a:t>55.1%</a:t>
+                        <a:t>€6.9M</a:t>
                       </a:r>
                     </a:p>
                   </a:txBody>
@@ -14552,6 +14109,29 @@
                           </a:solidFill>
                           <a:latin typeface="Arial"/>
                         </a:rPr>
+                        <a:t>3.74%</a:t>
+                      </a:r>
+                    </a:p>
+                  </a:txBody>
+                  <a:tcPr>
+                    <a:solidFill>
+                      <a:srgbClr val="FFFFFF"/>
+                    </a:solidFill>
+                  </a:tcPr>
+                </a:tc>
+                <a:tc>
+                  <a:txBody>
+                    <a:bodyPr/>
+                    <a:lstStyle/>
+                    <a:p>
+                      <a:pPr algn="r"/>
+                      <a:r>
+                        <a:rPr sz="1050" b="0">
+                          <a:solidFill>
+                            <a:srgbClr val="5D6D7E"/>
+                          </a:solidFill>
+                          <a:latin typeface="Arial"/>
+                        </a:rPr>
                         <a:t>54.8%</a:t>
                       </a:r>
                     </a:p>
@@ -14575,7 +14155,30 @@
                           </a:solidFill>
                           <a:latin typeface="Arial"/>
                         </a:rPr>
-                        <a:t>29.0%</a:t>
+                        <a:t>€15.3M</a:t>
+                      </a:r>
+                    </a:p>
+                  </a:txBody>
+                  <a:tcPr>
+                    <a:solidFill>
+                      <a:srgbClr val="FFFFFF"/>
+                    </a:solidFill>
+                  </a:tcPr>
+                </a:tc>
+                <a:tc>
+                  <a:txBody>
+                    <a:bodyPr/>
+                    <a:lstStyle/>
+                    <a:p>
+                      <a:pPr algn="r"/>
+                      <a:r>
+                        <a:rPr sz="1050" b="0">
+                          <a:solidFill>
+                            <a:srgbClr val="5D6D7E"/>
+                          </a:solidFill>
+                          <a:latin typeface="Arial"/>
+                        </a:rPr>
+                        <a:t>3.99%</a:t>
                       </a:r>
                     </a:p>
                   </a:txBody>
@@ -14586,7 +14189,7 @@
                   </a:tcPr>
                 </a:tc>
               </a:tr>
-              <a:tr h="228600">
+              <a:tr h="274320">
                 <a:tc>
                   <a:txBody>
                     <a:bodyPr/>
@@ -14646,7 +14249,7 @@
                           </a:solidFill>
                           <a:latin typeface="Arial"/>
                         </a:rPr>
-                        <a:t>20.9%</a:t>
+                        <a:t>€8.4M</a:t>
                       </a:r>
                     </a:p>
                   </a:txBody>
@@ -14669,6 +14272,29 @@
                           </a:solidFill>
                           <a:latin typeface="Arial"/>
                         </a:rPr>
+                        <a:t>4.15%</a:t>
+                      </a:r>
+                    </a:p>
+                  </a:txBody>
+                  <a:tcPr>
+                    <a:solidFill>
+                      <a:srgbClr val="FFFFFF"/>
+                    </a:solidFill>
+                  </a:tcPr>
+                </a:tc>
+                <a:tc>
+                  <a:txBody>
+                    <a:bodyPr/>
+                    <a:lstStyle/>
+                    <a:p>
+                      <a:pPr algn="r"/>
+                      <a:r>
+                        <a:rPr sz="1050" b="0">
+                          <a:solidFill>
+                            <a:srgbClr val="5D6D7E"/>
+                          </a:solidFill>
+                          <a:latin typeface="Arial"/>
+                        </a:rPr>
                         <a:t>53.5%</a:t>
                       </a:r>
                     </a:p>
@@ -14692,7 +14318,7 @@
                           </a:solidFill>
                           <a:latin typeface="Arial"/>
                         </a:rPr>
-                        <a:t>43.0%</a:t>
+                        <a:t>€7.8M</a:t>
                       </a:r>
                     </a:p>
                   </a:txBody>
@@ -14715,6 +14341,29 @@
                           </a:solidFill>
                           <a:latin typeface="Arial"/>
                         </a:rPr>
+                        <a:t>3.74%</a:t>
+                      </a:r>
+                    </a:p>
+                  </a:txBody>
+                  <a:tcPr>
+                    <a:solidFill>
+                      <a:srgbClr val="FFFFFF"/>
+                    </a:solidFill>
+                  </a:tcPr>
+                </a:tc>
+                <a:tc>
+                  <a:txBody>
+                    <a:bodyPr/>
+                    <a:lstStyle/>
+                    <a:p>
+                      <a:pPr algn="r"/>
+                      <a:r>
+                        <a:rPr sz="1050" b="0">
+                          <a:solidFill>
+                            <a:srgbClr val="5D6D7E"/>
+                          </a:solidFill>
+                          <a:latin typeface="Arial"/>
+                        </a:rPr>
                         <a:t>52.4%</a:t>
                       </a:r>
                     </a:p>
@@ -14738,7 +14387,30 @@
                           </a:solidFill>
                           <a:latin typeface="Arial"/>
                         </a:rPr>
-                        <a:t>27.7%</a:t>
+                        <a:t>€16.2M</a:t>
+                      </a:r>
+                    </a:p>
+                  </a:txBody>
+                  <a:tcPr>
+                    <a:solidFill>
+                      <a:srgbClr val="FFFFFF"/>
+                    </a:solidFill>
+                  </a:tcPr>
+                </a:tc>
+                <a:tc>
+                  <a:txBody>
+                    <a:bodyPr/>
+                    <a:lstStyle/>
+                    <a:p>
+                      <a:pPr algn="r"/>
+                      <a:r>
+                        <a:rPr sz="1050" b="0">
+                          <a:solidFill>
+                            <a:srgbClr val="5D6D7E"/>
+                          </a:solidFill>
+                          <a:latin typeface="Arial"/>
+                        </a:rPr>
+                        <a:t>3.95%</a:t>
                       </a:r>
                     </a:p>
                   </a:txBody>
@@ -14749,7 +14421,7 @@
                   </a:tcPr>
                 </a:tc>
               </a:tr>
-              <a:tr h="228600">
+              <a:tr h="274320">
                 <a:tc>
                   <a:txBody>
                     <a:bodyPr/>
@@ -14809,7 +14481,7 @@
                           </a:solidFill>
                           <a:latin typeface="Arial"/>
                         </a:rPr>
-                        <a:t>20.9%</a:t>
+                        <a:t>€8.4M</a:t>
                       </a:r>
                     </a:p>
                   </a:txBody>
@@ -14832,6 +14504,29 @@
                           </a:solidFill>
                           <a:latin typeface="Arial"/>
                         </a:rPr>
+                        <a:t>4.26%</a:t>
+                      </a:r>
+                    </a:p>
+                  </a:txBody>
+                  <a:tcPr>
+                    <a:solidFill>
+                      <a:srgbClr val="FFFFFF"/>
+                    </a:solidFill>
+                  </a:tcPr>
+                </a:tc>
+                <a:tc>
+                  <a:txBody>
+                    <a:bodyPr/>
+                    <a:lstStyle/>
+                    <a:p>
+                      <a:pPr algn="r"/>
+                      <a:r>
+                        <a:rPr sz="1050" b="0">
+                          <a:solidFill>
+                            <a:srgbClr val="5D6D7E"/>
+                          </a:solidFill>
+                          <a:latin typeface="Arial"/>
+                        </a:rPr>
                         <a:t>69.2%</a:t>
                       </a:r>
                     </a:p>
@@ -14855,7 +14550,7 @@
                           </a:solidFill>
                           <a:latin typeface="Arial"/>
                         </a:rPr>
-                        <a:t>55.9%</a:t>
+                        <a:t>€10.1M</a:t>
                       </a:r>
                     </a:p>
                   </a:txBody>
@@ -14878,6 +14573,29 @@
                           </a:solidFill>
                           <a:latin typeface="Arial"/>
                         </a:rPr>
+                        <a:t>3.52%</a:t>
+                      </a:r>
+                    </a:p>
+                  </a:txBody>
+                  <a:tcPr>
+                    <a:solidFill>
+                      <a:srgbClr val="FFFFFF"/>
+                    </a:solidFill>
+                  </a:tcPr>
+                </a:tc>
+                <a:tc>
+                  <a:txBody>
+                    <a:bodyPr/>
+                    <a:lstStyle/>
+                    <a:p>
+                      <a:pPr algn="r"/>
+                      <a:r>
+                        <a:rPr sz="1050" b="0">
+                          <a:solidFill>
+                            <a:srgbClr val="5D6D7E"/>
+                          </a:solidFill>
+                          <a:latin typeface="Arial"/>
+                        </a:rPr>
                         <a:t>57.2%</a:t>
                       </a:r>
                     </a:p>
@@ -14901,7 +14619,30 @@
                           </a:solidFill>
                           <a:latin typeface="Arial"/>
                         </a:rPr>
-                        <a:t>31.7%</a:t>
+                        <a:t>€18.5M</a:t>
+                      </a:r>
+                    </a:p>
+                  </a:txBody>
+                  <a:tcPr>
+                    <a:solidFill>
+                      <a:srgbClr val="FFFFFF"/>
+                    </a:solidFill>
+                  </a:tcPr>
+                </a:tc>
+                <a:tc>
+                  <a:txBody>
+                    <a:bodyPr/>
+                    <a:lstStyle/>
+                    <a:p>
+                      <a:pPr algn="r"/>
+                      <a:r>
+                        <a:rPr sz="1050" b="0">
+                          <a:solidFill>
+                            <a:srgbClr val="5D6D7E"/>
+                          </a:solidFill>
+                          <a:latin typeface="Arial"/>
+                        </a:rPr>
+                        <a:t>3.85%</a:t>
                       </a:r>
                     </a:p>
                   </a:txBody>
@@ -14912,7 +14653,7 @@
                   </a:tcPr>
                 </a:tc>
               </a:tr>
-              <a:tr h="228600">
+              <a:tr h="274320">
                 <a:tc>
                   <a:txBody>
                     <a:bodyPr/>
@@ -14972,7 +14713,7 @@
                           </a:solidFill>
                           <a:latin typeface="Arial"/>
                         </a:rPr>
-                        <a:t>13.0%</a:t>
+                        <a:t>€5.2M</a:t>
                       </a:r>
                     </a:p>
                   </a:txBody>
@@ -14995,6 +14736,29 @@
                           </a:solidFill>
                           <a:latin typeface="Arial"/>
                         </a:rPr>
+                        <a:t>2.61%</a:t>
+                      </a:r>
+                    </a:p>
+                  </a:txBody>
+                  <a:tcPr>
+                    <a:solidFill>
+                      <a:srgbClr val="FFFFFF"/>
+                    </a:solidFill>
+                  </a:tcPr>
+                </a:tc>
+                <a:tc>
+                  <a:txBody>
+                    <a:bodyPr/>
+                    <a:lstStyle/>
+                    <a:p>
+                      <a:pPr algn="r"/>
+                      <a:r>
+                        <a:rPr sz="1050" b="0">
+                          <a:solidFill>
+                            <a:srgbClr val="5D6D7E"/>
+                          </a:solidFill>
+                          <a:latin typeface="Arial"/>
+                        </a:rPr>
                         <a:t>48.4%</a:t>
                       </a:r>
                     </a:p>
@@ -15018,7 +14782,7 @@
                           </a:solidFill>
                           <a:latin typeface="Arial"/>
                         </a:rPr>
-                        <a:t>39.1%</a:t>
+                        <a:t>€7.1M</a:t>
                       </a:r>
                     </a:p>
                   </a:txBody>
@@ -15041,6 +14805,29 @@
                           </a:solidFill>
                           <a:latin typeface="Arial"/>
                         </a:rPr>
+                        <a:t>2.40%</a:t>
+                      </a:r>
+                    </a:p>
+                  </a:txBody>
+                  <a:tcPr>
+                    <a:solidFill>
+                      <a:srgbClr val="FFFFFF"/>
+                    </a:solidFill>
+                  </a:tcPr>
+                </a:tc>
+                <a:tc>
+                  <a:txBody>
+                    <a:bodyPr/>
+                    <a:lstStyle/>
+                    <a:p>
+                      <a:pPr algn="r"/>
+                      <a:r>
+                        <a:rPr sz="1050" b="0">
+                          <a:solidFill>
+                            <a:srgbClr val="5D6D7E"/>
+                          </a:solidFill>
+                          <a:latin typeface="Arial"/>
+                        </a:rPr>
                         <a:t>37.2%</a:t>
                       </a:r>
                     </a:p>
@@ -15064,7 +14851,30 @@
                           </a:solidFill>
                           <a:latin typeface="Arial"/>
                         </a:rPr>
-                        <a:t>21.1%</a:t>
+                        <a:t>€12.3M</a:t>
+                      </a:r>
+                    </a:p>
+                  </a:txBody>
+                  <a:tcPr>
+                    <a:solidFill>
+                      <a:srgbClr val="FFFFFF"/>
+                    </a:solidFill>
+                  </a:tcPr>
+                </a:tc>
+                <a:tc>
+                  <a:txBody>
+                    <a:bodyPr/>
+                    <a:lstStyle/>
+                    <a:p>
+                      <a:pPr algn="r"/>
+                      <a:r>
+                        <a:rPr sz="1050" b="0">
+                          <a:solidFill>
+                            <a:srgbClr val="5D6D7E"/>
+                          </a:solidFill>
+                          <a:latin typeface="Arial"/>
+                        </a:rPr>
+                        <a:t>2.48%</a:t>
                       </a:r>
                     </a:p>
                   </a:txBody>
@@ -15075,7 +14885,7 @@
                   </a:tcPr>
                 </a:tc>
               </a:tr>
-              <a:tr h="228600">
+              <a:tr h="274320">
                 <a:tc>
                   <a:txBody>
                     <a:bodyPr/>
@@ -15135,7 +14945,7 @@
                           </a:solidFill>
                           <a:latin typeface="Arial"/>
                         </a:rPr>
-                        <a:t>16.9%</a:t>
+                        <a:t>€6.8M</a:t>
                       </a:r>
                     </a:p>
                   </a:txBody>
@@ -15158,6 +14968,29 @@
                           </a:solidFill>
                           <a:latin typeface="Arial"/>
                         </a:rPr>
+                        <a:t>3.14%</a:t>
+                      </a:r>
+                    </a:p>
+                  </a:txBody>
+                  <a:tcPr>
+                    <a:solidFill>
+                      <a:srgbClr val="FFFFFF"/>
+                    </a:solidFill>
+                  </a:tcPr>
+                </a:tc>
+                <a:tc>
+                  <a:txBody>
+                    <a:bodyPr/>
+                    <a:lstStyle/>
+                    <a:p>
+                      <a:pPr algn="r"/>
+                      <a:r>
+                        <a:rPr sz="1050" b="0">
+                          <a:solidFill>
+                            <a:srgbClr val="5D6D7E"/>
+                          </a:solidFill>
+                          <a:latin typeface="Arial"/>
+                        </a:rPr>
                         <a:t>60.1%</a:t>
                       </a:r>
                     </a:p>
@@ -15181,7 +15014,7 @@
                           </a:solidFill>
                           <a:latin typeface="Arial"/>
                         </a:rPr>
-                        <a:t>48.5%</a:t>
+                        <a:t>€8.8M</a:t>
                       </a:r>
                     </a:p>
                   </a:txBody>
@@ -15204,6 +15037,29 @@
                           </a:solidFill>
                           <a:latin typeface="Arial"/>
                         </a:rPr>
+                        <a:t>2.83%</a:t>
+                      </a:r>
+                    </a:p>
+                  </a:txBody>
+                  <a:tcPr>
+                    <a:solidFill>
+                      <a:srgbClr val="FFFFFF"/>
+                    </a:solidFill>
+                  </a:tcPr>
+                </a:tc>
+                <a:tc>
+                  <a:txBody>
+                    <a:bodyPr/>
+                    <a:lstStyle/>
+                    <a:p>
+                      <a:pPr algn="r"/>
+                      <a:r>
+                        <a:rPr sz="1050" b="0">
+                          <a:solidFill>
+                            <a:srgbClr val="5D6D7E"/>
+                          </a:solidFill>
+                          <a:latin typeface="Arial"/>
+                        </a:rPr>
                         <a:t>47.5%</a:t>
                       </a:r>
                     </a:p>
@@ -15227,7 +15083,30 @@
                           </a:solidFill>
                           <a:latin typeface="Arial"/>
                         </a:rPr>
-                        <a:t>26.7%</a:t>
+                        <a:t>€15.6M</a:t>
+                      </a:r>
+                    </a:p>
+                  </a:txBody>
+                  <a:tcPr>
+                    <a:solidFill>
+                      <a:srgbClr val="FFFFFF"/>
+                    </a:solidFill>
+                  </a:tcPr>
+                </a:tc>
+                <a:tc>
+                  <a:txBody>
+                    <a:bodyPr/>
+                    <a:lstStyle/>
+                    <a:p>
+                      <a:pPr algn="r"/>
+                      <a:r>
+                        <a:rPr sz="1050" b="0">
+                          <a:solidFill>
+                            <a:srgbClr val="5D6D7E"/>
+                          </a:solidFill>
+                          <a:latin typeface="Arial"/>
+                        </a:rPr>
+                        <a:t>2.97%</a:t>
                       </a:r>
                     </a:p>
                   </a:txBody>
@@ -15238,7 +15117,7 @@
                   </a:tcPr>
                 </a:tc>
               </a:tr>
-              <a:tr h="228600">
+              <a:tr h="274320">
                 <a:tc>
                   <a:txBody>
                     <a:bodyPr/>
@@ -15298,7 +15177,7 @@
                           </a:solidFill>
                           <a:latin typeface="Arial"/>
                         </a:rPr>
-                        <a:t>19.7%</a:t>
+                        <a:t>€7.9M</a:t>
                       </a:r>
                     </a:p>
                   </a:txBody>
@@ -15321,6 +15200,29 @@
                           </a:solidFill>
                           <a:latin typeface="Arial"/>
                         </a:rPr>
+                        <a:t>3.75%</a:t>
+                      </a:r>
+                    </a:p>
+                  </a:txBody>
+                  <a:tcPr>
+                    <a:solidFill>
+                      <a:srgbClr val="FFFFFF"/>
+                    </a:solidFill>
+                  </a:tcPr>
+                </a:tc>
+                <a:tc>
+                  <a:txBody>
+                    <a:bodyPr/>
+                    <a:lstStyle/>
+                    <a:p>
+                      <a:pPr algn="r"/>
+                      <a:r>
+                        <a:rPr sz="1050" b="0">
+                          <a:solidFill>
+                            <a:srgbClr val="5D6D7E"/>
+                          </a:solidFill>
+                          <a:latin typeface="Arial"/>
+                        </a:rPr>
                         <a:t>67.0%</a:t>
                       </a:r>
                     </a:p>
@@ -15344,7 +15246,7 @@
                           </a:solidFill>
                           <a:latin typeface="Arial"/>
                         </a:rPr>
-                        <a:t>54.1%</a:t>
+                        <a:t>€9.8M</a:t>
                       </a:r>
                     </a:p>
                   </a:txBody>
@@ -15367,6 +15269,29 @@
                           </a:solidFill>
                           <a:latin typeface="Arial"/>
                         </a:rPr>
+                        <a:t>3.27%</a:t>
+                      </a:r>
+                    </a:p>
+                  </a:txBody>
+                  <a:tcPr>
+                    <a:solidFill>
+                      <a:srgbClr val="FFFFFF"/>
+                    </a:solidFill>
+                  </a:tcPr>
+                </a:tc>
+                <a:tc>
+                  <a:txBody>
+                    <a:bodyPr/>
+                    <a:lstStyle/>
+                    <a:p>
+                      <a:pPr algn="r"/>
+                      <a:r>
+                        <a:rPr sz="1050" b="0">
+                          <a:solidFill>
+                            <a:srgbClr val="5D6D7E"/>
+                          </a:solidFill>
+                          <a:latin typeface="Arial"/>
+                        </a:rPr>
                         <a:t>54.4%</a:t>
                       </a:r>
                     </a:p>
@@ -15390,7 +15315,30 @@
                           </a:solidFill>
                           <a:latin typeface="Arial"/>
                         </a:rPr>
-                        <a:t>30.4%</a:t>
+                        <a:t>€17.7M</a:t>
+                      </a:r>
+                    </a:p>
+                  </a:txBody>
+                  <a:tcPr>
+                    <a:solidFill>
+                      <a:srgbClr val="FFFFFF"/>
+                    </a:solidFill>
+                  </a:tcPr>
+                </a:tc>
+                <a:tc>
+                  <a:txBody>
+                    <a:bodyPr/>
+                    <a:lstStyle/>
+                    <a:p>
+                      <a:pPr algn="r"/>
+                      <a:r>
+                        <a:rPr sz="1050" b="0">
+                          <a:solidFill>
+                            <a:srgbClr val="5D6D7E"/>
+                          </a:solidFill>
+                          <a:latin typeface="Arial"/>
+                        </a:rPr>
+                        <a:t>3.48%</a:t>
                       </a:r>
                     </a:p>
                   </a:txBody>
@@ -15401,7 +15349,7 @@
                   </a:tcPr>
                 </a:tc>
               </a:tr>
-              <a:tr h="228600">
+              <a:tr h="274320">
                 <a:tc>
                   <a:txBody>
                     <a:bodyPr/>
@@ -15461,7 +15409,7 @@
                           </a:solidFill>
                           <a:latin typeface="Arial"/>
                         </a:rPr>
-                        <a:t>20.9%</a:t>
+                        <a:t>€8.4M</a:t>
                       </a:r>
                     </a:p>
                   </a:txBody>
@@ -15484,6 +15432,29 @@
                           </a:solidFill>
                           <a:latin typeface="Arial"/>
                         </a:rPr>
+                        <a:t>4.26%</a:t>
+                      </a:r>
+                    </a:p>
+                  </a:txBody>
+                  <a:tcPr>
+                    <a:solidFill>
+                      <a:srgbClr val="FFFFFF"/>
+                    </a:solidFill>
+                  </a:tcPr>
+                </a:tc>
+                <a:tc>
+                  <a:txBody>
+                    <a:bodyPr/>
+                    <a:lstStyle/>
+                    <a:p>
+                      <a:pPr algn="r"/>
+                      <a:r>
+                        <a:rPr sz="1050" b="0">
+                          <a:solidFill>
+                            <a:srgbClr val="5D6D7E"/>
+                          </a:solidFill>
+                          <a:latin typeface="Arial"/>
+                        </a:rPr>
                         <a:t>69.2%</a:t>
                       </a:r>
                     </a:p>
@@ -15507,7 +15478,7 @@
                           </a:solidFill>
                           <a:latin typeface="Arial"/>
                         </a:rPr>
-                        <a:t>55.9%</a:t>
+                        <a:t>€10.1M</a:t>
                       </a:r>
                     </a:p>
                   </a:txBody>
@@ -15530,6 +15501,29 @@
                           </a:solidFill>
                           <a:latin typeface="Arial"/>
                         </a:rPr>
+                        <a:t>3.52%</a:t>
+                      </a:r>
+                    </a:p>
+                  </a:txBody>
+                  <a:tcPr>
+                    <a:solidFill>
+                      <a:srgbClr val="FFFFFF"/>
+                    </a:solidFill>
+                  </a:tcPr>
+                </a:tc>
+                <a:tc>
+                  <a:txBody>
+                    <a:bodyPr/>
+                    <a:lstStyle/>
+                    <a:p>
+                      <a:pPr algn="r"/>
+                      <a:r>
+                        <a:rPr sz="1050" b="0">
+                          <a:solidFill>
+                            <a:srgbClr val="5D6D7E"/>
+                          </a:solidFill>
+                          <a:latin typeface="Arial"/>
+                        </a:rPr>
                         <a:t>57.2%</a:t>
                       </a:r>
                     </a:p>
@@ -15553,7 +15547,30 @@
                           </a:solidFill>
                           <a:latin typeface="Arial"/>
                         </a:rPr>
-                        <a:t>31.7%</a:t>
+                        <a:t>€18.5M</a:t>
+                      </a:r>
+                    </a:p>
+                  </a:txBody>
+                  <a:tcPr>
+                    <a:solidFill>
+                      <a:srgbClr val="FFFFFF"/>
+                    </a:solidFill>
+                  </a:tcPr>
+                </a:tc>
+                <a:tc>
+                  <a:txBody>
+                    <a:bodyPr/>
+                    <a:lstStyle/>
+                    <a:p>
+                      <a:pPr algn="r"/>
+                      <a:r>
+                        <a:rPr sz="1050" b="0">
+                          <a:solidFill>
+                            <a:srgbClr val="5D6D7E"/>
+                          </a:solidFill>
+                          <a:latin typeface="Arial"/>
+                        </a:rPr>
+                        <a:t>3.85%</a:t>
                       </a:r>
                     </a:p>
                   </a:txBody>
@@ -15568,1423 +15585,16 @@
           </a:graphicData>
         </a:graphic>
       </p:graphicFrame>
-      <p:graphicFrame>
-        <p:nvGraphicFramePr>
-          <p:cNvPr id="7" name="Table 6"/>
-          <p:cNvGraphicFramePr>
-            <a:graphicFrameLocks noGrp="1"/>
-          </p:cNvGraphicFramePr>
-          <p:nvPr/>
-        </p:nvGraphicFramePr>
-        <p:xfrm>
-          <a:off x="566928" y="3685032"/>
-          <a:ext cx="11057837" cy="1984248"/>
-        </p:xfrm>
-        <a:graphic>
-          <a:graphicData uri="http://schemas.openxmlformats.org/drawingml/2006/table">
-            <a:tbl>
-              <a:tblPr firstRow="1" bandRow="1">
-                <a:tableStyleId>{5C22544A-7EE6-4342-B048-85BDC9FD1C3A}</a:tableStyleId>
-              </a:tblPr>
-              <a:tblGrid>
-                <a:gridCol w="3343067"/>
-                <a:gridCol w="1285795"/>
-                <a:gridCol w="1285795"/>
-                <a:gridCol w="1285795"/>
-                <a:gridCol w="1285795"/>
-                <a:gridCol w="1285795"/>
-                <a:gridCol w="1285795"/>
-              </a:tblGrid>
-              <a:tr h="384048">
-                <a:tc>
-                  <a:txBody>
-                    <a:bodyPr/>
-                    <a:lstStyle/>
-                    <a:p>
-                      <a:pPr algn="l"/>
-                      <a:r>
-                        <a:rPr sz="1050" b="1">
-                          <a:solidFill>
-                            <a:srgbClr val="2C3E50"/>
-                          </a:solidFill>
-                          <a:latin typeface="Arial"/>
-                        </a:rPr>
-                        <a:t>Production €M/mo · risk (b2)</a:t>
-                      </a:r>
-                    </a:p>
-                  </a:txBody>
-                  <a:tcPr>
-                    <a:solidFill>
-                      <a:srgbClr val="F6F7F9"/>
-                    </a:solidFill>
-                  </a:tcPr>
-                </a:tc>
-                <a:tc>
-                  <a:txBody>
-                    <a:bodyPr/>
-                    <a:lstStyle/>
-                    <a:p>
-                      <a:pPr algn="r"/>
-                      <a:r>
-                        <a:rPr sz="1050" b="1">
-                          <a:solidFill>
-                            <a:srgbClr val="2C3E50"/>
-                          </a:solidFill>
-                          <a:latin typeface="Arial"/>
-                        </a:rPr>
-                        <a:t>E-com</a:t>
-                      </a:r>
-                    </a:p>
-                    <a:p>
-                      <a:pPr algn="r"/>
-                      <a:r>
-                        <a:rPr sz="1050" b="1">
-                          <a:solidFill>
-                            <a:srgbClr val="2C3E50"/>
-                          </a:solidFill>
-                          <a:latin typeface="Arial"/>
-                        </a:rPr>
-                        <a:t>prod./mo</a:t>
-                      </a:r>
-                    </a:p>
-                  </a:txBody>
-                  <a:tcPr>
-                    <a:solidFill>
-                      <a:srgbClr val="F6F7F9"/>
-                    </a:solidFill>
-                  </a:tcPr>
-                </a:tc>
-                <a:tc>
-                  <a:txBody>
-                    <a:bodyPr/>
-                    <a:lstStyle/>
-                    <a:p>
-                      <a:pPr algn="r"/>
-                      <a:r>
-                        <a:rPr sz="1050" b="1">
-                          <a:solidFill>
-                            <a:srgbClr val="2C3E50"/>
-                          </a:solidFill>
-                          <a:latin typeface="Arial"/>
-                        </a:rPr>
-                        <a:t>E-com</a:t>
-                      </a:r>
-                    </a:p>
-                    <a:p>
-                      <a:pPr algn="r"/>
-                      <a:r>
-                        <a:rPr sz="1050" b="1">
-                          <a:solidFill>
-                            <a:srgbClr val="2C3E50"/>
-                          </a:solidFill>
-                          <a:latin typeface="Arial"/>
-                        </a:rPr>
-                        <a:t>risk</a:t>
-                      </a:r>
-                    </a:p>
-                  </a:txBody>
-                  <a:tcPr>
-                    <a:solidFill>
-                      <a:srgbClr val="F6F7F9"/>
-                    </a:solidFill>
-                  </a:tcPr>
-                </a:tc>
-                <a:tc>
-                  <a:txBody>
-                    <a:bodyPr/>
-                    <a:lstStyle/>
-                    <a:p>
-                      <a:pPr algn="r"/>
-                      <a:r>
-                        <a:rPr sz="1050" b="1">
-                          <a:solidFill>
-                            <a:srgbClr val="2C3E50"/>
-                          </a:solidFill>
-                          <a:latin typeface="Arial"/>
-                        </a:rPr>
-                        <a:t>Stores</a:t>
-                      </a:r>
-                    </a:p>
-                    <a:p>
-                      <a:pPr algn="r"/>
-                      <a:r>
-                        <a:rPr sz="1050" b="1">
-                          <a:solidFill>
-                            <a:srgbClr val="2C3E50"/>
-                          </a:solidFill>
-                          <a:latin typeface="Arial"/>
-                        </a:rPr>
-                        <a:t>prod./mo</a:t>
-                      </a:r>
-                    </a:p>
-                  </a:txBody>
-                  <a:tcPr>
-                    <a:solidFill>
-                      <a:srgbClr val="F6F7F9"/>
-                    </a:solidFill>
-                  </a:tcPr>
-                </a:tc>
-                <a:tc>
-                  <a:txBody>
-                    <a:bodyPr/>
-                    <a:lstStyle/>
-                    <a:p>
-                      <a:pPr algn="r"/>
-                      <a:r>
-                        <a:rPr sz="1050" b="1">
-                          <a:solidFill>
-                            <a:srgbClr val="2C3E50"/>
-                          </a:solidFill>
-                          <a:latin typeface="Arial"/>
-                        </a:rPr>
-                        <a:t>Stores</a:t>
-                      </a:r>
-                    </a:p>
-                    <a:p>
-                      <a:pPr algn="r"/>
-                      <a:r>
-                        <a:rPr sz="1050" b="1">
-                          <a:solidFill>
-                            <a:srgbClr val="2C3E50"/>
-                          </a:solidFill>
-                          <a:latin typeface="Arial"/>
-                        </a:rPr>
-                        <a:t>risk</a:t>
-                      </a:r>
-                    </a:p>
-                  </a:txBody>
-                  <a:tcPr>
-                    <a:solidFill>
-                      <a:srgbClr val="F6F7F9"/>
-                    </a:solidFill>
-                  </a:tcPr>
-                </a:tc>
-                <a:tc>
-                  <a:txBody>
-                    <a:bodyPr/>
-                    <a:lstStyle/>
-                    <a:p>
-                      <a:pPr algn="r"/>
-                      <a:r>
-                        <a:rPr sz="1050" b="1">
-                          <a:solidFill>
-                            <a:srgbClr val="2C3E50"/>
-                          </a:solidFill>
-                          <a:latin typeface="Arial"/>
-                        </a:rPr>
-                        <a:t>Apple</a:t>
-                      </a:r>
-                    </a:p>
-                    <a:p>
-                      <a:pPr algn="r"/>
-                      <a:r>
-                        <a:rPr sz="1050" b="1">
-                          <a:solidFill>
-                            <a:srgbClr val="2C3E50"/>
-                          </a:solidFill>
-                          <a:latin typeface="Arial"/>
-                        </a:rPr>
-                        <a:t>prod./mo</a:t>
-                      </a:r>
-                    </a:p>
-                  </a:txBody>
-                  <a:tcPr>
-                    <a:solidFill>
-                      <a:srgbClr val="F6F7F9"/>
-                    </a:solidFill>
-                  </a:tcPr>
-                </a:tc>
-                <a:tc>
-                  <a:txBody>
-                    <a:bodyPr/>
-                    <a:lstStyle/>
-                    <a:p>
-                      <a:pPr algn="r"/>
-                      <a:r>
-                        <a:rPr sz="1050" b="1">
-                          <a:solidFill>
-                            <a:srgbClr val="2C3E50"/>
-                          </a:solidFill>
-                          <a:latin typeface="Arial"/>
-                        </a:rPr>
-                        <a:t>Apple</a:t>
-                      </a:r>
-                    </a:p>
-                    <a:p>
-                      <a:pPr algn="r"/>
-                      <a:r>
-                        <a:rPr sz="1050" b="1">
-                          <a:solidFill>
-                            <a:srgbClr val="2C3E50"/>
-                          </a:solidFill>
-                          <a:latin typeface="Arial"/>
-                        </a:rPr>
-                        <a:t>risk</a:t>
-                      </a:r>
-                    </a:p>
-                  </a:txBody>
-                  <a:tcPr>
-                    <a:solidFill>
-                      <a:srgbClr val="F6F7F9"/>
-                    </a:solidFill>
-                  </a:tcPr>
-                </a:tc>
-              </a:tr>
-              <a:tr h="228600">
-                <a:tc>
-                  <a:txBody>
-                    <a:bodyPr/>
-                    <a:lstStyle/>
-                    <a:p>
-                      <a:pPr algn="l"/>
-                      <a:r>
-                        <a:rPr sz="1050" b="0">
-                          <a:solidFill>
-                            <a:srgbClr val="5D6D7E"/>
-                          </a:solidFill>
-                          <a:latin typeface="Arial"/>
-                        </a:rPr>
-                        <a:t>Today (measured)</a:t>
-                      </a:r>
-                    </a:p>
-                  </a:txBody>
-                  <a:tcPr>
-                    <a:solidFill>
-                      <a:srgbClr val="FFFFFF"/>
-                    </a:solidFill>
-                  </a:tcPr>
-                </a:tc>
-                <a:tc>
-                  <a:txBody>
-                    <a:bodyPr/>
-                    <a:lstStyle/>
-                    <a:p>
-                      <a:pPr algn="r"/>
-                      <a:r>
-                        <a:rPr sz="1050" b="0">
-                          <a:solidFill>
-                            <a:srgbClr val="5D6D7E"/>
-                          </a:solidFill>
-                          <a:latin typeface="Arial"/>
-                        </a:rPr>
-                        <a:t>€8.4M</a:t>
-                      </a:r>
-                    </a:p>
-                  </a:txBody>
-                  <a:tcPr>
-                    <a:solidFill>
-                      <a:srgbClr val="FFFFFF"/>
-                    </a:solidFill>
-                  </a:tcPr>
-                </a:tc>
-                <a:tc>
-                  <a:txBody>
-                    <a:bodyPr/>
-                    <a:lstStyle/>
-                    <a:p>
-                      <a:pPr algn="r"/>
-                      <a:r>
-                        <a:rPr sz="1050" b="0">
-                          <a:solidFill>
-                            <a:srgbClr val="5D6D7E"/>
-                          </a:solidFill>
-                          <a:latin typeface="Arial"/>
-                        </a:rPr>
-                        <a:t>4.18%</a:t>
-                      </a:r>
-                    </a:p>
-                  </a:txBody>
-                  <a:tcPr>
-                    <a:solidFill>
-                      <a:srgbClr val="FFFFFF"/>
-                    </a:solidFill>
-                  </a:tcPr>
-                </a:tc>
-                <a:tc>
-                  <a:txBody>
-                    <a:bodyPr/>
-                    <a:lstStyle/>
-                    <a:p>
-                      <a:pPr algn="r"/>
-                      <a:r>
-                        <a:rPr sz="1050" b="0">
-                          <a:solidFill>
-                            <a:srgbClr val="5D6D7E"/>
-                          </a:solidFill>
-                          <a:latin typeface="Arial"/>
-                        </a:rPr>
-                        <a:t>€6.9M</a:t>
-                      </a:r>
-                    </a:p>
-                  </a:txBody>
-                  <a:tcPr>
-                    <a:solidFill>
-                      <a:srgbClr val="FFFFFF"/>
-                    </a:solidFill>
-                  </a:tcPr>
-                </a:tc>
-                <a:tc>
-                  <a:txBody>
-                    <a:bodyPr/>
-                    <a:lstStyle/>
-                    <a:p>
-                      <a:pPr algn="r"/>
-                      <a:r>
-                        <a:rPr sz="1050" b="0">
-                          <a:solidFill>
-                            <a:srgbClr val="5D6D7E"/>
-                          </a:solidFill>
-                          <a:latin typeface="Arial"/>
-                        </a:rPr>
-                        <a:t>3.74%</a:t>
-                      </a:r>
-                    </a:p>
-                  </a:txBody>
-                  <a:tcPr>
-                    <a:solidFill>
-                      <a:srgbClr val="FFFFFF"/>
-                    </a:solidFill>
-                  </a:tcPr>
-                </a:tc>
-                <a:tc>
-                  <a:txBody>
-                    <a:bodyPr/>
-                    <a:lstStyle/>
-                    <a:p>
-                      <a:pPr algn="r"/>
-                      <a:r>
-                        <a:rPr sz="1050" b="0">
-                          <a:solidFill>
-                            <a:srgbClr val="5D6D7E"/>
-                          </a:solidFill>
-                          <a:latin typeface="Arial"/>
-                        </a:rPr>
-                        <a:t>€15.3M</a:t>
-                      </a:r>
-                    </a:p>
-                  </a:txBody>
-                  <a:tcPr>
-                    <a:solidFill>
-                      <a:srgbClr val="FFFFFF"/>
-                    </a:solidFill>
-                  </a:tcPr>
-                </a:tc>
-                <a:tc>
-                  <a:txBody>
-                    <a:bodyPr/>
-                    <a:lstStyle/>
-                    <a:p>
-                      <a:pPr algn="r"/>
-                      <a:r>
-                        <a:rPr sz="1050" b="0">
-                          <a:solidFill>
-                            <a:srgbClr val="5D6D7E"/>
-                          </a:solidFill>
-                          <a:latin typeface="Arial"/>
-                        </a:rPr>
-                        <a:t>3.99%</a:t>
-                      </a:r>
-                    </a:p>
-                  </a:txBody>
-                  <a:tcPr>
-                    <a:solidFill>
-                      <a:srgbClr val="FFFFFF"/>
-                    </a:solidFill>
-                  </a:tcPr>
-                </a:tc>
-              </a:tr>
-              <a:tr h="228600">
-                <a:tc>
-                  <a:txBody>
-                    <a:bodyPr/>
-                    <a:lstStyle/>
-                    <a:p>
-                      <a:pPr algn="l"/>
-                      <a:r>
-                        <a:rPr sz="1050" b="0">
-                          <a:solidFill>
-                            <a:srgbClr val="5D6D7E"/>
-                          </a:solidFill>
-                          <a:latin typeface="Arial"/>
-                        </a:rPr>
-                        <a:t>Today, current store demand</a:t>
-                      </a:r>
-                    </a:p>
-                  </a:txBody>
-                  <a:tcPr>
-                    <a:solidFill>
-                      <a:srgbClr val="FFFFFF"/>
-                    </a:solidFill>
-                  </a:tcPr>
-                </a:tc>
-                <a:tc>
-                  <a:txBody>
-                    <a:bodyPr/>
-                    <a:lstStyle/>
-                    <a:p>
-                      <a:pPr algn="r"/>
-                      <a:r>
-                        <a:rPr sz="1050" b="0">
-                          <a:solidFill>
-                            <a:srgbClr val="5D6D7E"/>
-                          </a:solidFill>
-                          <a:latin typeface="Arial"/>
-                        </a:rPr>
-                        <a:t>€8.4M</a:t>
-                      </a:r>
-                    </a:p>
-                  </a:txBody>
-                  <a:tcPr>
-                    <a:solidFill>
-                      <a:srgbClr val="FFFFFF"/>
-                    </a:solidFill>
-                  </a:tcPr>
-                </a:tc>
-                <a:tc>
-                  <a:txBody>
-                    <a:bodyPr/>
-                    <a:lstStyle/>
-                    <a:p>
-                      <a:pPr algn="r"/>
-                      <a:r>
-                        <a:rPr sz="1050" b="0">
-                          <a:solidFill>
-                            <a:srgbClr val="5D6D7E"/>
-                          </a:solidFill>
-                          <a:latin typeface="Arial"/>
-                        </a:rPr>
-                        <a:t>4.15%</a:t>
-                      </a:r>
-                    </a:p>
-                  </a:txBody>
-                  <a:tcPr>
-                    <a:solidFill>
-                      <a:srgbClr val="FFFFFF"/>
-                    </a:solidFill>
-                  </a:tcPr>
-                </a:tc>
-                <a:tc>
-                  <a:txBody>
-                    <a:bodyPr/>
-                    <a:lstStyle/>
-                    <a:p>
-                      <a:pPr algn="r"/>
-                      <a:r>
-                        <a:rPr sz="1050" b="0">
-                          <a:solidFill>
-                            <a:srgbClr val="5D6D7E"/>
-                          </a:solidFill>
-                          <a:latin typeface="Arial"/>
-                        </a:rPr>
-                        <a:t>€7.8M</a:t>
-                      </a:r>
-                    </a:p>
-                  </a:txBody>
-                  <a:tcPr>
-                    <a:solidFill>
-                      <a:srgbClr val="FFFFFF"/>
-                    </a:solidFill>
-                  </a:tcPr>
-                </a:tc>
-                <a:tc>
-                  <a:txBody>
-                    <a:bodyPr/>
-                    <a:lstStyle/>
-                    <a:p>
-                      <a:pPr algn="r"/>
-                      <a:r>
-                        <a:rPr sz="1050" b="0">
-                          <a:solidFill>
-                            <a:srgbClr val="5D6D7E"/>
-                          </a:solidFill>
-                          <a:latin typeface="Arial"/>
-                        </a:rPr>
-                        <a:t>3.74%</a:t>
-                      </a:r>
-                    </a:p>
-                  </a:txBody>
-                  <a:tcPr>
-                    <a:solidFill>
-                      <a:srgbClr val="FFFFFF"/>
-                    </a:solidFill>
-                  </a:tcPr>
-                </a:tc>
-                <a:tc>
-                  <a:txBody>
-                    <a:bodyPr/>
-                    <a:lstStyle/>
-                    <a:p>
-                      <a:pPr algn="r"/>
-                      <a:r>
-                        <a:rPr sz="1050" b="0">
-                          <a:solidFill>
-                            <a:srgbClr val="5D6D7E"/>
-                          </a:solidFill>
-                          <a:latin typeface="Arial"/>
-                        </a:rPr>
-                        <a:t>€16.2M</a:t>
-                      </a:r>
-                    </a:p>
-                  </a:txBody>
-                  <a:tcPr>
-                    <a:solidFill>
-                      <a:srgbClr val="FFFFFF"/>
-                    </a:solidFill>
-                  </a:tcPr>
-                </a:tc>
-                <a:tc>
-                  <a:txBody>
-                    <a:bodyPr/>
-                    <a:lstStyle/>
-                    <a:p>
-                      <a:pPr algn="r"/>
-                      <a:r>
-                        <a:rPr sz="1050" b="0">
-                          <a:solidFill>
-                            <a:srgbClr val="5D6D7E"/>
-                          </a:solidFill>
-                          <a:latin typeface="Arial"/>
-                        </a:rPr>
-                        <a:t>3.95%</a:t>
-                      </a:r>
-                    </a:p>
-                  </a:txBody>
-                  <a:tcPr>
-                    <a:solidFill>
-                      <a:srgbClr val="FFFFFF"/>
-                    </a:solidFill>
-                  </a:tcPr>
-                </a:tc>
-              </a:tr>
-              <a:tr h="228600">
-                <a:tc>
-                  <a:txBody>
-                    <a:bodyPr/>
-                    <a:lstStyle/>
-                    <a:p>
-                      <a:pPr algn="l"/>
-                      <a:r>
-                        <a:rPr sz="1050" b="0">
-                          <a:solidFill>
-                            <a:srgbClr val="5D6D7E"/>
-                          </a:solidFill>
-                          <a:latin typeface="Arial"/>
-                        </a:rPr>
-                        <a:t>Online grid in both</a:t>
-                      </a:r>
-                    </a:p>
-                  </a:txBody>
-                  <a:tcPr>
-                    <a:solidFill>
-                      <a:srgbClr val="FFFFFF"/>
-                    </a:solidFill>
-                  </a:tcPr>
-                </a:tc>
-                <a:tc>
-                  <a:txBody>
-                    <a:bodyPr/>
-                    <a:lstStyle/>
-                    <a:p>
-                      <a:pPr algn="r"/>
-                      <a:r>
-                        <a:rPr sz="1050" b="0">
-                          <a:solidFill>
-                            <a:srgbClr val="5D6D7E"/>
-                          </a:solidFill>
-                          <a:latin typeface="Arial"/>
-                        </a:rPr>
-                        <a:t>€8.4M</a:t>
-                      </a:r>
-                    </a:p>
-                  </a:txBody>
-                  <a:tcPr>
-                    <a:solidFill>
-                      <a:srgbClr val="FFFFFF"/>
-                    </a:solidFill>
-                  </a:tcPr>
-                </a:tc>
-                <a:tc>
-                  <a:txBody>
-                    <a:bodyPr/>
-                    <a:lstStyle/>
-                    <a:p>
-                      <a:pPr algn="r"/>
-                      <a:r>
-                        <a:rPr sz="1050" b="0">
-                          <a:solidFill>
-                            <a:srgbClr val="5D6D7E"/>
-                          </a:solidFill>
-                          <a:latin typeface="Arial"/>
-                        </a:rPr>
-                        <a:t>4.26%</a:t>
-                      </a:r>
-                    </a:p>
-                  </a:txBody>
-                  <a:tcPr>
-                    <a:solidFill>
-                      <a:srgbClr val="FFFFFF"/>
-                    </a:solidFill>
-                  </a:tcPr>
-                </a:tc>
-                <a:tc>
-                  <a:txBody>
-                    <a:bodyPr/>
-                    <a:lstStyle/>
-                    <a:p>
-                      <a:pPr algn="r"/>
-                      <a:r>
-                        <a:rPr sz="1050" b="0">
-                          <a:solidFill>
-                            <a:srgbClr val="5D6D7E"/>
-                          </a:solidFill>
-                          <a:latin typeface="Arial"/>
-                        </a:rPr>
-                        <a:t>€10.1M</a:t>
-                      </a:r>
-                    </a:p>
-                  </a:txBody>
-                  <a:tcPr>
-                    <a:solidFill>
-                      <a:srgbClr val="FFFFFF"/>
-                    </a:solidFill>
-                  </a:tcPr>
-                </a:tc>
-                <a:tc>
-                  <a:txBody>
-                    <a:bodyPr/>
-                    <a:lstStyle/>
-                    <a:p>
-                      <a:pPr algn="r"/>
-                      <a:r>
-                        <a:rPr sz="1050" b="0">
-                          <a:solidFill>
-                            <a:srgbClr val="5D6D7E"/>
-                          </a:solidFill>
-                          <a:latin typeface="Arial"/>
-                        </a:rPr>
-                        <a:t>3.52%</a:t>
-                      </a:r>
-                    </a:p>
-                  </a:txBody>
-                  <a:tcPr>
-                    <a:solidFill>
-                      <a:srgbClr val="FFFFFF"/>
-                    </a:solidFill>
-                  </a:tcPr>
-                </a:tc>
-                <a:tc>
-                  <a:txBody>
-                    <a:bodyPr/>
-                    <a:lstStyle/>
-                    <a:p>
-                      <a:pPr algn="r"/>
-                      <a:r>
-                        <a:rPr sz="1050" b="0">
-                          <a:solidFill>
-                            <a:srgbClr val="5D6D7E"/>
-                          </a:solidFill>
-                          <a:latin typeface="Arial"/>
-                        </a:rPr>
-                        <a:t>€18.5M</a:t>
-                      </a:r>
-                    </a:p>
-                  </a:txBody>
-                  <a:tcPr>
-                    <a:solidFill>
-                      <a:srgbClr val="FFFFFF"/>
-                    </a:solidFill>
-                  </a:tcPr>
-                </a:tc>
-                <a:tc>
-                  <a:txBody>
-                    <a:bodyPr/>
-                    <a:lstStyle/>
-                    <a:p>
-                      <a:pPr algn="r"/>
-                      <a:r>
-                        <a:rPr sz="1050" b="0">
-                          <a:solidFill>
-                            <a:srgbClr val="5D6D7E"/>
-                          </a:solidFill>
-                          <a:latin typeface="Arial"/>
-                        </a:rPr>
-                        <a:t>3.85%</a:t>
-                      </a:r>
-                    </a:p>
-                  </a:txBody>
-                  <a:tcPr>
-                    <a:solidFill>
-                      <a:srgbClr val="FFFFFF"/>
-                    </a:solidFill>
-                  </a:tcPr>
-                </a:tc>
-              </a:tr>
-              <a:tr h="228600">
-                <a:tc>
-                  <a:txBody>
-                    <a:bodyPr/>
-                    <a:lstStyle/>
-                    <a:p>
-                      <a:pPr algn="l"/>
-                      <a:r>
-                        <a:rPr sz="1050" b="0">
-                          <a:solidFill>
-                            <a:srgbClr val="5D6D7E"/>
-                          </a:solidFill>
-                          <a:latin typeface="Arial"/>
-                        </a:rPr>
-                        <a:t>2.5% target · shifted grid</a:t>
-                      </a:r>
-                    </a:p>
-                  </a:txBody>
-                  <a:tcPr>
-                    <a:solidFill>
-                      <a:srgbClr val="FFFFFF"/>
-                    </a:solidFill>
-                  </a:tcPr>
-                </a:tc>
-                <a:tc>
-                  <a:txBody>
-                    <a:bodyPr/>
-                    <a:lstStyle/>
-                    <a:p>
-                      <a:pPr algn="r"/>
-                      <a:r>
-                        <a:rPr sz="1050" b="0">
-                          <a:solidFill>
-                            <a:srgbClr val="5D6D7E"/>
-                          </a:solidFill>
-                          <a:latin typeface="Arial"/>
-                        </a:rPr>
-                        <a:t>€5.2M</a:t>
-                      </a:r>
-                    </a:p>
-                  </a:txBody>
-                  <a:tcPr>
-                    <a:solidFill>
-                      <a:srgbClr val="FFFFFF"/>
-                    </a:solidFill>
-                  </a:tcPr>
-                </a:tc>
-                <a:tc>
-                  <a:txBody>
-                    <a:bodyPr/>
-                    <a:lstStyle/>
-                    <a:p>
-                      <a:pPr algn="r"/>
-                      <a:r>
-                        <a:rPr sz="1050" b="0">
-                          <a:solidFill>
-                            <a:srgbClr val="5D6D7E"/>
-                          </a:solidFill>
-                          <a:latin typeface="Arial"/>
-                        </a:rPr>
-                        <a:t>2.61%</a:t>
-                      </a:r>
-                    </a:p>
-                  </a:txBody>
-                  <a:tcPr>
-                    <a:solidFill>
-                      <a:srgbClr val="FFFFFF"/>
-                    </a:solidFill>
-                  </a:tcPr>
-                </a:tc>
-                <a:tc>
-                  <a:txBody>
-                    <a:bodyPr/>
-                    <a:lstStyle/>
-                    <a:p>
-                      <a:pPr algn="r"/>
-                      <a:r>
-                        <a:rPr sz="1050" b="0">
-                          <a:solidFill>
-                            <a:srgbClr val="5D6D7E"/>
-                          </a:solidFill>
-                          <a:latin typeface="Arial"/>
-                        </a:rPr>
-                        <a:t>€7.1M</a:t>
-                      </a:r>
-                    </a:p>
-                  </a:txBody>
-                  <a:tcPr>
-                    <a:solidFill>
-                      <a:srgbClr val="FFFFFF"/>
-                    </a:solidFill>
-                  </a:tcPr>
-                </a:tc>
-                <a:tc>
-                  <a:txBody>
-                    <a:bodyPr/>
-                    <a:lstStyle/>
-                    <a:p>
-                      <a:pPr algn="r"/>
-                      <a:r>
-                        <a:rPr sz="1050" b="0">
-                          <a:solidFill>
-                            <a:srgbClr val="5D6D7E"/>
-                          </a:solidFill>
-                          <a:latin typeface="Arial"/>
-                        </a:rPr>
-                        <a:t>2.40%</a:t>
-                      </a:r>
-                    </a:p>
-                  </a:txBody>
-                  <a:tcPr>
-                    <a:solidFill>
-                      <a:srgbClr val="FFFFFF"/>
-                    </a:solidFill>
-                  </a:tcPr>
-                </a:tc>
-                <a:tc>
-                  <a:txBody>
-                    <a:bodyPr/>
-                    <a:lstStyle/>
-                    <a:p>
-                      <a:pPr algn="r"/>
-                      <a:r>
-                        <a:rPr sz="1050" b="0">
-                          <a:solidFill>
-                            <a:srgbClr val="5D6D7E"/>
-                          </a:solidFill>
-                          <a:latin typeface="Arial"/>
-                        </a:rPr>
-                        <a:t>€12.3M</a:t>
-                      </a:r>
-                    </a:p>
-                  </a:txBody>
-                  <a:tcPr>
-                    <a:solidFill>
-                      <a:srgbClr val="FFFFFF"/>
-                    </a:solidFill>
-                  </a:tcPr>
-                </a:tc>
-                <a:tc>
-                  <a:txBody>
-                    <a:bodyPr/>
-                    <a:lstStyle/>
-                    <a:p>
-                      <a:pPr algn="r"/>
-                      <a:r>
-                        <a:rPr sz="1050" b="0">
-                          <a:solidFill>
-                            <a:srgbClr val="5D6D7E"/>
-                          </a:solidFill>
-                          <a:latin typeface="Arial"/>
-                        </a:rPr>
-                        <a:t>2.48%</a:t>
-                      </a:r>
-                    </a:p>
-                  </a:txBody>
-                  <a:tcPr>
-                    <a:solidFill>
-                      <a:srgbClr val="FFFFFF"/>
-                    </a:solidFill>
-                  </a:tcPr>
-                </a:tc>
-              </a:tr>
-              <a:tr h="228600">
-                <a:tc>
-                  <a:txBody>
-                    <a:bodyPr/>
-                    <a:lstStyle/>
-                    <a:p>
-                      <a:pPr algn="l"/>
-                      <a:r>
-                        <a:rPr sz="1050" b="0">
-                          <a:solidFill>
-                            <a:srgbClr val="5D6D7E"/>
-                          </a:solidFill>
-                          <a:latin typeface="Arial"/>
-                        </a:rPr>
-                        <a:t>3% target · shifted grid</a:t>
-                      </a:r>
-                    </a:p>
-                  </a:txBody>
-                  <a:tcPr>
-                    <a:solidFill>
-                      <a:srgbClr val="FFFFFF"/>
-                    </a:solidFill>
-                  </a:tcPr>
-                </a:tc>
-                <a:tc>
-                  <a:txBody>
-                    <a:bodyPr/>
-                    <a:lstStyle/>
-                    <a:p>
-                      <a:pPr algn="r"/>
-                      <a:r>
-                        <a:rPr sz="1050" b="0">
-                          <a:solidFill>
-                            <a:srgbClr val="5D6D7E"/>
-                          </a:solidFill>
-                          <a:latin typeface="Arial"/>
-                        </a:rPr>
-                        <a:t>€6.8M</a:t>
-                      </a:r>
-                    </a:p>
-                  </a:txBody>
-                  <a:tcPr>
-                    <a:solidFill>
-                      <a:srgbClr val="FFFFFF"/>
-                    </a:solidFill>
-                  </a:tcPr>
-                </a:tc>
-                <a:tc>
-                  <a:txBody>
-                    <a:bodyPr/>
-                    <a:lstStyle/>
-                    <a:p>
-                      <a:pPr algn="r"/>
-                      <a:r>
-                        <a:rPr sz="1050" b="0">
-                          <a:solidFill>
-                            <a:srgbClr val="5D6D7E"/>
-                          </a:solidFill>
-                          <a:latin typeface="Arial"/>
-                        </a:rPr>
-                        <a:t>3.14%</a:t>
-                      </a:r>
-                    </a:p>
-                  </a:txBody>
-                  <a:tcPr>
-                    <a:solidFill>
-                      <a:srgbClr val="FFFFFF"/>
-                    </a:solidFill>
-                  </a:tcPr>
-                </a:tc>
-                <a:tc>
-                  <a:txBody>
-                    <a:bodyPr/>
-                    <a:lstStyle/>
-                    <a:p>
-                      <a:pPr algn="r"/>
-                      <a:r>
-                        <a:rPr sz="1050" b="0">
-                          <a:solidFill>
-                            <a:srgbClr val="5D6D7E"/>
-                          </a:solidFill>
-                          <a:latin typeface="Arial"/>
-                        </a:rPr>
-                        <a:t>€8.8M</a:t>
-                      </a:r>
-                    </a:p>
-                  </a:txBody>
-                  <a:tcPr>
-                    <a:solidFill>
-                      <a:srgbClr val="FFFFFF"/>
-                    </a:solidFill>
-                  </a:tcPr>
-                </a:tc>
-                <a:tc>
-                  <a:txBody>
-                    <a:bodyPr/>
-                    <a:lstStyle/>
-                    <a:p>
-                      <a:pPr algn="r"/>
-                      <a:r>
-                        <a:rPr sz="1050" b="0">
-                          <a:solidFill>
-                            <a:srgbClr val="5D6D7E"/>
-                          </a:solidFill>
-                          <a:latin typeface="Arial"/>
-                        </a:rPr>
-                        <a:t>2.83%</a:t>
-                      </a:r>
-                    </a:p>
-                  </a:txBody>
-                  <a:tcPr>
-                    <a:solidFill>
-                      <a:srgbClr val="FFFFFF"/>
-                    </a:solidFill>
-                  </a:tcPr>
-                </a:tc>
-                <a:tc>
-                  <a:txBody>
-                    <a:bodyPr/>
-                    <a:lstStyle/>
-                    <a:p>
-                      <a:pPr algn="r"/>
-                      <a:r>
-                        <a:rPr sz="1050" b="0">
-                          <a:solidFill>
-                            <a:srgbClr val="5D6D7E"/>
-                          </a:solidFill>
-                          <a:latin typeface="Arial"/>
-                        </a:rPr>
-                        <a:t>€15.6M</a:t>
-                      </a:r>
-                    </a:p>
-                  </a:txBody>
-                  <a:tcPr>
-                    <a:solidFill>
-                      <a:srgbClr val="FFFFFF"/>
-                    </a:solidFill>
-                  </a:tcPr>
-                </a:tc>
-                <a:tc>
-                  <a:txBody>
-                    <a:bodyPr/>
-                    <a:lstStyle/>
-                    <a:p>
-                      <a:pPr algn="r"/>
-                      <a:r>
-                        <a:rPr sz="1050" b="0">
-                          <a:solidFill>
-                            <a:srgbClr val="5D6D7E"/>
-                          </a:solidFill>
-                          <a:latin typeface="Arial"/>
-                        </a:rPr>
-                        <a:t>2.97%</a:t>
-                      </a:r>
-                    </a:p>
-                  </a:txBody>
-                  <a:tcPr>
-                    <a:solidFill>
-                      <a:srgbClr val="FFFFFF"/>
-                    </a:solidFill>
-                  </a:tcPr>
-                </a:tc>
-              </a:tr>
-              <a:tr h="228600">
-                <a:tc>
-                  <a:txBody>
-                    <a:bodyPr/>
-                    <a:lstStyle/>
-                    <a:p>
-                      <a:pPr algn="l"/>
-                      <a:r>
-                        <a:rPr sz="1050" b="0">
-                          <a:solidFill>
-                            <a:srgbClr val="5D6D7E"/>
-                          </a:solidFill>
-                          <a:latin typeface="Arial"/>
-                        </a:rPr>
-                        <a:t>3.5% target · shifted grid</a:t>
-                      </a:r>
-                    </a:p>
-                  </a:txBody>
-                  <a:tcPr>
-                    <a:solidFill>
-                      <a:srgbClr val="FFFFFF"/>
-                    </a:solidFill>
-                  </a:tcPr>
-                </a:tc>
-                <a:tc>
-                  <a:txBody>
-                    <a:bodyPr/>
-                    <a:lstStyle/>
-                    <a:p>
-                      <a:pPr algn="r"/>
-                      <a:r>
-                        <a:rPr sz="1050" b="0">
-                          <a:solidFill>
-                            <a:srgbClr val="5D6D7E"/>
-                          </a:solidFill>
-                          <a:latin typeface="Arial"/>
-                        </a:rPr>
-                        <a:t>€7.9M</a:t>
-                      </a:r>
-                    </a:p>
-                  </a:txBody>
-                  <a:tcPr>
-                    <a:solidFill>
-                      <a:srgbClr val="FFFFFF"/>
-                    </a:solidFill>
-                  </a:tcPr>
-                </a:tc>
-                <a:tc>
-                  <a:txBody>
-                    <a:bodyPr/>
-                    <a:lstStyle/>
-                    <a:p>
-                      <a:pPr algn="r"/>
-                      <a:r>
-                        <a:rPr sz="1050" b="0">
-                          <a:solidFill>
-                            <a:srgbClr val="5D6D7E"/>
-                          </a:solidFill>
-                          <a:latin typeface="Arial"/>
-                        </a:rPr>
-                        <a:t>3.75%</a:t>
-                      </a:r>
-                    </a:p>
-                  </a:txBody>
-                  <a:tcPr>
-                    <a:solidFill>
-                      <a:srgbClr val="FFFFFF"/>
-                    </a:solidFill>
-                  </a:tcPr>
-                </a:tc>
-                <a:tc>
-                  <a:txBody>
-                    <a:bodyPr/>
-                    <a:lstStyle/>
-                    <a:p>
-                      <a:pPr algn="r"/>
-                      <a:r>
-                        <a:rPr sz="1050" b="0">
-                          <a:solidFill>
-                            <a:srgbClr val="5D6D7E"/>
-                          </a:solidFill>
-                          <a:latin typeface="Arial"/>
-                        </a:rPr>
-                        <a:t>€9.8M</a:t>
-                      </a:r>
-                    </a:p>
-                  </a:txBody>
-                  <a:tcPr>
-                    <a:solidFill>
-                      <a:srgbClr val="FFFFFF"/>
-                    </a:solidFill>
-                  </a:tcPr>
-                </a:tc>
-                <a:tc>
-                  <a:txBody>
-                    <a:bodyPr/>
-                    <a:lstStyle/>
-                    <a:p>
-                      <a:pPr algn="r"/>
-                      <a:r>
-                        <a:rPr sz="1050" b="0">
-                          <a:solidFill>
-                            <a:srgbClr val="5D6D7E"/>
-                          </a:solidFill>
-                          <a:latin typeface="Arial"/>
-                        </a:rPr>
-                        <a:t>3.27%</a:t>
-                      </a:r>
-                    </a:p>
-                  </a:txBody>
-                  <a:tcPr>
-                    <a:solidFill>
-                      <a:srgbClr val="FFFFFF"/>
-                    </a:solidFill>
-                  </a:tcPr>
-                </a:tc>
-                <a:tc>
-                  <a:txBody>
-                    <a:bodyPr/>
-                    <a:lstStyle/>
-                    <a:p>
-                      <a:pPr algn="r"/>
-                      <a:r>
-                        <a:rPr sz="1050" b="0">
-                          <a:solidFill>
-                            <a:srgbClr val="5D6D7E"/>
-                          </a:solidFill>
-                          <a:latin typeface="Arial"/>
-                        </a:rPr>
-                        <a:t>€17.7M</a:t>
-                      </a:r>
-                    </a:p>
-                  </a:txBody>
-                  <a:tcPr>
-                    <a:solidFill>
-                      <a:srgbClr val="FFFFFF"/>
-                    </a:solidFill>
-                  </a:tcPr>
-                </a:tc>
-                <a:tc>
-                  <a:txBody>
-                    <a:bodyPr/>
-                    <a:lstStyle/>
-                    <a:p>
-                      <a:pPr algn="r"/>
-                      <a:r>
-                        <a:rPr sz="1050" b="0">
-                          <a:solidFill>
-                            <a:srgbClr val="5D6D7E"/>
-                          </a:solidFill>
-                          <a:latin typeface="Arial"/>
-                        </a:rPr>
-                        <a:t>3.48%</a:t>
-                      </a:r>
-                    </a:p>
-                  </a:txBody>
-                  <a:tcPr>
-                    <a:solidFill>
-                      <a:srgbClr val="FFFFFF"/>
-                    </a:solidFill>
-                  </a:tcPr>
-                </a:tc>
-              </a:tr>
-              <a:tr h="228600">
-                <a:tc>
-                  <a:txBody>
-                    <a:bodyPr/>
-                    <a:lstStyle/>
-                    <a:p>
-                      <a:pPr algn="l"/>
-                      <a:r>
-                        <a:rPr sz="1050" b="0">
-                          <a:solidFill>
-                            <a:srgbClr val="5D6D7E"/>
-                          </a:solidFill>
-                          <a:latin typeface="Arial"/>
-                        </a:rPr>
-                        <a:t>4% target · shifted grid</a:t>
-                      </a:r>
-                    </a:p>
-                  </a:txBody>
-                  <a:tcPr>
-                    <a:solidFill>
-                      <a:srgbClr val="FFFFFF"/>
-                    </a:solidFill>
-                  </a:tcPr>
-                </a:tc>
-                <a:tc>
-                  <a:txBody>
-                    <a:bodyPr/>
-                    <a:lstStyle/>
-                    <a:p>
-                      <a:pPr algn="r"/>
-                      <a:r>
-                        <a:rPr sz="1050" b="0">
-                          <a:solidFill>
-                            <a:srgbClr val="5D6D7E"/>
-                          </a:solidFill>
-                          <a:latin typeface="Arial"/>
-                        </a:rPr>
-                        <a:t>€8.4M</a:t>
-                      </a:r>
-                    </a:p>
-                  </a:txBody>
-                  <a:tcPr>
-                    <a:solidFill>
-                      <a:srgbClr val="FFFFFF"/>
-                    </a:solidFill>
-                  </a:tcPr>
-                </a:tc>
-                <a:tc>
-                  <a:txBody>
-                    <a:bodyPr/>
-                    <a:lstStyle/>
-                    <a:p>
-                      <a:pPr algn="r"/>
-                      <a:r>
-                        <a:rPr sz="1050" b="0">
-                          <a:solidFill>
-                            <a:srgbClr val="5D6D7E"/>
-                          </a:solidFill>
-                          <a:latin typeface="Arial"/>
-                        </a:rPr>
-                        <a:t>4.26%</a:t>
-                      </a:r>
-                    </a:p>
-                  </a:txBody>
-                  <a:tcPr>
-                    <a:solidFill>
-                      <a:srgbClr val="FFFFFF"/>
-                    </a:solidFill>
-                  </a:tcPr>
-                </a:tc>
-                <a:tc>
-                  <a:txBody>
-                    <a:bodyPr/>
-                    <a:lstStyle/>
-                    <a:p>
-                      <a:pPr algn="r"/>
-                      <a:r>
-                        <a:rPr sz="1050" b="0">
-                          <a:solidFill>
-                            <a:srgbClr val="5D6D7E"/>
-                          </a:solidFill>
-                          <a:latin typeface="Arial"/>
-                        </a:rPr>
-                        <a:t>€10.1M</a:t>
-                      </a:r>
-                    </a:p>
-                  </a:txBody>
-                  <a:tcPr>
-                    <a:solidFill>
-                      <a:srgbClr val="FFFFFF"/>
-                    </a:solidFill>
-                  </a:tcPr>
-                </a:tc>
-                <a:tc>
-                  <a:txBody>
-                    <a:bodyPr/>
-                    <a:lstStyle/>
-                    <a:p>
-                      <a:pPr algn="r"/>
-                      <a:r>
-                        <a:rPr sz="1050" b="0">
-                          <a:solidFill>
-                            <a:srgbClr val="5D6D7E"/>
-                          </a:solidFill>
-                          <a:latin typeface="Arial"/>
-                        </a:rPr>
-                        <a:t>3.52%</a:t>
-                      </a:r>
-                    </a:p>
-                  </a:txBody>
-                  <a:tcPr>
-                    <a:solidFill>
-                      <a:srgbClr val="FFFFFF"/>
-                    </a:solidFill>
-                  </a:tcPr>
-                </a:tc>
-                <a:tc>
-                  <a:txBody>
-                    <a:bodyPr/>
-                    <a:lstStyle/>
-                    <a:p>
-                      <a:pPr algn="r"/>
-                      <a:r>
-                        <a:rPr sz="1050" b="0">
-                          <a:solidFill>
-                            <a:srgbClr val="5D6D7E"/>
-                          </a:solidFill>
-                          <a:latin typeface="Arial"/>
-                        </a:rPr>
-                        <a:t>€18.5M</a:t>
-                      </a:r>
-                    </a:p>
-                  </a:txBody>
-                  <a:tcPr>
-                    <a:solidFill>
-                      <a:srgbClr val="FFFFFF"/>
-                    </a:solidFill>
-                  </a:tcPr>
-                </a:tc>
-                <a:tc>
-                  <a:txBody>
-                    <a:bodyPr/>
-                    <a:lstStyle/>
-                    <a:p>
-                      <a:pPr algn="r"/>
-                      <a:r>
-                        <a:rPr sz="1050" b="0">
-                          <a:solidFill>
-                            <a:srgbClr val="5D6D7E"/>
-                          </a:solidFill>
-                          <a:latin typeface="Arial"/>
-                        </a:rPr>
-                        <a:t>3.85%</a:t>
-                      </a:r>
-                    </a:p>
-                  </a:txBody>
-                  <a:tcPr>
-                    <a:solidFill>
-                      <a:srgbClr val="FFFFFF"/>
-                    </a:solidFill>
-                  </a:tcPr>
-                </a:tc>
-              </a:tr>
-            </a:tbl>
-          </a:graphicData>
-        </a:graphic>
-      </p:graphicFrame>
-      <p:sp>
-        <p:nvSpPr>
-          <p:cNvPr id="8" name="TextBox 7"/>
+      <p:sp>
+        <p:nvSpPr>
+          <p:cNvPr id="7" name="TextBox 6"/>
           <p:cNvSpPr txBox="1"/>
           <p:nvPr/>
         </p:nvSpPr>
         <p:spPr>
           <a:xfrm>
-            <a:off x="566928" y="5779008"/>
-            <a:ext cx="11057839" cy="896112"/>
+            <a:off x="566928" y="4005072"/>
+            <a:ext cx="11057839" cy="2670048"/>
           </a:xfrm>
           <a:prstGeom prst="rect">
             <a:avLst/>
@@ -17009,7 +15619,7 @@
                 </a:solidFill>
                 <a:latin typeface="Arial"/>
               </a:rPr>
-              <a:t>Stores: 'Today (measured)' is the Mar 2025 – Feb 2026 window with the internal score; every other row is Aug–Sep 2026, the only period with an EFX score. Online is always Mar 2025 – Feb 2026. Store booking rates here use the channel take-up; point 2 uses per-segment take-up, hence a 0.1 pp difference. Online's risk in the grid rows carries the reject-inference uplift on its own book (realized 4.18%).</a:t>
+              <a:t>Stores: 'Today (measured)' is the Mar 2025 – Feb 2026 window with the internal score; every other row is Aug–Sep 2026, the only period with an EFX score. Online is always Mar 2025 – Feb 2026. Online's risk in the grid rows carries the reject-inference uplift on its own book (realized 4.18%).</a:t>
             </a:r>
           </a:p>
         </p:txBody>
@@ -19084,7 +17694,7 @@
                 </a:solidFill>
                 <a:latin typeface="Arial"/>
               </a:rPr>
-              <a:t>A single cutoff is simpler to operate; shifting the grid keeps its shape —looser where the group is good— and gives slightly more acceptance at the same risk. '&gt;=G' is always rejected in both.</a:t>
+              <a:t>A single cutoff is simpler to operate; shifting the grid keeps its shape —looser where the group is good— and gives slightly higher system approval at the same risk. '&gt;=G' is always rejected in both.</a:t>
             </a:r>
           </a:p>
         </p:txBody>

--- a/output/apple_deck/Apple_EFX_Study.pptx
+++ b/output/apple_deck/Apple_EFX_Study.pptx
@@ -15619,7 +15619,7 @@
                 </a:solidFill>
                 <a:latin typeface="Arial"/>
               </a:rPr>
-              <a:t>Stores: 'Today (measured)' is the Mar 2025 – Feb 2026 window with the internal score; every other row is Aug–Sep 2026, the only period with an EFX score. Online is always Mar 2025 – Feb 2026. Online's risk in the grid rows carries the reject-inference uplift on its own book (realized 4.18%).</a:t>
+              <a:t>Stores: 'Today (measured)' is the Mar 2025 – Feb 2026 window with the internal score; every other row is Aug–Sep 2026, the only period with an EFX score. Online is always Mar 2025 – Feb 2026. Online's risk in the grid rows carries the reject-inference uplift on its own book (realized 4.18%). Online's 'Today, current store demand' risk (4.15%) is on the scored book: 23 contracts booked without an Equifax call (no score, 0.03% of production, 88.6% realized risk) enter the measured 4.18% but have no bin, so they sit outside the curve and every row valued by bin — the grid can never accept them.</a:t>
             </a:r>
           </a:p>
         </p:txBody>
